--- a/praesentation/Fiori_vs_Freestyle.pptx
+++ b/praesentation/Fiori_vs_Freestyle.pptx
@@ -17,9 +17,13 @@
     <p:sldId id="265" r:id="rId11"/>
     <p:sldId id="266" r:id="rId12"/>
     <p:sldId id="267" r:id="rId13"/>
+    <p:sldId id="268" r:id="rId14"/>
+    <p:sldId id="269" r:id="rId15"/>
+    <p:sldId id="270" r:id="rId16"/>
+    <p:sldId id="271" r:id="rId17"/>
   </p:sldIdLst>
   <p:notesMasterIdLst>
-    <p:notesMasterId r:id="rId14"/>
+    <p:notesMasterId r:id="rId18"/>
   </p:notesMasterIdLst>
   <p:sldSz cx="12192000" cy="6858000"/>
   <p:notesSz cx="6858000" cy="12192000"/>
@@ -118,18 +122,18 @@
   <p:extLst>
     <p:ext uri="{521415D9-36F7-43E2-AB2F-B90AF26B5E84}">
       <p14:sectionLst xmlns:p14="http://schemas.microsoft.com/office/powerpoint/2010/main">
-        <p14:section name="Einstieg" id="{4b436fe5-7764-0181-dc9b-c8a93a63a829}">
+        <p14:section name="Einstieg" id="{c50f63b8-8744-b0e2-46ef-843a8e7daa00}">
           <p14:sldIdLst>
             <p14:sldId id="256"/>
             <p14:sldId id="257"/>
           </p14:sldIdLst>
         </p14:section>
-        <p14:section name="Einordnung" id="{b06d7910-f65e-9c99-8bc3-23a9b06e8b46}">
+        <p14:section name="Einordnung" id="{7c7cdd1d-71ee-5732-f5e6-038266c316c2}">
           <p14:sldIdLst>
             <p14:sldId id="258"/>
           </p14:sldIdLst>
         </p14:section>
-        <p14:section name="Demo" id="{58132ba1-630f-e66c-166d-ca6f07181804}">
+        <p14:section name="Demo" id="{f527c130-a15b-e106-c9bd-97f200c16089}">
           <p14:sldIdLst>
             <p14:sldId id="259"/>
             <p14:sldId id="260"/>
@@ -137,17 +141,25 @@
             <p14:sldId id="262"/>
           </p14:sldIdLst>
         </p14:section>
-        <p14:section name="Bewertung" id="{4b5ff7b9-13a3-a5e1-7cda-3121cd44dc8f}">
+        <p14:section name="Bewertung" id="{a534fe8d-8eeb-5c5f-58e7-b9cad7f4a6f4}">
           <p14:sldIdLst>
             <p14:sldId id="263"/>
             <p14:sldId id="264"/>
             <p14:sldId id="265"/>
           </p14:sldIdLst>
         </p14:section>
-        <p14:section name="Vorschlag" id="{0177bf7f-12ac-0e9e-7e5e-46309804d64f}">
+        <p14:section name="Shopfloor" id="{c3dd8e35-6b81-a471-08f3-34ea3636b3ac}">
           <p14:sldIdLst>
             <p14:sldId id="266"/>
             <p14:sldId id="267"/>
+            <p14:sldId id="268"/>
+            <p14:sldId id="269"/>
+          </p14:sldIdLst>
+        </p14:section>
+        <p14:section name="Vorschlag" id="{70658427-cd66-3d6f-7508-e7323a82a575}">
+          <p14:sldIdLst>
+            <p14:sldId id="270"/>
+            <p14:sldId id="271"/>
           </p14:sldIdLst>
         </p14:section>
       </p14:sectionLst>
@@ -1115,7 +1127,7 @@
           <a:p>
             <a:r>
               <a:rPr lang="en-US" dirty="0"/>
-              <a:t>Mein Vorschlag als einfache Leitplanke: Wir prüfen immer zuerst Fiori Elements mit RAP. Reicht das nicht, erweitern wir Fiori Elements gezielt. Erst wenn beides nicht passt, wird Freestyle gebaut – und dann bewusst, mit Begründung, einem Owner und eingeplantem Wartungsbudget. Die drei Prüffragen können wir in jede Anforderungsklärung aufnehmen.</a:t>
+              <a:t>Die Kollegen aus Lager und Produktion haben recht: Dort zählt jeder Klick, multipliziert mit hunderten Buchungen pro Tag und Schicht. Große Flächen, sichtbare Buttons, wenige Schritte, Scanner. Das ist der häufigste Grund, warum Freestyle gefordert wird. Ich will das ernst nehmen und zeigen, wo der Standard das schon abdeckt und wo die echten technischen Grenzen liegen.</a:t>
             </a:r>
             <a:endParaRPr lang="en-US" dirty="0"/>
           </a:p>
@@ -1203,7 +1215,7 @@
           <a:p>
             <a:r>
               <a:rPr lang="en-US" dirty="0"/>
-              <a:t>Zusammenfassung: Gleiches Aussehen heißt nicht gleicher Aufwand. Ich schlage vier konkrete Schritte vor und würde gerne heute festhalten, dass Fiori Elements mit RAP unser Standard ist und Freestyle-Apps künftig kurz begründet werden müssen. Fragen?</a:t>
+              <a:t>Vieles, was als Grund für Freestyle genannt wird, kann Fiori Elements bereits: Der Cozy-Modus ist genau für Touch gedacht. Aktionen lassen sich fest in die Fußleiste oder direkt in die Tabellenzeile legen, dann ist es ein Klick. Parameter können vorbelegt werden. Handscanner verhalten sich wie eine Tastatur und funktionieren damit überall. Für den Scan per Handy- oder Tablet-Kamera gibt es in SAPUI5 einen fertigen Baustein (BarcodeScannerButton); in Fiori Elements ist er nicht eingebaut, wird aber als kleine Erweiterung ergänzt. Und das Aussehen steuern wir zentral über ein Firmen-Theme statt über CSS in jeder einzelnen App.</a:t>
             </a:r>
             <a:endParaRPr lang="en-US" dirty="0"/>
           </a:p>
@@ -1227,6 +1239,358 @@
             <a:fld id="{F7021451-1387-4CA6-816F-3879F97B5CBC}" type="slidenum">
               <a:rPr lang="en-US"/>
               <a:t>12</a:t>
+            </a:fld>
+            <a:endParaRPr lang="en-US"/>
+          </a:p>
+        </p:txBody>
+      </p:sp>
+    </p:spTree>
+    <p:extLst>
+      <p:ext uri="{BB962C8B-B14F-4D97-AF65-F5344CB8AC3E}">
+        <p14:creationId xmlns:p14="http://schemas.microsoft.com/office/powerpoint/2010/main" val="1024086991"/>
+      </p:ext>
+    </p:extLst>
+  </p:cSld>
+  <p:clrMapOvr>
+    <a:masterClrMapping/>
+  </p:clrMapOvr>
+</p:notes>
+</file>
+
+<file path=ppt/notesSlides/notesSlide13.xml><?xml version="1.0" encoding="utf-8"?>
+<p:notes xmlns:a="http://schemas.openxmlformats.org/drawingml/2006/main" xmlns:r="http://schemas.openxmlformats.org/officeDocument/2006/relationships" xmlns:p="http://schemas.openxmlformats.org/presentationml/2006/main">
+  <p:cSld>
+    <p:spTree>
+      <p:nvGrpSpPr>
+        <p:cNvPr id="1" name=""/>
+        <p:cNvGrpSpPr/>
+        <p:nvPr/>
+      </p:nvGrpSpPr>
+      <p:grpSpPr>
+        <a:xfrm>
+          <a:off x="0" y="0"/>
+          <a:ext cx="0" cy="0"/>
+          <a:chOff x="0" y="0"/>
+          <a:chExt cx="0" cy="0"/>
+        </a:xfrm>
+      </p:grpSpPr>
+      <p:sp>
+        <p:nvSpPr>
+          <p:cNvPr id="2" name="Slide Image Placeholder 1"/>
+          <p:cNvSpPr>
+            <a:spLocks noGrp="1" noRot="1" noChangeAspect="1"/>
+          </p:cNvSpPr>
+          <p:nvPr>
+            <p:ph type="sldImg"/>
+          </p:nvPr>
+        </p:nvSpPr>
+        <p:spPr/>
+      </p:sp>
+      <p:sp>
+        <p:nvSpPr>
+          <p:cNvPr id="3" name="Notes Placeholder 2"/>
+          <p:cNvSpPr>
+            <a:spLocks noGrp="1"/>
+          </p:cNvSpPr>
+          <p:nvPr>
+            <p:ph type="body" idx="1"/>
+          </p:nvPr>
+        </p:nvSpPr>
+        <p:spPr/>
+        <p:txBody>
+          <a:bodyPr/>
+          <a:lstStyle/>
+          <a:p>
+            <a:r>
+              <a:rPr lang="en-US" dirty="0"/>
+              <a:t>Ehrlich gesagt: Fiori Elements hat hier echte Grenzen. Das Layout folgt festen Floorplans, man kann einen großen grünen Button nicht frei in die Mitte setzen, und eigenes CSS ist nicht vorgesehen. Für Kamera-Scan oder einen echten Scan-Schnellablauf brauchen wir eine Erweiterung. Wichtig für beide Varianten: Der Browser gibt die Kamera nur über HTTPS frei, und bei vielen Scans pro Schicht ist ein Handscanner klar schneller als die Handy-Kamera. Aber auch Freestyle hat Grenzen, die oft übersehen werden: Wer UI5-Controls per CSS umgestaltet, greift in interne Klassen und Strukturen ein. Die sind kein offizielles API, SAP kann sie mit jedem Release ändern – und dann sieht die App nach dem Upgrade plötzlich anders aus oder ist kaputt. Offline können beide nicht ohne Weiteres; dafür gibt es eigene SAP-Lösungen wie das Mobile Development Kit, die man dann separat bewerten müsste.</a:t>
+            </a:r>
+            <a:endParaRPr lang="en-US" dirty="0"/>
+          </a:p>
+        </p:txBody>
+      </p:sp>
+      <p:sp>
+        <p:nvSpPr>
+          <p:cNvPr id="4" name="Slide Number Placeholder 3"/>
+          <p:cNvSpPr>
+            <a:spLocks noGrp="1"/>
+          </p:cNvSpPr>
+          <p:nvPr>
+            <p:ph type="sldNum" sz="quarter" idx="10"/>
+          </p:nvPr>
+        </p:nvSpPr>
+        <p:spPr/>
+        <p:txBody>
+          <a:bodyPr/>
+          <a:lstStyle/>
+          <a:p>
+            <a:fld id="{F7021451-1387-4CA6-816F-3879F97B5CBC}" type="slidenum">
+              <a:rPr lang="en-US"/>
+              <a:t>13</a:t>
+            </a:fld>
+            <a:endParaRPr lang="en-US"/>
+          </a:p>
+        </p:txBody>
+      </p:sp>
+    </p:spTree>
+    <p:extLst>
+      <p:ext uri="{BB962C8B-B14F-4D97-AF65-F5344CB8AC3E}">
+        <p14:creationId xmlns:p14="http://schemas.microsoft.com/office/powerpoint/2010/main" val="1024086991"/>
+      </p:ext>
+    </p:extLst>
+  </p:cSld>
+  <p:clrMapOvr>
+    <a:masterClrMapping/>
+  </p:clrMapOvr>
+</p:notes>
+</file>
+
+<file path=ppt/notesSlides/notesSlide14.xml><?xml version="1.0" encoding="utf-8"?>
+<p:notes xmlns:a="http://schemas.openxmlformats.org/drawingml/2006/main" xmlns:r="http://schemas.openxmlformats.org/officeDocument/2006/relationships" xmlns:p="http://schemas.openxmlformats.org/presentationml/2006/main">
+  <p:cSld>
+    <p:spTree>
+      <p:nvGrpSpPr>
+        <p:cNvPr id="1" name=""/>
+        <p:cNvGrpSpPr/>
+        <p:nvPr/>
+      </p:nvGrpSpPr>
+      <p:grpSpPr>
+        <a:xfrm>
+          <a:off x="0" y="0"/>
+          <a:ext cx="0" cy="0"/>
+          <a:chOff x="0" y="0"/>
+          <a:chExt cx="0" cy="0"/>
+        </a:xfrm>
+      </p:grpSpPr>
+      <p:sp>
+        <p:nvSpPr>
+          <p:cNvPr id="2" name="Slide Image Placeholder 1"/>
+          <p:cNvSpPr>
+            <a:spLocks noGrp="1" noRot="1" noChangeAspect="1"/>
+          </p:cNvSpPr>
+          <p:nvPr>
+            <p:ph type="sldImg"/>
+          </p:nvPr>
+        </p:nvSpPr>
+        <p:spPr/>
+      </p:sp>
+      <p:sp>
+        <p:nvSpPr>
+          <p:cNvPr id="3" name="Notes Placeholder 2"/>
+          <p:cNvSpPr>
+            <a:spLocks noGrp="1"/>
+          </p:cNvSpPr>
+          <p:nvPr>
+            <p:ph type="body" idx="1"/>
+          </p:nvPr>
+        </p:nvSpPr>
+        <p:spPr/>
+        <p:txBody>
+          <a:bodyPr/>
+          <a:lstStyle/>
+          <a:p>
+            <a:r>
+              <a:rPr lang="en-US" dirty="0"/>
+              <a:t>Daraus ergibt sich eine pragmatische Entscheidungshilfe: Übersichten und Disposition am PC – klar Fiori Elements. Bestätigen am Tablet – Fiori Elements im Touch-Modus mit Aktion direkt in der Zeile. Gelegentlicher Kamera-Scan – Fiori Elements mit dem Scanner-Baustein als Erweiterung. Wenn ein Spezialteil nötig ist, erweitern wir Fiori Elements gezielt. Für einen wirklich scan-getriebenen Schnellablauf, der hunderte Male pro Schicht läuft, ist eine schlanke Freestyle-App gerechtfertigt – aber genau für diesen einen Ablauf, nicht als Nachbau einer kompletten Anwendung. Offline ist ein eigenes Thema und braucht eine eigene Bewertung.</a:t>
+            </a:r>
+            <a:endParaRPr lang="en-US" dirty="0"/>
+          </a:p>
+        </p:txBody>
+      </p:sp>
+      <p:sp>
+        <p:nvSpPr>
+          <p:cNvPr id="4" name="Slide Number Placeholder 3"/>
+          <p:cNvSpPr>
+            <a:spLocks noGrp="1"/>
+          </p:cNvSpPr>
+          <p:nvPr>
+            <p:ph type="sldNum" sz="quarter" idx="10"/>
+          </p:nvPr>
+        </p:nvSpPr>
+        <p:spPr/>
+        <p:txBody>
+          <a:bodyPr/>
+          <a:lstStyle/>
+          <a:p>
+            <a:fld id="{F7021451-1387-4CA6-816F-3879F97B5CBC}" type="slidenum">
+              <a:rPr lang="en-US"/>
+              <a:t>14</a:t>
+            </a:fld>
+            <a:endParaRPr lang="en-US"/>
+          </a:p>
+        </p:txBody>
+      </p:sp>
+    </p:spTree>
+    <p:extLst>
+      <p:ext uri="{BB962C8B-B14F-4D97-AF65-F5344CB8AC3E}">
+        <p14:creationId xmlns:p14="http://schemas.microsoft.com/office/powerpoint/2010/main" val="1024086991"/>
+      </p:ext>
+    </p:extLst>
+  </p:cSld>
+  <p:clrMapOvr>
+    <a:masterClrMapping/>
+  </p:clrMapOvr>
+</p:notes>
+</file>
+
+<file path=ppt/notesSlides/notesSlide15.xml><?xml version="1.0" encoding="utf-8"?>
+<p:notes xmlns:a="http://schemas.openxmlformats.org/drawingml/2006/main" xmlns:r="http://schemas.openxmlformats.org/officeDocument/2006/relationships" xmlns:p="http://schemas.openxmlformats.org/presentationml/2006/main">
+  <p:cSld>
+    <p:spTree>
+      <p:nvGrpSpPr>
+        <p:cNvPr id="1" name=""/>
+        <p:cNvGrpSpPr/>
+        <p:nvPr/>
+      </p:nvGrpSpPr>
+      <p:grpSpPr>
+        <a:xfrm>
+          <a:off x="0" y="0"/>
+          <a:ext cx="0" cy="0"/>
+          <a:chOff x="0" y="0"/>
+          <a:chExt cx="0" cy="0"/>
+        </a:xfrm>
+      </p:grpSpPr>
+      <p:sp>
+        <p:nvSpPr>
+          <p:cNvPr id="2" name="Slide Image Placeholder 1"/>
+          <p:cNvSpPr>
+            <a:spLocks noGrp="1" noRot="1" noChangeAspect="1"/>
+          </p:cNvSpPr>
+          <p:nvPr>
+            <p:ph type="sldImg"/>
+          </p:nvPr>
+        </p:nvSpPr>
+        <p:spPr/>
+      </p:sp>
+      <p:sp>
+        <p:nvSpPr>
+          <p:cNvPr id="3" name="Notes Placeholder 2"/>
+          <p:cNvSpPr>
+            <a:spLocks noGrp="1"/>
+          </p:cNvSpPr>
+          <p:nvPr>
+            <p:ph type="body" idx="1"/>
+          </p:nvPr>
+        </p:nvSpPr>
+        <p:spPr/>
+        <p:txBody>
+          <a:bodyPr/>
+          <a:lstStyle/>
+          <a:p>
+            <a:r>
+              <a:rPr lang="en-US" dirty="0"/>
+              <a:t>Mein Vorschlag als einfache Leitplanke: Wir prüfen immer zuerst Fiori Elements mit RAP. Reicht das nicht, erweitern wir Fiori Elements gezielt. Erst wenn beides nicht passt, wird Freestyle gebaut – und dann bewusst, mit Begründung, einem Owner und eingeplantem Wartungsbudget. Die drei Prüffragen können wir in jede Anforderungsklärung aufnehmen.</a:t>
+            </a:r>
+            <a:endParaRPr lang="en-US" dirty="0"/>
+          </a:p>
+        </p:txBody>
+      </p:sp>
+      <p:sp>
+        <p:nvSpPr>
+          <p:cNvPr id="4" name="Slide Number Placeholder 3"/>
+          <p:cNvSpPr>
+            <a:spLocks noGrp="1"/>
+          </p:cNvSpPr>
+          <p:nvPr>
+            <p:ph type="sldNum" sz="quarter" idx="10"/>
+          </p:nvPr>
+        </p:nvSpPr>
+        <p:spPr/>
+        <p:txBody>
+          <a:bodyPr/>
+          <a:lstStyle/>
+          <a:p>
+            <a:fld id="{F7021451-1387-4CA6-816F-3879F97B5CBC}" type="slidenum">
+              <a:rPr lang="en-US"/>
+              <a:t>15</a:t>
+            </a:fld>
+            <a:endParaRPr lang="en-US"/>
+          </a:p>
+        </p:txBody>
+      </p:sp>
+    </p:spTree>
+    <p:extLst>
+      <p:ext uri="{BB962C8B-B14F-4D97-AF65-F5344CB8AC3E}">
+        <p14:creationId xmlns:p14="http://schemas.microsoft.com/office/powerpoint/2010/main" val="1024086991"/>
+      </p:ext>
+    </p:extLst>
+  </p:cSld>
+  <p:clrMapOvr>
+    <a:masterClrMapping/>
+  </p:clrMapOvr>
+</p:notes>
+</file>
+
+<file path=ppt/notesSlides/notesSlide16.xml><?xml version="1.0" encoding="utf-8"?>
+<p:notes xmlns:a="http://schemas.openxmlformats.org/drawingml/2006/main" xmlns:r="http://schemas.openxmlformats.org/officeDocument/2006/relationships" xmlns:p="http://schemas.openxmlformats.org/presentationml/2006/main">
+  <p:cSld>
+    <p:spTree>
+      <p:nvGrpSpPr>
+        <p:cNvPr id="1" name=""/>
+        <p:cNvGrpSpPr/>
+        <p:nvPr/>
+      </p:nvGrpSpPr>
+      <p:grpSpPr>
+        <a:xfrm>
+          <a:off x="0" y="0"/>
+          <a:ext cx="0" cy="0"/>
+          <a:chOff x="0" y="0"/>
+          <a:chExt cx="0" cy="0"/>
+        </a:xfrm>
+      </p:grpSpPr>
+      <p:sp>
+        <p:nvSpPr>
+          <p:cNvPr id="2" name="Slide Image Placeholder 1"/>
+          <p:cNvSpPr>
+            <a:spLocks noGrp="1" noRot="1" noChangeAspect="1"/>
+          </p:cNvSpPr>
+          <p:nvPr>
+            <p:ph type="sldImg"/>
+          </p:nvPr>
+        </p:nvSpPr>
+        <p:spPr/>
+      </p:sp>
+      <p:sp>
+        <p:nvSpPr>
+          <p:cNvPr id="3" name="Notes Placeholder 2"/>
+          <p:cNvSpPr>
+            <a:spLocks noGrp="1"/>
+          </p:cNvSpPr>
+          <p:nvPr>
+            <p:ph type="body" idx="1"/>
+          </p:nvPr>
+        </p:nvSpPr>
+        <p:spPr/>
+        <p:txBody>
+          <a:bodyPr/>
+          <a:lstStyle/>
+          <a:p>
+            <a:r>
+              <a:rPr lang="en-US" dirty="0"/>
+              <a:t>Zusammenfassung: Gleiches Aussehen heißt nicht gleicher Aufwand. Ich schlage vier konkrete Schritte vor und würde gerne heute festhalten, dass Fiori Elements mit RAP unser Standard ist und Freestyle-Apps künftig kurz begründet werden müssen. Fragen?</a:t>
+            </a:r>
+            <a:endParaRPr lang="en-US" dirty="0"/>
+          </a:p>
+        </p:txBody>
+      </p:sp>
+      <p:sp>
+        <p:nvSpPr>
+          <p:cNvPr id="4" name="Slide Number Placeholder 3"/>
+          <p:cNvSpPr>
+            <a:spLocks noGrp="1"/>
+          </p:cNvSpPr>
+          <p:nvPr>
+            <p:ph type="sldNum" sz="quarter" idx="10"/>
+          </p:nvPr>
+        </p:nvSpPr>
+        <p:spPr/>
+        <p:txBody>
+          <a:bodyPr/>
+          <a:lstStyle/>
+          <a:p>
+            <a:fld id="{F7021451-1387-4CA6-816F-3879F97B5CBC}" type="slidenum">
+              <a:rPr lang="en-US"/>
+              <a:t>16</a:t>
             </a:fld>
             <a:endParaRPr lang="en-US"/>
           </a:p>
@@ -3525,7 +3889,7 @@
                   <a:schemeClr val="tx2"/>
                 </a:solidFill>
               </a:rPr>
-              <a:t>Leitplanke: erst Standard, dann Ausnahme</a:t>
+              <a:t>Lager &amp; Produktion: Jeder Klick kostet Geld</a:t>
             </a:r>
             <a:endParaRPr lang="en-US" sz="3400" dirty="0"/>
           </a:p>
@@ -3533,56 +3897,116 @@
       </p:sp>
       <p:sp>
         <p:nvSpPr>
-          <p:cNvPr id="3" name="Stufe 1"/>
+          <p:cNvPr id="3" name="Text 1"/>
+          <p:cNvSpPr txBox="1"/>
+          <p:nvPr/>
+        </p:nvSpPr>
+        <p:spPr>
+          <a:xfrm>
+            <a:off x="548640" y="1280160"/>
+            <a:ext cx="11064240" cy="411480"/>
+          </a:xfrm>
+          <a:prstGeom prst="rect">
+            <a:avLst/>
+          </a:prstGeom>
+          <a:noFill/>
+          <a:ln/>
+        </p:spPr>
+        <p:txBody>
+          <a:bodyPr wrap="square" lIns="0" tIns="0" rIns="0" bIns="0" rtlCol="0" anchor="ctr"/>
+          <a:lstStyle/>
+          <a:p>
+            <a:pPr indent="0" marL="0">
+              <a:buNone/>
+            </a:pPr>
+            <a:r>
+              <a:rPr lang="en-US" sz="1600" dirty="0">
+                <a:solidFill>
+                  <a:schemeClr val="accent4"/>
+                </a:solidFill>
+              </a:rPr>
+              <a:t>Die Anforderungen der Kollegen sind berechtigt – und sie sind die häufigste Begründung für Freestyle.</a:t>
+            </a:r>
+            <a:endParaRPr lang="en-US" sz="1600" dirty="0"/>
+          </a:p>
+        </p:txBody>
+      </p:sp>
+      <p:sp>
+        <p:nvSpPr>
+          <p:cNvPr id="4" name="Anforderung Große Touch-Flächen"/>
           <p:cNvSpPr/>
           <p:nvPr/>
         </p:nvSpPr>
         <p:spPr>
           <a:xfrm>
-            <a:off x="548640" y="1463040"/>
-            <a:ext cx="3474720" cy="2743200"/>
+            <a:off x="548640" y="1965960"/>
+            <a:ext cx="2066544" cy="3291840"/>
           </a:xfrm>
           <a:prstGeom prst="roundRect">
             <a:avLst>
-              <a:gd name="adj" fmla="val 4000"/>
+              <a:gd name="adj" fmla="val 5310"/>
             </a:avLst>
           </a:prstGeom>
           <a:solidFill>
-            <a:schemeClr val="accent6"/>
+            <a:schemeClr val="bg2"/>
           </a:solidFill>
           <a:ln/>
         </p:spPr>
       </p:sp>
       <p:sp>
         <p:nvSpPr>
-          <p:cNvPr id="4" name="Stufe 1 Nummer"/>
+          <p:cNvPr id="5" name="Große Touch-Flächen Kreis"/>
           <p:cNvSpPr/>
           <p:nvPr/>
         </p:nvSpPr>
         <p:spPr>
           <a:xfrm>
-            <a:off x="822960" y="1691640"/>
-            <a:ext cx="640080" cy="640080"/>
+            <a:off x="1216152" y="2240280"/>
+            <a:ext cx="731520" cy="731520"/>
           </a:xfrm>
           <a:prstGeom prst="ellipse">
             <a:avLst/>
           </a:prstGeom>
           <a:solidFill>
-            <a:schemeClr val="accent1"/>
+            <a:schemeClr val="tx2"/>
           </a:solidFill>
           <a:ln/>
         </p:spPr>
       </p:sp>
-      <p:sp>
-        <p:nvSpPr>
-          <p:cNvPr id="5" name="Text 3"/>
+      <p:pic>
+        <p:nvPicPr>
+          <p:cNvPr id="6" name="Große Touch-Flächen Icon" descr="Große Touch-Flächen">    </p:cNvPr>
+          <p:cNvPicPr>
+            <a:picLocks noChangeAspect="1"/>
+          </p:cNvPicPr>
+          <p:nvPr/>
+        </p:nvPicPr>
+        <p:blipFill>
+          <a:blip r:embed="rId1"/>
+          <a:stretch>
+            <a:fillRect/>
+          </a:stretch>
+        </p:blipFill>
+        <p:spPr>
+          <a:xfrm>
+            <a:off x="1399032" y="2423160"/>
+            <a:ext cx="365760" cy="365760"/>
+          </a:xfrm>
+          <a:prstGeom prst="rect">
+            <a:avLst/>
+          </a:prstGeom>
+        </p:spPr>
+      </p:pic>
+      <p:sp>
+        <p:nvSpPr>
+          <p:cNvPr id="7" name="Text 4"/>
           <p:cNvSpPr txBox="1"/>
           <p:nvPr/>
         </p:nvSpPr>
         <p:spPr>
           <a:xfrm>
-            <a:off x="822960" y="1691640"/>
-            <a:ext cx="640080" cy="640080"/>
+            <a:off x="685800" y="3154680"/>
+            <a:ext cx="1792224" cy="685800"/>
           </a:xfrm>
           <a:prstGeom prst="rect">
             <a:avLst/>
@@ -3591,34 +4015,644 @@
           <a:ln/>
         </p:spPr>
         <p:txBody>
-          <a:bodyPr wrap="square" lIns="0" tIns="0" rIns="0" bIns="0" rtlCol="0" anchor="ctr"/>
+          <a:bodyPr wrap="square" lIns="0" tIns="0" rIns="0" bIns="0" rtlCol="0" anchor="t"/>
           <a:lstStyle/>
           <a:p>
             <a:pPr algn="ctr" indent="0" marL="0">
               <a:buNone/>
             </a:pPr>
             <a:r>
-              <a:rPr lang="en-US" sz="2400" b="1" dirty="0">
-                <a:solidFill>
-                  <a:schemeClr val="bg1"/>
-                </a:solidFill>
-              </a:rPr>
-              <a:t>1</a:t>
-            </a:r>
-            <a:endParaRPr lang="en-US" sz="2400" dirty="0"/>
-          </a:p>
-        </p:txBody>
-      </p:sp>
-      <p:sp>
-        <p:nvSpPr>
-          <p:cNvPr id="6" name="Text 4"/>
+              <a:rPr lang="en-US" sz="1700" b="1" dirty="0">
+                <a:solidFill>
+                  <a:schemeClr val="tx1"/>
+                </a:solidFill>
+              </a:rPr>
+              <a:t>Große Touch-Flächen</a:t>
+            </a:r>
+            <a:endParaRPr lang="en-US" sz="1700" dirty="0"/>
+          </a:p>
+        </p:txBody>
+      </p:sp>
+      <p:sp>
+        <p:nvSpPr>
+          <p:cNvPr id="8" name="Text 5"/>
           <p:cNvSpPr txBox="1"/>
           <p:nvPr/>
         </p:nvSpPr>
         <p:spPr>
           <a:xfrm>
-            <a:off x="822960" y="2468880"/>
-            <a:ext cx="2926080" cy="457200"/>
+            <a:off x="685800" y="3886200"/>
+            <a:ext cx="1792224" cy="1234440"/>
+          </a:xfrm>
+          <a:prstGeom prst="rect">
+            <a:avLst/>
+          </a:prstGeom>
+          <a:noFill/>
+          <a:ln/>
+        </p:spPr>
+        <p:txBody>
+          <a:bodyPr wrap="square" lIns="0" tIns="0" rIns="0" bIns="0" rtlCol="0" anchor="t"/>
+          <a:lstStyle/>
+          <a:p>
+            <a:pPr algn="ctr" indent="0" marL="0">
+              <a:buNone/>
+            </a:pPr>
+            <a:r>
+              <a:rPr lang="en-US" sz="1400" dirty="0">
+                <a:solidFill>
+                  <a:schemeClr val="tx1"/>
+                </a:solidFill>
+              </a:rPr>
+              <a:t>Bedienung mit Handschuh, am Tablet oder Handscanner</a:t>
+            </a:r>
+            <a:endParaRPr lang="en-US" sz="1400" dirty="0"/>
+          </a:p>
+        </p:txBody>
+      </p:sp>
+      <p:sp>
+        <p:nvSpPr>
+          <p:cNvPr id="9" name="Anforderung Sichtbare Buttons"/>
+          <p:cNvSpPr/>
+          <p:nvPr/>
+        </p:nvSpPr>
+        <p:spPr>
+          <a:xfrm>
+            <a:off x="2816352" y="1965960"/>
+            <a:ext cx="2066544" cy="3291840"/>
+          </a:xfrm>
+          <a:prstGeom prst="roundRect">
+            <a:avLst>
+              <a:gd name="adj" fmla="val 5310"/>
+            </a:avLst>
+          </a:prstGeom>
+          <a:solidFill>
+            <a:schemeClr val="bg2"/>
+          </a:solidFill>
+          <a:ln/>
+        </p:spPr>
+      </p:sp>
+      <p:sp>
+        <p:nvSpPr>
+          <p:cNvPr id="10" name="Sichtbare Buttons Kreis"/>
+          <p:cNvSpPr/>
+          <p:nvPr/>
+        </p:nvSpPr>
+        <p:spPr>
+          <a:xfrm>
+            <a:off x="3483864" y="2240280"/>
+            <a:ext cx="731520" cy="731520"/>
+          </a:xfrm>
+          <a:prstGeom prst="ellipse">
+            <a:avLst/>
+          </a:prstGeom>
+          <a:solidFill>
+            <a:schemeClr val="tx2"/>
+          </a:solidFill>
+          <a:ln/>
+        </p:spPr>
+      </p:sp>
+      <p:pic>
+        <p:nvPicPr>
+          <p:cNvPr id="11" name="Sichtbare Buttons Icon" descr="Sichtbare Buttons">    </p:cNvPr>
+          <p:cNvPicPr>
+            <a:picLocks noChangeAspect="1"/>
+          </p:cNvPicPr>
+          <p:nvPr/>
+        </p:nvPicPr>
+        <p:blipFill>
+          <a:blip r:embed="rId2"/>
+          <a:stretch>
+            <a:fillRect/>
+          </a:stretch>
+        </p:blipFill>
+        <p:spPr>
+          <a:xfrm>
+            <a:off x="3666744" y="2423160"/>
+            <a:ext cx="365760" cy="365760"/>
+          </a:xfrm>
+          <a:prstGeom prst="rect">
+            <a:avLst/>
+          </a:prstGeom>
+        </p:spPr>
+      </p:pic>
+      <p:sp>
+        <p:nvSpPr>
+          <p:cNvPr id="12" name="Text 8"/>
+          <p:cNvSpPr txBox="1"/>
+          <p:nvPr/>
+        </p:nvSpPr>
+        <p:spPr>
+          <a:xfrm>
+            <a:off x="2953512" y="3154680"/>
+            <a:ext cx="1792224" cy="685800"/>
+          </a:xfrm>
+          <a:prstGeom prst="rect">
+            <a:avLst/>
+          </a:prstGeom>
+          <a:noFill/>
+          <a:ln/>
+        </p:spPr>
+        <p:txBody>
+          <a:bodyPr wrap="square" lIns="0" tIns="0" rIns="0" bIns="0" rtlCol="0" anchor="t"/>
+          <a:lstStyle/>
+          <a:p>
+            <a:pPr algn="ctr" indent="0" marL="0">
+              <a:buNone/>
+            </a:pPr>
+            <a:r>
+              <a:rPr lang="en-US" sz="1700" b="1" dirty="0">
+                <a:solidFill>
+                  <a:schemeClr val="tx1"/>
+                </a:solidFill>
+              </a:rPr>
+              <a:t>Sichtbare Buttons</a:t>
+            </a:r>
+            <a:endParaRPr lang="en-US" sz="1700" dirty="0"/>
+          </a:p>
+        </p:txBody>
+      </p:sp>
+      <p:sp>
+        <p:nvSpPr>
+          <p:cNvPr id="13" name="Text 9"/>
+          <p:cNvSpPr txBox="1"/>
+          <p:nvPr/>
+        </p:nvSpPr>
+        <p:spPr>
+          <a:xfrm>
+            <a:off x="2953512" y="3886200"/>
+            <a:ext cx="1792224" cy="1234440"/>
+          </a:xfrm>
+          <a:prstGeom prst="rect">
+            <a:avLst/>
+          </a:prstGeom>
+          <a:noFill/>
+          <a:ln/>
+        </p:spPr>
+        <p:txBody>
+          <a:bodyPr wrap="square" lIns="0" tIns="0" rIns="0" bIns="0" rtlCol="0" anchor="t"/>
+          <a:lstStyle/>
+          <a:p>
+            <a:pPr algn="ctr" indent="0" marL="0">
+              <a:buNone/>
+            </a:pPr>
+            <a:r>
+              <a:rPr lang="en-US" sz="1400" dirty="0">
+                <a:solidFill>
+                  <a:schemeClr val="tx1"/>
+                </a:solidFill>
+              </a:rPr>
+              <a:t>Die Hauptaktion liegt im Blick, nicht im Menü versteckt</a:t>
+            </a:r>
+            <a:endParaRPr lang="en-US" sz="1400" dirty="0"/>
+          </a:p>
+        </p:txBody>
+      </p:sp>
+      <p:sp>
+        <p:nvSpPr>
+          <p:cNvPr id="14" name="Anforderung Wenige Schritte"/>
+          <p:cNvSpPr/>
+          <p:nvPr/>
+        </p:nvSpPr>
+        <p:spPr>
+          <a:xfrm>
+            <a:off x="5084064" y="1965960"/>
+            <a:ext cx="2066544" cy="3291840"/>
+          </a:xfrm>
+          <a:prstGeom prst="roundRect">
+            <a:avLst>
+              <a:gd name="adj" fmla="val 5310"/>
+            </a:avLst>
+          </a:prstGeom>
+          <a:solidFill>
+            <a:schemeClr val="bg2"/>
+          </a:solidFill>
+          <a:ln/>
+        </p:spPr>
+      </p:sp>
+      <p:sp>
+        <p:nvSpPr>
+          <p:cNvPr id="15" name="Wenige Schritte Kreis"/>
+          <p:cNvSpPr/>
+          <p:nvPr/>
+        </p:nvSpPr>
+        <p:spPr>
+          <a:xfrm>
+            <a:off x="5751576" y="2240280"/>
+            <a:ext cx="731520" cy="731520"/>
+          </a:xfrm>
+          <a:prstGeom prst="ellipse">
+            <a:avLst/>
+          </a:prstGeom>
+          <a:solidFill>
+            <a:schemeClr val="tx2"/>
+          </a:solidFill>
+          <a:ln/>
+        </p:spPr>
+      </p:sp>
+      <p:pic>
+        <p:nvPicPr>
+          <p:cNvPr id="16" name="Wenige Schritte Icon" descr="Wenige Schritte">    </p:cNvPr>
+          <p:cNvPicPr>
+            <a:picLocks noChangeAspect="1"/>
+          </p:cNvPicPr>
+          <p:nvPr/>
+        </p:nvPicPr>
+        <p:blipFill>
+          <a:blip r:embed="rId3"/>
+          <a:stretch>
+            <a:fillRect/>
+          </a:stretch>
+        </p:blipFill>
+        <p:spPr>
+          <a:xfrm>
+            <a:off x="5934456" y="2423160"/>
+            <a:ext cx="365760" cy="365760"/>
+          </a:xfrm>
+          <a:prstGeom prst="rect">
+            <a:avLst/>
+          </a:prstGeom>
+        </p:spPr>
+      </p:pic>
+      <p:sp>
+        <p:nvSpPr>
+          <p:cNvPr id="17" name="Text 12"/>
+          <p:cNvSpPr txBox="1"/>
+          <p:nvPr/>
+        </p:nvSpPr>
+        <p:spPr>
+          <a:xfrm>
+            <a:off x="5221224" y="3154680"/>
+            <a:ext cx="1792224" cy="685800"/>
+          </a:xfrm>
+          <a:prstGeom prst="rect">
+            <a:avLst/>
+          </a:prstGeom>
+          <a:noFill/>
+          <a:ln/>
+        </p:spPr>
+        <p:txBody>
+          <a:bodyPr wrap="square" lIns="0" tIns="0" rIns="0" bIns="0" rtlCol="0" anchor="t"/>
+          <a:lstStyle/>
+          <a:p>
+            <a:pPr algn="ctr" indent="0" marL="0">
+              <a:buNone/>
+            </a:pPr>
+            <a:r>
+              <a:rPr lang="en-US" sz="1700" b="1" dirty="0">
+                <a:solidFill>
+                  <a:schemeClr val="tx1"/>
+                </a:solidFill>
+              </a:rPr>
+              <a:t>Wenige Schritte</a:t>
+            </a:r>
+            <a:endParaRPr lang="en-US" sz="1700" dirty="0"/>
+          </a:p>
+        </p:txBody>
+      </p:sp>
+      <p:sp>
+        <p:nvSpPr>
+          <p:cNvPr id="18" name="Text 13"/>
+          <p:cNvSpPr txBox="1"/>
+          <p:nvPr/>
+        </p:nvSpPr>
+        <p:spPr>
+          <a:xfrm>
+            <a:off x="5221224" y="3886200"/>
+            <a:ext cx="1792224" cy="1234440"/>
+          </a:xfrm>
+          <a:prstGeom prst="rect">
+            <a:avLst/>
+          </a:prstGeom>
+          <a:noFill/>
+          <a:ln/>
+        </p:spPr>
+        <p:txBody>
+          <a:bodyPr wrap="square" lIns="0" tIns="0" rIns="0" bIns="0" rtlCol="0" anchor="t"/>
+          <a:lstStyle/>
+          <a:p>
+            <a:pPr algn="ctr" indent="0" marL="0">
+              <a:buNone/>
+            </a:pPr>
+            <a:r>
+              <a:rPr lang="en-US" sz="1400" dirty="0">
+                <a:solidFill>
+                  <a:schemeClr val="tx1"/>
+                </a:solidFill>
+              </a:rPr>
+              <a:t>Scannen, Menge, Bestätigen – ohne Umwege über Listen</a:t>
+            </a:r>
+            <a:endParaRPr lang="en-US" sz="1400" dirty="0"/>
+          </a:p>
+        </p:txBody>
+      </p:sp>
+      <p:sp>
+        <p:nvSpPr>
+          <p:cNvPr id="19" name="Anforderung Scanner-Bedienung"/>
+          <p:cNvSpPr/>
+          <p:nvPr/>
+        </p:nvSpPr>
+        <p:spPr>
+          <a:xfrm>
+            <a:off x="7351776" y="1965960"/>
+            <a:ext cx="2066544" cy="3291840"/>
+          </a:xfrm>
+          <a:prstGeom prst="roundRect">
+            <a:avLst>
+              <a:gd name="adj" fmla="val 5310"/>
+            </a:avLst>
+          </a:prstGeom>
+          <a:solidFill>
+            <a:schemeClr val="bg2"/>
+          </a:solidFill>
+          <a:ln/>
+        </p:spPr>
+      </p:sp>
+      <p:sp>
+        <p:nvSpPr>
+          <p:cNvPr id="20" name="Scanner-Bedienung Kreis"/>
+          <p:cNvSpPr/>
+          <p:nvPr/>
+        </p:nvSpPr>
+        <p:spPr>
+          <a:xfrm>
+            <a:off x="8019288" y="2240280"/>
+            <a:ext cx="731520" cy="731520"/>
+          </a:xfrm>
+          <a:prstGeom prst="ellipse">
+            <a:avLst/>
+          </a:prstGeom>
+          <a:solidFill>
+            <a:schemeClr val="tx2"/>
+          </a:solidFill>
+          <a:ln/>
+        </p:spPr>
+      </p:sp>
+      <p:pic>
+        <p:nvPicPr>
+          <p:cNvPr id="21" name="Scanner-Bedienung Icon" descr="Scanner-Bedienung">    </p:cNvPr>
+          <p:cNvPicPr>
+            <a:picLocks noChangeAspect="1"/>
+          </p:cNvPicPr>
+          <p:nvPr/>
+        </p:nvPicPr>
+        <p:blipFill>
+          <a:blip r:embed="rId4"/>
+          <a:stretch>
+            <a:fillRect/>
+          </a:stretch>
+        </p:blipFill>
+        <p:spPr>
+          <a:xfrm>
+            <a:off x="8202168" y="2423160"/>
+            <a:ext cx="365760" cy="365760"/>
+          </a:xfrm>
+          <a:prstGeom prst="rect">
+            <a:avLst/>
+          </a:prstGeom>
+        </p:spPr>
+      </p:pic>
+      <p:sp>
+        <p:nvSpPr>
+          <p:cNvPr id="22" name="Text 16"/>
+          <p:cNvSpPr txBox="1"/>
+          <p:nvPr/>
+        </p:nvSpPr>
+        <p:spPr>
+          <a:xfrm>
+            <a:off x="7488936" y="3154680"/>
+            <a:ext cx="1792224" cy="685800"/>
+          </a:xfrm>
+          <a:prstGeom prst="rect">
+            <a:avLst/>
+          </a:prstGeom>
+          <a:noFill/>
+          <a:ln/>
+        </p:spPr>
+        <p:txBody>
+          <a:bodyPr wrap="square" lIns="0" tIns="0" rIns="0" bIns="0" rtlCol="0" anchor="t"/>
+          <a:lstStyle/>
+          <a:p>
+            <a:pPr algn="ctr" indent="0" marL="0">
+              <a:buNone/>
+            </a:pPr>
+            <a:r>
+              <a:rPr lang="en-US" sz="1700" b="1" dirty="0">
+                <a:solidFill>
+                  <a:schemeClr val="tx1"/>
+                </a:solidFill>
+              </a:rPr>
+              <a:t>Scanner-Bedienung</a:t>
+            </a:r>
+            <a:endParaRPr lang="en-US" sz="1700" dirty="0"/>
+          </a:p>
+        </p:txBody>
+      </p:sp>
+      <p:sp>
+        <p:nvSpPr>
+          <p:cNvPr id="23" name="Text 17"/>
+          <p:cNvSpPr txBox="1"/>
+          <p:nvPr/>
+        </p:nvSpPr>
+        <p:spPr>
+          <a:xfrm>
+            <a:off x="7488936" y="3886200"/>
+            <a:ext cx="1792224" cy="1234440"/>
+          </a:xfrm>
+          <a:prstGeom prst="rect">
+            <a:avLst/>
+          </a:prstGeom>
+          <a:noFill/>
+          <a:ln/>
+        </p:spPr>
+        <p:txBody>
+          <a:bodyPr wrap="square" lIns="0" tIns="0" rIns="0" bIns="0" rtlCol="0" anchor="t"/>
+          <a:lstStyle/>
+          <a:p>
+            <a:pPr algn="ctr" indent="0" marL="0">
+              <a:buNone/>
+            </a:pPr>
+            <a:r>
+              <a:rPr lang="en-US" sz="1400" dirty="0">
+                <a:solidFill>
+                  <a:schemeClr val="tx1"/>
+                </a:solidFill>
+              </a:rPr>
+              <a:t>Per Handscanner oder Kamera, Fokus springt automatisch weiter</a:t>
+            </a:r>
+            <a:endParaRPr lang="en-US" sz="1400" dirty="0"/>
+          </a:p>
+        </p:txBody>
+      </p:sp>
+      <p:sp>
+        <p:nvSpPr>
+          <p:cNvPr id="24" name="Anforderung Schnelles Feedback"/>
+          <p:cNvSpPr/>
+          <p:nvPr/>
+        </p:nvSpPr>
+        <p:spPr>
+          <a:xfrm>
+            <a:off x="9619488" y="1965960"/>
+            <a:ext cx="2066544" cy="3291840"/>
+          </a:xfrm>
+          <a:prstGeom prst="roundRect">
+            <a:avLst>
+              <a:gd name="adj" fmla="val 5310"/>
+            </a:avLst>
+          </a:prstGeom>
+          <a:solidFill>
+            <a:schemeClr val="bg2"/>
+          </a:solidFill>
+          <a:ln/>
+        </p:spPr>
+      </p:sp>
+      <p:sp>
+        <p:nvSpPr>
+          <p:cNvPr id="25" name="Schnelles Feedback Kreis"/>
+          <p:cNvSpPr/>
+          <p:nvPr/>
+        </p:nvSpPr>
+        <p:spPr>
+          <a:xfrm>
+            <a:off x="10287000" y="2240280"/>
+            <a:ext cx="731520" cy="731520"/>
+          </a:xfrm>
+          <a:prstGeom prst="ellipse">
+            <a:avLst/>
+          </a:prstGeom>
+          <a:solidFill>
+            <a:schemeClr val="tx2"/>
+          </a:solidFill>
+          <a:ln/>
+        </p:spPr>
+      </p:sp>
+      <p:pic>
+        <p:nvPicPr>
+          <p:cNvPr id="26" name="Schnelles Feedback Icon" descr="Schnelles Feedback">    </p:cNvPr>
+          <p:cNvPicPr>
+            <a:picLocks noChangeAspect="1"/>
+          </p:cNvPicPr>
+          <p:nvPr/>
+        </p:nvPicPr>
+        <p:blipFill>
+          <a:blip r:embed="rId5"/>
+          <a:stretch>
+            <a:fillRect/>
+          </a:stretch>
+        </p:blipFill>
+        <p:spPr>
+          <a:xfrm>
+            <a:off x="10469880" y="2423160"/>
+            <a:ext cx="365760" cy="365760"/>
+          </a:xfrm>
+          <a:prstGeom prst="rect">
+            <a:avLst/>
+          </a:prstGeom>
+        </p:spPr>
+      </p:pic>
+      <p:sp>
+        <p:nvSpPr>
+          <p:cNvPr id="27" name="Text 20"/>
+          <p:cNvSpPr txBox="1"/>
+          <p:nvPr/>
+        </p:nvSpPr>
+        <p:spPr>
+          <a:xfrm>
+            <a:off x="9756648" y="3154680"/>
+            <a:ext cx="1792224" cy="685800"/>
+          </a:xfrm>
+          <a:prstGeom prst="rect">
+            <a:avLst/>
+          </a:prstGeom>
+          <a:noFill/>
+          <a:ln/>
+        </p:spPr>
+        <p:txBody>
+          <a:bodyPr wrap="square" lIns="0" tIns="0" rIns="0" bIns="0" rtlCol="0" anchor="t"/>
+          <a:lstStyle/>
+          <a:p>
+            <a:pPr algn="ctr" indent="0" marL="0">
+              <a:buNone/>
+            </a:pPr>
+            <a:r>
+              <a:rPr lang="en-US" sz="1700" b="1" dirty="0">
+                <a:solidFill>
+                  <a:schemeClr val="tx1"/>
+                </a:solidFill>
+              </a:rPr>
+              <a:t>Schnelles Feedback</a:t>
+            </a:r>
+            <a:endParaRPr lang="en-US" sz="1700" dirty="0"/>
+          </a:p>
+        </p:txBody>
+      </p:sp>
+      <p:sp>
+        <p:nvSpPr>
+          <p:cNvPr id="28" name="Text 21"/>
+          <p:cNvSpPr txBox="1"/>
+          <p:nvPr/>
+        </p:nvSpPr>
+        <p:spPr>
+          <a:xfrm>
+            <a:off x="9756648" y="3886200"/>
+            <a:ext cx="1792224" cy="1234440"/>
+          </a:xfrm>
+          <a:prstGeom prst="rect">
+            <a:avLst/>
+          </a:prstGeom>
+          <a:noFill/>
+          <a:ln/>
+        </p:spPr>
+        <p:txBody>
+          <a:bodyPr wrap="square" lIns="0" tIns="0" rIns="0" bIns="0" rtlCol="0" anchor="t"/>
+          <a:lstStyle/>
+          <a:p>
+            <a:pPr algn="ctr" indent="0" marL="0">
+              <a:buNone/>
+            </a:pPr>
+            <a:r>
+              <a:rPr lang="en-US" sz="1400" dirty="0">
+                <a:solidFill>
+                  <a:schemeClr val="tx1"/>
+                </a:solidFill>
+              </a:rPr>
+              <a:t>Sofort sehen, ob gebucht wurde – optisch und akustisch</a:t>
+            </a:r>
+            <a:endParaRPr lang="en-US" sz="1400" dirty="0"/>
+          </a:p>
+        </p:txBody>
+      </p:sp>
+      <p:sp>
+        <p:nvSpPr>
+          <p:cNvPr id="29" name="Leitfrage Shopfloor"/>
+          <p:cNvSpPr/>
+          <p:nvPr/>
+        </p:nvSpPr>
+        <p:spPr>
+          <a:xfrm>
+            <a:off x="548640" y="5486400"/>
+            <a:ext cx="11064240" cy="685800"/>
+          </a:xfrm>
+          <a:prstGeom prst="roundRect">
+            <a:avLst>
+              <a:gd name="adj" fmla="val 13333"/>
+            </a:avLst>
+          </a:prstGeom>
+          <a:solidFill>
+            <a:schemeClr val="tx2"/>
+          </a:solidFill>
+          <a:ln/>
+        </p:spPr>
+      </p:sp>
+      <p:sp>
+        <p:nvSpPr>
+          <p:cNvPr id="30" name="Text 23"/>
+          <p:cNvSpPr txBox="1"/>
+          <p:nvPr/>
+        </p:nvSpPr>
+        <p:spPr>
+          <a:xfrm>
+            <a:off x="777240" y="5486400"/>
+            <a:ext cx="10607040" cy="685800"/>
           </a:xfrm>
           <a:prstGeom prst="rect">
             <a:avLst/>
@@ -3634,534 +4668,14 @@
               <a:buNone/>
             </a:pPr>
             <a:r>
-              <a:rPr lang="en-US" sz="1900" b="1" dirty="0">
-                <a:solidFill>
-                  <a:schemeClr val="accent1"/>
-                </a:solidFill>
-              </a:rPr>
-              <a:t>Fiori Elements</a:t>
-            </a:r>
-            <a:endParaRPr lang="en-US" sz="1900" dirty="0"/>
-          </a:p>
-        </p:txBody>
-      </p:sp>
-      <p:sp>
-        <p:nvSpPr>
-          <p:cNvPr id="7" name="Text 5"/>
-          <p:cNvSpPr txBox="1"/>
-          <p:nvPr/>
-        </p:nvSpPr>
-        <p:spPr>
-          <a:xfrm>
-            <a:off x="822960" y="2971800"/>
-            <a:ext cx="2926080" cy="1097280"/>
-          </a:xfrm>
-          <a:prstGeom prst="rect">
-            <a:avLst/>
-          </a:prstGeom>
-          <a:noFill/>
-          <a:ln/>
-        </p:spPr>
-        <p:txBody>
-          <a:bodyPr wrap="square" lIns="0" tIns="0" rIns="0" bIns="0" rtlCol="0" anchor="t"/>
-          <a:lstStyle/>
-          <a:p>
-            <a:pPr indent="0" marL="0">
-              <a:buNone/>
-            </a:pPr>
-            <a:r>
-              <a:rPr lang="en-US" sz="1500" dirty="0">
-                <a:solidFill>
-                  <a:schemeClr val="tx1"/>
-                </a:solidFill>
-              </a:rPr>
-              <a:t>mit RAP im Backend. Deckt Liste, Detail, Bearbeiten und Analyse ab.</a:t>
-            </a:r>
-            <a:endParaRPr lang="en-US" sz="1500" dirty="0"/>
-          </a:p>
-        </p:txBody>
-      </p:sp>
-      <p:sp>
-        <p:nvSpPr>
-          <p:cNvPr id="8" name="Pfeil 1"/>
-          <p:cNvSpPr/>
-          <p:nvPr/>
-        </p:nvSpPr>
-        <p:spPr>
-          <a:xfrm>
-            <a:off x="4050792" y="2606040"/>
-            <a:ext cx="274320" cy="457200"/>
-          </a:xfrm>
-          <a:prstGeom prst="rightArrow">
-            <a:avLst/>
-          </a:prstGeom>
-          <a:solidFill>
-            <a:schemeClr val="accent4"/>
-          </a:solidFill>
-          <a:ln/>
-        </p:spPr>
-      </p:sp>
-      <p:sp>
-        <p:nvSpPr>
-          <p:cNvPr id="9" name="Stufe 2"/>
-          <p:cNvSpPr/>
-          <p:nvPr/>
-        </p:nvSpPr>
-        <p:spPr>
-          <a:xfrm>
-            <a:off x="4343400" y="1463040"/>
-            <a:ext cx="3474720" cy="2743200"/>
-          </a:xfrm>
-          <a:prstGeom prst="roundRect">
-            <a:avLst>
-              <a:gd name="adj" fmla="val 4000"/>
-            </a:avLst>
-          </a:prstGeom>
-          <a:solidFill>
-            <a:schemeClr val="accent6"/>
-          </a:solidFill>
-          <a:ln/>
-        </p:spPr>
-      </p:sp>
-      <p:sp>
-        <p:nvSpPr>
-          <p:cNvPr id="10" name="Stufe 2 Nummer"/>
-          <p:cNvSpPr/>
-          <p:nvPr/>
-        </p:nvSpPr>
-        <p:spPr>
-          <a:xfrm>
-            <a:off x="4617720" y="1691640"/>
-            <a:ext cx="640080" cy="640080"/>
-          </a:xfrm>
-          <a:prstGeom prst="ellipse">
-            <a:avLst/>
-          </a:prstGeom>
-          <a:solidFill>
-            <a:schemeClr val="accent1"/>
-          </a:solidFill>
-          <a:ln/>
-        </p:spPr>
-      </p:sp>
-      <p:sp>
-        <p:nvSpPr>
-          <p:cNvPr id="11" name="Text 9"/>
-          <p:cNvSpPr txBox="1"/>
-          <p:nvPr/>
-        </p:nvSpPr>
-        <p:spPr>
-          <a:xfrm>
-            <a:off x="4617720" y="1691640"/>
-            <a:ext cx="640080" cy="640080"/>
-          </a:xfrm>
-          <a:prstGeom prst="rect">
-            <a:avLst/>
-          </a:prstGeom>
-          <a:noFill/>
-          <a:ln/>
-        </p:spPr>
-        <p:txBody>
-          <a:bodyPr wrap="square" lIns="0" tIns="0" rIns="0" bIns="0" rtlCol="0" anchor="ctr"/>
-          <a:lstStyle/>
-          <a:p>
-            <a:pPr algn="ctr" indent="0" marL="0">
-              <a:buNone/>
-            </a:pPr>
-            <a:r>
-              <a:rPr lang="en-US" sz="2400" b="1" dirty="0">
+              <a:rPr lang="en-US" sz="1700" b="1" dirty="0">
                 <a:solidFill>
                   <a:schemeClr val="bg1"/>
                 </a:solidFill>
               </a:rPr>
-              <a:t>2</a:t>
-            </a:r>
-            <a:endParaRPr lang="en-US" sz="2400" dirty="0"/>
-          </a:p>
-        </p:txBody>
-      </p:sp>
-      <p:sp>
-        <p:nvSpPr>
-          <p:cNvPr id="12" name="Text 10"/>
-          <p:cNvSpPr txBox="1"/>
-          <p:nvPr/>
-        </p:nvSpPr>
-        <p:spPr>
-          <a:xfrm>
-            <a:off x="4617720" y="2468880"/>
-            <a:ext cx="2926080" cy="457200"/>
-          </a:xfrm>
-          <a:prstGeom prst="rect">
-            <a:avLst/>
-          </a:prstGeom>
-          <a:noFill/>
-          <a:ln/>
-        </p:spPr>
-        <p:txBody>
-          <a:bodyPr wrap="square" lIns="0" tIns="0" rIns="0" bIns="0" rtlCol="0" anchor="ctr"/>
-          <a:lstStyle/>
-          <a:p>
-            <a:pPr indent="0" marL="0">
-              <a:buNone/>
-            </a:pPr>
-            <a:r>
-              <a:rPr lang="en-US" sz="1900" b="1" dirty="0">
-                <a:solidFill>
-                  <a:schemeClr val="accent1"/>
-                </a:solidFill>
-              </a:rPr>
-              <a:t>Fiori Elements + Erweiterung</a:t>
-            </a:r>
-            <a:endParaRPr lang="en-US" sz="1900" dirty="0"/>
-          </a:p>
-        </p:txBody>
-      </p:sp>
-      <p:sp>
-        <p:nvSpPr>
-          <p:cNvPr id="13" name="Text 11"/>
-          <p:cNvSpPr txBox="1"/>
-          <p:nvPr/>
-        </p:nvSpPr>
-        <p:spPr>
-          <a:xfrm>
-            <a:off x="4617720" y="2971800"/>
-            <a:ext cx="2926080" cy="1097280"/>
-          </a:xfrm>
-          <a:prstGeom prst="rect">
-            <a:avLst/>
-          </a:prstGeom>
-          <a:noFill/>
-          <a:ln/>
-        </p:spPr>
-        <p:txBody>
-          <a:bodyPr wrap="square" lIns="0" tIns="0" rIns="0" bIns="0" rtlCol="0" anchor="t"/>
-          <a:lstStyle/>
-          <a:p>
-            <a:pPr indent="0" marL="0">
-              <a:buNone/>
-            </a:pPr>
-            <a:r>
-              <a:rPr lang="en-US" sz="1500" dirty="0">
-                <a:solidFill>
-                  <a:schemeClr val="tx1"/>
-                </a:solidFill>
-              </a:rPr>
-              <a:t>Flexible Programming Model: eigene Abschnitte und Bausteine, wo nötig.</a:t>
-            </a:r>
-            <a:endParaRPr lang="en-US" sz="1500" dirty="0"/>
-          </a:p>
-        </p:txBody>
-      </p:sp>
-      <p:sp>
-        <p:nvSpPr>
-          <p:cNvPr id="14" name="Pfeil 2"/>
-          <p:cNvSpPr/>
-          <p:nvPr/>
-        </p:nvSpPr>
-        <p:spPr>
-          <a:xfrm>
-            <a:off x="7845552" y="2606040"/>
-            <a:ext cx="274320" cy="457200"/>
-          </a:xfrm>
-          <a:prstGeom prst="rightArrow">
-            <a:avLst/>
-          </a:prstGeom>
-          <a:solidFill>
-            <a:schemeClr val="accent4"/>
-          </a:solidFill>
-          <a:ln/>
-        </p:spPr>
-      </p:sp>
-      <p:sp>
-        <p:nvSpPr>
-          <p:cNvPr id="15" name="Stufe 3"/>
-          <p:cNvSpPr/>
-          <p:nvPr/>
-        </p:nvSpPr>
-        <p:spPr>
-          <a:xfrm>
-            <a:off x="8138160" y="1463040"/>
-            <a:ext cx="3474720" cy="2743200"/>
-          </a:xfrm>
-          <a:prstGeom prst="roundRect">
-            <a:avLst>
-              <a:gd name="adj" fmla="val 4000"/>
-            </a:avLst>
-          </a:prstGeom>
-          <a:solidFill>
-            <a:schemeClr val="accent5"/>
-          </a:solidFill>
-          <a:ln/>
-        </p:spPr>
-      </p:sp>
-      <p:sp>
-        <p:nvSpPr>
-          <p:cNvPr id="16" name="Stufe 3 Nummer"/>
-          <p:cNvSpPr/>
-          <p:nvPr/>
-        </p:nvSpPr>
-        <p:spPr>
-          <a:xfrm>
-            <a:off x="8412480" y="1691640"/>
-            <a:ext cx="640080" cy="640080"/>
-          </a:xfrm>
-          <a:prstGeom prst="ellipse">
-            <a:avLst/>
-          </a:prstGeom>
-          <a:solidFill>
-            <a:schemeClr val="accent2"/>
-          </a:solidFill>
-          <a:ln/>
-        </p:spPr>
-      </p:sp>
-      <p:sp>
-        <p:nvSpPr>
-          <p:cNvPr id="17" name="Text 15"/>
-          <p:cNvSpPr txBox="1"/>
-          <p:nvPr/>
-        </p:nvSpPr>
-        <p:spPr>
-          <a:xfrm>
-            <a:off x="8412480" y="1691640"/>
-            <a:ext cx="640080" cy="640080"/>
-          </a:xfrm>
-          <a:prstGeom prst="rect">
-            <a:avLst/>
-          </a:prstGeom>
-          <a:noFill/>
-          <a:ln/>
-        </p:spPr>
-        <p:txBody>
-          <a:bodyPr wrap="square" lIns="0" tIns="0" rIns="0" bIns="0" rtlCol="0" anchor="ctr"/>
-          <a:lstStyle/>
-          <a:p>
-            <a:pPr algn="ctr" indent="0" marL="0">
-              <a:buNone/>
-            </a:pPr>
-            <a:r>
-              <a:rPr lang="en-US" sz="2400" b="1" dirty="0">
-                <a:solidFill>
-                  <a:schemeClr val="bg1"/>
-                </a:solidFill>
-              </a:rPr>
-              <a:t>3</a:t>
-            </a:r>
-            <a:endParaRPr lang="en-US" sz="2400" dirty="0"/>
-          </a:p>
-        </p:txBody>
-      </p:sp>
-      <p:sp>
-        <p:nvSpPr>
-          <p:cNvPr id="18" name="Text 16"/>
-          <p:cNvSpPr txBox="1"/>
-          <p:nvPr/>
-        </p:nvSpPr>
-        <p:spPr>
-          <a:xfrm>
-            <a:off x="8412480" y="2468880"/>
-            <a:ext cx="2926080" cy="457200"/>
-          </a:xfrm>
-          <a:prstGeom prst="rect">
-            <a:avLst/>
-          </a:prstGeom>
-          <a:noFill/>
-          <a:ln/>
-        </p:spPr>
-        <p:txBody>
-          <a:bodyPr wrap="square" lIns="0" tIns="0" rIns="0" bIns="0" rtlCol="0" anchor="ctr"/>
-          <a:lstStyle/>
-          <a:p>
-            <a:pPr indent="0" marL="0">
-              <a:buNone/>
-            </a:pPr>
-            <a:r>
-              <a:rPr lang="en-US" sz="1900" b="1" dirty="0">
-                <a:solidFill>
-                  <a:schemeClr val="accent2"/>
-                </a:solidFill>
-              </a:rPr>
-              <a:t>SAPUI5 Freestyle</a:t>
-            </a:r>
-            <a:endParaRPr lang="en-US" sz="1900" dirty="0"/>
-          </a:p>
-        </p:txBody>
-      </p:sp>
-      <p:sp>
-        <p:nvSpPr>
-          <p:cNvPr id="19" name="Text 17"/>
-          <p:cNvSpPr txBox="1"/>
-          <p:nvPr/>
-        </p:nvSpPr>
-        <p:spPr>
-          <a:xfrm>
-            <a:off x="8412480" y="2971800"/>
-            <a:ext cx="2926080" cy="1097280"/>
-          </a:xfrm>
-          <a:prstGeom prst="rect">
-            <a:avLst/>
-          </a:prstGeom>
-          <a:noFill/>
-          <a:ln/>
-        </p:spPr>
-        <p:txBody>
-          <a:bodyPr wrap="square" lIns="0" tIns="0" rIns="0" bIns="0" rtlCol="0" anchor="t"/>
-          <a:lstStyle/>
-          <a:p>
-            <a:pPr indent="0" marL="0">
-              <a:buNone/>
-            </a:pPr>
-            <a:r>
-              <a:rPr lang="en-US" sz="1500" dirty="0">
-                <a:solidFill>
-                  <a:schemeClr val="tx1"/>
-                </a:solidFill>
-              </a:rPr>
-              <a:t>nur mit Begründung, verantwortlichem Owner und Wartungsbudget.</a:t>
-            </a:r>
-            <a:endParaRPr lang="en-US" sz="1500" dirty="0"/>
-          </a:p>
-        </p:txBody>
-      </p:sp>
-      <p:sp>
-        <p:nvSpPr>
-          <p:cNvPr id="20" name="Text 18"/>
-          <p:cNvSpPr txBox="1"/>
-          <p:nvPr/>
-        </p:nvSpPr>
-        <p:spPr>
-          <a:xfrm>
-            <a:off x="548640" y="4526280"/>
-            <a:ext cx="11064240" cy="411480"/>
-          </a:xfrm>
-          <a:prstGeom prst="rect">
-            <a:avLst/>
-          </a:prstGeom>
-          <a:noFill/>
-          <a:ln/>
-        </p:spPr>
-        <p:txBody>
-          <a:bodyPr wrap="square" lIns="0" tIns="0" rIns="0" bIns="0" rtlCol="0" anchor="ctr"/>
-          <a:lstStyle/>
-          <a:p>
-            <a:pPr indent="0" marL="0">
-              <a:buNone/>
-            </a:pPr>
-            <a:r>
-              <a:rPr lang="en-US" sz="1800" b="1" dirty="0">
-                <a:solidFill>
-                  <a:schemeClr val="tx1"/>
-                </a:solidFill>
-              </a:rPr>
-              <a:t>Prüffragen vor jeder Freestyle-Entscheidung</a:t>
-            </a:r>
-            <a:endParaRPr lang="en-US" sz="1800" dirty="0"/>
-          </a:p>
-        </p:txBody>
-      </p:sp>
-      <p:sp>
-        <p:nvSpPr>
-          <p:cNvPr id="21" name="Text 19"/>
-          <p:cNvSpPr txBox="1"/>
-          <p:nvPr/>
-        </p:nvSpPr>
-        <p:spPr>
-          <a:xfrm>
-            <a:off x="548640" y="5029200"/>
-            <a:ext cx="3474720" cy="914400"/>
-          </a:xfrm>
-          <a:prstGeom prst="rect">
-            <a:avLst/>
-          </a:prstGeom>
-          <a:noFill/>
-          <a:ln/>
-        </p:spPr>
-        <p:txBody>
-          <a:bodyPr wrap="square" lIns="0" tIns="0" rIns="0" bIns="0" rtlCol="0" anchor="t"/>
-          <a:lstStyle/>
-          <a:p>
-            <a:pPr indent="0" marL="0">
-              <a:buNone/>
-            </a:pPr>
-            <a:r>
-              <a:rPr lang="en-US" sz="1500" dirty="0">
-                <a:solidFill>
-                  <a:schemeClr val="tx1"/>
-                </a:solidFill>
-              </a:rPr>
-              <a:t>Passt die Anforderung wirklich in keinen Floorplan?</a:t>
-            </a:r>
-            <a:endParaRPr lang="en-US" sz="1500" dirty="0"/>
-          </a:p>
-        </p:txBody>
-      </p:sp>
-      <p:sp>
-        <p:nvSpPr>
-          <p:cNvPr id="22" name="Text 20"/>
-          <p:cNvSpPr txBox="1"/>
-          <p:nvPr/>
-        </p:nvSpPr>
-        <p:spPr>
-          <a:xfrm>
-            <a:off x="4343400" y="5029200"/>
-            <a:ext cx="3474720" cy="914400"/>
-          </a:xfrm>
-          <a:prstGeom prst="rect">
-            <a:avLst/>
-          </a:prstGeom>
-          <a:noFill/>
-          <a:ln/>
-        </p:spPr>
-        <p:txBody>
-          <a:bodyPr wrap="square" lIns="0" tIns="0" rIns="0" bIns="0" rtlCol="0" anchor="t"/>
-          <a:lstStyle/>
-          <a:p>
-            <a:pPr indent="0" marL="0">
-              <a:buNone/>
-            </a:pPr>
-            <a:r>
-              <a:rPr lang="en-US" sz="1500" dirty="0">
-                <a:solidFill>
-                  <a:schemeClr val="tx1"/>
-                </a:solidFill>
-              </a:rPr>
-              <a:t>Wer verantwortet Updates, Tests und Upgrades?</a:t>
-            </a:r>
-            <a:endParaRPr lang="en-US" sz="1500" dirty="0"/>
-          </a:p>
-        </p:txBody>
-      </p:sp>
-      <p:sp>
-        <p:nvSpPr>
-          <p:cNvPr id="23" name="Text 21"/>
-          <p:cNvSpPr txBox="1"/>
-          <p:nvPr/>
-        </p:nvSpPr>
-        <p:spPr>
-          <a:xfrm>
-            <a:off x="8138160" y="5029200"/>
-            <a:ext cx="3474720" cy="914400"/>
-          </a:xfrm>
-          <a:prstGeom prst="rect">
-            <a:avLst/>
-          </a:prstGeom>
-          <a:noFill/>
-          <a:ln/>
-        </p:spPr>
-        <p:txBody>
-          <a:bodyPr wrap="square" lIns="0" tIns="0" rIns="0" bIns="0" rtlCol="0" anchor="t"/>
-          <a:lstStyle/>
-          <a:p>
-            <a:pPr indent="0" marL="0">
-              <a:buNone/>
-            </a:pPr>
-            <a:r>
-              <a:rPr lang="en-US" sz="1500" dirty="0">
-                <a:solidFill>
-                  <a:schemeClr val="tx1"/>
-                </a:solidFill>
-              </a:rPr>
-              <a:t>Ist der Wartungsaufwand für die nächsten Jahre eingeplant?</a:t>
-            </a:r>
-            <a:endParaRPr lang="en-US" sz="1500" dirty="0"/>
+              <a:t>Die Frage ist: Welche dieser Anforderungen erfüllt der Standard schon – und wo fängt Eigenbau wirklich an?</a:t>
+            </a:r>
+            <a:endParaRPr lang="en-US" sz="1700" dirty="0"/>
           </a:p>
         </p:txBody>
       </p:sp>
@@ -4221,6 +4735,3774 @@
 <file path=ppt/slides/slide12.xml><?xml version="1.0" encoding="utf-8"?>
 <p:sld xmlns:a="http://schemas.openxmlformats.org/drawingml/2006/main" xmlns:r="http://schemas.openxmlformats.org/officeDocument/2006/relationships" xmlns:p="http://schemas.openxmlformats.org/presentationml/2006/main">
   <p:cSld name="Slide 12">
+    <p:spTree>
+      <p:nvGrpSpPr>
+        <p:cNvPr id="1" name=""/>
+        <p:cNvGrpSpPr/>
+        <p:nvPr/>
+      </p:nvGrpSpPr>
+      <p:grpSpPr>
+        <a:xfrm>
+          <a:off x="0" y="0"/>
+          <a:ext cx="0" cy="0"/>
+          <a:chOff x="0" y="0"/>
+          <a:chExt cx="0" cy="0"/>
+        </a:xfrm>
+      </p:grpSpPr>
+      <p:sp>
+        <p:nvSpPr>
+          <p:cNvPr id="2" name="Text 0"/>
+          <p:cNvSpPr/>
+          <p:nvPr>
+            <p:ph idx="100" type="title" hasCustomPrompt="1"/>
+          </p:nvPr>
+        </p:nvSpPr>
+        <p:spPr>
+          <a:xfrm>
+            <a:off x="548640" y="365760"/>
+            <a:ext cx="11064240" cy="822960"/>
+          </a:xfrm>
+          <a:prstGeom prst="rect">
+            <a:avLst/>
+          </a:prstGeom>
+          <a:noFill/>
+          <a:ln/>
+        </p:spPr>
+        <p:txBody>
+          <a:bodyPr wrap="square" lIns="0" tIns="0" rIns="0" bIns="0" rtlCol="0" anchor="ctr"/>
+          <a:lstStyle/>
+          <a:p>
+            <a:pPr algn="l" indent="0" marL="0">
+              <a:buNone/>
+            </a:pPr>
+            <a:r>
+              <a:rPr lang="en-US" sz="3400" b="1" dirty="0">
+                <a:solidFill>
+                  <a:schemeClr val="tx2"/>
+                </a:solidFill>
+              </a:rPr>
+              <a:t>Was Fiori Elements für effiziente Dialoge kann</a:t>
+            </a:r>
+            <a:endParaRPr lang="en-US" sz="3400" dirty="0"/>
+          </a:p>
+        </p:txBody>
+      </p:sp>
+      <p:sp>
+        <p:nvSpPr>
+          <p:cNvPr id="3" name="Touch-Modus „Cozy“ Kreis"/>
+          <p:cNvSpPr/>
+          <p:nvPr/>
+        </p:nvSpPr>
+        <p:spPr>
+          <a:xfrm>
+            <a:off x="548640" y="1463040"/>
+            <a:ext cx="731520" cy="731520"/>
+          </a:xfrm>
+          <a:prstGeom prst="ellipse">
+            <a:avLst/>
+          </a:prstGeom>
+          <a:solidFill>
+            <a:schemeClr val="accent1"/>
+          </a:solidFill>
+          <a:ln/>
+        </p:spPr>
+      </p:sp>
+      <p:pic>
+        <p:nvPicPr>
+          <p:cNvPr id="4" name="Touch-Modus „Cozy“ Icon" descr="Touch-Modus „Cozy“">    </p:cNvPr>
+          <p:cNvPicPr>
+            <a:picLocks noChangeAspect="1"/>
+          </p:cNvPicPr>
+          <p:nvPr/>
+        </p:nvPicPr>
+        <p:blipFill>
+          <a:blip r:embed="rId1"/>
+          <a:stretch>
+            <a:fillRect/>
+          </a:stretch>
+        </p:blipFill>
+        <p:spPr>
+          <a:xfrm>
+            <a:off x="731520" y="1645920"/>
+            <a:ext cx="365760" cy="365760"/>
+          </a:xfrm>
+          <a:prstGeom prst="rect">
+            <a:avLst/>
+          </a:prstGeom>
+        </p:spPr>
+      </p:pic>
+      <p:sp>
+        <p:nvSpPr>
+          <p:cNvPr id="5" name="Text 2"/>
+          <p:cNvSpPr txBox="1"/>
+          <p:nvPr/>
+        </p:nvSpPr>
+        <p:spPr>
+          <a:xfrm>
+            <a:off x="1508760" y="1417320"/>
+            <a:ext cx="4389120" cy="384048"/>
+          </a:xfrm>
+          <a:prstGeom prst="rect">
+            <a:avLst/>
+          </a:prstGeom>
+          <a:noFill/>
+          <a:ln/>
+        </p:spPr>
+        <p:txBody>
+          <a:bodyPr wrap="square" lIns="0" tIns="0" rIns="0" bIns="0" rtlCol="0" anchor="ctr"/>
+          <a:lstStyle/>
+          <a:p>
+            <a:pPr indent="0" marL="0">
+              <a:buNone/>
+            </a:pPr>
+            <a:r>
+              <a:rPr lang="en-US" sz="1800" b="1" dirty="0">
+                <a:solidFill>
+                  <a:schemeClr val="tx1"/>
+                </a:solidFill>
+              </a:rPr>
+              <a:t>Touch-Modus „Cozy“</a:t>
+            </a:r>
+            <a:endParaRPr lang="en-US" sz="1800" dirty="0"/>
+          </a:p>
+        </p:txBody>
+      </p:sp>
+      <p:sp>
+        <p:nvSpPr>
+          <p:cNvPr id="6" name="Text 3"/>
+          <p:cNvSpPr txBox="1"/>
+          <p:nvPr/>
+        </p:nvSpPr>
+        <p:spPr>
+          <a:xfrm>
+            <a:off x="1508760" y="1828800"/>
+            <a:ext cx="4389120" cy="960120"/>
+          </a:xfrm>
+          <a:prstGeom prst="rect">
+            <a:avLst/>
+          </a:prstGeom>
+          <a:noFill/>
+          <a:ln/>
+        </p:spPr>
+        <p:txBody>
+          <a:bodyPr wrap="square" lIns="0" tIns="0" rIns="0" bIns="0" rtlCol="0" anchor="t"/>
+          <a:lstStyle/>
+          <a:p>
+            <a:pPr indent="0" marL="0">
+              <a:buNone/>
+            </a:pPr>
+            <a:r>
+              <a:rPr lang="en-US" sz="1400" dirty="0">
+                <a:solidFill>
+                  <a:schemeClr val="tx1"/>
+                </a:solidFill>
+              </a:rPr>
+              <a:t>Größere Zeilen, Buttons und Eingabefelder für Touch-Geräte – eine Einstellung, kein CSS.</a:t>
+            </a:r>
+            <a:endParaRPr lang="en-US" sz="1400" dirty="0"/>
+          </a:p>
+        </p:txBody>
+      </p:sp>
+      <p:sp>
+        <p:nvSpPr>
+          <p:cNvPr id="7" name="Aktionen immer sichtbar Kreis"/>
+          <p:cNvSpPr/>
+          <p:nvPr/>
+        </p:nvSpPr>
+        <p:spPr>
+          <a:xfrm>
+            <a:off x="6217920" y="1463040"/>
+            <a:ext cx="731520" cy="731520"/>
+          </a:xfrm>
+          <a:prstGeom prst="ellipse">
+            <a:avLst/>
+          </a:prstGeom>
+          <a:solidFill>
+            <a:schemeClr val="accent1"/>
+          </a:solidFill>
+          <a:ln/>
+        </p:spPr>
+      </p:sp>
+      <p:pic>
+        <p:nvPicPr>
+          <p:cNvPr id="8" name="Aktionen immer sichtbar Icon" descr="Aktionen immer sichtbar">    </p:cNvPr>
+          <p:cNvPicPr>
+            <a:picLocks noChangeAspect="1"/>
+          </p:cNvPicPr>
+          <p:nvPr/>
+        </p:nvPicPr>
+        <p:blipFill>
+          <a:blip r:embed="rId2"/>
+          <a:stretch>
+            <a:fillRect/>
+          </a:stretch>
+        </p:blipFill>
+        <p:spPr>
+          <a:xfrm>
+            <a:off x="6400800" y="1645920"/>
+            <a:ext cx="365760" cy="365760"/>
+          </a:xfrm>
+          <a:prstGeom prst="rect">
+            <a:avLst/>
+          </a:prstGeom>
+        </p:spPr>
+      </p:pic>
+      <p:sp>
+        <p:nvSpPr>
+          <p:cNvPr id="9" name="Text 5"/>
+          <p:cNvSpPr txBox="1"/>
+          <p:nvPr/>
+        </p:nvSpPr>
+        <p:spPr>
+          <a:xfrm>
+            <a:off x="7178040" y="1417320"/>
+            <a:ext cx="4389120" cy="384048"/>
+          </a:xfrm>
+          <a:prstGeom prst="rect">
+            <a:avLst/>
+          </a:prstGeom>
+          <a:noFill/>
+          <a:ln/>
+        </p:spPr>
+        <p:txBody>
+          <a:bodyPr wrap="square" lIns="0" tIns="0" rIns="0" bIns="0" rtlCol="0" anchor="ctr"/>
+          <a:lstStyle/>
+          <a:p>
+            <a:pPr indent="0" marL="0">
+              <a:buNone/>
+            </a:pPr>
+            <a:r>
+              <a:rPr lang="en-US" sz="1800" b="1" dirty="0">
+                <a:solidFill>
+                  <a:schemeClr val="tx1"/>
+                </a:solidFill>
+              </a:rPr>
+              <a:t>Aktionen immer sichtbar</a:t>
+            </a:r>
+            <a:endParaRPr lang="en-US" sz="1800" dirty="0"/>
+          </a:p>
+        </p:txBody>
+      </p:sp>
+      <p:sp>
+        <p:nvSpPr>
+          <p:cNvPr id="10" name="Text 6"/>
+          <p:cNvSpPr txBox="1"/>
+          <p:nvPr/>
+        </p:nvSpPr>
+        <p:spPr>
+          <a:xfrm>
+            <a:off x="7178040" y="1828800"/>
+            <a:ext cx="4389120" cy="960120"/>
+          </a:xfrm>
+          <a:prstGeom prst="rect">
+            <a:avLst/>
+          </a:prstGeom>
+          <a:noFill/>
+          <a:ln/>
+        </p:spPr>
+        <p:txBody>
+          <a:bodyPr wrap="square" lIns="0" tIns="0" rIns="0" bIns="0" rtlCol="0" anchor="t"/>
+          <a:lstStyle/>
+          <a:p>
+            <a:pPr indent="0" marL="0">
+              <a:buNone/>
+            </a:pPr>
+            <a:r>
+              <a:rPr lang="en-US" sz="1400" dirty="0">
+                <a:solidFill>
+                  <a:schemeClr val="tx1"/>
+                </a:solidFill>
+              </a:rPr>
+              <a:t>Hauptaktionen fest in der Fußleiste oder direkt in der Tabellenzeile (Inline-Aktion) – ein Klick.</a:t>
+            </a:r>
+            <a:endParaRPr lang="en-US" sz="1400" dirty="0"/>
+          </a:p>
+        </p:txBody>
+      </p:sp>
+      <p:sp>
+        <p:nvSpPr>
+          <p:cNvPr id="11" name="Vorbelegte Werte Kreis"/>
+          <p:cNvSpPr/>
+          <p:nvPr/>
+        </p:nvSpPr>
+        <p:spPr>
+          <a:xfrm>
+            <a:off x="548640" y="3063240"/>
+            <a:ext cx="731520" cy="731520"/>
+          </a:xfrm>
+          <a:prstGeom prst="ellipse">
+            <a:avLst/>
+          </a:prstGeom>
+          <a:solidFill>
+            <a:schemeClr val="accent1"/>
+          </a:solidFill>
+          <a:ln/>
+        </p:spPr>
+      </p:sp>
+      <p:pic>
+        <p:nvPicPr>
+          <p:cNvPr id="12" name="Vorbelegte Werte Icon" descr="Vorbelegte Werte">    </p:cNvPr>
+          <p:cNvPicPr>
+            <a:picLocks noChangeAspect="1"/>
+          </p:cNvPicPr>
+          <p:nvPr/>
+        </p:nvPicPr>
+        <p:blipFill>
+          <a:blip r:embed="rId3"/>
+          <a:stretch>
+            <a:fillRect/>
+          </a:stretch>
+        </p:blipFill>
+        <p:spPr>
+          <a:xfrm>
+            <a:off x="731520" y="3246120"/>
+            <a:ext cx="365760" cy="365760"/>
+          </a:xfrm>
+          <a:prstGeom prst="rect">
+            <a:avLst/>
+          </a:prstGeom>
+        </p:spPr>
+      </p:pic>
+      <p:sp>
+        <p:nvSpPr>
+          <p:cNvPr id="13" name="Text 8"/>
+          <p:cNvSpPr txBox="1"/>
+          <p:nvPr/>
+        </p:nvSpPr>
+        <p:spPr>
+          <a:xfrm>
+            <a:off x="1508760" y="3017520"/>
+            <a:ext cx="4389120" cy="384048"/>
+          </a:xfrm>
+          <a:prstGeom prst="rect">
+            <a:avLst/>
+          </a:prstGeom>
+          <a:noFill/>
+          <a:ln/>
+        </p:spPr>
+        <p:txBody>
+          <a:bodyPr wrap="square" lIns="0" tIns="0" rIns="0" bIns="0" rtlCol="0" anchor="ctr"/>
+          <a:lstStyle/>
+          <a:p>
+            <a:pPr indent="0" marL="0">
+              <a:buNone/>
+            </a:pPr>
+            <a:r>
+              <a:rPr lang="en-US" sz="1800" b="1" dirty="0">
+                <a:solidFill>
+                  <a:schemeClr val="tx1"/>
+                </a:solidFill>
+              </a:rPr>
+              <a:t>Vorbelegte Werte</a:t>
+            </a:r>
+            <a:endParaRPr lang="en-US" sz="1800" dirty="0"/>
+          </a:p>
+        </p:txBody>
+      </p:sp>
+      <p:sp>
+        <p:nvSpPr>
+          <p:cNvPr id="14" name="Text 9"/>
+          <p:cNvSpPr txBox="1"/>
+          <p:nvPr/>
+        </p:nvSpPr>
+        <p:spPr>
+          <a:xfrm>
+            <a:off x="1508760" y="3429000"/>
+            <a:ext cx="4389120" cy="960120"/>
+          </a:xfrm>
+          <a:prstGeom prst="rect">
+            <a:avLst/>
+          </a:prstGeom>
+          <a:noFill/>
+          <a:ln/>
+        </p:spPr>
+        <p:txBody>
+          <a:bodyPr wrap="square" lIns="0" tIns="0" rIns="0" bIns="0" rtlCol="0" anchor="t"/>
+          <a:lstStyle/>
+          <a:p>
+            <a:pPr indent="0" marL="0">
+              <a:buNone/>
+            </a:pPr>
+            <a:r>
+              <a:rPr lang="en-US" sz="1400" dirty="0">
+                <a:solidFill>
+                  <a:schemeClr val="tx1"/>
+                </a:solidFill>
+              </a:rPr>
+              <a:t>Dialog-Parameter per Annotation vorbelegen – oft nur noch „Bestätigen“.</a:t>
+            </a:r>
+            <a:endParaRPr lang="en-US" sz="1400" dirty="0"/>
+          </a:p>
+        </p:txBody>
+      </p:sp>
+      <p:sp>
+        <p:nvSpPr>
+          <p:cNvPr id="15" name="Scanner &amp; Kamera Kreis"/>
+          <p:cNvSpPr/>
+          <p:nvPr/>
+        </p:nvSpPr>
+        <p:spPr>
+          <a:xfrm>
+            <a:off x="6217920" y="3063240"/>
+            <a:ext cx="731520" cy="731520"/>
+          </a:xfrm>
+          <a:prstGeom prst="ellipse">
+            <a:avLst/>
+          </a:prstGeom>
+          <a:solidFill>
+            <a:schemeClr val="accent1"/>
+          </a:solidFill>
+          <a:ln/>
+        </p:spPr>
+      </p:sp>
+      <p:pic>
+        <p:nvPicPr>
+          <p:cNvPr id="16" name="Scanner &amp; Kamera Icon" descr="Scanner &amp; Kamera">    </p:cNvPr>
+          <p:cNvPicPr>
+            <a:picLocks noChangeAspect="1"/>
+          </p:cNvPicPr>
+          <p:nvPr/>
+        </p:nvPicPr>
+        <p:blipFill>
+          <a:blip r:embed="rId4"/>
+          <a:stretch>
+            <a:fillRect/>
+          </a:stretch>
+        </p:blipFill>
+        <p:spPr>
+          <a:xfrm>
+            <a:off x="6400800" y="3246120"/>
+            <a:ext cx="365760" cy="365760"/>
+          </a:xfrm>
+          <a:prstGeom prst="rect">
+            <a:avLst/>
+          </a:prstGeom>
+        </p:spPr>
+      </p:pic>
+      <p:sp>
+        <p:nvSpPr>
+          <p:cNvPr id="17" name="Text 11"/>
+          <p:cNvSpPr txBox="1"/>
+          <p:nvPr/>
+        </p:nvSpPr>
+        <p:spPr>
+          <a:xfrm>
+            <a:off x="7178040" y="3017520"/>
+            <a:ext cx="4389120" cy="384048"/>
+          </a:xfrm>
+          <a:prstGeom prst="rect">
+            <a:avLst/>
+          </a:prstGeom>
+          <a:noFill/>
+          <a:ln/>
+        </p:spPr>
+        <p:txBody>
+          <a:bodyPr wrap="square" lIns="0" tIns="0" rIns="0" bIns="0" rtlCol="0" anchor="ctr"/>
+          <a:lstStyle/>
+          <a:p>
+            <a:pPr indent="0" marL="0">
+              <a:buNone/>
+            </a:pPr>
+            <a:r>
+              <a:rPr lang="en-US" sz="1800" b="1" dirty="0">
+                <a:solidFill>
+                  <a:schemeClr val="tx1"/>
+                </a:solidFill>
+              </a:rPr>
+              <a:t>Scanner &amp; Kamera</a:t>
+            </a:r>
+            <a:endParaRPr lang="en-US" sz="1800" dirty="0"/>
+          </a:p>
+        </p:txBody>
+      </p:sp>
+      <p:sp>
+        <p:nvSpPr>
+          <p:cNvPr id="18" name="Text 12"/>
+          <p:cNvSpPr txBox="1"/>
+          <p:nvPr/>
+        </p:nvSpPr>
+        <p:spPr>
+          <a:xfrm>
+            <a:off x="7178040" y="3429000"/>
+            <a:ext cx="4389120" cy="960120"/>
+          </a:xfrm>
+          <a:prstGeom prst="rect">
+            <a:avLst/>
+          </a:prstGeom>
+          <a:noFill/>
+          <a:ln/>
+        </p:spPr>
+        <p:txBody>
+          <a:bodyPr wrap="square" lIns="0" tIns="0" rIns="0" bIns="0" rtlCol="0" anchor="t"/>
+          <a:lstStyle/>
+          <a:p>
+            <a:pPr indent="0" marL="0">
+              <a:buNone/>
+            </a:pPr>
+            <a:r>
+              <a:rPr lang="en-US" sz="1400" dirty="0">
+                <a:solidFill>
+                  <a:schemeClr val="tx1"/>
+                </a:solidFill>
+              </a:rPr>
+              <a:t>Handscanner funktionieren in jedem Eingabefeld. Kamera-Scan über den UI5-Scanner-Baustein als kleine Erweiterung.</a:t>
+            </a:r>
+            <a:endParaRPr lang="en-US" sz="1400" dirty="0"/>
+          </a:p>
+        </p:txBody>
+      </p:sp>
+      <p:sp>
+        <p:nvSpPr>
+          <p:cNvPr id="19" name="Massenbearbeitung Kreis"/>
+          <p:cNvSpPr/>
+          <p:nvPr/>
+        </p:nvSpPr>
+        <p:spPr>
+          <a:xfrm>
+            <a:off x="548640" y="4663440"/>
+            <a:ext cx="731520" cy="731520"/>
+          </a:xfrm>
+          <a:prstGeom prst="ellipse">
+            <a:avLst/>
+          </a:prstGeom>
+          <a:solidFill>
+            <a:schemeClr val="accent1"/>
+          </a:solidFill>
+          <a:ln/>
+        </p:spPr>
+      </p:sp>
+      <p:pic>
+        <p:nvPicPr>
+          <p:cNvPr id="20" name="Massenbearbeitung Icon" descr="Massenbearbeitung">    </p:cNvPr>
+          <p:cNvPicPr>
+            <a:picLocks noChangeAspect="1"/>
+          </p:cNvPicPr>
+          <p:nvPr/>
+        </p:nvPicPr>
+        <p:blipFill>
+          <a:blip r:embed="rId5"/>
+          <a:stretch>
+            <a:fillRect/>
+          </a:stretch>
+        </p:blipFill>
+        <p:spPr>
+          <a:xfrm>
+            <a:off x="731520" y="4846320"/>
+            <a:ext cx="365760" cy="365760"/>
+          </a:xfrm>
+          <a:prstGeom prst="rect">
+            <a:avLst/>
+          </a:prstGeom>
+        </p:spPr>
+      </p:pic>
+      <p:sp>
+        <p:nvSpPr>
+          <p:cNvPr id="21" name="Text 14"/>
+          <p:cNvSpPr txBox="1"/>
+          <p:nvPr/>
+        </p:nvSpPr>
+        <p:spPr>
+          <a:xfrm>
+            <a:off x="1508760" y="4617720"/>
+            <a:ext cx="4389120" cy="384048"/>
+          </a:xfrm>
+          <a:prstGeom prst="rect">
+            <a:avLst/>
+          </a:prstGeom>
+          <a:noFill/>
+          <a:ln/>
+        </p:spPr>
+        <p:txBody>
+          <a:bodyPr wrap="square" lIns="0" tIns="0" rIns="0" bIns="0" rtlCol="0" anchor="ctr"/>
+          <a:lstStyle/>
+          <a:p>
+            <a:pPr indent="0" marL="0">
+              <a:buNone/>
+            </a:pPr>
+            <a:r>
+              <a:rPr lang="en-US" sz="1800" b="1" dirty="0">
+                <a:solidFill>
+                  <a:schemeClr val="tx1"/>
+                </a:solidFill>
+              </a:rPr>
+              <a:t>Massenbearbeitung</a:t>
+            </a:r>
+            <a:endParaRPr lang="en-US" sz="1800" dirty="0"/>
+          </a:p>
+        </p:txBody>
+      </p:sp>
+      <p:sp>
+        <p:nvSpPr>
+          <p:cNvPr id="22" name="Text 15"/>
+          <p:cNvSpPr txBox="1"/>
+          <p:nvPr/>
+        </p:nvSpPr>
+        <p:spPr>
+          <a:xfrm>
+            <a:off x="1508760" y="5029200"/>
+            <a:ext cx="4389120" cy="960120"/>
+          </a:xfrm>
+          <a:prstGeom prst="rect">
+            <a:avLst/>
+          </a:prstGeom>
+          <a:noFill/>
+          <a:ln/>
+        </p:spPr>
+        <p:txBody>
+          <a:bodyPr wrap="square" lIns="0" tIns="0" rIns="0" bIns="0" rtlCol="0" anchor="t"/>
+          <a:lstStyle/>
+          <a:p>
+            <a:pPr indent="0" marL="0">
+              <a:buNone/>
+            </a:pPr>
+            <a:r>
+              <a:rPr lang="en-US" sz="1400" dirty="0">
+                <a:solidFill>
+                  <a:schemeClr val="tx1"/>
+                </a:solidFill>
+              </a:rPr>
+              <a:t>Mehrere Zeilen markieren und in einem Schritt ändern statt einzeln.</a:t>
+            </a:r>
+            <a:endParaRPr lang="en-US" sz="1400" dirty="0"/>
+          </a:p>
+        </p:txBody>
+      </p:sp>
+      <p:sp>
+        <p:nvSpPr>
+          <p:cNvPr id="23" name="Firmen-Theme Kreis"/>
+          <p:cNvSpPr/>
+          <p:nvPr/>
+        </p:nvSpPr>
+        <p:spPr>
+          <a:xfrm>
+            <a:off x="6217920" y="4663440"/>
+            <a:ext cx="731520" cy="731520"/>
+          </a:xfrm>
+          <a:prstGeom prst="ellipse">
+            <a:avLst/>
+          </a:prstGeom>
+          <a:solidFill>
+            <a:schemeClr val="accent1"/>
+          </a:solidFill>
+          <a:ln/>
+        </p:spPr>
+      </p:sp>
+      <p:pic>
+        <p:nvPicPr>
+          <p:cNvPr id="24" name="Firmen-Theme Icon" descr="Firmen-Theme">    </p:cNvPr>
+          <p:cNvPicPr>
+            <a:picLocks noChangeAspect="1"/>
+          </p:cNvPicPr>
+          <p:nvPr/>
+        </p:nvPicPr>
+        <p:blipFill>
+          <a:blip r:embed="rId6"/>
+          <a:stretch>
+            <a:fillRect/>
+          </a:stretch>
+        </p:blipFill>
+        <p:spPr>
+          <a:xfrm>
+            <a:off x="6400800" y="4846320"/>
+            <a:ext cx="365760" cy="365760"/>
+          </a:xfrm>
+          <a:prstGeom prst="rect">
+            <a:avLst/>
+          </a:prstGeom>
+        </p:spPr>
+      </p:pic>
+      <p:sp>
+        <p:nvSpPr>
+          <p:cNvPr id="25" name="Text 17"/>
+          <p:cNvSpPr txBox="1"/>
+          <p:nvPr/>
+        </p:nvSpPr>
+        <p:spPr>
+          <a:xfrm>
+            <a:off x="7178040" y="4617720"/>
+            <a:ext cx="4389120" cy="384048"/>
+          </a:xfrm>
+          <a:prstGeom prst="rect">
+            <a:avLst/>
+          </a:prstGeom>
+          <a:noFill/>
+          <a:ln/>
+        </p:spPr>
+        <p:txBody>
+          <a:bodyPr wrap="square" lIns="0" tIns="0" rIns="0" bIns="0" rtlCol="0" anchor="ctr"/>
+          <a:lstStyle/>
+          <a:p>
+            <a:pPr indent="0" marL="0">
+              <a:buNone/>
+            </a:pPr>
+            <a:r>
+              <a:rPr lang="en-US" sz="1800" b="1" dirty="0">
+                <a:solidFill>
+                  <a:schemeClr val="tx1"/>
+                </a:solidFill>
+              </a:rPr>
+              <a:t>Firmen-Theme</a:t>
+            </a:r>
+            <a:endParaRPr lang="en-US" sz="1800" dirty="0"/>
+          </a:p>
+        </p:txBody>
+      </p:sp>
+      <p:sp>
+        <p:nvSpPr>
+          <p:cNvPr id="26" name="Text 18"/>
+          <p:cNvSpPr txBox="1"/>
+          <p:nvPr/>
+        </p:nvSpPr>
+        <p:spPr>
+          <a:xfrm>
+            <a:off x="7178040" y="5029200"/>
+            <a:ext cx="4389120" cy="960120"/>
+          </a:xfrm>
+          <a:prstGeom prst="rect">
+            <a:avLst/>
+          </a:prstGeom>
+          <a:noFill/>
+          <a:ln/>
+        </p:spPr>
+        <p:txBody>
+          <a:bodyPr wrap="square" lIns="0" tIns="0" rIns="0" bIns="0" rtlCol="0" anchor="t"/>
+          <a:lstStyle/>
+          <a:p>
+            <a:pPr indent="0" marL="0">
+              <a:buNone/>
+            </a:pPr>
+            <a:r>
+              <a:rPr lang="en-US" sz="1400" dirty="0">
+                <a:solidFill>
+                  <a:schemeClr val="tx1"/>
+                </a:solidFill>
+              </a:rPr>
+              <a:t>Farben, Kontraste und Schriftgrößen zentral über den Theme Designer – für alle Apps.</a:t>
+            </a:r>
+            <a:endParaRPr lang="en-US" sz="1400" dirty="0"/>
+          </a:p>
+        </p:txBody>
+      </p:sp>
+      <p:sp>
+        <p:nvSpPr>
+          <p:cNvPr id="25" name="Slide Number Placeholder 0"/>
+          <p:cNvSpPr>
+            <a:spLocks noGrp="1"/>
+          </p:cNvSpPr>
+          <p:nvPr>
+            <p:ph type="sldNum" sz="quarter" idx="4294967295"/>
+          </p:nvPr>
+        </p:nvSpPr>
+        <p:spPr>
+          <a:xfrm>
+            <a:off x="11155680" y="6400800"/>
+            <a:ext cx="457200" cy="274320"/>
+          </a:xfrm>
+          <a:prstGeom prst="rect">
+            <a:avLst/>
+          </a:prstGeom>
+          <a:extLst>
+            <a:ext uri="{C572A759-6A51-4108-AA02-DFA0A04FC94B}">
+              <ma14:wrappingTextBoxFlag xmlns:ma14="http://schemas.microsoft.com/office/mac/drawingml/2011/main" val="0"/>
+            </a:ext>
+          </a:extLst>
+        </p:spPr>
+        <p:txBody>
+          <a:bodyPr/>
+          <a:lstStyle>
+            <a:lvl1pPr>
+              <a:defRPr sz="1000">
+                <a:solidFill>
+                  <a:schemeClr val="accent4"/>
+                </a:solidFill>
+              </a:defRPr>
+            </a:lvl1pPr>
+          </a:lstStyle>
+          <a:p>
+            <a:pPr algn="r"/>
+            <a:fld id="{F7021451-1387-4CA6-816F-3879F97B5CBC}" type="slidenum">
+              <a:rPr b="0" lang="en-US"/>
+              <a:t>12</a:t>
+            </a:fld>
+            <a:endParaRPr lang="en-US"/>
+          </a:p>
+        </p:txBody>
+      </p:sp>
+    </p:spTree>
+  </p:cSld>
+  <p:clrMapOvr>
+    <a:masterClrMapping/>
+  </p:clrMapOvr>
+</p:sld>
+</file>
+
+<file path=ppt/slides/slide13.xml><?xml version="1.0" encoding="utf-8"?>
+<p:sld xmlns:a="http://schemas.openxmlformats.org/drawingml/2006/main" xmlns:r="http://schemas.openxmlformats.org/officeDocument/2006/relationships" xmlns:p="http://schemas.openxmlformats.org/presentationml/2006/main">
+  <p:cSld name="Slide 13">
+    <p:spTree>
+      <p:nvGrpSpPr>
+        <p:cNvPr id="1" name=""/>
+        <p:cNvGrpSpPr/>
+        <p:nvPr/>
+      </p:nvGrpSpPr>
+      <p:grpSpPr>
+        <a:xfrm>
+          <a:off x="0" y="0"/>
+          <a:ext cx="0" cy="0"/>
+          <a:chOff x="0" y="0"/>
+          <a:chExt cx="0" cy="0"/>
+        </a:xfrm>
+      </p:grpSpPr>
+      <p:sp>
+        <p:nvSpPr>
+          <p:cNvPr id="2" name="Text 0"/>
+          <p:cNvSpPr/>
+          <p:nvPr>
+            <p:ph idx="100" type="title" hasCustomPrompt="1"/>
+          </p:nvPr>
+        </p:nvSpPr>
+        <p:spPr>
+          <a:xfrm>
+            <a:off x="548640" y="365760"/>
+            <a:ext cx="11064240" cy="822960"/>
+          </a:xfrm>
+          <a:prstGeom prst="rect">
+            <a:avLst/>
+          </a:prstGeom>
+          <a:noFill/>
+          <a:ln/>
+        </p:spPr>
+        <p:txBody>
+          <a:bodyPr wrap="square" lIns="0" tIns="0" rIns="0" bIns="0" rtlCol="0" anchor="ctr"/>
+          <a:lstStyle/>
+          <a:p>
+            <a:pPr algn="l" indent="0" marL="0">
+              <a:buNone/>
+            </a:pPr>
+            <a:r>
+              <a:rPr lang="en-US" sz="3400" b="1" dirty="0">
+                <a:solidFill>
+                  <a:schemeClr val="tx2"/>
+                </a:solidFill>
+              </a:rPr>
+              <a:t>Technische Grenzen – auf beiden Seiten</a:t>
+            </a:r>
+            <a:endParaRPr lang="en-US" sz="3400" dirty="0"/>
+          </a:p>
+        </p:txBody>
+      </p:sp>
+      <p:sp>
+        <p:nvSpPr>
+          <p:cNvPr id="3" name="Grenzen von Fiori Elements"/>
+          <p:cNvSpPr/>
+          <p:nvPr/>
+        </p:nvSpPr>
+        <p:spPr>
+          <a:xfrm>
+            <a:off x="548640" y="1371600"/>
+            <a:ext cx="5394960" cy="3291840"/>
+          </a:xfrm>
+          <a:prstGeom prst="roundRect">
+            <a:avLst>
+              <a:gd name="adj" fmla="val 3333"/>
+            </a:avLst>
+          </a:prstGeom>
+          <a:solidFill>
+            <a:schemeClr val="accent6"/>
+          </a:solidFill>
+          <a:ln/>
+        </p:spPr>
+      </p:sp>
+      <p:sp>
+        <p:nvSpPr>
+          <p:cNvPr id="4" name="Grenzen von Fiori Elements Kreis"/>
+          <p:cNvSpPr/>
+          <p:nvPr/>
+        </p:nvSpPr>
+        <p:spPr>
+          <a:xfrm>
+            <a:off x="822960" y="1600200"/>
+            <a:ext cx="685800" cy="685800"/>
+          </a:xfrm>
+          <a:prstGeom prst="ellipse">
+            <a:avLst/>
+          </a:prstGeom>
+          <a:solidFill>
+            <a:schemeClr val="accent1"/>
+          </a:solidFill>
+          <a:ln/>
+        </p:spPr>
+      </p:sp>
+      <p:pic>
+        <p:nvPicPr>
+          <p:cNvPr id="5" name="Grenzen von Fiori Elements Icon" descr="Grenzen von Fiori Elements">    </p:cNvPr>
+          <p:cNvPicPr>
+            <a:picLocks noChangeAspect="1"/>
+          </p:cNvPicPr>
+          <p:nvPr/>
+        </p:nvPicPr>
+        <p:blipFill>
+          <a:blip r:embed="rId1"/>
+          <a:stretch>
+            <a:fillRect/>
+          </a:stretch>
+        </p:blipFill>
+        <p:spPr>
+          <a:xfrm>
+            <a:off x="994410" y="1771650"/>
+            <a:ext cx="342900" cy="342900"/>
+          </a:xfrm>
+          <a:prstGeom prst="rect">
+            <a:avLst/>
+          </a:prstGeom>
+        </p:spPr>
+      </p:pic>
+      <p:sp>
+        <p:nvSpPr>
+          <p:cNvPr id="6" name="Text 3"/>
+          <p:cNvSpPr txBox="1"/>
+          <p:nvPr/>
+        </p:nvSpPr>
+        <p:spPr>
+          <a:xfrm>
+            <a:off x="1691640" y="1600200"/>
+            <a:ext cx="4023360" cy="685800"/>
+          </a:xfrm>
+          <a:prstGeom prst="rect">
+            <a:avLst/>
+          </a:prstGeom>
+          <a:noFill/>
+          <a:ln/>
+        </p:spPr>
+        <p:txBody>
+          <a:bodyPr wrap="square" lIns="0" tIns="0" rIns="0" bIns="0" rtlCol="0" anchor="ctr"/>
+          <a:lstStyle/>
+          <a:p>
+            <a:pPr indent="0" marL="0">
+              <a:buNone/>
+            </a:pPr>
+            <a:r>
+              <a:rPr lang="en-US" sz="2000" b="1" dirty="0">
+                <a:solidFill>
+                  <a:schemeClr val="accent1"/>
+                </a:solidFill>
+              </a:rPr>
+              <a:t>Grenzen von Fiori Elements</a:t>
+            </a:r>
+            <a:endParaRPr lang="en-US" sz="2000" dirty="0"/>
+          </a:p>
+        </p:txBody>
+      </p:sp>
+      <p:sp>
+        <p:nvSpPr>
+          <p:cNvPr id="7" name="Text 4"/>
+          <p:cNvSpPr txBox="1"/>
+          <p:nvPr/>
+        </p:nvSpPr>
+        <p:spPr>
+          <a:xfrm>
+            <a:off x="822960" y="2514600"/>
+            <a:ext cx="4846320" cy="2057400"/>
+          </a:xfrm>
+          <a:prstGeom prst="rect">
+            <a:avLst/>
+          </a:prstGeom>
+          <a:noFill/>
+          <a:ln/>
+        </p:spPr>
+        <p:txBody>
+          <a:bodyPr wrap="square" lIns="0" tIns="0" rIns="0" bIns="0" rtlCol="0" anchor="t"/>
+          <a:lstStyle/>
+          <a:p>
+            <a:pPr marL="342900" indent="-342900">
+              <a:spcAft>
+                <a:spcPts val="800"/>
+              </a:spcAft>
+              <a:buSzPct val="100000"/>
+              <a:buChar char="•"/>
+            </a:pPr>
+            <a:r>
+              <a:rPr lang="en-US" sz="1500" dirty="0">
+                <a:solidFill>
+                  <a:schemeClr val="tx1"/>
+                </a:solidFill>
+              </a:rPr>
+              <a:t>Layout folgt festen Floorplans – Buttons nicht frei platzierbar</a:t>
+            </a:r>
+            <a:endParaRPr lang="en-US" sz="1500" dirty="0"/>
+          </a:p>
+          <a:p>
+            <a:pPr marL="342900" indent="-342900">
+              <a:spcAft>
+                <a:spcPts val="800"/>
+              </a:spcAft>
+              <a:buSzPct val="100000"/>
+              <a:buChar char="•"/>
+            </a:pPr>
+            <a:r>
+              <a:rPr lang="en-US" sz="1500" dirty="0">
+                <a:solidFill>
+                  <a:schemeClr val="tx1"/>
+                </a:solidFill>
+              </a:rPr>
+              <a:t>Kein eigenes CSS vorgesehen, Aussehen nur über Theme</a:t>
+            </a:r>
+            <a:endParaRPr lang="en-US" sz="1500" dirty="0"/>
+          </a:p>
+          <a:p>
+            <a:pPr marL="342900" indent="-342900">
+              <a:spcAft>
+                <a:spcPts val="800"/>
+              </a:spcAft>
+              <a:buSzPct val="100000"/>
+              <a:buChar char="•"/>
+            </a:pPr>
+            <a:r>
+              <a:rPr lang="en-US" sz="1500" dirty="0">
+                <a:solidFill>
+                  <a:schemeClr val="tx1"/>
+                </a:solidFill>
+              </a:rPr>
+              <a:t>Kamera-Scan, Fokus-Sprung und Auto-Bestätigen brauchen eine Erweiterung (UI5-Scanner-Baustein in eigenem Abschnitt)</a:t>
+            </a:r>
+            <a:endParaRPr lang="en-US" sz="1500" dirty="0"/>
+          </a:p>
+          <a:p>
+            <a:pPr marL="342900" indent="-342900">
+              <a:spcAft>
+                <a:spcPts val="800"/>
+              </a:spcAft>
+              <a:buSzPct val="100000"/>
+              <a:buChar char="•"/>
+            </a:pPr>
+            <a:r>
+              <a:rPr lang="en-US" sz="1500" dirty="0">
+                <a:solidFill>
+                  <a:schemeClr val="tx1"/>
+                </a:solidFill>
+              </a:rPr>
+              <a:t>Kein Offline-Betrieb</a:t>
+            </a:r>
+            <a:endParaRPr lang="en-US" sz="1500" dirty="0"/>
+          </a:p>
+        </p:txBody>
+      </p:sp>
+      <p:sp>
+        <p:nvSpPr>
+          <p:cNvPr id="8" name="Grenzen von Freestyle"/>
+          <p:cNvSpPr/>
+          <p:nvPr/>
+        </p:nvSpPr>
+        <p:spPr>
+          <a:xfrm>
+            <a:off x="6217920" y="1371600"/>
+            <a:ext cx="5394960" cy="3291840"/>
+          </a:xfrm>
+          <a:prstGeom prst="roundRect">
+            <a:avLst>
+              <a:gd name="adj" fmla="val 3333"/>
+            </a:avLst>
+          </a:prstGeom>
+          <a:solidFill>
+            <a:schemeClr val="accent5"/>
+          </a:solidFill>
+          <a:ln/>
+        </p:spPr>
+      </p:sp>
+      <p:sp>
+        <p:nvSpPr>
+          <p:cNvPr id="9" name="Grenzen von Freestyle Kreis"/>
+          <p:cNvSpPr/>
+          <p:nvPr/>
+        </p:nvSpPr>
+        <p:spPr>
+          <a:xfrm>
+            <a:off x="6492240" y="1600200"/>
+            <a:ext cx="685800" cy="685800"/>
+          </a:xfrm>
+          <a:prstGeom prst="ellipse">
+            <a:avLst/>
+          </a:prstGeom>
+          <a:solidFill>
+            <a:schemeClr val="accent2"/>
+          </a:solidFill>
+          <a:ln/>
+        </p:spPr>
+      </p:sp>
+      <p:pic>
+        <p:nvPicPr>
+          <p:cNvPr id="10" name="Grenzen von Freestyle Icon" descr="Grenzen von Freestyle">    </p:cNvPr>
+          <p:cNvPicPr>
+            <a:picLocks noChangeAspect="1"/>
+          </p:cNvPicPr>
+          <p:nvPr/>
+        </p:nvPicPr>
+        <p:blipFill>
+          <a:blip r:embed="rId2"/>
+          <a:stretch>
+            <a:fillRect/>
+          </a:stretch>
+        </p:blipFill>
+        <p:spPr>
+          <a:xfrm>
+            <a:off x="6663690" y="1771650"/>
+            <a:ext cx="342900" cy="342900"/>
+          </a:xfrm>
+          <a:prstGeom prst="rect">
+            <a:avLst/>
+          </a:prstGeom>
+        </p:spPr>
+      </p:pic>
+      <p:sp>
+        <p:nvSpPr>
+          <p:cNvPr id="11" name="Text 7"/>
+          <p:cNvSpPr txBox="1"/>
+          <p:nvPr/>
+        </p:nvSpPr>
+        <p:spPr>
+          <a:xfrm>
+            <a:off x="7360920" y="1600200"/>
+            <a:ext cx="4023360" cy="685800"/>
+          </a:xfrm>
+          <a:prstGeom prst="rect">
+            <a:avLst/>
+          </a:prstGeom>
+          <a:noFill/>
+          <a:ln/>
+        </p:spPr>
+        <p:txBody>
+          <a:bodyPr wrap="square" lIns="0" tIns="0" rIns="0" bIns="0" rtlCol="0" anchor="ctr"/>
+          <a:lstStyle/>
+          <a:p>
+            <a:pPr indent="0" marL="0">
+              <a:buNone/>
+            </a:pPr>
+            <a:r>
+              <a:rPr lang="en-US" sz="2000" b="1" dirty="0">
+                <a:solidFill>
+                  <a:schemeClr val="accent2"/>
+                </a:solidFill>
+              </a:rPr>
+              <a:t>Grenzen von Freestyle</a:t>
+            </a:r>
+            <a:endParaRPr lang="en-US" sz="2000" dirty="0"/>
+          </a:p>
+        </p:txBody>
+      </p:sp>
+      <p:sp>
+        <p:nvSpPr>
+          <p:cNvPr id="12" name="Text 8"/>
+          <p:cNvSpPr txBox="1"/>
+          <p:nvPr/>
+        </p:nvSpPr>
+        <p:spPr>
+          <a:xfrm>
+            <a:off x="6492240" y="2514600"/>
+            <a:ext cx="4846320" cy="2057400"/>
+          </a:xfrm>
+          <a:prstGeom prst="rect">
+            <a:avLst/>
+          </a:prstGeom>
+          <a:noFill/>
+          <a:ln/>
+        </p:spPr>
+        <p:txBody>
+          <a:bodyPr wrap="square" lIns="0" tIns="0" rIns="0" bIns="0" rtlCol="0" anchor="t"/>
+          <a:lstStyle/>
+          <a:p>
+            <a:pPr marL="342900" indent="-342900">
+              <a:spcAft>
+                <a:spcPts val="800"/>
+              </a:spcAft>
+              <a:buSzPct val="100000"/>
+              <a:buChar char="•"/>
+            </a:pPr>
+            <a:r>
+              <a:rPr lang="en-US" sz="1500" dirty="0">
+                <a:solidFill>
+                  <a:schemeClr val="tx1"/>
+                </a:solidFill>
+              </a:rPr>
+              <a:t>Eigenes CSS greift in interne UI5-Strukturen ein – kein stabiles API, kann bei jedem Upgrade brechen</a:t>
+            </a:r>
+            <a:endParaRPr lang="en-US" sz="1500" dirty="0"/>
+          </a:p>
+          <a:p>
+            <a:pPr marL="342900" indent="-342900">
+              <a:spcAft>
+                <a:spcPts val="800"/>
+              </a:spcAft>
+              <a:buSzPct val="100000"/>
+              <a:buChar char="•"/>
+            </a:pPr>
+            <a:r>
+              <a:rPr lang="en-US" sz="1500" dirty="0">
+                <a:solidFill>
+                  <a:schemeClr val="tx1"/>
+                </a:solidFill>
+              </a:rPr>
+              <a:t>Jedes Gerät und jede Bildschirmgröße selbst testen</a:t>
+            </a:r>
+            <a:endParaRPr lang="en-US" sz="1500" dirty="0"/>
+          </a:p>
+          <a:p>
+            <a:pPr marL="342900" indent="-342900">
+              <a:spcAft>
+                <a:spcPts val="800"/>
+              </a:spcAft>
+              <a:buSzPct val="100000"/>
+              <a:buChar char="•"/>
+            </a:pPr>
+            <a:r>
+              <a:rPr lang="en-US" sz="1500" dirty="0">
+                <a:solidFill>
+                  <a:schemeClr val="tx1"/>
+                </a:solidFill>
+              </a:rPr>
+              <a:t>Jeder optimierte Ablauf ist eigener Code mit eigener Wartung</a:t>
+            </a:r>
+            <a:endParaRPr lang="en-US" sz="1500" dirty="0"/>
+          </a:p>
+          <a:p>
+            <a:pPr marL="342900" indent="-342900">
+              <a:spcAft>
+                <a:spcPts val="800"/>
+              </a:spcAft>
+              <a:buSzPct val="100000"/>
+              <a:buChar char="•"/>
+            </a:pPr>
+            <a:r>
+              <a:rPr lang="en-US" sz="1500" dirty="0">
+                <a:solidFill>
+                  <a:schemeClr val="tx1"/>
+                </a:solidFill>
+              </a:rPr>
+              <a:t>Kein Offline-Betrieb ohne erheblichen Zusatzaufwand</a:t>
+            </a:r>
+            <a:endParaRPr lang="en-US" sz="1500" dirty="0"/>
+          </a:p>
+        </p:txBody>
+      </p:sp>
+      <p:sp>
+        <p:nvSpPr>
+          <p:cNvPr id="13" name="Text 9"/>
+          <p:cNvSpPr txBox="1"/>
+          <p:nvPr/>
+        </p:nvSpPr>
+        <p:spPr>
+          <a:xfrm>
+            <a:off x="548640" y="4754880"/>
+            <a:ext cx="11064240" cy="365760"/>
+          </a:xfrm>
+          <a:prstGeom prst="rect">
+            <a:avLst/>
+          </a:prstGeom>
+          <a:noFill/>
+          <a:ln/>
+        </p:spPr>
+        <p:txBody>
+          <a:bodyPr wrap="square" lIns="0" tIns="0" rIns="0" bIns="0" rtlCol="0" anchor="ctr"/>
+          <a:lstStyle/>
+          <a:p>
+            <a:pPr indent="0" marL="0">
+              <a:buNone/>
+            </a:pPr>
+            <a:r>
+              <a:rPr lang="en-US" sz="1400" b="1" dirty="0">
+                <a:solidFill>
+                  <a:schemeClr val="tx1"/>
+                </a:solidFill>
+              </a:rPr>
+              <a:t>Für beide gilt: </a:t>
+            </a:r>
+            <a:pPr indent="0" marL="0">
+              <a:buNone/>
+            </a:pPr>
+            <a:r>
+              <a:rPr lang="en-US" sz="1400" dirty="0">
+                <a:solidFill>
+                  <a:schemeClr val="tx1"/>
+                </a:solidFill>
+              </a:rPr>
+              <a:t>Kamera-Zugriff im Browser nur über HTTPS. Bei hohen Scan-Mengen ist ein Handscanner deutlich schneller als die Kamera.</a:t>
+            </a:r>
+            <a:endParaRPr lang="en-US" sz="1400" dirty="0"/>
+          </a:p>
+        </p:txBody>
+      </p:sp>
+      <p:sp>
+        <p:nvSpPr>
+          <p:cNvPr id="14" name="Fazit CSS"/>
+          <p:cNvSpPr/>
+          <p:nvPr/>
+        </p:nvSpPr>
+        <p:spPr>
+          <a:xfrm>
+            <a:off x="548640" y="5257800"/>
+            <a:ext cx="11064240" cy="914400"/>
+          </a:xfrm>
+          <a:prstGeom prst="roundRect">
+            <a:avLst>
+              <a:gd name="adj" fmla="val 10000"/>
+            </a:avLst>
+          </a:prstGeom>
+          <a:solidFill>
+            <a:schemeClr val="tx2"/>
+          </a:solidFill>
+          <a:ln/>
+        </p:spPr>
+      </p:sp>
+      <p:sp>
+        <p:nvSpPr>
+          <p:cNvPr id="15" name="Text 11"/>
+          <p:cNvSpPr txBox="1"/>
+          <p:nvPr/>
+        </p:nvSpPr>
+        <p:spPr>
+          <a:xfrm>
+            <a:off x="777240" y="5257800"/>
+            <a:ext cx="10607040" cy="914400"/>
+          </a:xfrm>
+          <a:prstGeom prst="rect">
+            <a:avLst/>
+          </a:prstGeom>
+          <a:noFill/>
+          <a:ln/>
+        </p:spPr>
+        <p:txBody>
+          <a:bodyPr wrap="square" lIns="0" tIns="0" rIns="0" bIns="0" rtlCol="0" anchor="ctr"/>
+          <a:lstStyle/>
+          <a:p>
+            <a:pPr indent="0" marL="0">
+              <a:buNone/>
+            </a:pPr>
+            <a:r>
+              <a:rPr lang="en-US" sz="1800" b="1" dirty="0">
+                <a:solidFill>
+                  <a:schemeClr val="bg1"/>
+                </a:solidFill>
+              </a:rPr>
+              <a:t>„Wir passen das per CSS an“ ist kein Einmalaufwand – es ist eine Wette darauf, dass SAP die internen Strukturen nie ändert.</a:t>
+            </a:r>
+            <a:endParaRPr lang="en-US" sz="1800" dirty="0"/>
+          </a:p>
+        </p:txBody>
+      </p:sp>
+      <p:sp>
+        <p:nvSpPr>
+          <p:cNvPr id="25" name="Slide Number Placeholder 0"/>
+          <p:cNvSpPr>
+            <a:spLocks noGrp="1"/>
+          </p:cNvSpPr>
+          <p:nvPr>
+            <p:ph type="sldNum" sz="quarter" idx="4294967295"/>
+          </p:nvPr>
+        </p:nvSpPr>
+        <p:spPr>
+          <a:xfrm>
+            <a:off x="11155680" y="6400800"/>
+            <a:ext cx="457200" cy="274320"/>
+          </a:xfrm>
+          <a:prstGeom prst="rect">
+            <a:avLst/>
+          </a:prstGeom>
+          <a:extLst>
+            <a:ext uri="{C572A759-6A51-4108-AA02-DFA0A04FC94B}">
+              <ma14:wrappingTextBoxFlag xmlns:ma14="http://schemas.microsoft.com/office/mac/drawingml/2011/main" val="0"/>
+            </a:ext>
+          </a:extLst>
+        </p:spPr>
+        <p:txBody>
+          <a:bodyPr/>
+          <a:lstStyle>
+            <a:lvl1pPr>
+              <a:defRPr sz="1000">
+                <a:solidFill>
+                  <a:schemeClr val="accent4"/>
+                </a:solidFill>
+              </a:defRPr>
+            </a:lvl1pPr>
+          </a:lstStyle>
+          <a:p>
+            <a:pPr algn="r"/>
+            <a:fld id="{F7021451-1387-4CA6-816F-3879F97B5CBC}" type="slidenum">
+              <a:rPr b="0" lang="en-US"/>
+              <a:t>13</a:t>
+            </a:fld>
+            <a:endParaRPr lang="en-US"/>
+          </a:p>
+        </p:txBody>
+      </p:sp>
+    </p:spTree>
+  </p:cSld>
+  <p:clrMapOvr>
+    <a:masterClrMapping/>
+  </p:clrMapOvr>
+</p:sld>
+</file>
+
+<file path=ppt/slides/slide14.xml><?xml version="1.0" encoding="utf-8"?>
+<p:sld xmlns:a="http://schemas.openxmlformats.org/drawingml/2006/main" xmlns:r="http://schemas.openxmlformats.org/officeDocument/2006/relationships" xmlns:p="http://schemas.openxmlformats.org/presentationml/2006/main">
+  <p:cSld name="Slide 14">
+    <p:spTree>
+      <p:nvGrpSpPr>
+        <p:cNvPr id="1" name=""/>
+        <p:cNvGrpSpPr/>
+        <p:nvPr/>
+      </p:nvGrpSpPr>
+      <p:grpSpPr>
+        <a:xfrm>
+          <a:off x="0" y="0"/>
+          <a:ext cx="0" cy="0"/>
+          <a:chOff x="0" y="0"/>
+          <a:chExt cx="0" cy="0"/>
+        </a:xfrm>
+      </p:grpSpPr>
+      <p:sp>
+        <p:nvSpPr>
+          <p:cNvPr id="2" name="Text 0"/>
+          <p:cNvSpPr/>
+          <p:nvPr>
+            <p:ph idx="100" type="title" hasCustomPrompt="1"/>
+          </p:nvPr>
+        </p:nvSpPr>
+        <p:spPr>
+          <a:xfrm>
+            <a:off x="548640" y="365760"/>
+            <a:ext cx="11064240" cy="822960"/>
+          </a:xfrm>
+          <a:prstGeom prst="rect">
+            <a:avLst/>
+          </a:prstGeom>
+          <a:noFill/>
+          <a:ln/>
+        </p:spPr>
+        <p:txBody>
+          <a:bodyPr wrap="square" lIns="0" tIns="0" rIns="0" bIns="0" rtlCol="0" anchor="ctr"/>
+          <a:lstStyle/>
+          <a:p>
+            <a:pPr algn="l" indent="0" marL="0">
+              <a:buNone/>
+            </a:pPr>
+            <a:r>
+              <a:rPr lang="en-US" sz="3400" b="1" dirty="0">
+                <a:solidFill>
+                  <a:schemeClr val="tx2"/>
+                </a:solidFill>
+              </a:rPr>
+              <a:t>Entscheidungshilfe für den Shopfloor</a:t>
+            </a:r>
+            <a:endParaRPr lang="en-US" sz="3400" dirty="0"/>
+          </a:p>
+        </p:txBody>
+      </p:sp>
+      <p:graphicFrame>
+        <p:nvGraphicFramePr>
+          <p:cNvPr id="15" name="Tabelle Shopfloor"/>
+          <p:cNvGraphicFramePr>
+            <a:graphicFrameLocks noGrp="1"/>
+          </p:cNvGraphicFramePr>
+          <p:nvPr>
+            <p:extLst>
+              <p:ext uri="{D42A27DB-BD31-4B8C-83A1-F6EECF244321}">
+                <p14:modId xmlns:p14="http://schemas.microsoft.com/office/powerpoint/2010/main" val="1579011935"/>
+              </p:ext>
+            </p:extLst>
+          </p:nvPr>
+        </p:nvGraphicFramePr>
+        <p:xfrm>
+          <a:off x="548640" y="1417320"/>
+          <a:ext cx="11064240" cy="914400"/>
+        </p:xfrm>
+        <a:graphic>
+          <a:graphicData uri="http://schemas.openxmlformats.org/drawingml/2006/table">
+            <a:tbl>
+              <a:tblPr/>
+              <a:tblGrid>
+                <a:gridCol w="3017520"/>
+                <a:gridCol w="4206240"/>
+                <a:gridCol w="3840480"/>
+              </a:tblGrid>
+              <a:tr h="566928">
+                <a:tc>
+                  <a:txBody>
+                    <a:bodyPr/>
+                    <a:lstStyle/>
+                    <a:p>
+                      <a:pPr indent="0" marL="0">
+                        <a:buNone/>
+                      </a:pPr>
+                      <a:r>
+                        <a:rPr lang="en-US" sz="1500" b="1" dirty="0">
+                          <a:solidFill>
+                            <a:srgbClr val="FFFFFF"/>
+                          </a:solidFill>
+                          <a:latin typeface="Calibri" pitchFamily="34" charset="0"/>
+                          <a:ea typeface="Calibri" pitchFamily="34" charset="-122"/>
+                          <a:cs typeface="Calibri" pitchFamily="34" charset="-120"/>
+                        </a:rPr>
+                        <a:t>Szenario</a:t>
+                      </a:r>
+                      <a:endParaRPr lang="en-US" sz="1500" dirty="0">
+                        <a:latin typeface="Calibri" charset="0"/>
+                        <a:ea typeface="Calibri" charset="0"/>
+                        <a:cs typeface="Calibri" charset="0"/>
+                      </a:endParaRPr>
+                    </a:p>
+                  </a:txBody>
+                  <a:tcPr marL="91440" marR="91440" marT="45720" marB="45720" anchor="ctr">
+                    <a:lnL w="9525" cap="flat" cmpd="sng" algn="ctr">
+                      <a:solidFill>
+                        <a:srgbClr val="D5DDE0"/>
+                      </a:solidFill>
+                      <a:prstDash val="solid"/>
+                      <a:round/>
+                      <a:headEnd type="none" w="med" len="med"/>
+                      <a:tailEnd type="none" w="med" len="med"/>
+                    </a:lnL>
+                    <a:lnR w="9525" cap="flat" cmpd="sng" algn="ctr">
+                      <a:solidFill>
+                        <a:srgbClr val="D5DDE0"/>
+                      </a:solidFill>
+                      <a:prstDash val="solid"/>
+                      <a:round/>
+                      <a:headEnd type="none" w="med" len="med"/>
+                      <a:tailEnd type="none" w="med" len="med"/>
+                    </a:lnR>
+                    <a:lnT w="9525" cap="flat" cmpd="sng" algn="ctr">
+                      <a:solidFill>
+                        <a:srgbClr val="D5DDE0"/>
+                      </a:solidFill>
+                      <a:prstDash val="solid"/>
+                      <a:round/>
+                      <a:headEnd type="none" w="med" len="med"/>
+                      <a:tailEnd type="none" w="med" len="med"/>
+                    </a:lnT>
+                    <a:lnB w="9525" cap="flat" cmpd="sng" algn="ctr">
+                      <a:solidFill>
+                        <a:srgbClr val="D5DDE0"/>
+                      </a:solidFill>
+                      <a:prstDash val="solid"/>
+                      <a:round/>
+                      <a:headEnd type="none" w="med" len="med"/>
+                      <a:tailEnd type="none" w="med" len="med"/>
+                    </a:lnB>
+                    <a:solidFill>
+                      <a:srgbClr val="0B3C49"/>
+                    </a:solidFill>
+                  </a:tcPr>
+                </a:tc>
+                <a:tc>
+                  <a:txBody>
+                    <a:bodyPr/>
+                    <a:lstStyle/>
+                    <a:p>
+                      <a:pPr indent="0" marL="0">
+                        <a:buNone/>
+                      </a:pPr>
+                      <a:r>
+                        <a:rPr lang="en-US" sz="1500" b="1" dirty="0">
+                          <a:solidFill>
+                            <a:srgbClr val="FFFFFF"/>
+                          </a:solidFill>
+                          <a:latin typeface="Calibri" pitchFamily="34" charset="0"/>
+                          <a:ea typeface="Calibri" pitchFamily="34" charset="-122"/>
+                          <a:cs typeface="Calibri" pitchFamily="34" charset="-120"/>
+                        </a:rPr>
+                        <a:t>Beispiel</a:t>
+                      </a:r>
+                      <a:endParaRPr lang="en-US" sz="1500" dirty="0">
+                        <a:latin typeface="Calibri" charset="0"/>
+                        <a:ea typeface="Calibri" charset="0"/>
+                        <a:cs typeface="Calibri" charset="0"/>
+                      </a:endParaRPr>
+                    </a:p>
+                  </a:txBody>
+                  <a:tcPr marL="91440" marR="91440" marT="45720" marB="45720" anchor="ctr">
+                    <a:lnL w="9525" cap="flat" cmpd="sng" algn="ctr">
+                      <a:solidFill>
+                        <a:srgbClr val="D5DDE0"/>
+                      </a:solidFill>
+                      <a:prstDash val="solid"/>
+                      <a:round/>
+                      <a:headEnd type="none" w="med" len="med"/>
+                      <a:tailEnd type="none" w="med" len="med"/>
+                    </a:lnL>
+                    <a:lnR w="9525" cap="flat" cmpd="sng" algn="ctr">
+                      <a:solidFill>
+                        <a:srgbClr val="D5DDE0"/>
+                      </a:solidFill>
+                      <a:prstDash val="solid"/>
+                      <a:round/>
+                      <a:headEnd type="none" w="med" len="med"/>
+                      <a:tailEnd type="none" w="med" len="med"/>
+                    </a:lnR>
+                    <a:lnT w="9525" cap="flat" cmpd="sng" algn="ctr">
+                      <a:solidFill>
+                        <a:srgbClr val="D5DDE0"/>
+                      </a:solidFill>
+                      <a:prstDash val="solid"/>
+                      <a:round/>
+                      <a:headEnd type="none" w="med" len="med"/>
+                      <a:tailEnd type="none" w="med" len="med"/>
+                    </a:lnT>
+                    <a:lnB w="9525" cap="flat" cmpd="sng" algn="ctr">
+                      <a:solidFill>
+                        <a:srgbClr val="D5DDE0"/>
+                      </a:solidFill>
+                      <a:prstDash val="solid"/>
+                      <a:round/>
+                      <a:headEnd type="none" w="med" len="med"/>
+                      <a:tailEnd type="none" w="med" len="med"/>
+                    </a:lnB>
+                    <a:solidFill>
+                      <a:srgbClr val="0B3C49"/>
+                    </a:solidFill>
+                  </a:tcPr>
+                </a:tc>
+                <a:tc>
+                  <a:txBody>
+                    <a:bodyPr/>
+                    <a:lstStyle/>
+                    <a:p>
+                      <a:pPr indent="0" marL="0">
+                        <a:buNone/>
+                      </a:pPr>
+                      <a:r>
+                        <a:rPr lang="en-US" sz="1500" b="1" dirty="0">
+                          <a:solidFill>
+                            <a:srgbClr val="FFFFFF"/>
+                          </a:solidFill>
+                          <a:latin typeface="Calibri" pitchFamily="34" charset="0"/>
+                          <a:ea typeface="Calibri" pitchFamily="34" charset="-122"/>
+                          <a:cs typeface="Calibri" pitchFamily="34" charset="-120"/>
+                        </a:rPr>
+                        <a:t>Empfehlung</a:t>
+                      </a:r>
+                      <a:endParaRPr lang="en-US" sz="1500" dirty="0">
+                        <a:latin typeface="Calibri" charset="0"/>
+                        <a:ea typeface="Calibri" charset="0"/>
+                        <a:cs typeface="Calibri" charset="0"/>
+                      </a:endParaRPr>
+                    </a:p>
+                  </a:txBody>
+                  <a:tcPr marL="91440" marR="91440" marT="45720" marB="45720" anchor="ctr">
+                    <a:lnL w="9525" cap="flat" cmpd="sng" algn="ctr">
+                      <a:solidFill>
+                        <a:srgbClr val="D5DDE0"/>
+                      </a:solidFill>
+                      <a:prstDash val="solid"/>
+                      <a:round/>
+                      <a:headEnd type="none" w="med" len="med"/>
+                      <a:tailEnd type="none" w="med" len="med"/>
+                    </a:lnL>
+                    <a:lnR w="9525" cap="flat" cmpd="sng" algn="ctr">
+                      <a:solidFill>
+                        <a:srgbClr val="D5DDE0"/>
+                      </a:solidFill>
+                      <a:prstDash val="solid"/>
+                      <a:round/>
+                      <a:headEnd type="none" w="med" len="med"/>
+                      <a:tailEnd type="none" w="med" len="med"/>
+                    </a:lnR>
+                    <a:lnT w="9525" cap="flat" cmpd="sng" algn="ctr">
+                      <a:solidFill>
+                        <a:srgbClr val="D5DDE0"/>
+                      </a:solidFill>
+                      <a:prstDash val="solid"/>
+                      <a:round/>
+                      <a:headEnd type="none" w="med" len="med"/>
+                      <a:tailEnd type="none" w="med" len="med"/>
+                    </a:lnT>
+                    <a:lnB w="9525" cap="flat" cmpd="sng" algn="ctr">
+                      <a:solidFill>
+                        <a:srgbClr val="D5DDE0"/>
+                      </a:solidFill>
+                      <a:prstDash val="solid"/>
+                      <a:round/>
+                      <a:headEnd type="none" w="med" len="med"/>
+                      <a:tailEnd type="none" w="med" len="med"/>
+                    </a:lnB>
+                    <a:solidFill>
+                      <a:srgbClr val="0B3C49"/>
+                    </a:solidFill>
+                  </a:tcPr>
+                </a:tc>
+              </a:tr>
+              <a:tr h="566928">
+                <a:tc>
+                  <a:txBody>
+                    <a:bodyPr/>
+                    <a:lstStyle/>
+                    <a:p>
+                      <a:pPr indent="0" marL="0">
+                        <a:buNone/>
+                      </a:pPr>
+                      <a:r>
+                        <a:rPr lang="en-US" sz="1500" b="1" dirty="0">
+                          <a:solidFill>
+                            <a:srgbClr val="1B2B34"/>
+                          </a:solidFill>
+                          <a:latin typeface="Calibri" pitchFamily="34" charset="0"/>
+                          <a:ea typeface="Calibri" pitchFamily="34" charset="-122"/>
+                          <a:cs typeface="Calibri" pitchFamily="34" charset="-120"/>
+                        </a:rPr>
+                        <a:t>Übersicht &amp; Disposition</a:t>
+                      </a:r>
+                      <a:endParaRPr lang="en-US" sz="1500" dirty="0">
+                        <a:latin typeface="Calibri" charset="0"/>
+                        <a:ea typeface="Calibri" charset="0"/>
+                        <a:cs typeface="Calibri" charset="0"/>
+                      </a:endParaRPr>
+                    </a:p>
+                  </a:txBody>
+                  <a:tcPr marL="91440" marR="91440" marT="45720" marB="45720" anchor="ctr">
+                    <a:lnL w="9525" cap="flat" cmpd="sng" algn="ctr">
+                      <a:solidFill>
+                        <a:srgbClr val="D5DDE0"/>
+                      </a:solidFill>
+                      <a:prstDash val="solid"/>
+                      <a:round/>
+                      <a:headEnd type="none" w="med" len="med"/>
+                      <a:tailEnd type="none" w="med" len="med"/>
+                    </a:lnL>
+                    <a:lnR w="9525" cap="flat" cmpd="sng" algn="ctr">
+                      <a:solidFill>
+                        <a:srgbClr val="D5DDE0"/>
+                      </a:solidFill>
+                      <a:prstDash val="solid"/>
+                      <a:round/>
+                      <a:headEnd type="none" w="med" len="med"/>
+                      <a:tailEnd type="none" w="med" len="med"/>
+                    </a:lnR>
+                    <a:lnT w="9525" cap="flat" cmpd="sng" algn="ctr">
+                      <a:solidFill>
+                        <a:srgbClr val="D5DDE0"/>
+                      </a:solidFill>
+                      <a:prstDash val="solid"/>
+                      <a:round/>
+                      <a:headEnd type="none" w="med" len="med"/>
+                      <a:tailEnd type="none" w="med" len="med"/>
+                    </a:lnT>
+                    <a:lnB w="9525" cap="flat" cmpd="sng" algn="ctr">
+                      <a:solidFill>
+                        <a:srgbClr val="D5DDE0"/>
+                      </a:solidFill>
+                      <a:prstDash val="solid"/>
+                      <a:round/>
+                      <a:headEnd type="none" w="med" len="med"/>
+                      <a:tailEnd type="none" w="med" len="med"/>
+                    </a:lnB>
+                    <a:solidFill>
+                      <a:srgbClr val="FFFFFF"/>
+                    </a:solidFill>
+                  </a:tcPr>
+                </a:tc>
+                <a:tc>
+                  <a:txBody>
+                    <a:bodyPr/>
+                    <a:lstStyle/>
+                    <a:p>
+                      <a:pPr indent="0" marL="0">
+                        <a:buNone/>
+                      </a:pPr>
+                      <a:r>
+                        <a:rPr lang="en-US" sz="1500" dirty="0">
+                          <a:solidFill>
+                            <a:srgbClr val="1B2B34"/>
+                          </a:solidFill>
+                          <a:latin typeface="Calibri" pitchFamily="34" charset="0"/>
+                          <a:ea typeface="Calibri" pitchFamily="34" charset="-122"/>
+                          <a:cs typeface="Calibri" pitchFamily="34" charset="-120"/>
+                        </a:rPr>
+                        <a:t>Leitstand, Auftragsliste, Bestandsübersicht am PC</a:t>
+                      </a:r>
+                      <a:endParaRPr lang="en-US" sz="1500" dirty="0">
+                        <a:latin typeface="Calibri" charset="0"/>
+                        <a:ea typeface="Calibri" charset="0"/>
+                        <a:cs typeface="Calibri" charset="0"/>
+                      </a:endParaRPr>
+                    </a:p>
+                  </a:txBody>
+                  <a:tcPr marL="91440" marR="91440" marT="45720" marB="45720" anchor="ctr">
+                    <a:lnL w="9525" cap="flat" cmpd="sng" algn="ctr">
+                      <a:solidFill>
+                        <a:srgbClr val="D5DDE0"/>
+                      </a:solidFill>
+                      <a:prstDash val="solid"/>
+                      <a:round/>
+                      <a:headEnd type="none" w="med" len="med"/>
+                      <a:tailEnd type="none" w="med" len="med"/>
+                    </a:lnL>
+                    <a:lnR w="9525" cap="flat" cmpd="sng" algn="ctr">
+                      <a:solidFill>
+                        <a:srgbClr val="D5DDE0"/>
+                      </a:solidFill>
+                      <a:prstDash val="solid"/>
+                      <a:round/>
+                      <a:headEnd type="none" w="med" len="med"/>
+                      <a:tailEnd type="none" w="med" len="med"/>
+                    </a:lnR>
+                    <a:lnT w="9525" cap="flat" cmpd="sng" algn="ctr">
+                      <a:solidFill>
+                        <a:srgbClr val="D5DDE0"/>
+                      </a:solidFill>
+                      <a:prstDash val="solid"/>
+                      <a:round/>
+                      <a:headEnd type="none" w="med" len="med"/>
+                      <a:tailEnd type="none" w="med" len="med"/>
+                    </a:lnT>
+                    <a:lnB w="9525" cap="flat" cmpd="sng" algn="ctr">
+                      <a:solidFill>
+                        <a:srgbClr val="D5DDE0"/>
+                      </a:solidFill>
+                      <a:prstDash val="solid"/>
+                      <a:round/>
+                      <a:headEnd type="none" w="med" len="med"/>
+                      <a:tailEnd type="none" w="med" len="med"/>
+                    </a:lnB>
+                    <a:solidFill>
+                      <a:srgbClr val="FFFFFF"/>
+                    </a:solidFill>
+                  </a:tcPr>
+                </a:tc>
+                <a:tc>
+                  <a:txBody>
+                    <a:bodyPr/>
+                    <a:lstStyle/>
+                    <a:p>
+                      <a:pPr indent="0" marL="0">
+                        <a:buNone/>
+                      </a:pPr>
+                      <a:r>
+                        <a:rPr lang="en-US" sz="1500" b="1" dirty="0">
+                          <a:solidFill>
+                            <a:srgbClr val="1F8A70"/>
+                          </a:solidFill>
+                          <a:latin typeface="Calibri" pitchFamily="34" charset="0"/>
+                          <a:ea typeface="Calibri" pitchFamily="34" charset="-122"/>
+                          <a:cs typeface="Calibri" pitchFamily="34" charset="-120"/>
+                        </a:rPr>
+                        <a:t>Fiori Elements</a:t>
+                      </a:r>
+                      <a:endParaRPr lang="en-US" sz="1500" dirty="0">
+                        <a:latin typeface="Calibri" charset="0"/>
+                        <a:ea typeface="Calibri" charset="0"/>
+                        <a:cs typeface="Calibri" charset="0"/>
+                      </a:endParaRPr>
+                    </a:p>
+                  </a:txBody>
+                  <a:tcPr marL="91440" marR="91440" marT="45720" marB="45720" anchor="ctr">
+                    <a:lnL w="9525" cap="flat" cmpd="sng" algn="ctr">
+                      <a:solidFill>
+                        <a:srgbClr val="D5DDE0"/>
+                      </a:solidFill>
+                      <a:prstDash val="solid"/>
+                      <a:round/>
+                      <a:headEnd type="none" w="med" len="med"/>
+                      <a:tailEnd type="none" w="med" len="med"/>
+                    </a:lnL>
+                    <a:lnR w="9525" cap="flat" cmpd="sng" algn="ctr">
+                      <a:solidFill>
+                        <a:srgbClr val="D5DDE0"/>
+                      </a:solidFill>
+                      <a:prstDash val="solid"/>
+                      <a:round/>
+                      <a:headEnd type="none" w="med" len="med"/>
+                      <a:tailEnd type="none" w="med" len="med"/>
+                    </a:lnR>
+                    <a:lnT w="9525" cap="flat" cmpd="sng" algn="ctr">
+                      <a:solidFill>
+                        <a:srgbClr val="D5DDE0"/>
+                      </a:solidFill>
+                      <a:prstDash val="solid"/>
+                      <a:round/>
+                      <a:headEnd type="none" w="med" len="med"/>
+                      <a:tailEnd type="none" w="med" len="med"/>
+                    </a:lnT>
+                    <a:lnB w="9525" cap="flat" cmpd="sng" algn="ctr">
+                      <a:solidFill>
+                        <a:srgbClr val="D5DDE0"/>
+                      </a:solidFill>
+                      <a:prstDash val="solid"/>
+                      <a:round/>
+                      <a:headEnd type="none" w="med" len="med"/>
+                      <a:tailEnd type="none" w="med" len="med"/>
+                    </a:lnB>
+                    <a:solidFill>
+                      <a:srgbClr val="FFFFFF"/>
+                    </a:solidFill>
+                  </a:tcPr>
+                </a:tc>
+              </a:tr>
+              <a:tr h="566928">
+                <a:tc>
+                  <a:txBody>
+                    <a:bodyPr/>
+                    <a:lstStyle/>
+                    <a:p>
+                      <a:pPr indent="0" marL="0">
+                        <a:buNone/>
+                      </a:pPr>
+                      <a:r>
+                        <a:rPr lang="en-US" sz="1500" b="1" dirty="0">
+                          <a:solidFill>
+                            <a:srgbClr val="1B2B34"/>
+                          </a:solidFill>
+                          <a:latin typeface="Calibri" pitchFamily="34" charset="0"/>
+                          <a:ea typeface="Calibri" pitchFamily="34" charset="-122"/>
+                          <a:cs typeface="Calibri" pitchFamily="34" charset="-120"/>
+                        </a:rPr>
+                        <a:t>Bestätigen am Tablet</a:t>
+                      </a:r>
+                      <a:endParaRPr lang="en-US" sz="1500" dirty="0">
+                        <a:latin typeface="Calibri" charset="0"/>
+                        <a:ea typeface="Calibri" charset="0"/>
+                        <a:cs typeface="Calibri" charset="0"/>
+                      </a:endParaRPr>
+                    </a:p>
+                  </a:txBody>
+                  <a:tcPr marL="91440" marR="91440" marT="45720" marB="45720" anchor="ctr">
+                    <a:lnL w="9525" cap="flat" cmpd="sng" algn="ctr">
+                      <a:solidFill>
+                        <a:srgbClr val="D5DDE0"/>
+                      </a:solidFill>
+                      <a:prstDash val="solid"/>
+                      <a:round/>
+                      <a:headEnd type="none" w="med" len="med"/>
+                      <a:tailEnd type="none" w="med" len="med"/>
+                    </a:lnL>
+                    <a:lnR w="9525" cap="flat" cmpd="sng" algn="ctr">
+                      <a:solidFill>
+                        <a:srgbClr val="D5DDE0"/>
+                      </a:solidFill>
+                      <a:prstDash val="solid"/>
+                      <a:round/>
+                      <a:headEnd type="none" w="med" len="med"/>
+                      <a:tailEnd type="none" w="med" len="med"/>
+                    </a:lnR>
+                    <a:lnT w="9525" cap="flat" cmpd="sng" algn="ctr">
+                      <a:solidFill>
+                        <a:srgbClr val="D5DDE0"/>
+                      </a:solidFill>
+                      <a:prstDash val="solid"/>
+                      <a:round/>
+                      <a:headEnd type="none" w="med" len="med"/>
+                      <a:tailEnd type="none" w="med" len="med"/>
+                    </a:lnT>
+                    <a:lnB w="9525" cap="flat" cmpd="sng" algn="ctr">
+                      <a:solidFill>
+                        <a:srgbClr val="D5DDE0"/>
+                      </a:solidFill>
+                      <a:prstDash val="solid"/>
+                      <a:round/>
+                      <a:headEnd type="none" w="med" len="med"/>
+                      <a:tailEnd type="none" w="med" len="med"/>
+                    </a:lnB>
+                    <a:solidFill>
+                      <a:srgbClr val="FFFFFF"/>
+                    </a:solidFill>
+                  </a:tcPr>
+                </a:tc>
+                <a:tc>
+                  <a:txBody>
+                    <a:bodyPr/>
+                    <a:lstStyle/>
+                    <a:p>
+                      <a:pPr indent="0" marL="0">
+                        <a:buNone/>
+                      </a:pPr>
+                      <a:r>
+                        <a:rPr lang="en-US" sz="1500" dirty="0">
+                          <a:solidFill>
+                            <a:srgbClr val="1B2B34"/>
+                          </a:solidFill>
+                          <a:latin typeface="Calibri" pitchFamily="34" charset="0"/>
+                          <a:ea typeface="Calibri" pitchFamily="34" charset="-122"/>
+                          <a:cs typeface="Calibri" pitchFamily="34" charset="-120"/>
+                        </a:rPr>
+                        <a:t>Wareneingang prüfen, Auftrag rückmelden</a:t>
+                      </a:r>
+                      <a:endParaRPr lang="en-US" sz="1500" dirty="0">
+                        <a:latin typeface="Calibri" charset="0"/>
+                        <a:ea typeface="Calibri" charset="0"/>
+                        <a:cs typeface="Calibri" charset="0"/>
+                      </a:endParaRPr>
+                    </a:p>
+                  </a:txBody>
+                  <a:tcPr marL="91440" marR="91440" marT="45720" marB="45720" anchor="ctr">
+                    <a:lnL w="9525" cap="flat" cmpd="sng" algn="ctr">
+                      <a:solidFill>
+                        <a:srgbClr val="D5DDE0"/>
+                      </a:solidFill>
+                      <a:prstDash val="solid"/>
+                      <a:round/>
+                      <a:headEnd type="none" w="med" len="med"/>
+                      <a:tailEnd type="none" w="med" len="med"/>
+                    </a:lnL>
+                    <a:lnR w="9525" cap="flat" cmpd="sng" algn="ctr">
+                      <a:solidFill>
+                        <a:srgbClr val="D5DDE0"/>
+                      </a:solidFill>
+                      <a:prstDash val="solid"/>
+                      <a:round/>
+                      <a:headEnd type="none" w="med" len="med"/>
+                      <a:tailEnd type="none" w="med" len="med"/>
+                    </a:lnR>
+                    <a:lnT w="9525" cap="flat" cmpd="sng" algn="ctr">
+                      <a:solidFill>
+                        <a:srgbClr val="D5DDE0"/>
+                      </a:solidFill>
+                      <a:prstDash val="solid"/>
+                      <a:round/>
+                      <a:headEnd type="none" w="med" len="med"/>
+                      <a:tailEnd type="none" w="med" len="med"/>
+                    </a:lnT>
+                    <a:lnB w="9525" cap="flat" cmpd="sng" algn="ctr">
+                      <a:solidFill>
+                        <a:srgbClr val="D5DDE0"/>
+                      </a:solidFill>
+                      <a:prstDash val="solid"/>
+                      <a:round/>
+                      <a:headEnd type="none" w="med" len="med"/>
+                      <a:tailEnd type="none" w="med" len="med"/>
+                    </a:lnB>
+                    <a:solidFill>
+                      <a:srgbClr val="FFFFFF"/>
+                    </a:solidFill>
+                  </a:tcPr>
+                </a:tc>
+                <a:tc>
+                  <a:txBody>
+                    <a:bodyPr/>
+                    <a:lstStyle/>
+                    <a:p>
+                      <a:pPr indent="0" marL="0">
+                        <a:buNone/>
+                      </a:pPr>
+                      <a:r>
+                        <a:rPr lang="en-US" sz="1500" b="1" dirty="0">
+                          <a:solidFill>
+                            <a:srgbClr val="1F8A70"/>
+                          </a:solidFill>
+                          <a:latin typeface="Calibri" pitchFamily="34" charset="0"/>
+                          <a:ea typeface="Calibri" pitchFamily="34" charset="-122"/>
+                          <a:cs typeface="Calibri" pitchFamily="34" charset="-120"/>
+                        </a:rPr>
+                        <a:t>Fiori Elements, Cozy + Inline-Aktion</a:t>
+                      </a:r>
+                      <a:endParaRPr lang="en-US" sz="1500" dirty="0">
+                        <a:latin typeface="Calibri" charset="0"/>
+                        <a:ea typeface="Calibri" charset="0"/>
+                        <a:cs typeface="Calibri" charset="0"/>
+                      </a:endParaRPr>
+                    </a:p>
+                  </a:txBody>
+                  <a:tcPr marL="91440" marR="91440" marT="45720" marB="45720" anchor="ctr">
+                    <a:lnL w="9525" cap="flat" cmpd="sng" algn="ctr">
+                      <a:solidFill>
+                        <a:srgbClr val="D5DDE0"/>
+                      </a:solidFill>
+                      <a:prstDash val="solid"/>
+                      <a:round/>
+                      <a:headEnd type="none" w="med" len="med"/>
+                      <a:tailEnd type="none" w="med" len="med"/>
+                    </a:lnL>
+                    <a:lnR w="9525" cap="flat" cmpd="sng" algn="ctr">
+                      <a:solidFill>
+                        <a:srgbClr val="D5DDE0"/>
+                      </a:solidFill>
+                      <a:prstDash val="solid"/>
+                      <a:round/>
+                      <a:headEnd type="none" w="med" len="med"/>
+                      <a:tailEnd type="none" w="med" len="med"/>
+                    </a:lnR>
+                    <a:lnT w="9525" cap="flat" cmpd="sng" algn="ctr">
+                      <a:solidFill>
+                        <a:srgbClr val="D5DDE0"/>
+                      </a:solidFill>
+                      <a:prstDash val="solid"/>
+                      <a:round/>
+                      <a:headEnd type="none" w="med" len="med"/>
+                      <a:tailEnd type="none" w="med" len="med"/>
+                    </a:lnT>
+                    <a:lnB w="9525" cap="flat" cmpd="sng" algn="ctr">
+                      <a:solidFill>
+                        <a:srgbClr val="D5DDE0"/>
+                      </a:solidFill>
+                      <a:prstDash val="solid"/>
+                      <a:round/>
+                      <a:headEnd type="none" w="med" len="med"/>
+                      <a:tailEnd type="none" w="med" len="med"/>
+                    </a:lnB>
+                    <a:solidFill>
+                      <a:srgbClr val="FFFFFF"/>
+                    </a:solidFill>
+                  </a:tcPr>
+                </a:tc>
+              </a:tr>
+              <a:tr h="566928">
+                <a:tc>
+                  <a:txBody>
+                    <a:bodyPr/>
+                    <a:lstStyle/>
+                    <a:p>
+                      <a:pPr indent="0" marL="0">
+                        <a:buNone/>
+                      </a:pPr>
+                      <a:r>
+                        <a:rPr lang="en-US" sz="1500" b="1" dirty="0">
+                          <a:solidFill>
+                            <a:srgbClr val="1B2B34"/>
+                          </a:solidFill>
+                          <a:latin typeface="Calibri" pitchFamily="34" charset="0"/>
+                          <a:ea typeface="Calibri" pitchFamily="34" charset="-122"/>
+                          <a:cs typeface="Calibri" pitchFamily="34" charset="-120"/>
+                        </a:rPr>
+                        <a:t>Gelegentlicher Kamera-Scan</a:t>
+                      </a:r>
+                      <a:endParaRPr lang="en-US" sz="1500" dirty="0">
+                        <a:latin typeface="Calibri" charset="0"/>
+                        <a:ea typeface="Calibri" charset="0"/>
+                        <a:cs typeface="Calibri" charset="0"/>
+                      </a:endParaRPr>
+                    </a:p>
+                  </a:txBody>
+                  <a:tcPr marL="91440" marR="91440" marT="45720" marB="45720" anchor="ctr">
+                    <a:lnL w="9525" cap="flat" cmpd="sng" algn="ctr">
+                      <a:solidFill>
+                        <a:srgbClr val="D5DDE0"/>
+                      </a:solidFill>
+                      <a:prstDash val="solid"/>
+                      <a:round/>
+                      <a:headEnd type="none" w="med" len="med"/>
+                      <a:tailEnd type="none" w="med" len="med"/>
+                    </a:lnL>
+                    <a:lnR w="9525" cap="flat" cmpd="sng" algn="ctr">
+                      <a:solidFill>
+                        <a:srgbClr val="D5DDE0"/>
+                      </a:solidFill>
+                      <a:prstDash val="solid"/>
+                      <a:round/>
+                      <a:headEnd type="none" w="med" len="med"/>
+                      <a:tailEnd type="none" w="med" len="med"/>
+                    </a:lnR>
+                    <a:lnT w="9525" cap="flat" cmpd="sng" algn="ctr">
+                      <a:solidFill>
+                        <a:srgbClr val="D5DDE0"/>
+                      </a:solidFill>
+                      <a:prstDash val="solid"/>
+                      <a:round/>
+                      <a:headEnd type="none" w="med" len="med"/>
+                      <a:tailEnd type="none" w="med" len="med"/>
+                    </a:lnT>
+                    <a:lnB w="9525" cap="flat" cmpd="sng" algn="ctr">
+                      <a:solidFill>
+                        <a:srgbClr val="D5DDE0"/>
+                      </a:solidFill>
+                      <a:prstDash val="solid"/>
+                      <a:round/>
+                      <a:headEnd type="none" w="med" len="med"/>
+                      <a:tailEnd type="none" w="med" len="med"/>
+                    </a:lnB>
+                    <a:solidFill>
+                      <a:srgbClr val="FFFFFF"/>
+                    </a:solidFill>
+                  </a:tcPr>
+                </a:tc>
+                <a:tc>
+                  <a:txBody>
+                    <a:bodyPr/>
+                    <a:lstStyle/>
+                    <a:p>
+                      <a:pPr indent="0" marL="0">
+                        <a:buNone/>
+                      </a:pPr>
+                      <a:r>
+                        <a:rPr lang="en-US" sz="1500" dirty="0">
+                          <a:solidFill>
+                            <a:srgbClr val="1B2B34"/>
+                          </a:solidFill>
+                          <a:latin typeface="Calibri" pitchFamily="34" charset="0"/>
+                          <a:ea typeface="Calibri" pitchFamily="34" charset="-122"/>
+                          <a:cs typeface="Calibri" pitchFamily="34" charset="-120"/>
+                        </a:rPr>
+                        <a:t>Material oder Charge per Handy-Kamera erfassen</a:t>
+                      </a:r>
+                      <a:endParaRPr lang="en-US" sz="1500" dirty="0">
+                        <a:latin typeface="Calibri" charset="0"/>
+                        <a:ea typeface="Calibri" charset="0"/>
+                        <a:cs typeface="Calibri" charset="0"/>
+                      </a:endParaRPr>
+                    </a:p>
+                  </a:txBody>
+                  <a:tcPr marL="91440" marR="91440" marT="45720" marB="45720" anchor="ctr">
+                    <a:lnL w="9525" cap="flat" cmpd="sng" algn="ctr">
+                      <a:solidFill>
+                        <a:srgbClr val="D5DDE0"/>
+                      </a:solidFill>
+                      <a:prstDash val="solid"/>
+                      <a:round/>
+                      <a:headEnd type="none" w="med" len="med"/>
+                      <a:tailEnd type="none" w="med" len="med"/>
+                    </a:lnL>
+                    <a:lnR w="9525" cap="flat" cmpd="sng" algn="ctr">
+                      <a:solidFill>
+                        <a:srgbClr val="D5DDE0"/>
+                      </a:solidFill>
+                      <a:prstDash val="solid"/>
+                      <a:round/>
+                      <a:headEnd type="none" w="med" len="med"/>
+                      <a:tailEnd type="none" w="med" len="med"/>
+                    </a:lnR>
+                    <a:lnT w="9525" cap="flat" cmpd="sng" algn="ctr">
+                      <a:solidFill>
+                        <a:srgbClr val="D5DDE0"/>
+                      </a:solidFill>
+                      <a:prstDash val="solid"/>
+                      <a:round/>
+                      <a:headEnd type="none" w="med" len="med"/>
+                      <a:tailEnd type="none" w="med" len="med"/>
+                    </a:lnT>
+                    <a:lnB w="9525" cap="flat" cmpd="sng" algn="ctr">
+                      <a:solidFill>
+                        <a:srgbClr val="D5DDE0"/>
+                      </a:solidFill>
+                      <a:prstDash val="solid"/>
+                      <a:round/>
+                      <a:headEnd type="none" w="med" len="med"/>
+                      <a:tailEnd type="none" w="med" len="med"/>
+                    </a:lnB>
+                    <a:solidFill>
+                      <a:srgbClr val="FFFFFF"/>
+                    </a:solidFill>
+                  </a:tcPr>
+                </a:tc>
+                <a:tc>
+                  <a:txBody>
+                    <a:bodyPr/>
+                    <a:lstStyle/>
+                    <a:p>
+                      <a:pPr indent="0" marL="0">
+                        <a:buNone/>
+                      </a:pPr>
+                      <a:r>
+                        <a:rPr lang="en-US" sz="1500" b="1" dirty="0">
+                          <a:solidFill>
+                            <a:srgbClr val="1F8A70"/>
+                          </a:solidFill>
+                          <a:latin typeface="Calibri" pitchFamily="34" charset="0"/>
+                          <a:ea typeface="Calibri" pitchFamily="34" charset="-122"/>
+                          <a:cs typeface="Calibri" pitchFamily="34" charset="-120"/>
+                        </a:rPr>
+                        <a:t>Fiori Elements + Scanner-Erweiterung</a:t>
+                      </a:r>
+                      <a:endParaRPr lang="en-US" sz="1500" dirty="0">
+                        <a:latin typeface="Calibri" charset="0"/>
+                        <a:ea typeface="Calibri" charset="0"/>
+                        <a:cs typeface="Calibri" charset="0"/>
+                      </a:endParaRPr>
+                    </a:p>
+                  </a:txBody>
+                  <a:tcPr marL="91440" marR="91440" marT="45720" marB="45720" anchor="ctr">
+                    <a:lnL w="9525" cap="flat" cmpd="sng" algn="ctr">
+                      <a:solidFill>
+                        <a:srgbClr val="D5DDE0"/>
+                      </a:solidFill>
+                      <a:prstDash val="solid"/>
+                      <a:round/>
+                      <a:headEnd type="none" w="med" len="med"/>
+                      <a:tailEnd type="none" w="med" len="med"/>
+                    </a:lnL>
+                    <a:lnR w="9525" cap="flat" cmpd="sng" algn="ctr">
+                      <a:solidFill>
+                        <a:srgbClr val="D5DDE0"/>
+                      </a:solidFill>
+                      <a:prstDash val="solid"/>
+                      <a:round/>
+                      <a:headEnd type="none" w="med" len="med"/>
+                      <a:tailEnd type="none" w="med" len="med"/>
+                    </a:lnR>
+                    <a:lnT w="9525" cap="flat" cmpd="sng" algn="ctr">
+                      <a:solidFill>
+                        <a:srgbClr val="D5DDE0"/>
+                      </a:solidFill>
+                      <a:prstDash val="solid"/>
+                      <a:round/>
+                      <a:headEnd type="none" w="med" len="med"/>
+                      <a:tailEnd type="none" w="med" len="med"/>
+                    </a:lnT>
+                    <a:lnB w="9525" cap="flat" cmpd="sng" algn="ctr">
+                      <a:solidFill>
+                        <a:srgbClr val="D5DDE0"/>
+                      </a:solidFill>
+                      <a:prstDash val="solid"/>
+                      <a:round/>
+                      <a:headEnd type="none" w="med" len="med"/>
+                      <a:tailEnd type="none" w="med" len="med"/>
+                    </a:lnB>
+                    <a:solidFill>
+                      <a:srgbClr val="FFFFFF"/>
+                    </a:solidFill>
+                  </a:tcPr>
+                </a:tc>
+              </a:tr>
+              <a:tr h="566928">
+                <a:tc>
+                  <a:txBody>
+                    <a:bodyPr/>
+                    <a:lstStyle/>
+                    <a:p>
+                      <a:pPr indent="0" marL="0">
+                        <a:buNone/>
+                      </a:pPr>
+                      <a:r>
+                        <a:rPr lang="en-US" sz="1500" b="1" dirty="0">
+                          <a:solidFill>
+                            <a:srgbClr val="1B2B34"/>
+                          </a:solidFill>
+                          <a:latin typeface="Calibri" pitchFamily="34" charset="0"/>
+                          <a:ea typeface="Calibri" pitchFamily="34" charset="-122"/>
+                          <a:cs typeface="Calibri" pitchFamily="34" charset="-120"/>
+                        </a:rPr>
+                        <a:t>Standard mit Spezialteil</a:t>
+                      </a:r>
+                      <a:endParaRPr lang="en-US" sz="1500" dirty="0">
+                        <a:latin typeface="Calibri" charset="0"/>
+                        <a:ea typeface="Calibri" charset="0"/>
+                        <a:cs typeface="Calibri" charset="0"/>
+                      </a:endParaRPr>
+                    </a:p>
+                  </a:txBody>
+                  <a:tcPr marL="91440" marR="91440" marT="45720" marB="45720" anchor="ctr">
+                    <a:lnL w="9525" cap="flat" cmpd="sng" algn="ctr">
+                      <a:solidFill>
+                        <a:srgbClr val="D5DDE0"/>
+                      </a:solidFill>
+                      <a:prstDash val="solid"/>
+                      <a:round/>
+                      <a:headEnd type="none" w="med" len="med"/>
+                      <a:tailEnd type="none" w="med" len="med"/>
+                    </a:lnL>
+                    <a:lnR w="9525" cap="flat" cmpd="sng" algn="ctr">
+                      <a:solidFill>
+                        <a:srgbClr val="D5DDE0"/>
+                      </a:solidFill>
+                      <a:prstDash val="solid"/>
+                      <a:round/>
+                      <a:headEnd type="none" w="med" len="med"/>
+                      <a:tailEnd type="none" w="med" len="med"/>
+                    </a:lnR>
+                    <a:lnT w="9525" cap="flat" cmpd="sng" algn="ctr">
+                      <a:solidFill>
+                        <a:srgbClr val="D5DDE0"/>
+                      </a:solidFill>
+                      <a:prstDash val="solid"/>
+                      <a:round/>
+                      <a:headEnd type="none" w="med" len="med"/>
+                      <a:tailEnd type="none" w="med" len="med"/>
+                    </a:lnT>
+                    <a:lnB w="9525" cap="flat" cmpd="sng" algn="ctr">
+                      <a:solidFill>
+                        <a:srgbClr val="D5DDE0"/>
+                      </a:solidFill>
+                      <a:prstDash val="solid"/>
+                      <a:round/>
+                      <a:headEnd type="none" w="med" len="med"/>
+                      <a:tailEnd type="none" w="med" len="med"/>
+                    </a:lnB>
+                    <a:solidFill>
+                      <a:srgbClr val="FFFFFF"/>
+                    </a:solidFill>
+                  </a:tcPr>
+                </a:tc>
+                <a:tc>
+                  <a:txBody>
+                    <a:bodyPr/>
+                    <a:lstStyle/>
+                    <a:p>
+                      <a:pPr indent="0" marL="0">
+                        <a:buNone/>
+                      </a:pPr>
+                      <a:r>
+                        <a:rPr lang="en-US" sz="1500" dirty="0">
+                          <a:solidFill>
+                            <a:srgbClr val="1B2B34"/>
+                          </a:solidFill>
+                          <a:latin typeface="Calibri" pitchFamily="34" charset="0"/>
+                          <a:ea typeface="Calibri" pitchFamily="34" charset="-122"/>
+                          <a:cs typeface="Calibri" pitchFamily="34" charset="-120"/>
+                        </a:rPr>
+                        <a:t>Objektseite plus eigener Scan-Bereich</a:t>
+                      </a:r>
+                      <a:endParaRPr lang="en-US" sz="1500" dirty="0">
+                        <a:latin typeface="Calibri" charset="0"/>
+                        <a:ea typeface="Calibri" charset="0"/>
+                        <a:cs typeface="Calibri" charset="0"/>
+                      </a:endParaRPr>
+                    </a:p>
+                  </a:txBody>
+                  <a:tcPr marL="91440" marR="91440" marT="45720" marB="45720" anchor="ctr">
+                    <a:lnL w="9525" cap="flat" cmpd="sng" algn="ctr">
+                      <a:solidFill>
+                        <a:srgbClr val="D5DDE0"/>
+                      </a:solidFill>
+                      <a:prstDash val="solid"/>
+                      <a:round/>
+                      <a:headEnd type="none" w="med" len="med"/>
+                      <a:tailEnd type="none" w="med" len="med"/>
+                    </a:lnL>
+                    <a:lnR w="9525" cap="flat" cmpd="sng" algn="ctr">
+                      <a:solidFill>
+                        <a:srgbClr val="D5DDE0"/>
+                      </a:solidFill>
+                      <a:prstDash val="solid"/>
+                      <a:round/>
+                      <a:headEnd type="none" w="med" len="med"/>
+                      <a:tailEnd type="none" w="med" len="med"/>
+                    </a:lnR>
+                    <a:lnT w="9525" cap="flat" cmpd="sng" algn="ctr">
+                      <a:solidFill>
+                        <a:srgbClr val="D5DDE0"/>
+                      </a:solidFill>
+                      <a:prstDash val="solid"/>
+                      <a:round/>
+                      <a:headEnd type="none" w="med" len="med"/>
+                      <a:tailEnd type="none" w="med" len="med"/>
+                    </a:lnT>
+                    <a:lnB w="9525" cap="flat" cmpd="sng" algn="ctr">
+                      <a:solidFill>
+                        <a:srgbClr val="D5DDE0"/>
+                      </a:solidFill>
+                      <a:prstDash val="solid"/>
+                      <a:round/>
+                      <a:headEnd type="none" w="med" len="med"/>
+                      <a:tailEnd type="none" w="med" len="med"/>
+                    </a:lnB>
+                    <a:solidFill>
+                      <a:srgbClr val="FFFFFF"/>
+                    </a:solidFill>
+                  </a:tcPr>
+                </a:tc>
+                <a:tc>
+                  <a:txBody>
+                    <a:bodyPr/>
+                    <a:lstStyle/>
+                    <a:p>
+                      <a:pPr indent="0" marL="0">
+                        <a:buNone/>
+                      </a:pPr>
+                      <a:r>
+                        <a:rPr lang="en-US" sz="1500" b="1" dirty="0">
+                          <a:solidFill>
+                            <a:srgbClr val="1F8A70"/>
+                          </a:solidFill>
+                          <a:latin typeface="Calibri" pitchFamily="34" charset="0"/>
+                          <a:ea typeface="Calibri" pitchFamily="34" charset="-122"/>
+                          <a:cs typeface="Calibri" pitchFamily="34" charset="-120"/>
+                        </a:rPr>
+                        <a:t>Fiori Elements + Erweiterung</a:t>
+                      </a:r>
+                      <a:endParaRPr lang="en-US" sz="1500" dirty="0">
+                        <a:latin typeface="Calibri" charset="0"/>
+                        <a:ea typeface="Calibri" charset="0"/>
+                        <a:cs typeface="Calibri" charset="0"/>
+                      </a:endParaRPr>
+                    </a:p>
+                  </a:txBody>
+                  <a:tcPr marL="91440" marR="91440" marT="45720" marB="45720" anchor="ctr">
+                    <a:lnL w="9525" cap="flat" cmpd="sng" algn="ctr">
+                      <a:solidFill>
+                        <a:srgbClr val="D5DDE0"/>
+                      </a:solidFill>
+                      <a:prstDash val="solid"/>
+                      <a:round/>
+                      <a:headEnd type="none" w="med" len="med"/>
+                      <a:tailEnd type="none" w="med" len="med"/>
+                    </a:lnL>
+                    <a:lnR w="9525" cap="flat" cmpd="sng" algn="ctr">
+                      <a:solidFill>
+                        <a:srgbClr val="D5DDE0"/>
+                      </a:solidFill>
+                      <a:prstDash val="solid"/>
+                      <a:round/>
+                      <a:headEnd type="none" w="med" len="med"/>
+                      <a:tailEnd type="none" w="med" len="med"/>
+                    </a:lnR>
+                    <a:lnT w="9525" cap="flat" cmpd="sng" algn="ctr">
+                      <a:solidFill>
+                        <a:srgbClr val="D5DDE0"/>
+                      </a:solidFill>
+                      <a:prstDash val="solid"/>
+                      <a:round/>
+                      <a:headEnd type="none" w="med" len="med"/>
+                      <a:tailEnd type="none" w="med" len="med"/>
+                    </a:lnT>
+                    <a:lnB w="9525" cap="flat" cmpd="sng" algn="ctr">
+                      <a:solidFill>
+                        <a:srgbClr val="D5DDE0"/>
+                      </a:solidFill>
+                      <a:prstDash val="solid"/>
+                      <a:round/>
+                      <a:headEnd type="none" w="med" len="med"/>
+                      <a:tailEnd type="none" w="med" len="med"/>
+                    </a:lnB>
+                    <a:solidFill>
+                      <a:srgbClr val="FFFFFF"/>
+                    </a:solidFill>
+                  </a:tcPr>
+                </a:tc>
+              </a:tr>
+              <a:tr h="566928">
+                <a:tc>
+                  <a:txBody>
+                    <a:bodyPr/>
+                    <a:lstStyle/>
+                    <a:p>
+                      <a:pPr indent="0" marL="0">
+                        <a:buNone/>
+                      </a:pPr>
+                      <a:r>
+                        <a:rPr lang="en-US" sz="1500" b="1" dirty="0">
+                          <a:solidFill>
+                            <a:srgbClr val="1B2B34"/>
+                          </a:solidFill>
+                          <a:latin typeface="Calibri" pitchFamily="34" charset="0"/>
+                          <a:ea typeface="Calibri" pitchFamily="34" charset="-122"/>
+                          <a:cs typeface="Calibri" pitchFamily="34" charset="-120"/>
+                        </a:rPr>
+                        <a:t>Scan-getriebener Schnellablauf</a:t>
+                      </a:r>
+                      <a:endParaRPr lang="en-US" sz="1500" dirty="0">
+                        <a:latin typeface="Calibri" charset="0"/>
+                        <a:ea typeface="Calibri" charset="0"/>
+                        <a:cs typeface="Calibri" charset="0"/>
+                      </a:endParaRPr>
+                    </a:p>
+                  </a:txBody>
+                  <a:tcPr marL="91440" marR="91440" marT="45720" marB="45720" anchor="ctr">
+                    <a:lnL w="9525" cap="flat" cmpd="sng" algn="ctr">
+                      <a:solidFill>
+                        <a:srgbClr val="D5DDE0"/>
+                      </a:solidFill>
+                      <a:prstDash val="solid"/>
+                      <a:round/>
+                      <a:headEnd type="none" w="med" len="med"/>
+                      <a:tailEnd type="none" w="med" len="med"/>
+                    </a:lnL>
+                    <a:lnR w="9525" cap="flat" cmpd="sng" algn="ctr">
+                      <a:solidFill>
+                        <a:srgbClr val="D5DDE0"/>
+                      </a:solidFill>
+                      <a:prstDash val="solid"/>
+                      <a:round/>
+                      <a:headEnd type="none" w="med" len="med"/>
+                      <a:tailEnd type="none" w="med" len="med"/>
+                    </a:lnR>
+                    <a:lnT w="9525" cap="flat" cmpd="sng" algn="ctr">
+                      <a:solidFill>
+                        <a:srgbClr val="D5DDE0"/>
+                      </a:solidFill>
+                      <a:prstDash val="solid"/>
+                      <a:round/>
+                      <a:headEnd type="none" w="med" len="med"/>
+                      <a:tailEnd type="none" w="med" len="med"/>
+                    </a:lnT>
+                    <a:lnB w="9525" cap="flat" cmpd="sng" algn="ctr">
+                      <a:solidFill>
+                        <a:srgbClr val="D5DDE0"/>
+                      </a:solidFill>
+                      <a:prstDash val="solid"/>
+                      <a:round/>
+                      <a:headEnd type="none" w="med" len="med"/>
+                      <a:tailEnd type="none" w="med" len="med"/>
+                    </a:lnB>
+                    <a:solidFill>
+                      <a:srgbClr val="FFFFFF"/>
+                    </a:solidFill>
+                  </a:tcPr>
+                </a:tc>
+                <a:tc>
+                  <a:txBody>
+                    <a:bodyPr/>
+                    <a:lstStyle/>
+                    <a:p>
+                      <a:pPr indent="0" marL="0">
+                        <a:buNone/>
+                      </a:pPr>
+                      <a:r>
+                        <a:rPr lang="en-US" sz="1500" dirty="0">
+                          <a:solidFill>
+                            <a:srgbClr val="1B2B34"/>
+                          </a:solidFill>
+                          <a:latin typeface="Calibri" pitchFamily="34" charset="0"/>
+                          <a:ea typeface="Calibri" pitchFamily="34" charset="-122"/>
+                          <a:cs typeface="Calibri" pitchFamily="34" charset="-120"/>
+                        </a:rPr>
+                        <a:t>Scannen → Menge → Buchen, hunderte Male pro Schicht</a:t>
+                      </a:r>
+                      <a:endParaRPr lang="en-US" sz="1500" dirty="0">
+                        <a:latin typeface="Calibri" charset="0"/>
+                        <a:ea typeface="Calibri" charset="0"/>
+                        <a:cs typeface="Calibri" charset="0"/>
+                      </a:endParaRPr>
+                    </a:p>
+                  </a:txBody>
+                  <a:tcPr marL="91440" marR="91440" marT="45720" marB="45720" anchor="ctr">
+                    <a:lnL w="9525" cap="flat" cmpd="sng" algn="ctr">
+                      <a:solidFill>
+                        <a:srgbClr val="D5DDE0"/>
+                      </a:solidFill>
+                      <a:prstDash val="solid"/>
+                      <a:round/>
+                      <a:headEnd type="none" w="med" len="med"/>
+                      <a:tailEnd type="none" w="med" len="med"/>
+                    </a:lnL>
+                    <a:lnR w="9525" cap="flat" cmpd="sng" algn="ctr">
+                      <a:solidFill>
+                        <a:srgbClr val="D5DDE0"/>
+                      </a:solidFill>
+                      <a:prstDash val="solid"/>
+                      <a:round/>
+                      <a:headEnd type="none" w="med" len="med"/>
+                      <a:tailEnd type="none" w="med" len="med"/>
+                    </a:lnR>
+                    <a:lnT w="9525" cap="flat" cmpd="sng" algn="ctr">
+                      <a:solidFill>
+                        <a:srgbClr val="D5DDE0"/>
+                      </a:solidFill>
+                      <a:prstDash val="solid"/>
+                      <a:round/>
+                      <a:headEnd type="none" w="med" len="med"/>
+                      <a:tailEnd type="none" w="med" len="med"/>
+                    </a:lnT>
+                    <a:lnB w="9525" cap="flat" cmpd="sng" algn="ctr">
+                      <a:solidFill>
+                        <a:srgbClr val="D5DDE0"/>
+                      </a:solidFill>
+                      <a:prstDash val="solid"/>
+                      <a:round/>
+                      <a:headEnd type="none" w="med" len="med"/>
+                      <a:tailEnd type="none" w="med" len="med"/>
+                    </a:lnB>
+                    <a:solidFill>
+                      <a:srgbClr val="FFFFFF"/>
+                    </a:solidFill>
+                  </a:tcPr>
+                </a:tc>
+                <a:tc>
+                  <a:txBody>
+                    <a:bodyPr/>
+                    <a:lstStyle/>
+                    <a:p>
+                      <a:pPr indent="0" marL="0">
+                        <a:buNone/>
+                      </a:pPr>
+                      <a:r>
+                        <a:rPr lang="en-US" sz="1500" b="1" dirty="0">
+                          <a:solidFill>
+                            <a:srgbClr val="D9661F"/>
+                          </a:solidFill>
+                          <a:latin typeface="Calibri" pitchFamily="34" charset="0"/>
+                          <a:ea typeface="Calibri" pitchFamily="34" charset="-122"/>
+                          <a:cs typeface="Calibri" pitchFamily="34" charset="-120"/>
+                        </a:rPr>
+                        <a:t>Schlanke Freestyle-App, bewusst klein gehalten</a:t>
+                      </a:r>
+                      <a:endParaRPr lang="en-US" sz="1500" dirty="0">
+                        <a:latin typeface="Calibri" charset="0"/>
+                        <a:ea typeface="Calibri" charset="0"/>
+                        <a:cs typeface="Calibri" charset="0"/>
+                      </a:endParaRPr>
+                    </a:p>
+                  </a:txBody>
+                  <a:tcPr marL="91440" marR="91440" marT="45720" marB="45720" anchor="ctr">
+                    <a:lnL w="9525" cap="flat" cmpd="sng" algn="ctr">
+                      <a:solidFill>
+                        <a:srgbClr val="D5DDE0"/>
+                      </a:solidFill>
+                      <a:prstDash val="solid"/>
+                      <a:round/>
+                      <a:headEnd type="none" w="med" len="med"/>
+                      <a:tailEnd type="none" w="med" len="med"/>
+                    </a:lnL>
+                    <a:lnR w="9525" cap="flat" cmpd="sng" algn="ctr">
+                      <a:solidFill>
+                        <a:srgbClr val="D5DDE0"/>
+                      </a:solidFill>
+                      <a:prstDash val="solid"/>
+                      <a:round/>
+                      <a:headEnd type="none" w="med" len="med"/>
+                      <a:tailEnd type="none" w="med" len="med"/>
+                    </a:lnR>
+                    <a:lnT w="9525" cap="flat" cmpd="sng" algn="ctr">
+                      <a:solidFill>
+                        <a:srgbClr val="D5DDE0"/>
+                      </a:solidFill>
+                      <a:prstDash val="solid"/>
+                      <a:round/>
+                      <a:headEnd type="none" w="med" len="med"/>
+                      <a:tailEnd type="none" w="med" len="med"/>
+                    </a:lnT>
+                    <a:lnB w="9525" cap="flat" cmpd="sng" algn="ctr">
+                      <a:solidFill>
+                        <a:srgbClr val="D5DDE0"/>
+                      </a:solidFill>
+                      <a:prstDash val="solid"/>
+                      <a:round/>
+                      <a:headEnd type="none" w="med" len="med"/>
+                      <a:tailEnd type="none" w="med" len="med"/>
+                    </a:lnB>
+                    <a:solidFill>
+                      <a:srgbClr val="FFFFFF"/>
+                    </a:solidFill>
+                  </a:tcPr>
+                </a:tc>
+              </a:tr>
+              <a:tr h="566928">
+                <a:tc>
+                  <a:txBody>
+                    <a:bodyPr/>
+                    <a:lstStyle/>
+                    <a:p>
+                      <a:pPr indent="0" marL="0">
+                        <a:buNone/>
+                      </a:pPr>
+                      <a:r>
+                        <a:rPr lang="en-US" sz="1500" b="1" dirty="0">
+                          <a:solidFill>
+                            <a:srgbClr val="1B2B34"/>
+                          </a:solidFill>
+                          <a:latin typeface="Calibri" pitchFamily="34" charset="0"/>
+                          <a:ea typeface="Calibri" pitchFamily="34" charset="-122"/>
+                          <a:cs typeface="Calibri" pitchFamily="34" charset="-120"/>
+                        </a:rPr>
+                        <a:t>Offline im Lager</a:t>
+                      </a:r>
+                      <a:endParaRPr lang="en-US" sz="1500" dirty="0">
+                        <a:latin typeface="Calibri" charset="0"/>
+                        <a:ea typeface="Calibri" charset="0"/>
+                        <a:cs typeface="Calibri" charset="0"/>
+                      </a:endParaRPr>
+                    </a:p>
+                  </a:txBody>
+                  <a:tcPr marL="91440" marR="91440" marT="45720" marB="45720" anchor="ctr">
+                    <a:lnL w="9525" cap="flat" cmpd="sng" algn="ctr">
+                      <a:solidFill>
+                        <a:srgbClr val="D5DDE0"/>
+                      </a:solidFill>
+                      <a:prstDash val="solid"/>
+                      <a:round/>
+                      <a:headEnd type="none" w="med" len="med"/>
+                      <a:tailEnd type="none" w="med" len="med"/>
+                    </a:lnL>
+                    <a:lnR w="9525" cap="flat" cmpd="sng" algn="ctr">
+                      <a:solidFill>
+                        <a:srgbClr val="D5DDE0"/>
+                      </a:solidFill>
+                      <a:prstDash val="solid"/>
+                      <a:round/>
+                      <a:headEnd type="none" w="med" len="med"/>
+                      <a:tailEnd type="none" w="med" len="med"/>
+                    </a:lnR>
+                    <a:lnT w="9525" cap="flat" cmpd="sng" algn="ctr">
+                      <a:solidFill>
+                        <a:srgbClr val="D5DDE0"/>
+                      </a:solidFill>
+                      <a:prstDash val="solid"/>
+                      <a:round/>
+                      <a:headEnd type="none" w="med" len="med"/>
+                      <a:tailEnd type="none" w="med" len="med"/>
+                    </a:lnT>
+                    <a:lnB w="9525" cap="flat" cmpd="sng" algn="ctr">
+                      <a:solidFill>
+                        <a:srgbClr val="D5DDE0"/>
+                      </a:solidFill>
+                      <a:prstDash val="solid"/>
+                      <a:round/>
+                      <a:headEnd type="none" w="med" len="med"/>
+                      <a:tailEnd type="none" w="med" len="med"/>
+                    </a:lnB>
+                    <a:solidFill>
+                      <a:srgbClr val="FFFFFF"/>
+                    </a:solidFill>
+                  </a:tcPr>
+                </a:tc>
+                <a:tc>
+                  <a:txBody>
+                    <a:bodyPr/>
+                    <a:lstStyle/>
+                    <a:p>
+                      <a:pPr indent="0" marL="0">
+                        <a:buNone/>
+                      </a:pPr>
+                      <a:r>
+                        <a:rPr lang="en-US" sz="1500" dirty="0">
+                          <a:solidFill>
+                            <a:srgbClr val="1B2B34"/>
+                          </a:solidFill>
+                          <a:latin typeface="Calibri" pitchFamily="34" charset="0"/>
+                          <a:ea typeface="Calibri" pitchFamily="34" charset="-122"/>
+                          <a:cs typeface="Calibri" pitchFamily="34" charset="-120"/>
+                        </a:rPr>
+                        <a:t>Kein stabiles WLAN in der Halle</a:t>
+                      </a:r>
+                      <a:endParaRPr lang="en-US" sz="1500" dirty="0">
+                        <a:latin typeface="Calibri" charset="0"/>
+                        <a:ea typeface="Calibri" charset="0"/>
+                        <a:cs typeface="Calibri" charset="0"/>
+                      </a:endParaRPr>
+                    </a:p>
+                  </a:txBody>
+                  <a:tcPr marL="91440" marR="91440" marT="45720" marB="45720" anchor="ctr">
+                    <a:lnL w="9525" cap="flat" cmpd="sng" algn="ctr">
+                      <a:solidFill>
+                        <a:srgbClr val="D5DDE0"/>
+                      </a:solidFill>
+                      <a:prstDash val="solid"/>
+                      <a:round/>
+                      <a:headEnd type="none" w="med" len="med"/>
+                      <a:tailEnd type="none" w="med" len="med"/>
+                    </a:lnL>
+                    <a:lnR w="9525" cap="flat" cmpd="sng" algn="ctr">
+                      <a:solidFill>
+                        <a:srgbClr val="D5DDE0"/>
+                      </a:solidFill>
+                      <a:prstDash val="solid"/>
+                      <a:round/>
+                      <a:headEnd type="none" w="med" len="med"/>
+                      <a:tailEnd type="none" w="med" len="med"/>
+                    </a:lnR>
+                    <a:lnT w="9525" cap="flat" cmpd="sng" algn="ctr">
+                      <a:solidFill>
+                        <a:srgbClr val="D5DDE0"/>
+                      </a:solidFill>
+                      <a:prstDash val="solid"/>
+                      <a:round/>
+                      <a:headEnd type="none" w="med" len="med"/>
+                      <a:tailEnd type="none" w="med" len="med"/>
+                    </a:lnT>
+                    <a:lnB w="9525" cap="flat" cmpd="sng" algn="ctr">
+                      <a:solidFill>
+                        <a:srgbClr val="D5DDE0"/>
+                      </a:solidFill>
+                      <a:prstDash val="solid"/>
+                      <a:round/>
+                      <a:headEnd type="none" w="med" len="med"/>
+                      <a:tailEnd type="none" w="med" len="med"/>
+                    </a:lnB>
+                    <a:solidFill>
+                      <a:srgbClr val="FFFFFF"/>
+                    </a:solidFill>
+                  </a:tcPr>
+                </a:tc>
+                <a:tc>
+                  <a:txBody>
+                    <a:bodyPr/>
+                    <a:lstStyle/>
+                    <a:p>
+                      <a:pPr indent="0" marL="0">
+                        <a:buNone/>
+                      </a:pPr>
+                      <a:r>
+                        <a:rPr lang="en-US" sz="1500" b="1" dirty="0">
+                          <a:solidFill>
+                            <a:srgbClr val="5E727B"/>
+                          </a:solidFill>
+                          <a:latin typeface="Calibri" pitchFamily="34" charset="0"/>
+                          <a:ea typeface="Calibri" pitchFamily="34" charset="-122"/>
+                          <a:cs typeface="Calibri" pitchFamily="34" charset="-120"/>
+                        </a:rPr>
+                        <a:t>Eigene Bewertung (z. B. SAP Mobile Development Kit)</a:t>
+                      </a:r>
+                      <a:endParaRPr lang="en-US" sz="1500" dirty="0">
+                        <a:latin typeface="Calibri" charset="0"/>
+                        <a:ea typeface="Calibri" charset="0"/>
+                        <a:cs typeface="Calibri" charset="0"/>
+                      </a:endParaRPr>
+                    </a:p>
+                  </a:txBody>
+                  <a:tcPr marL="91440" marR="91440" marT="45720" marB="45720" anchor="ctr">
+                    <a:lnL w="9525" cap="flat" cmpd="sng" algn="ctr">
+                      <a:solidFill>
+                        <a:srgbClr val="D5DDE0"/>
+                      </a:solidFill>
+                      <a:prstDash val="solid"/>
+                      <a:round/>
+                      <a:headEnd type="none" w="med" len="med"/>
+                      <a:tailEnd type="none" w="med" len="med"/>
+                    </a:lnL>
+                    <a:lnR w="9525" cap="flat" cmpd="sng" algn="ctr">
+                      <a:solidFill>
+                        <a:srgbClr val="D5DDE0"/>
+                      </a:solidFill>
+                      <a:prstDash val="solid"/>
+                      <a:round/>
+                      <a:headEnd type="none" w="med" len="med"/>
+                      <a:tailEnd type="none" w="med" len="med"/>
+                    </a:lnR>
+                    <a:lnT w="9525" cap="flat" cmpd="sng" algn="ctr">
+                      <a:solidFill>
+                        <a:srgbClr val="D5DDE0"/>
+                      </a:solidFill>
+                      <a:prstDash val="solid"/>
+                      <a:round/>
+                      <a:headEnd type="none" w="med" len="med"/>
+                      <a:tailEnd type="none" w="med" len="med"/>
+                    </a:lnT>
+                    <a:lnB w="9525" cap="flat" cmpd="sng" algn="ctr">
+                      <a:solidFill>
+                        <a:srgbClr val="D5DDE0"/>
+                      </a:solidFill>
+                      <a:prstDash val="solid"/>
+                      <a:round/>
+                      <a:headEnd type="none" w="med" len="med"/>
+                      <a:tailEnd type="none" w="med" len="med"/>
+                    </a:lnB>
+                    <a:solidFill>
+                      <a:srgbClr val="FFFFFF"/>
+                    </a:solidFill>
+                  </a:tcPr>
+                </a:tc>
+              </a:tr>
+            </a:tbl>
+          </a:graphicData>
+        </a:graphic>
+      </p:graphicFrame>
+      <p:sp>
+        <p:nvSpPr>
+          <p:cNvPr id="4" name="Text 1"/>
+          <p:cNvSpPr txBox="1"/>
+          <p:nvPr/>
+        </p:nvSpPr>
+        <p:spPr>
+          <a:xfrm>
+            <a:off x="548640" y="5715000"/>
+            <a:ext cx="11064240" cy="457200"/>
+          </a:xfrm>
+          <a:prstGeom prst="rect">
+            <a:avLst/>
+          </a:prstGeom>
+          <a:noFill/>
+          <a:ln/>
+        </p:spPr>
+        <p:txBody>
+          <a:bodyPr wrap="square" lIns="0" tIns="0" rIns="0" bIns="0" rtlCol="0" anchor="ctr"/>
+          <a:lstStyle/>
+          <a:p>
+            <a:pPr indent="0" marL="0">
+              <a:buNone/>
+            </a:pPr>
+            <a:r>
+              <a:rPr lang="en-US" sz="1600" i="1" dirty="0">
+                <a:solidFill>
+                  <a:schemeClr val="tx2"/>
+                </a:solidFill>
+              </a:rPr>
+              <a:t>Wenn Freestyle, dann für genau einen Ablauf – nicht als Nachbau einer kompletten Liste mit Detailseite.</a:t>
+            </a:r>
+            <a:endParaRPr lang="en-US" sz="1600" dirty="0"/>
+          </a:p>
+        </p:txBody>
+      </p:sp>
+      <p:sp>
+        <p:nvSpPr>
+          <p:cNvPr id="25" name="Slide Number Placeholder 0"/>
+          <p:cNvSpPr>
+            <a:spLocks noGrp="1"/>
+          </p:cNvSpPr>
+          <p:nvPr>
+            <p:ph type="sldNum" sz="quarter" idx="4294967295"/>
+          </p:nvPr>
+        </p:nvSpPr>
+        <p:spPr>
+          <a:xfrm>
+            <a:off x="11155680" y="6400800"/>
+            <a:ext cx="457200" cy="274320"/>
+          </a:xfrm>
+          <a:prstGeom prst="rect">
+            <a:avLst/>
+          </a:prstGeom>
+          <a:extLst>
+            <a:ext uri="{C572A759-6A51-4108-AA02-DFA0A04FC94B}">
+              <ma14:wrappingTextBoxFlag xmlns:ma14="http://schemas.microsoft.com/office/mac/drawingml/2011/main" val="0"/>
+            </a:ext>
+          </a:extLst>
+        </p:spPr>
+        <p:txBody>
+          <a:bodyPr/>
+          <a:lstStyle>
+            <a:lvl1pPr>
+              <a:defRPr sz="1000">
+                <a:solidFill>
+                  <a:schemeClr val="accent4"/>
+                </a:solidFill>
+              </a:defRPr>
+            </a:lvl1pPr>
+          </a:lstStyle>
+          <a:p>
+            <a:pPr algn="r"/>
+            <a:fld id="{F7021451-1387-4CA6-816F-3879F97B5CBC}" type="slidenum">
+              <a:rPr b="0" lang="en-US"/>
+              <a:t>14</a:t>
+            </a:fld>
+            <a:endParaRPr lang="en-US"/>
+          </a:p>
+        </p:txBody>
+      </p:sp>
+    </p:spTree>
+  </p:cSld>
+  <p:clrMapOvr>
+    <a:masterClrMapping/>
+  </p:clrMapOvr>
+</p:sld>
+</file>
+
+<file path=ppt/slides/slide15.xml><?xml version="1.0" encoding="utf-8"?>
+<p:sld xmlns:a="http://schemas.openxmlformats.org/drawingml/2006/main" xmlns:r="http://schemas.openxmlformats.org/officeDocument/2006/relationships" xmlns:p="http://schemas.openxmlformats.org/presentationml/2006/main">
+  <p:cSld name="Slide 15">
+    <p:spTree>
+      <p:nvGrpSpPr>
+        <p:cNvPr id="1" name=""/>
+        <p:cNvGrpSpPr/>
+        <p:nvPr/>
+      </p:nvGrpSpPr>
+      <p:grpSpPr>
+        <a:xfrm>
+          <a:off x="0" y="0"/>
+          <a:ext cx="0" cy="0"/>
+          <a:chOff x="0" y="0"/>
+          <a:chExt cx="0" cy="0"/>
+        </a:xfrm>
+      </p:grpSpPr>
+      <p:sp>
+        <p:nvSpPr>
+          <p:cNvPr id="2" name="Text 0"/>
+          <p:cNvSpPr/>
+          <p:nvPr>
+            <p:ph idx="100" type="title" hasCustomPrompt="1"/>
+          </p:nvPr>
+        </p:nvSpPr>
+        <p:spPr>
+          <a:xfrm>
+            <a:off x="548640" y="365760"/>
+            <a:ext cx="11064240" cy="822960"/>
+          </a:xfrm>
+          <a:prstGeom prst="rect">
+            <a:avLst/>
+          </a:prstGeom>
+          <a:noFill/>
+          <a:ln/>
+        </p:spPr>
+        <p:txBody>
+          <a:bodyPr wrap="square" lIns="0" tIns="0" rIns="0" bIns="0" rtlCol="0" anchor="ctr"/>
+          <a:lstStyle/>
+          <a:p>
+            <a:pPr algn="l" indent="0" marL="0">
+              <a:buNone/>
+            </a:pPr>
+            <a:r>
+              <a:rPr lang="en-US" sz="3400" b="1" dirty="0">
+                <a:solidFill>
+                  <a:schemeClr val="tx2"/>
+                </a:solidFill>
+              </a:rPr>
+              <a:t>Leitplanke: erst Standard, dann Ausnahme</a:t>
+            </a:r>
+            <a:endParaRPr lang="en-US" sz="3400" dirty="0"/>
+          </a:p>
+        </p:txBody>
+      </p:sp>
+      <p:sp>
+        <p:nvSpPr>
+          <p:cNvPr id="3" name="Stufe 1"/>
+          <p:cNvSpPr/>
+          <p:nvPr/>
+        </p:nvSpPr>
+        <p:spPr>
+          <a:xfrm>
+            <a:off x="548640" y="1463040"/>
+            <a:ext cx="3474720" cy="2743200"/>
+          </a:xfrm>
+          <a:prstGeom prst="roundRect">
+            <a:avLst>
+              <a:gd name="adj" fmla="val 4000"/>
+            </a:avLst>
+          </a:prstGeom>
+          <a:solidFill>
+            <a:schemeClr val="accent6"/>
+          </a:solidFill>
+          <a:ln/>
+        </p:spPr>
+      </p:sp>
+      <p:sp>
+        <p:nvSpPr>
+          <p:cNvPr id="4" name="Stufe 1 Nummer"/>
+          <p:cNvSpPr/>
+          <p:nvPr/>
+        </p:nvSpPr>
+        <p:spPr>
+          <a:xfrm>
+            <a:off x="822960" y="1691640"/>
+            <a:ext cx="640080" cy="640080"/>
+          </a:xfrm>
+          <a:prstGeom prst="ellipse">
+            <a:avLst/>
+          </a:prstGeom>
+          <a:solidFill>
+            <a:schemeClr val="accent1"/>
+          </a:solidFill>
+          <a:ln/>
+        </p:spPr>
+      </p:sp>
+      <p:sp>
+        <p:nvSpPr>
+          <p:cNvPr id="5" name="Text 3"/>
+          <p:cNvSpPr txBox="1"/>
+          <p:nvPr/>
+        </p:nvSpPr>
+        <p:spPr>
+          <a:xfrm>
+            <a:off x="822960" y="1691640"/>
+            <a:ext cx="640080" cy="640080"/>
+          </a:xfrm>
+          <a:prstGeom prst="rect">
+            <a:avLst/>
+          </a:prstGeom>
+          <a:noFill/>
+          <a:ln/>
+        </p:spPr>
+        <p:txBody>
+          <a:bodyPr wrap="square" lIns="0" tIns="0" rIns="0" bIns="0" rtlCol="0" anchor="ctr"/>
+          <a:lstStyle/>
+          <a:p>
+            <a:pPr algn="ctr" indent="0" marL="0">
+              <a:buNone/>
+            </a:pPr>
+            <a:r>
+              <a:rPr lang="en-US" sz="2400" b="1" dirty="0">
+                <a:solidFill>
+                  <a:schemeClr val="bg1"/>
+                </a:solidFill>
+              </a:rPr>
+              <a:t>1</a:t>
+            </a:r>
+            <a:endParaRPr lang="en-US" sz="2400" dirty="0"/>
+          </a:p>
+        </p:txBody>
+      </p:sp>
+      <p:sp>
+        <p:nvSpPr>
+          <p:cNvPr id="6" name="Text 4"/>
+          <p:cNvSpPr txBox="1"/>
+          <p:nvPr/>
+        </p:nvSpPr>
+        <p:spPr>
+          <a:xfrm>
+            <a:off x="822960" y="2468880"/>
+            <a:ext cx="2926080" cy="457200"/>
+          </a:xfrm>
+          <a:prstGeom prst="rect">
+            <a:avLst/>
+          </a:prstGeom>
+          <a:noFill/>
+          <a:ln/>
+        </p:spPr>
+        <p:txBody>
+          <a:bodyPr wrap="square" lIns="0" tIns="0" rIns="0" bIns="0" rtlCol="0" anchor="ctr"/>
+          <a:lstStyle/>
+          <a:p>
+            <a:pPr indent="0" marL="0">
+              <a:buNone/>
+            </a:pPr>
+            <a:r>
+              <a:rPr lang="en-US" sz="1900" b="1" dirty="0">
+                <a:solidFill>
+                  <a:schemeClr val="accent1"/>
+                </a:solidFill>
+              </a:rPr>
+              <a:t>Fiori Elements</a:t>
+            </a:r>
+            <a:endParaRPr lang="en-US" sz="1900" dirty="0"/>
+          </a:p>
+        </p:txBody>
+      </p:sp>
+      <p:sp>
+        <p:nvSpPr>
+          <p:cNvPr id="7" name="Text 5"/>
+          <p:cNvSpPr txBox="1"/>
+          <p:nvPr/>
+        </p:nvSpPr>
+        <p:spPr>
+          <a:xfrm>
+            <a:off x="822960" y="2971800"/>
+            <a:ext cx="2926080" cy="1097280"/>
+          </a:xfrm>
+          <a:prstGeom prst="rect">
+            <a:avLst/>
+          </a:prstGeom>
+          <a:noFill/>
+          <a:ln/>
+        </p:spPr>
+        <p:txBody>
+          <a:bodyPr wrap="square" lIns="0" tIns="0" rIns="0" bIns="0" rtlCol="0" anchor="t"/>
+          <a:lstStyle/>
+          <a:p>
+            <a:pPr indent="0" marL="0">
+              <a:buNone/>
+            </a:pPr>
+            <a:r>
+              <a:rPr lang="en-US" sz="1500" dirty="0">
+                <a:solidFill>
+                  <a:schemeClr val="tx1"/>
+                </a:solidFill>
+              </a:rPr>
+              <a:t>mit RAP im Backend. Deckt Liste, Detail, Bearbeiten und Analyse ab.</a:t>
+            </a:r>
+            <a:endParaRPr lang="en-US" sz="1500" dirty="0"/>
+          </a:p>
+        </p:txBody>
+      </p:sp>
+      <p:sp>
+        <p:nvSpPr>
+          <p:cNvPr id="8" name="Pfeil 1"/>
+          <p:cNvSpPr/>
+          <p:nvPr/>
+        </p:nvSpPr>
+        <p:spPr>
+          <a:xfrm>
+            <a:off x="4050792" y="2606040"/>
+            <a:ext cx="274320" cy="457200"/>
+          </a:xfrm>
+          <a:prstGeom prst="rightArrow">
+            <a:avLst/>
+          </a:prstGeom>
+          <a:solidFill>
+            <a:schemeClr val="accent4"/>
+          </a:solidFill>
+          <a:ln/>
+        </p:spPr>
+      </p:sp>
+      <p:sp>
+        <p:nvSpPr>
+          <p:cNvPr id="9" name="Stufe 2"/>
+          <p:cNvSpPr/>
+          <p:nvPr/>
+        </p:nvSpPr>
+        <p:spPr>
+          <a:xfrm>
+            <a:off x="4343400" y="1463040"/>
+            <a:ext cx="3474720" cy="2743200"/>
+          </a:xfrm>
+          <a:prstGeom prst="roundRect">
+            <a:avLst>
+              <a:gd name="adj" fmla="val 4000"/>
+            </a:avLst>
+          </a:prstGeom>
+          <a:solidFill>
+            <a:schemeClr val="accent6"/>
+          </a:solidFill>
+          <a:ln/>
+        </p:spPr>
+      </p:sp>
+      <p:sp>
+        <p:nvSpPr>
+          <p:cNvPr id="10" name="Stufe 2 Nummer"/>
+          <p:cNvSpPr/>
+          <p:nvPr/>
+        </p:nvSpPr>
+        <p:spPr>
+          <a:xfrm>
+            <a:off x="4617720" y="1691640"/>
+            <a:ext cx="640080" cy="640080"/>
+          </a:xfrm>
+          <a:prstGeom prst="ellipse">
+            <a:avLst/>
+          </a:prstGeom>
+          <a:solidFill>
+            <a:schemeClr val="accent1"/>
+          </a:solidFill>
+          <a:ln/>
+        </p:spPr>
+      </p:sp>
+      <p:sp>
+        <p:nvSpPr>
+          <p:cNvPr id="11" name="Text 9"/>
+          <p:cNvSpPr txBox="1"/>
+          <p:nvPr/>
+        </p:nvSpPr>
+        <p:spPr>
+          <a:xfrm>
+            <a:off x="4617720" y="1691640"/>
+            <a:ext cx="640080" cy="640080"/>
+          </a:xfrm>
+          <a:prstGeom prst="rect">
+            <a:avLst/>
+          </a:prstGeom>
+          <a:noFill/>
+          <a:ln/>
+        </p:spPr>
+        <p:txBody>
+          <a:bodyPr wrap="square" lIns="0" tIns="0" rIns="0" bIns="0" rtlCol="0" anchor="ctr"/>
+          <a:lstStyle/>
+          <a:p>
+            <a:pPr algn="ctr" indent="0" marL="0">
+              <a:buNone/>
+            </a:pPr>
+            <a:r>
+              <a:rPr lang="en-US" sz="2400" b="1" dirty="0">
+                <a:solidFill>
+                  <a:schemeClr val="bg1"/>
+                </a:solidFill>
+              </a:rPr>
+              <a:t>2</a:t>
+            </a:r>
+            <a:endParaRPr lang="en-US" sz="2400" dirty="0"/>
+          </a:p>
+        </p:txBody>
+      </p:sp>
+      <p:sp>
+        <p:nvSpPr>
+          <p:cNvPr id="12" name="Text 10"/>
+          <p:cNvSpPr txBox="1"/>
+          <p:nvPr/>
+        </p:nvSpPr>
+        <p:spPr>
+          <a:xfrm>
+            <a:off x="4617720" y="2468880"/>
+            <a:ext cx="2926080" cy="457200"/>
+          </a:xfrm>
+          <a:prstGeom prst="rect">
+            <a:avLst/>
+          </a:prstGeom>
+          <a:noFill/>
+          <a:ln/>
+        </p:spPr>
+        <p:txBody>
+          <a:bodyPr wrap="square" lIns="0" tIns="0" rIns="0" bIns="0" rtlCol="0" anchor="ctr"/>
+          <a:lstStyle/>
+          <a:p>
+            <a:pPr indent="0" marL="0">
+              <a:buNone/>
+            </a:pPr>
+            <a:r>
+              <a:rPr lang="en-US" sz="1900" b="1" dirty="0">
+                <a:solidFill>
+                  <a:schemeClr val="accent1"/>
+                </a:solidFill>
+              </a:rPr>
+              <a:t>Fiori Elements + Erweiterung</a:t>
+            </a:r>
+            <a:endParaRPr lang="en-US" sz="1900" dirty="0"/>
+          </a:p>
+        </p:txBody>
+      </p:sp>
+      <p:sp>
+        <p:nvSpPr>
+          <p:cNvPr id="13" name="Text 11"/>
+          <p:cNvSpPr txBox="1"/>
+          <p:nvPr/>
+        </p:nvSpPr>
+        <p:spPr>
+          <a:xfrm>
+            <a:off x="4617720" y="2971800"/>
+            <a:ext cx="2926080" cy="1097280"/>
+          </a:xfrm>
+          <a:prstGeom prst="rect">
+            <a:avLst/>
+          </a:prstGeom>
+          <a:noFill/>
+          <a:ln/>
+        </p:spPr>
+        <p:txBody>
+          <a:bodyPr wrap="square" lIns="0" tIns="0" rIns="0" bIns="0" rtlCol="0" anchor="t"/>
+          <a:lstStyle/>
+          <a:p>
+            <a:pPr indent="0" marL="0">
+              <a:buNone/>
+            </a:pPr>
+            <a:r>
+              <a:rPr lang="en-US" sz="1500" dirty="0">
+                <a:solidFill>
+                  <a:schemeClr val="tx1"/>
+                </a:solidFill>
+              </a:rPr>
+              <a:t>Flexible Programming Model: eigene Abschnitte und Bausteine, wo nötig.</a:t>
+            </a:r>
+            <a:endParaRPr lang="en-US" sz="1500" dirty="0"/>
+          </a:p>
+        </p:txBody>
+      </p:sp>
+      <p:sp>
+        <p:nvSpPr>
+          <p:cNvPr id="14" name="Pfeil 2"/>
+          <p:cNvSpPr/>
+          <p:nvPr/>
+        </p:nvSpPr>
+        <p:spPr>
+          <a:xfrm>
+            <a:off x="7845552" y="2606040"/>
+            <a:ext cx="274320" cy="457200"/>
+          </a:xfrm>
+          <a:prstGeom prst="rightArrow">
+            <a:avLst/>
+          </a:prstGeom>
+          <a:solidFill>
+            <a:schemeClr val="accent4"/>
+          </a:solidFill>
+          <a:ln/>
+        </p:spPr>
+      </p:sp>
+      <p:sp>
+        <p:nvSpPr>
+          <p:cNvPr id="15" name="Stufe 3"/>
+          <p:cNvSpPr/>
+          <p:nvPr/>
+        </p:nvSpPr>
+        <p:spPr>
+          <a:xfrm>
+            <a:off x="8138160" y="1463040"/>
+            <a:ext cx="3474720" cy="2743200"/>
+          </a:xfrm>
+          <a:prstGeom prst="roundRect">
+            <a:avLst>
+              <a:gd name="adj" fmla="val 4000"/>
+            </a:avLst>
+          </a:prstGeom>
+          <a:solidFill>
+            <a:schemeClr val="accent5"/>
+          </a:solidFill>
+          <a:ln/>
+        </p:spPr>
+      </p:sp>
+      <p:sp>
+        <p:nvSpPr>
+          <p:cNvPr id="16" name="Stufe 3 Nummer"/>
+          <p:cNvSpPr/>
+          <p:nvPr/>
+        </p:nvSpPr>
+        <p:spPr>
+          <a:xfrm>
+            <a:off x="8412480" y="1691640"/>
+            <a:ext cx="640080" cy="640080"/>
+          </a:xfrm>
+          <a:prstGeom prst="ellipse">
+            <a:avLst/>
+          </a:prstGeom>
+          <a:solidFill>
+            <a:schemeClr val="accent2"/>
+          </a:solidFill>
+          <a:ln/>
+        </p:spPr>
+      </p:sp>
+      <p:sp>
+        <p:nvSpPr>
+          <p:cNvPr id="17" name="Text 15"/>
+          <p:cNvSpPr txBox="1"/>
+          <p:nvPr/>
+        </p:nvSpPr>
+        <p:spPr>
+          <a:xfrm>
+            <a:off x="8412480" y="1691640"/>
+            <a:ext cx="640080" cy="640080"/>
+          </a:xfrm>
+          <a:prstGeom prst="rect">
+            <a:avLst/>
+          </a:prstGeom>
+          <a:noFill/>
+          <a:ln/>
+        </p:spPr>
+        <p:txBody>
+          <a:bodyPr wrap="square" lIns="0" tIns="0" rIns="0" bIns="0" rtlCol="0" anchor="ctr"/>
+          <a:lstStyle/>
+          <a:p>
+            <a:pPr algn="ctr" indent="0" marL="0">
+              <a:buNone/>
+            </a:pPr>
+            <a:r>
+              <a:rPr lang="en-US" sz="2400" b="1" dirty="0">
+                <a:solidFill>
+                  <a:schemeClr val="bg1"/>
+                </a:solidFill>
+              </a:rPr>
+              <a:t>3</a:t>
+            </a:r>
+            <a:endParaRPr lang="en-US" sz="2400" dirty="0"/>
+          </a:p>
+        </p:txBody>
+      </p:sp>
+      <p:sp>
+        <p:nvSpPr>
+          <p:cNvPr id="18" name="Text 16"/>
+          <p:cNvSpPr txBox="1"/>
+          <p:nvPr/>
+        </p:nvSpPr>
+        <p:spPr>
+          <a:xfrm>
+            <a:off x="8412480" y="2468880"/>
+            <a:ext cx="2926080" cy="457200"/>
+          </a:xfrm>
+          <a:prstGeom prst="rect">
+            <a:avLst/>
+          </a:prstGeom>
+          <a:noFill/>
+          <a:ln/>
+        </p:spPr>
+        <p:txBody>
+          <a:bodyPr wrap="square" lIns="0" tIns="0" rIns="0" bIns="0" rtlCol="0" anchor="ctr"/>
+          <a:lstStyle/>
+          <a:p>
+            <a:pPr indent="0" marL="0">
+              <a:buNone/>
+            </a:pPr>
+            <a:r>
+              <a:rPr lang="en-US" sz="1900" b="1" dirty="0">
+                <a:solidFill>
+                  <a:schemeClr val="accent2"/>
+                </a:solidFill>
+              </a:rPr>
+              <a:t>SAPUI5 Freestyle</a:t>
+            </a:r>
+            <a:endParaRPr lang="en-US" sz="1900" dirty="0"/>
+          </a:p>
+        </p:txBody>
+      </p:sp>
+      <p:sp>
+        <p:nvSpPr>
+          <p:cNvPr id="19" name="Text 17"/>
+          <p:cNvSpPr txBox="1"/>
+          <p:nvPr/>
+        </p:nvSpPr>
+        <p:spPr>
+          <a:xfrm>
+            <a:off x="8412480" y="2971800"/>
+            <a:ext cx="2926080" cy="1097280"/>
+          </a:xfrm>
+          <a:prstGeom prst="rect">
+            <a:avLst/>
+          </a:prstGeom>
+          <a:noFill/>
+          <a:ln/>
+        </p:spPr>
+        <p:txBody>
+          <a:bodyPr wrap="square" lIns="0" tIns="0" rIns="0" bIns="0" rtlCol="0" anchor="t"/>
+          <a:lstStyle/>
+          <a:p>
+            <a:pPr indent="0" marL="0">
+              <a:buNone/>
+            </a:pPr>
+            <a:r>
+              <a:rPr lang="en-US" sz="1500" dirty="0">
+                <a:solidFill>
+                  <a:schemeClr val="tx1"/>
+                </a:solidFill>
+              </a:rPr>
+              <a:t>nur mit Begründung, verantwortlichem Owner und Wartungsbudget.</a:t>
+            </a:r>
+            <a:endParaRPr lang="en-US" sz="1500" dirty="0"/>
+          </a:p>
+        </p:txBody>
+      </p:sp>
+      <p:sp>
+        <p:nvSpPr>
+          <p:cNvPr id="20" name="Text 18"/>
+          <p:cNvSpPr txBox="1"/>
+          <p:nvPr/>
+        </p:nvSpPr>
+        <p:spPr>
+          <a:xfrm>
+            <a:off x="548640" y="4526280"/>
+            <a:ext cx="11064240" cy="411480"/>
+          </a:xfrm>
+          <a:prstGeom prst="rect">
+            <a:avLst/>
+          </a:prstGeom>
+          <a:noFill/>
+          <a:ln/>
+        </p:spPr>
+        <p:txBody>
+          <a:bodyPr wrap="square" lIns="0" tIns="0" rIns="0" bIns="0" rtlCol="0" anchor="ctr"/>
+          <a:lstStyle/>
+          <a:p>
+            <a:pPr indent="0" marL="0">
+              <a:buNone/>
+            </a:pPr>
+            <a:r>
+              <a:rPr lang="en-US" sz="1800" b="1" dirty="0">
+                <a:solidFill>
+                  <a:schemeClr val="tx1"/>
+                </a:solidFill>
+              </a:rPr>
+              <a:t>Prüffragen vor jeder Freestyle-Entscheidung</a:t>
+            </a:r>
+            <a:endParaRPr lang="en-US" sz="1800" dirty="0"/>
+          </a:p>
+        </p:txBody>
+      </p:sp>
+      <p:sp>
+        <p:nvSpPr>
+          <p:cNvPr id="21" name="Text 19"/>
+          <p:cNvSpPr txBox="1"/>
+          <p:nvPr/>
+        </p:nvSpPr>
+        <p:spPr>
+          <a:xfrm>
+            <a:off x="548640" y="5029200"/>
+            <a:ext cx="3474720" cy="914400"/>
+          </a:xfrm>
+          <a:prstGeom prst="rect">
+            <a:avLst/>
+          </a:prstGeom>
+          <a:noFill/>
+          <a:ln/>
+        </p:spPr>
+        <p:txBody>
+          <a:bodyPr wrap="square" lIns="0" tIns="0" rIns="0" bIns="0" rtlCol="0" anchor="t"/>
+          <a:lstStyle/>
+          <a:p>
+            <a:pPr indent="0" marL="0">
+              <a:buNone/>
+            </a:pPr>
+            <a:r>
+              <a:rPr lang="en-US" sz="1500" dirty="0">
+                <a:solidFill>
+                  <a:schemeClr val="tx1"/>
+                </a:solidFill>
+              </a:rPr>
+              <a:t>Passt die Anforderung wirklich in keinen Floorplan?</a:t>
+            </a:r>
+            <a:endParaRPr lang="en-US" sz="1500" dirty="0"/>
+          </a:p>
+        </p:txBody>
+      </p:sp>
+      <p:sp>
+        <p:nvSpPr>
+          <p:cNvPr id="22" name="Text 20"/>
+          <p:cNvSpPr txBox="1"/>
+          <p:nvPr/>
+        </p:nvSpPr>
+        <p:spPr>
+          <a:xfrm>
+            <a:off x="4343400" y="5029200"/>
+            <a:ext cx="3474720" cy="914400"/>
+          </a:xfrm>
+          <a:prstGeom prst="rect">
+            <a:avLst/>
+          </a:prstGeom>
+          <a:noFill/>
+          <a:ln/>
+        </p:spPr>
+        <p:txBody>
+          <a:bodyPr wrap="square" lIns="0" tIns="0" rIns="0" bIns="0" rtlCol="0" anchor="t"/>
+          <a:lstStyle/>
+          <a:p>
+            <a:pPr indent="0" marL="0">
+              <a:buNone/>
+            </a:pPr>
+            <a:r>
+              <a:rPr lang="en-US" sz="1500" dirty="0">
+                <a:solidFill>
+                  <a:schemeClr val="tx1"/>
+                </a:solidFill>
+              </a:rPr>
+              <a:t>Wer verantwortet Updates, Tests und Upgrades?</a:t>
+            </a:r>
+            <a:endParaRPr lang="en-US" sz="1500" dirty="0"/>
+          </a:p>
+        </p:txBody>
+      </p:sp>
+      <p:sp>
+        <p:nvSpPr>
+          <p:cNvPr id="23" name="Text 21"/>
+          <p:cNvSpPr txBox="1"/>
+          <p:nvPr/>
+        </p:nvSpPr>
+        <p:spPr>
+          <a:xfrm>
+            <a:off x="8138160" y="5029200"/>
+            <a:ext cx="3474720" cy="914400"/>
+          </a:xfrm>
+          <a:prstGeom prst="rect">
+            <a:avLst/>
+          </a:prstGeom>
+          <a:noFill/>
+          <a:ln/>
+        </p:spPr>
+        <p:txBody>
+          <a:bodyPr wrap="square" lIns="0" tIns="0" rIns="0" bIns="0" rtlCol="0" anchor="t"/>
+          <a:lstStyle/>
+          <a:p>
+            <a:pPr indent="0" marL="0">
+              <a:buNone/>
+            </a:pPr>
+            <a:r>
+              <a:rPr lang="en-US" sz="1500" dirty="0">
+                <a:solidFill>
+                  <a:schemeClr val="tx1"/>
+                </a:solidFill>
+              </a:rPr>
+              <a:t>Ist der Wartungsaufwand für die nächsten Jahre eingeplant?</a:t>
+            </a:r>
+            <a:endParaRPr lang="en-US" sz="1500" dirty="0"/>
+          </a:p>
+        </p:txBody>
+      </p:sp>
+      <p:sp>
+        <p:nvSpPr>
+          <p:cNvPr id="25" name="Slide Number Placeholder 0"/>
+          <p:cNvSpPr>
+            <a:spLocks noGrp="1"/>
+          </p:cNvSpPr>
+          <p:nvPr>
+            <p:ph type="sldNum" sz="quarter" idx="4294967295"/>
+          </p:nvPr>
+        </p:nvSpPr>
+        <p:spPr>
+          <a:xfrm>
+            <a:off x="11155680" y="6400800"/>
+            <a:ext cx="457200" cy="274320"/>
+          </a:xfrm>
+          <a:prstGeom prst="rect">
+            <a:avLst/>
+          </a:prstGeom>
+          <a:extLst>
+            <a:ext uri="{C572A759-6A51-4108-AA02-DFA0A04FC94B}">
+              <ma14:wrappingTextBoxFlag xmlns:ma14="http://schemas.microsoft.com/office/mac/drawingml/2011/main" val="0"/>
+            </a:ext>
+          </a:extLst>
+        </p:spPr>
+        <p:txBody>
+          <a:bodyPr/>
+          <a:lstStyle>
+            <a:lvl1pPr>
+              <a:defRPr sz="1000">
+                <a:solidFill>
+                  <a:schemeClr val="accent4"/>
+                </a:solidFill>
+              </a:defRPr>
+            </a:lvl1pPr>
+          </a:lstStyle>
+          <a:p>
+            <a:pPr algn="r"/>
+            <a:fld id="{F7021451-1387-4CA6-816F-3879F97B5CBC}" type="slidenum">
+              <a:rPr b="0" lang="en-US"/>
+              <a:t>15</a:t>
+            </a:fld>
+            <a:endParaRPr lang="en-US"/>
+          </a:p>
+        </p:txBody>
+      </p:sp>
+    </p:spTree>
+  </p:cSld>
+  <p:clrMapOvr>
+    <a:masterClrMapping/>
+  </p:clrMapOvr>
+</p:sld>
+</file>
+
+<file path=ppt/slides/slide16.xml><?xml version="1.0" encoding="utf-8"?>
+<p:sld xmlns:a="http://schemas.openxmlformats.org/drawingml/2006/main" xmlns:r="http://schemas.openxmlformats.org/officeDocument/2006/relationships" xmlns:p="http://schemas.openxmlformats.org/presentationml/2006/main">
+  <p:cSld name="Slide 16">
     <p:spTree>
       <p:nvGrpSpPr>
         <p:cNvPr id="1" name=""/>

--- a/praesentation/Fiori_vs_Freestyle.pptx
+++ b/praesentation/Fiori_vs_Freestyle.pptx
@@ -21,9 +21,12 @@
     <p:sldId id="269" r:id="rId15"/>
     <p:sldId id="270" r:id="rId16"/>
     <p:sldId id="271" r:id="rId17"/>
+    <p:sldId id="272" r:id="rId18"/>
+    <p:sldId id="273" r:id="rId19"/>
+    <p:sldId id="274" r:id="rId20"/>
   </p:sldIdLst>
   <p:notesMasterIdLst>
-    <p:notesMasterId r:id="rId18"/>
+    <p:notesMasterId r:id="rId21"/>
   </p:notesMasterIdLst>
   <p:sldSz cx="12192000" cy="6858000"/>
   <p:notesSz cx="6858000" cy="12192000"/>
@@ -122,18 +125,18 @@
   <p:extLst>
     <p:ext uri="{521415D9-36F7-43E2-AB2F-B90AF26B5E84}">
       <p14:sectionLst xmlns:p14="http://schemas.microsoft.com/office/powerpoint/2010/main">
-        <p14:section name="Einstieg" id="{c50f63b8-8744-b0e2-46ef-843a8e7daa00}">
+        <p14:section name="Einstieg" id="{f1038a0e-0c9a-0e05-88c8-6d81c3f148a0}">
           <p14:sldIdLst>
             <p14:sldId id="256"/>
             <p14:sldId id="257"/>
           </p14:sldIdLst>
         </p14:section>
-        <p14:section name="Einordnung" id="{7c7cdd1d-71ee-5732-f5e6-038266c316c2}">
+        <p14:section name="Einordnung" id="{2b6f4e05-3a25-bc03-6461-de85f63b8871}">
           <p14:sldIdLst>
             <p14:sldId id="258"/>
           </p14:sldIdLst>
         </p14:section>
-        <p14:section name="Demo" id="{f527c130-a15b-e106-c9bd-97f200c16089}">
+        <p14:section name="Demo" id="{2f51389b-119b-e410-4a50-20d75b32d3f0}">
           <p14:sldIdLst>
             <p14:sldId id="259"/>
             <p14:sldId id="260"/>
@@ -141,14 +144,14 @@
             <p14:sldId id="262"/>
           </p14:sldIdLst>
         </p14:section>
-        <p14:section name="Bewertung" id="{a534fe8d-8eeb-5c5f-58e7-b9cad7f4a6f4}">
+        <p14:section name="Bewertung" id="{b667cfb8-bd0c-75c8-c75a-7ef14399c2c6}">
           <p14:sldIdLst>
             <p14:sldId id="263"/>
             <p14:sldId id="264"/>
             <p14:sldId id="265"/>
           </p14:sldIdLst>
         </p14:section>
-        <p14:section name="Shopfloor" id="{c3dd8e35-6b81-a471-08f3-34ea3636b3ac}">
+        <p14:section name="Shopfloor" id="{0266970e-36b3-123d-f834-5bdf0a5a03c9}">
           <p14:sldIdLst>
             <p14:sldId id="266"/>
             <p14:sldId id="267"/>
@@ -156,10 +159,17 @@
             <p14:sldId id="269"/>
           </p14:sldIdLst>
         </p14:section>
-        <p14:section name="Vorschlag" id="{70658427-cd66-3d6f-7508-e7323a82a575}">
+        <p14:section name="Kombination" id="{6526e7a4-6d59-2856-4d9e-df8ee7552570}">
           <p14:sldIdLst>
             <p14:sldId id="270"/>
             <p14:sldId id="271"/>
+            <p14:sldId id="272"/>
+          </p14:sldIdLst>
+        </p14:section>
+        <p14:section name="Vorschlag" id="{f7ac1e64-a63d-7b24-271e-daa8642c841e}">
+          <p14:sldIdLst>
+            <p14:sldId id="273"/>
+            <p14:sldId id="274"/>
           </p14:sldIdLst>
         </p14:section>
       </p14:sectionLst>
@@ -1127,7 +1137,7 @@
           <a:p>
             <a:r>
               <a:rPr lang="en-US" dirty="0"/>
-              <a:t>Die Kollegen aus Lager und Produktion haben recht: Dort zählt jeder Klick, multipliziert mit hunderten Buchungen pro Tag und Schicht. Große Flächen, sichtbare Buttons, wenige Schritte, Scanner. Das ist der häufigste Grund, warum Freestyle gefordert wird. Ich will das ernst nehmen und zeigen, wo der Standard das schon abdeckt und wo die echten technischen Grenzen liegen.</a:t>
+              <a:t>Die Kollegen aus Lager und Produktion haben recht: Dort zählt jeder Klick, multipliziert mit hunderten Buchungen pro Tag und Schicht. Große Flächen, sichtbare Buttons, wenige Schritte, Scanner. Bei uns konkret: Handhelds mit eingebautem Scanner. Das ist der häufigste Grund, warum Freestyle gefordert wird. Ich will das ernst nehmen und zeigen, wo der Standard das schon abdeckt und wo die echten technischen Grenzen liegen.</a:t>
             </a:r>
             <a:endParaRPr lang="en-US" dirty="0"/>
           </a:p>
@@ -1215,7 +1225,7 @@
           <a:p>
             <a:r>
               <a:rPr lang="en-US" dirty="0"/>
-              <a:t>Vieles, was als Grund für Freestyle genannt wird, kann Fiori Elements bereits: Der Cozy-Modus ist genau für Touch gedacht. Aktionen lassen sich fest in die Fußleiste oder direkt in die Tabellenzeile legen, dann ist es ein Klick. Parameter können vorbelegt werden. Handscanner verhalten sich wie eine Tastatur und funktionieren damit überall. Für den Scan per Handy- oder Tablet-Kamera gibt es in SAPUI5 einen fertigen Baustein (BarcodeScannerButton); in Fiori Elements ist er nicht eingebaut, wird aber als kleine Erweiterung ergänzt. Und das Aussehen steuern wir zentral über ein Firmen-Theme statt über CSS in jeder einzelnen App.</a:t>
+              <a:t>Vieles, was als Grund für Freestyle genannt wird, kann Fiori Elements bereits: Der Cozy-Modus ist genau für Touch gedacht. Aktionen lassen sich fest in die Fußleiste oder direkt in die Tabellenzeile legen, dann ist es ein Klick. Parameter können vorbelegt werden. Unsere Handhelds mit eingebautem Scanner verhalten sich wie eine Tastatur: Der gescannte Code landet im aktiven Eingabefeld – das funktioniert in Fiori Elements genauso wie in Freestyle. Für den Scan per Handy- oder Tablet-Kamera gibt es in SAPUI5 einen fertigen Baustein (BarcodeScannerButton); in Fiori Elements ist er nicht eingebaut, wird aber als kleine Erweiterung ergänzt. Und das Aussehen steuern wir zentral über ein Firmen-Theme statt über CSS in jeder einzelnen App.</a:t>
             </a:r>
             <a:endParaRPr lang="en-US" dirty="0"/>
           </a:p>
@@ -1303,7 +1313,7 @@
           <a:p>
             <a:r>
               <a:rPr lang="en-US" dirty="0"/>
-              <a:t>Ehrlich gesagt: Fiori Elements hat hier echte Grenzen. Das Layout folgt festen Floorplans, man kann einen großen grünen Button nicht frei in die Mitte setzen, und eigenes CSS ist nicht vorgesehen. Für Kamera-Scan oder einen echten Scan-Schnellablauf brauchen wir eine Erweiterung. Wichtig für beide Varianten: Der Browser gibt die Kamera nur über HTTPS frei, und bei vielen Scans pro Schicht ist ein Handscanner klar schneller als die Handy-Kamera. Aber auch Freestyle hat Grenzen, die oft übersehen werden: Wer UI5-Controls per CSS umgestaltet, greift in interne Klassen und Strukturen ein. Die sind kein offizielles API, SAP kann sie mit jedem Release ändern – und dann sieht die App nach dem Upgrade plötzlich anders aus oder ist kaputt. Offline können beide nicht ohne Weiteres; dafür gibt es eigene SAP-Lösungen wie das Mobile Development Kit, die man dann separat bewerten müsste.</a:t>
+              <a:t>Ehrlich gesagt: Fiori Elements hat hier echte Grenzen. Gerade auf den kleinen Displays unserer Handhelds wirken Filterleiste und Tabellen schnell überladen – Fiori Elements ist primär für PC und Tablet gedacht. Das Layout folgt festen Floorplans, man kann einen großen grünen Button nicht frei in die Mitte setzen, und eigenes CSS ist nicht vorgesehen. Für Kamera-Scan oder einen echten Scan-Schnellablauf brauchen wir eine Erweiterung. Wichtig für beide Varianten: Der Browser gibt die Kamera nur über HTTPS frei, und bei vielen Scans pro Schicht ist ein Handscanner klar schneller als die Handy-Kamera. Aber auch Freestyle hat Grenzen, die oft übersehen werden: Wer UI5-Controls per CSS umgestaltet, greift in interne Klassen und Strukturen ein. Die sind kein offizielles API, SAP kann sie mit jedem Release ändern – und dann sieht die App nach dem Upgrade plötzlich anders aus oder ist kaputt. Offline können beide nicht ohne Weiteres; dafür gibt es eigene SAP-Lösungen wie das Mobile Development Kit, die man dann separat bewerten müsste.</a:t>
             </a:r>
             <a:endParaRPr lang="en-US" dirty="0"/>
           </a:p>
@@ -1391,7 +1401,7 @@
           <a:p>
             <a:r>
               <a:rPr lang="en-US" dirty="0"/>
-              <a:t>Daraus ergibt sich eine pragmatische Entscheidungshilfe: Übersichten und Disposition am PC – klar Fiori Elements. Bestätigen am Tablet – Fiori Elements im Touch-Modus mit Aktion direkt in der Zeile. Gelegentlicher Kamera-Scan – Fiori Elements mit dem Scanner-Baustein als Erweiterung. Wenn ein Spezialteil nötig ist, erweitern wir Fiori Elements gezielt. Für einen wirklich scan-getriebenen Schnellablauf, der hunderte Male pro Schicht läuft, ist eine schlanke Freestyle-App gerechtfertigt – aber genau für diesen einen Ablauf, nicht als Nachbau einer kompletten Anwendung. Offline ist ein eigenes Thema und braucht eine eigene Bewertung.</a:t>
+              <a:t>Daraus ergibt sich eine pragmatische Entscheidungshilfe: Übersichten und Disposition am PC – klar Fiori Elements. Bestätigen am Tablet – Fiori Elements im Touch-Modus mit Aktion direkt in der Zeile. Wenn ein Spezialteil nötig ist, erweitern wir Fiori Elements gezielt. Für den Scan-Ablauf am Handheld, der hunderte Male pro Schicht läuft, ist eine schlanke Freestyle-App gerechtfertigt – aber genau für diesen einen Ablauf, nicht als Nachbau einer kompletten Anwendung. Offline ist ein eigenes Thema und braucht eine eigene Bewertung.</a:t>
             </a:r>
             <a:endParaRPr lang="en-US" dirty="0"/>
           </a:p>
@@ -1479,7 +1489,7 @@
           <a:p>
             <a:r>
               <a:rPr lang="en-US" dirty="0"/>
-              <a:t>Mein Vorschlag als einfache Leitplanke: Wir prüfen immer zuerst Fiori Elements mit RAP. Reicht das nicht, erweitern wir Fiori Elements gezielt. Erst wenn beides nicht passt, wird Freestyle gebaut – und dann bewusst, mit Begründung, einem Owner und eingeplantem Wartungsbudget. Die drei Prüffragen können wir in jede Anforderungsklärung aufnehmen.</a:t>
+              <a:t>Hier das Bild, um das es mir eigentlich geht: Eine Warehouse-Anwendung besteht nicht aus einer Technologie. Die Lagerleitung arbeitet am PC mit Übersichten – das ist klassisches Fiori-Elements-Terrain, ohne eigenen UI-Code. Klärfälle laufen über eine Detailseite, ebenfalls Fiori Elements. Der Mitarbeiter in der Halle arbeitet am Handheld mit Scanner – hier bauen wir eine schlanke Freestyle-App für genau diesen einen Ablauf. Entscheidend ist die untere Ebene: Die Geschäftslogik liegt einmal im Backend. Die Freestyle-App ist nur eine dünne Oberfläche und ruft dieselben Aktionen auf wie Fiori Elements. Vorher immer prüfen: Gibt es für den Ablauf schon eine SAP-Standard-App?</a:t>
             </a:r>
             <a:endParaRPr lang="en-US" dirty="0"/>
           </a:p>
@@ -1567,7 +1577,7 @@
           <a:p>
             <a:r>
               <a:rPr lang="en-US" dirty="0"/>
-              <a:t>Zusammenfassung: Gleiches Aussehen heißt nicht gleicher Aufwand. Ich schlage vier konkrete Schritte vor und würde gerne heute festhalten, dass Fiori Elements mit RAP unser Standard ist und Freestyle-Apps künftig kurz begründet werden müssen. Fragen?</a:t>
+              <a:t>Das gleiche Muster in der Produktion: Meister und Planung brauchen Übersichten und Details – Fiori Elements. Der Werker an der Linie braucht wenige, große Buttons und Scan – dort ist eine schlanke Freestyle-Oberfläche gerechtfertigt. Auch hier: Die Rückmeldelogik liegt im Backend, nicht im JavaScript. Damit bleibt der Freestyle-Teil klein und damit wartbar.</a:t>
             </a:r>
             <a:endParaRPr lang="en-US" dirty="0"/>
           </a:p>
@@ -1591,6 +1601,270 @@
             <a:fld id="{F7021451-1387-4CA6-816F-3879F97B5CBC}" type="slidenum">
               <a:rPr lang="en-US"/>
               <a:t>16</a:t>
+            </a:fld>
+            <a:endParaRPr lang="en-US"/>
+          </a:p>
+        </p:txBody>
+      </p:sp>
+    </p:spTree>
+    <p:extLst>
+      <p:ext uri="{BB962C8B-B14F-4D97-AF65-F5344CB8AC3E}">
+        <p14:creationId xmlns:p14="http://schemas.microsoft.com/office/powerpoint/2010/main" val="1024086991"/>
+      </p:ext>
+    </p:extLst>
+  </p:cSld>
+  <p:clrMapOvr>
+    <a:masterClrMapping/>
+  </p:clrMapOvr>
+</p:notes>
+</file>
+
+<file path=ppt/notesSlides/notesSlide17.xml><?xml version="1.0" encoding="utf-8"?>
+<p:notes xmlns:a="http://schemas.openxmlformats.org/drawingml/2006/main" xmlns:r="http://schemas.openxmlformats.org/officeDocument/2006/relationships" xmlns:p="http://schemas.openxmlformats.org/presentationml/2006/main">
+  <p:cSld>
+    <p:spTree>
+      <p:nvGrpSpPr>
+        <p:cNvPr id="1" name=""/>
+        <p:cNvGrpSpPr/>
+        <p:nvPr/>
+      </p:nvGrpSpPr>
+      <p:grpSpPr>
+        <a:xfrm>
+          <a:off x="0" y="0"/>
+          <a:ext cx="0" cy="0"/>
+          <a:chOff x="0" y="0"/>
+          <a:chExt cx="0" cy="0"/>
+        </a:xfrm>
+      </p:grpSpPr>
+      <p:sp>
+        <p:nvSpPr>
+          <p:cNvPr id="2" name="Slide Image Placeholder 1"/>
+          <p:cNvSpPr>
+            <a:spLocks noGrp="1" noRot="1" noChangeAspect="1"/>
+          </p:cNvSpPr>
+          <p:nvPr>
+            <p:ph type="sldImg"/>
+          </p:nvPr>
+        </p:nvSpPr>
+        <p:spPr/>
+      </p:sp>
+      <p:sp>
+        <p:nvSpPr>
+          <p:cNvPr id="3" name="Notes Placeholder 2"/>
+          <p:cNvSpPr>
+            <a:spLocks noGrp="1"/>
+          </p:cNvSpPr>
+          <p:nvPr>
+            <p:ph type="body" idx="1"/>
+          </p:nvPr>
+        </p:nvSpPr>
+        <p:spPr/>
+        <p:txBody>
+          <a:bodyPr/>
+          <a:lstStyle/>
+          <a:p>
+            <a:r>
+              <a:rPr lang="en-US" dirty="0"/>
+              <a:t>So würde ich vorgehen: Erstens prüfen, ob SAP den Ablauf schon im Standard abdeckt. Zweitens das Backend zuerst bauen, als RAP-Business-Objekt mit allen Prüfungen und Aktionen – das ist die Basis für jede Oberfläche. Drittens die Büro-Abläufe mit Fiori Elements, das geht schnell und ohne eigenen UI-Code. Viertens Freestyle gezielt für den einen Ablauf, der es braucht – dünn und ohne eigene Geschäftslogik. Für die Freestyle-Teile gelten feste Spielregeln, damit sie wartbar bleiben.</a:t>
+            </a:r>
+            <a:endParaRPr lang="en-US" dirty="0"/>
+          </a:p>
+        </p:txBody>
+      </p:sp>
+      <p:sp>
+        <p:nvSpPr>
+          <p:cNvPr id="4" name="Slide Number Placeholder 3"/>
+          <p:cNvSpPr>
+            <a:spLocks noGrp="1"/>
+          </p:cNvSpPr>
+          <p:nvPr>
+            <p:ph type="sldNum" sz="quarter" idx="10"/>
+          </p:nvPr>
+        </p:nvSpPr>
+        <p:spPr/>
+        <p:txBody>
+          <a:bodyPr/>
+          <a:lstStyle/>
+          <a:p>
+            <a:fld id="{F7021451-1387-4CA6-816F-3879F97B5CBC}" type="slidenum">
+              <a:rPr lang="en-US"/>
+              <a:t>17</a:t>
+            </a:fld>
+            <a:endParaRPr lang="en-US"/>
+          </a:p>
+        </p:txBody>
+      </p:sp>
+    </p:spTree>
+    <p:extLst>
+      <p:ext uri="{BB962C8B-B14F-4D97-AF65-F5344CB8AC3E}">
+        <p14:creationId xmlns:p14="http://schemas.microsoft.com/office/powerpoint/2010/main" val="1024086991"/>
+      </p:ext>
+    </p:extLst>
+  </p:cSld>
+  <p:clrMapOvr>
+    <a:masterClrMapping/>
+  </p:clrMapOvr>
+</p:notes>
+</file>
+
+<file path=ppt/notesSlides/notesSlide18.xml><?xml version="1.0" encoding="utf-8"?>
+<p:notes xmlns:a="http://schemas.openxmlformats.org/drawingml/2006/main" xmlns:r="http://schemas.openxmlformats.org/officeDocument/2006/relationships" xmlns:p="http://schemas.openxmlformats.org/presentationml/2006/main">
+  <p:cSld>
+    <p:spTree>
+      <p:nvGrpSpPr>
+        <p:cNvPr id="1" name=""/>
+        <p:cNvGrpSpPr/>
+        <p:nvPr/>
+      </p:nvGrpSpPr>
+      <p:grpSpPr>
+        <a:xfrm>
+          <a:off x="0" y="0"/>
+          <a:ext cx="0" cy="0"/>
+          <a:chOff x="0" y="0"/>
+          <a:chExt cx="0" cy="0"/>
+        </a:xfrm>
+      </p:grpSpPr>
+      <p:sp>
+        <p:nvSpPr>
+          <p:cNvPr id="2" name="Slide Image Placeholder 1"/>
+          <p:cNvSpPr>
+            <a:spLocks noGrp="1" noRot="1" noChangeAspect="1"/>
+          </p:cNvSpPr>
+          <p:nvPr>
+            <p:ph type="sldImg"/>
+          </p:nvPr>
+        </p:nvSpPr>
+        <p:spPr/>
+      </p:sp>
+      <p:sp>
+        <p:nvSpPr>
+          <p:cNvPr id="3" name="Notes Placeholder 2"/>
+          <p:cNvSpPr>
+            <a:spLocks noGrp="1"/>
+          </p:cNvSpPr>
+          <p:nvPr>
+            <p:ph type="body" idx="1"/>
+          </p:nvPr>
+        </p:nvSpPr>
+        <p:spPr/>
+        <p:txBody>
+          <a:bodyPr/>
+          <a:lstStyle/>
+          <a:p>
+            <a:r>
+              <a:rPr lang="en-US" dirty="0"/>
+              <a:t>Als Leitplanke pro Ablauf, nicht pro Anwendung: Zuerst Fiori Elements mit RAP. Reicht das nicht, erweitern wir Fiori Elements gezielt. Und für klar abgegrenzte Abläufe wie den Scan am Handheld nehmen wir bewusst Freestyle – mit Owner und eingeplantem Wartungsbudget. Die drei Prüffragen können wir in jede Anforderungsklärung aufnehmen.</a:t>
+            </a:r>
+            <a:endParaRPr lang="en-US" dirty="0"/>
+          </a:p>
+        </p:txBody>
+      </p:sp>
+      <p:sp>
+        <p:nvSpPr>
+          <p:cNvPr id="4" name="Slide Number Placeholder 3"/>
+          <p:cNvSpPr>
+            <a:spLocks noGrp="1"/>
+          </p:cNvSpPr>
+          <p:nvPr>
+            <p:ph type="sldNum" sz="quarter" idx="10"/>
+          </p:nvPr>
+        </p:nvSpPr>
+        <p:spPr/>
+        <p:txBody>
+          <a:bodyPr/>
+          <a:lstStyle/>
+          <a:p>
+            <a:fld id="{F7021451-1387-4CA6-816F-3879F97B5CBC}" type="slidenum">
+              <a:rPr lang="en-US"/>
+              <a:t>18</a:t>
+            </a:fld>
+            <a:endParaRPr lang="en-US"/>
+          </a:p>
+        </p:txBody>
+      </p:sp>
+    </p:spTree>
+    <p:extLst>
+      <p:ext uri="{BB962C8B-B14F-4D97-AF65-F5344CB8AC3E}">
+        <p14:creationId xmlns:p14="http://schemas.microsoft.com/office/powerpoint/2010/main" val="1024086991"/>
+      </p:ext>
+    </p:extLst>
+  </p:cSld>
+  <p:clrMapOvr>
+    <a:masterClrMapping/>
+  </p:clrMapOvr>
+</p:notes>
+</file>
+
+<file path=ppt/notesSlides/notesSlide19.xml><?xml version="1.0" encoding="utf-8"?>
+<p:notes xmlns:a="http://schemas.openxmlformats.org/drawingml/2006/main" xmlns:r="http://schemas.openxmlformats.org/officeDocument/2006/relationships" xmlns:p="http://schemas.openxmlformats.org/presentationml/2006/main">
+  <p:cSld>
+    <p:spTree>
+      <p:nvGrpSpPr>
+        <p:cNvPr id="1" name=""/>
+        <p:cNvGrpSpPr/>
+        <p:nvPr/>
+      </p:nvGrpSpPr>
+      <p:grpSpPr>
+        <a:xfrm>
+          <a:off x="0" y="0"/>
+          <a:ext cx="0" cy="0"/>
+          <a:chOff x="0" y="0"/>
+          <a:chExt cx="0" cy="0"/>
+        </a:xfrm>
+      </p:grpSpPr>
+      <p:sp>
+        <p:nvSpPr>
+          <p:cNvPr id="2" name="Slide Image Placeholder 1"/>
+          <p:cNvSpPr>
+            <a:spLocks noGrp="1" noRot="1" noChangeAspect="1"/>
+          </p:cNvSpPr>
+          <p:nvPr>
+            <p:ph type="sldImg"/>
+          </p:nvPr>
+        </p:nvSpPr>
+        <p:spPr/>
+      </p:sp>
+      <p:sp>
+        <p:nvSpPr>
+          <p:cNvPr id="3" name="Notes Placeholder 2"/>
+          <p:cNvSpPr>
+            <a:spLocks noGrp="1"/>
+          </p:cNvSpPr>
+          <p:nvPr>
+            <p:ph type="body" idx="1"/>
+          </p:nvPr>
+        </p:nvSpPr>
+        <p:spPr/>
+        <p:txBody>
+          <a:bodyPr/>
+          <a:lstStyle/>
+          <a:p>
+            <a:r>
+              <a:rPr lang="en-US" dirty="0"/>
+              <a:t>Zusammenfassung: Gleiches Aussehen heißt nicht gleicher Aufwand. Nicht alles ist SAPUI5, nicht alles ist Fiori Elements – unsere Anwendungen werden Kombinationen sein. Fiori Elements, wo der Standard trägt, Freestyle gezielt dort, wo ein Ablauf es wirklich braucht, zum Beispiel am Handheld. Die Logik gehört ins Backend, damit die Freestyle-Teile klein und wartbar bleiben. Fragen?</a:t>
+            </a:r>
+            <a:endParaRPr lang="en-US" dirty="0"/>
+          </a:p>
+        </p:txBody>
+      </p:sp>
+      <p:sp>
+        <p:nvSpPr>
+          <p:cNvPr id="4" name="Slide Number Placeholder 3"/>
+          <p:cNvSpPr>
+            <a:spLocks noGrp="1"/>
+          </p:cNvSpPr>
+          <p:nvPr>
+            <p:ph type="sldNum" sz="quarter" idx="10"/>
+          </p:nvPr>
+        </p:nvSpPr>
+        <p:spPr/>
+        <p:txBody>
+          <a:bodyPr/>
+          <a:lstStyle/>
+          <a:p>
+            <a:fld id="{F7021451-1387-4CA6-816F-3879F97B5CBC}" type="slidenum">
+              <a:rPr lang="en-US"/>
+              <a:t>19</a:t>
             </a:fld>
             <a:endParaRPr lang="en-US"/>
           </a:p>
@@ -1655,7 +1929,7 @@
           <a:p>
             <a:r>
               <a:rPr lang="en-US" dirty="0"/>
-              <a:t>Drei Botschaften: 1) Das Aussehen sagt nichts über den Aufwand. 2) Eine Freestyle-App ist eigene Software, für die wir den kompletten Lebenszyklus tragen. 3) Mein Vorschlag: Fiori Elements ist der Standard, Freestyle die begründete Ausnahme.</a:t>
+              <a:t>Drei Botschaften: 1) Das Aussehen sagt nichts über den Aufwand. 2) Eine Freestyle-App ist eigene Software, für die wir den kompletten Lebenszyklus tragen. 3) Es geht nicht um Entweder-oder: Am Ende werden unsere Anwendungen Kombinationen sein – Fiori Elements, wo der Standard trägt, Freestyle gezielt dort, wo ein Ablauf es wirklich braucht.</a:t>
             </a:r>
             <a:endParaRPr lang="en-US" dirty="0"/>
           </a:p>
@@ -4063,7 +4337,7 @@
                   <a:schemeClr val="tx1"/>
                 </a:solidFill>
               </a:rPr>
-              <a:t>Bedienung mit Handschuh, am Tablet oder Handscanner</a:t>
+              <a:t>Bedienung mit Handschuh, am Handheld oder Tablet</a:t>
             </a:r>
             <a:endParaRPr lang="en-US" sz="1400" dirty="0"/>
           </a:p>
@@ -4477,7 +4751,7 @@
                   <a:schemeClr val="tx1"/>
                 </a:solidFill>
               </a:rPr>
-              <a:t>Per Handscanner oder Kamera, Fokus springt automatisch weiter</a:t>
+              <a:t>Handheld mit eingebautem Scanner, Fokus springt automatisch weiter</a:t>
             </a:r>
             <a:endParaRPr lang="en-US" sz="1400" dirty="0"/>
           </a:p>
@@ -5137,7 +5411,7 @@
       </p:sp>
       <p:sp>
         <p:nvSpPr>
-          <p:cNvPr id="15" name="Scanner &amp; Kamera Kreis"/>
+          <p:cNvPr id="15" name="Handheld-Scanner Kreis"/>
           <p:cNvSpPr/>
           <p:nvPr/>
         </p:nvSpPr>
@@ -5157,7 +5431,7 @@
       </p:sp>
       <p:pic>
         <p:nvPicPr>
-          <p:cNvPr id="16" name="Scanner &amp; Kamera Icon" descr="Scanner &amp; Kamera">    </p:cNvPr>
+          <p:cNvPr id="16" name="Handheld-Scanner Icon" descr="Handheld-Scanner">    </p:cNvPr>
           <p:cNvPicPr>
             <a:picLocks noChangeAspect="1"/>
           </p:cNvPicPr>
@@ -5209,7 +5483,7 @@
                   <a:schemeClr val="tx1"/>
                 </a:solidFill>
               </a:rPr>
-              <a:t>Scanner &amp; Kamera</a:t>
+              <a:t>Handheld-Scanner</a:t>
             </a:r>
             <a:endParaRPr lang="en-US" sz="1800" dirty="0"/>
           </a:p>
@@ -5245,7 +5519,7 @@
                   <a:schemeClr val="tx1"/>
                 </a:solidFill>
               </a:rPr>
-              <a:t>Handscanner funktionieren in jedem Eingabefeld. Kamera-Scan über den UI5-Scanner-Baustein als kleine Erweiterung.</a:t>
+              <a:t>Unsere Handheld-Scanner arbeiten wie eine Tastatur – sie funktionieren in jedem Eingabefeld. Kamera-Scan wäre eine kleine Erweiterung.</a:t>
             </a:r>
             <a:endParaRPr lang="en-US" sz="1400" dirty="0"/>
           </a:p>
@@ -5727,7 +6001,7 @@
                   <a:schemeClr val="tx1"/>
                 </a:solidFill>
               </a:rPr>
-              <a:t>Layout folgt festen Floorplans – Buttons nicht frei platzierbar</a:t>
+              <a:t>Feste Floorplans, kein eigenes CSS – Buttons nicht frei platzierbar</a:t>
             </a:r>
             <a:endParaRPr lang="en-US" sz="1500" dirty="0"/>
           </a:p>
@@ -5745,7 +6019,7 @@
                   <a:schemeClr val="tx1"/>
                 </a:solidFill>
               </a:rPr>
-              <a:t>Kein eigenes CSS vorgesehen, Aussehen nur über Theme</a:t>
+              <a:t>Auf kleinen Handheld-Displays wirken Filterleiste und Tabellen schnell überladen</a:t>
             </a:r>
             <a:endParaRPr lang="en-US" sz="1500" dirty="0"/>
           </a:p>
@@ -5764,24 +6038,6 @@
                 </a:solidFill>
               </a:rPr>
               <a:t>Kamera-Scan, Fokus-Sprung und Auto-Bestätigen brauchen eine Erweiterung (UI5-Scanner-Baustein in eigenem Abschnitt)</a:t>
-            </a:r>
-            <a:endParaRPr lang="en-US" sz="1500" dirty="0"/>
-          </a:p>
-          <a:p>
-            <a:pPr marL="342900" indent="-342900">
-              <a:spcAft>
-                <a:spcPts val="800"/>
-              </a:spcAft>
-              <a:buSzPct val="100000"/>
-              <a:buChar char="•"/>
-            </a:pPr>
-            <a:r>
-              <a:rPr lang="en-US" sz="1500" dirty="0">
-                <a:solidFill>
-                  <a:schemeClr val="tx1"/>
-                </a:solidFill>
-              </a:rPr>
-              <a:t>Kein Offline-Betrieb</a:t>
             </a:r>
             <a:endParaRPr lang="en-US" sz="1500" dirty="0"/>
           </a:p>
@@ -5963,24 +6219,6 @@
             </a:r>
             <a:endParaRPr lang="en-US" sz="1500" dirty="0"/>
           </a:p>
-          <a:p>
-            <a:pPr marL="342900" indent="-342900">
-              <a:spcAft>
-                <a:spcPts val="800"/>
-              </a:spcAft>
-              <a:buSzPct val="100000"/>
-              <a:buChar char="•"/>
-            </a:pPr>
-            <a:r>
-              <a:rPr lang="en-US" sz="1500" dirty="0">
-                <a:solidFill>
-                  <a:schemeClr val="tx1"/>
-                </a:solidFill>
-              </a:rPr>
-              <a:t>Kein Offline-Betrieb ohne erheblichen Zusatzaufwand</a:t>
-            </a:r>
-            <a:endParaRPr lang="en-US" sz="1500" dirty="0"/>
-          </a:p>
         </p:txBody>
       </p:sp>
       <p:sp>
@@ -6024,7 +6262,7 @@
                   <a:schemeClr val="tx1"/>
                 </a:solidFill>
               </a:rPr>
-              <a:t>Kamera-Zugriff im Browser nur über HTTPS. Bei hohen Scan-Mengen ist ein Handscanner deutlich schneller als die Kamera.</a:t>
+              <a:t>Unsere Handheld-Scanner funktionieren in beiden Varianten. Offline-Betrieb geht mit keiner der beiden ohne Weiteres.</a:t>
             </a:r>
             <a:endParaRPr lang="en-US" sz="1400" dirty="0"/>
           </a:p>
@@ -6223,7 +6461,7 @@
                 <a:gridCol w="4206240"/>
                 <a:gridCol w="3840480"/>
               </a:tblGrid>
-              <a:tr h="566928">
+              <a:tr h="640080">
                 <a:tc>
                   <a:txBody>
                     <a:bodyPr/>
@@ -6429,7 +6667,7 @@
                   </a:tcPr>
                 </a:tc>
               </a:tr>
-              <a:tr h="566928">
+              <a:tr h="640080">
                 <a:tc>
                   <a:txBody>
                     <a:bodyPr/>
@@ -6635,7 +6873,7 @@
                   </a:tcPr>
                 </a:tc>
               </a:tr>
-              <a:tr h="566928">
+              <a:tr h="640080">
                 <a:tc>
                   <a:txBody>
                     <a:bodyPr/>
@@ -6841,213 +7079,7 @@
                   </a:tcPr>
                 </a:tc>
               </a:tr>
-              <a:tr h="566928">
-                <a:tc>
-                  <a:txBody>
-                    <a:bodyPr/>
-                    <a:lstStyle/>
-                    <a:p>
-                      <a:pPr indent="0" marL="0">
-                        <a:buNone/>
-                      </a:pPr>
-                      <a:r>
-                        <a:rPr lang="en-US" sz="1500" b="1" dirty="0">
-                          <a:solidFill>
-                            <a:srgbClr val="1B2B34"/>
-                          </a:solidFill>
-                          <a:latin typeface="Calibri" pitchFamily="34" charset="0"/>
-                          <a:ea typeface="Calibri" pitchFamily="34" charset="-122"/>
-                          <a:cs typeface="Calibri" pitchFamily="34" charset="-120"/>
-                        </a:rPr>
-                        <a:t>Gelegentlicher Kamera-Scan</a:t>
-                      </a:r>
-                      <a:endParaRPr lang="en-US" sz="1500" dirty="0">
-                        <a:latin typeface="Calibri" charset="0"/>
-                        <a:ea typeface="Calibri" charset="0"/>
-                        <a:cs typeface="Calibri" charset="0"/>
-                      </a:endParaRPr>
-                    </a:p>
-                  </a:txBody>
-                  <a:tcPr marL="91440" marR="91440" marT="45720" marB="45720" anchor="ctr">
-                    <a:lnL w="9525" cap="flat" cmpd="sng" algn="ctr">
-                      <a:solidFill>
-                        <a:srgbClr val="D5DDE0"/>
-                      </a:solidFill>
-                      <a:prstDash val="solid"/>
-                      <a:round/>
-                      <a:headEnd type="none" w="med" len="med"/>
-                      <a:tailEnd type="none" w="med" len="med"/>
-                    </a:lnL>
-                    <a:lnR w="9525" cap="flat" cmpd="sng" algn="ctr">
-                      <a:solidFill>
-                        <a:srgbClr val="D5DDE0"/>
-                      </a:solidFill>
-                      <a:prstDash val="solid"/>
-                      <a:round/>
-                      <a:headEnd type="none" w="med" len="med"/>
-                      <a:tailEnd type="none" w="med" len="med"/>
-                    </a:lnR>
-                    <a:lnT w="9525" cap="flat" cmpd="sng" algn="ctr">
-                      <a:solidFill>
-                        <a:srgbClr val="D5DDE0"/>
-                      </a:solidFill>
-                      <a:prstDash val="solid"/>
-                      <a:round/>
-                      <a:headEnd type="none" w="med" len="med"/>
-                      <a:tailEnd type="none" w="med" len="med"/>
-                    </a:lnT>
-                    <a:lnB w="9525" cap="flat" cmpd="sng" algn="ctr">
-                      <a:solidFill>
-                        <a:srgbClr val="D5DDE0"/>
-                      </a:solidFill>
-                      <a:prstDash val="solid"/>
-                      <a:round/>
-                      <a:headEnd type="none" w="med" len="med"/>
-                      <a:tailEnd type="none" w="med" len="med"/>
-                    </a:lnB>
-                    <a:solidFill>
-                      <a:srgbClr val="FFFFFF"/>
-                    </a:solidFill>
-                  </a:tcPr>
-                </a:tc>
-                <a:tc>
-                  <a:txBody>
-                    <a:bodyPr/>
-                    <a:lstStyle/>
-                    <a:p>
-                      <a:pPr indent="0" marL="0">
-                        <a:buNone/>
-                      </a:pPr>
-                      <a:r>
-                        <a:rPr lang="en-US" sz="1500" dirty="0">
-                          <a:solidFill>
-                            <a:srgbClr val="1B2B34"/>
-                          </a:solidFill>
-                          <a:latin typeface="Calibri" pitchFamily="34" charset="0"/>
-                          <a:ea typeface="Calibri" pitchFamily="34" charset="-122"/>
-                          <a:cs typeface="Calibri" pitchFamily="34" charset="-120"/>
-                        </a:rPr>
-                        <a:t>Material oder Charge per Handy-Kamera erfassen</a:t>
-                      </a:r>
-                      <a:endParaRPr lang="en-US" sz="1500" dirty="0">
-                        <a:latin typeface="Calibri" charset="0"/>
-                        <a:ea typeface="Calibri" charset="0"/>
-                        <a:cs typeface="Calibri" charset="0"/>
-                      </a:endParaRPr>
-                    </a:p>
-                  </a:txBody>
-                  <a:tcPr marL="91440" marR="91440" marT="45720" marB="45720" anchor="ctr">
-                    <a:lnL w="9525" cap="flat" cmpd="sng" algn="ctr">
-                      <a:solidFill>
-                        <a:srgbClr val="D5DDE0"/>
-                      </a:solidFill>
-                      <a:prstDash val="solid"/>
-                      <a:round/>
-                      <a:headEnd type="none" w="med" len="med"/>
-                      <a:tailEnd type="none" w="med" len="med"/>
-                    </a:lnL>
-                    <a:lnR w="9525" cap="flat" cmpd="sng" algn="ctr">
-                      <a:solidFill>
-                        <a:srgbClr val="D5DDE0"/>
-                      </a:solidFill>
-                      <a:prstDash val="solid"/>
-                      <a:round/>
-                      <a:headEnd type="none" w="med" len="med"/>
-                      <a:tailEnd type="none" w="med" len="med"/>
-                    </a:lnR>
-                    <a:lnT w="9525" cap="flat" cmpd="sng" algn="ctr">
-                      <a:solidFill>
-                        <a:srgbClr val="D5DDE0"/>
-                      </a:solidFill>
-                      <a:prstDash val="solid"/>
-                      <a:round/>
-                      <a:headEnd type="none" w="med" len="med"/>
-                      <a:tailEnd type="none" w="med" len="med"/>
-                    </a:lnT>
-                    <a:lnB w="9525" cap="flat" cmpd="sng" algn="ctr">
-                      <a:solidFill>
-                        <a:srgbClr val="D5DDE0"/>
-                      </a:solidFill>
-                      <a:prstDash val="solid"/>
-                      <a:round/>
-                      <a:headEnd type="none" w="med" len="med"/>
-                      <a:tailEnd type="none" w="med" len="med"/>
-                    </a:lnB>
-                    <a:solidFill>
-                      <a:srgbClr val="FFFFFF"/>
-                    </a:solidFill>
-                  </a:tcPr>
-                </a:tc>
-                <a:tc>
-                  <a:txBody>
-                    <a:bodyPr/>
-                    <a:lstStyle/>
-                    <a:p>
-                      <a:pPr indent="0" marL="0">
-                        <a:buNone/>
-                      </a:pPr>
-                      <a:r>
-                        <a:rPr lang="en-US" sz="1500" b="1" dirty="0">
-                          <a:solidFill>
-                            <a:srgbClr val="1F8A70"/>
-                          </a:solidFill>
-                          <a:latin typeface="Calibri" pitchFamily="34" charset="0"/>
-                          <a:ea typeface="Calibri" pitchFamily="34" charset="-122"/>
-                          <a:cs typeface="Calibri" pitchFamily="34" charset="-120"/>
-                        </a:rPr>
-                        <a:t>Fiori Elements + Scanner-Erweiterung</a:t>
-                      </a:r>
-                      <a:endParaRPr lang="en-US" sz="1500" dirty="0">
-                        <a:latin typeface="Calibri" charset="0"/>
-                        <a:ea typeface="Calibri" charset="0"/>
-                        <a:cs typeface="Calibri" charset="0"/>
-                      </a:endParaRPr>
-                    </a:p>
-                  </a:txBody>
-                  <a:tcPr marL="91440" marR="91440" marT="45720" marB="45720" anchor="ctr">
-                    <a:lnL w="9525" cap="flat" cmpd="sng" algn="ctr">
-                      <a:solidFill>
-                        <a:srgbClr val="D5DDE0"/>
-                      </a:solidFill>
-                      <a:prstDash val="solid"/>
-                      <a:round/>
-                      <a:headEnd type="none" w="med" len="med"/>
-                      <a:tailEnd type="none" w="med" len="med"/>
-                    </a:lnL>
-                    <a:lnR w="9525" cap="flat" cmpd="sng" algn="ctr">
-                      <a:solidFill>
-                        <a:srgbClr val="D5DDE0"/>
-                      </a:solidFill>
-                      <a:prstDash val="solid"/>
-                      <a:round/>
-                      <a:headEnd type="none" w="med" len="med"/>
-                      <a:tailEnd type="none" w="med" len="med"/>
-                    </a:lnR>
-                    <a:lnT w="9525" cap="flat" cmpd="sng" algn="ctr">
-                      <a:solidFill>
-                        <a:srgbClr val="D5DDE0"/>
-                      </a:solidFill>
-                      <a:prstDash val="solid"/>
-                      <a:round/>
-                      <a:headEnd type="none" w="med" len="med"/>
-                      <a:tailEnd type="none" w="med" len="med"/>
-                    </a:lnT>
-                    <a:lnB w="9525" cap="flat" cmpd="sng" algn="ctr">
-                      <a:solidFill>
-                        <a:srgbClr val="D5DDE0"/>
-                      </a:solidFill>
-                      <a:prstDash val="solid"/>
-                      <a:round/>
-                      <a:headEnd type="none" w="med" len="med"/>
-                      <a:tailEnd type="none" w="med" len="med"/>
-                    </a:lnB>
-                    <a:solidFill>
-                      <a:srgbClr val="FFFFFF"/>
-                    </a:solidFill>
-                  </a:tcPr>
-                </a:tc>
-              </a:tr>
-              <a:tr h="566928">
+              <a:tr h="640080">
                 <a:tc>
                   <a:txBody>
                     <a:bodyPr/>
@@ -7253,7 +7285,7 @@
                   </a:tcPr>
                 </a:tc>
               </a:tr>
-              <a:tr h="566928">
+              <a:tr h="640080">
                 <a:tc>
                   <a:txBody>
                     <a:bodyPr/>
@@ -7271,7 +7303,7 @@
                           <a:ea typeface="Calibri" pitchFamily="34" charset="-122"/>
                           <a:cs typeface="Calibri" pitchFamily="34" charset="-120"/>
                         </a:rPr>
-                        <a:t>Scan-getriebener Schnellablauf</a:t>
+                        <a:t>Scan-Ablauf am Handheld</a:t>
                       </a:r>
                       <a:endParaRPr lang="en-US" sz="1500" dirty="0">
                         <a:latin typeface="Calibri" charset="0"/>
@@ -7459,7 +7491,7 @@
                   </a:tcPr>
                 </a:tc>
               </a:tr>
-              <a:tr h="566928">
+              <a:tr h="640080">
                 <a:tc>
                   <a:txBody>
                     <a:bodyPr/>
@@ -7807,7 +7839,7 @@
                   <a:schemeClr val="tx2"/>
                 </a:solidFill>
               </a:rPr>
-              <a:t>Leitplanke: erst Standard, dann Ausnahme</a:t>
+              <a:t>Warehouse: eine Anwendung, zwei Technologien</a:t>
             </a:r>
             <a:endParaRPr lang="en-US" sz="3400" dirty="0"/>
           </a:p>
@@ -7815,18 +7847,148 @@
       </p:sp>
       <p:sp>
         <p:nvSpPr>
-          <p:cNvPr id="3" name="Stufe 1"/>
+          <p:cNvPr id="3" name="Text 1"/>
+          <p:cNvSpPr txBox="1"/>
+          <p:nvPr/>
+        </p:nvSpPr>
+        <p:spPr>
+          <a:xfrm>
+            <a:off x="548640" y="1234440"/>
+            <a:ext cx="11064240" cy="365760"/>
+          </a:xfrm>
+          <a:prstGeom prst="rect">
+            <a:avLst/>
+          </a:prstGeom>
+          <a:noFill/>
+          <a:ln/>
+        </p:spPr>
+        <p:txBody>
+          <a:bodyPr wrap="square" lIns="0" tIns="0" rIns="0" bIns="0" rtlCol="0" anchor="ctr"/>
+          <a:lstStyle/>
+          <a:p>
+            <a:pPr indent="0" marL="0">
+              <a:buNone/>
+            </a:pPr>
+            <a:r>
+              <a:rPr lang="en-US" sz="1600" dirty="0">
+                <a:solidFill>
+                  <a:schemeClr val="accent4"/>
+                </a:solidFill>
+              </a:rPr>
+              <a:t>Wareneingang: Die Logik liegt einmal im Backend – jede Oberfläche ist für ihre Nutzer gebaut.</a:t>
+            </a:r>
+            <a:endParaRPr lang="en-US" sz="1600" dirty="0"/>
+          </a:p>
+        </p:txBody>
+      </p:sp>
+      <p:sp>
+        <p:nvSpPr>
+          <p:cNvPr id="4" name="Lagerleitung Kreis"/>
           <p:cNvSpPr/>
           <p:nvPr/>
         </p:nvSpPr>
         <p:spPr>
           <a:xfrm>
-            <a:off x="548640" y="1463040"/>
-            <a:ext cx="3474720" cy="2743200"/>
+            <a:off x="548640" y="1783080"/>
+            <a:ext cx="548640" cy="548640"/>
+          </a:xfrm>
+          <a:prstGeom prst="ellipse">
+            <a:avLst/>
+          </a:prstGeom>
+          <a:solidFill>
+            <a:schemeClr val="tx2"/>
+          </a:solidFill>
+          <a:ln/>
+        </p:spPr>
+      </p:sp>
+      <p:pic>
+        <p:nvPicPr>
+          <p:cNvPr id="5" name="Lagerleitung Icon" descr="Lagerleitung">    </p:cNvPr>
+          <p:cNvPicPr>
+            <a:picLocks noChangeAspect="1"/>
+          </p:cNvPicPr>
+          <p:nvPr/>
+        </p:nvPicPr>
+        <p:blipFill>
+          <a:blip r:embed="rId1"/>
+          <a:stretch>
+            <a:fillRect/>
+          </a:stretch>
+        </p:blipFill>
+        <p:spPr>
+          <a:xfrm>
+            <a:off x="685800" y="1920240"/>
+            <a:ext cx="274320" cy="274320"/>
+          </a:xfrm>
+          <a:prstGeom prst="rect">
+            <a:avLst/>
+          </a:prstGeom>
+        </p:spPr>
+      </p:pic>
+      <p:sp>
+        <p:nvSpPr>
+          <p:cNvPr id="6" name="Text 3"/>
+          <p:cNvSpPr txBox="1"/>
+          <p:nvPr/>
+        </p:nvSpPr>
+        <p:spPr>
+          <a:xfrm>
+            <a:off x="1234440" y="1737360"/>
+            <a:ext cx="2788920" cy="640080"/>
+          </a:xfrm>
+          <a:prstGeom prst="rect">
+            <a:avLst/>
+          </a:prstGeom>
+          <a:noFill/>
+          <a:ln/>
+        </p:spPr>
+        <p:txBody>
+          <a:bodyPr wrap="square" lIns="0" tIns="0" rIns="0" bIns="0" rtlCol="0" anchor="ctr"/>
+          <a:lstStyle/>
+          <a:p>
+            <a:pPr indent="0" marL="0">
+              <a:buNone/>
+            </a:pPr>
+            <a:r>
+              <a:rPr lang="en-US" sz="1400" b="1" dirty="0">
+                <a:solidFill>
+                  <a:schemeClr val="tx1"/>
+                </a:solidFill>
+              </a:rPr>
+              <a:t>Lagerleitung</a:t>
+            </a:r>
+            <a:endParaRPr lang="en-US" sz="1400" dirty="0"/>
+          </a:p>
+          <a:p>
+            <a:pPr indent="0" marL="0">
+              <a:buNone/>
+            </a:pPr>
+            <a:r>
+              <a:rPr lang="en-US" sz="1400" dirty="0">
+                <a:solidFill>
+                  <a:schemeClr val="accent4"/>
+                </a:solidFill>
+              </a:rPr>
+              <a:t>PC im Büro</a:t>
+            </a:r>
+            <a:endParaRPr lang="en-US" sz="1400" dirty="0"/>
+          </a:p>
+        </p:txBody>
+      </p:sp>
+      <p:sp>
+        <p:nvSpPr>
+          <p:cNvPr id="7" name="App Wareneingänge im Blick"/>
+          <p:cNvSpPr/>
+          <p:nvPr/>
+        </p:nvSpPr>
+        <p:spPr>
+          <a:xfrm>
+            <a:off x="548640" y="2560320"/>
+            <a:ext cx="3474720" cy="2331720"/>
           </a:xfrm>
           <a:prstGeom prst="roundRect">
             <a:avLst>
-              <a:gd name="adj" fmla="val 4000"/>
+              <a:gd name="adj" fmla="val 4706"/>
             </a:avLst>
           </a:prstGeom>
           <a:solidFill>
@@ -7837,17 +7999,19 @@
       </p:sp>
       <p:sp>
         <p:nvSpPr>
-          <p:cNvPr id="4" name="Stufe 1 Nummer"/>
+          <p:cNvPr id="8" name="Technik Wareneingänge im Blick"/>
           <p:cNvSpPr/>
           <p:nvPr/>
         </p:nvSpPr>
         <p:spPr>
           <a:xfrm>
-            <a:off x="822960" y="1691640"/>
-            <a:ext cx="640080" cy="640080"/>
-          </a:xfrm>
-          <a:prstGeom prst="ellipse">
-            <a:avLst/>
+            <a:off x="777240" y="2743200"/>
+            <a:ext cx="1645920" cy="347472"/>
+          </a:xfrm>
+          <a:prstGeom prst="roundRect">
+            <a:avLst>
+              <a:gd name="adj" fmla="val 21053"/>
+            </a:avLst>
           </a:prstGeom>
           <a:solidFill>
             <a:schemeClr val="accent1"/>
@@ -7857,14 +8021,14 @@
       </p:sp>
       <p:sp>
         <p:nvSpPr>
-          <p:cNvPr id="5" name="Text 3"/>
+          <p:cNvPr id="9" name="Text 6"/>
           <p:cNvSpPr txBox="1"/>
           <p:nvPr/>
         </p:nvSpPr>
         <p:spPr>
           <a:xfrm>
-            <a:off x="822960" y="1691640"/>
-            <a:ext cx="640080" cy="640080"/>
+            <a:off x="777240" y="2743200"/>
+            <a:ext cx="1645920" cy="347472"/>
           </a:xfrm>
           <a:prstGeom prst="rect">
             <a:avLst/>
@@ -7880,27 +8044,27 @@
               <a:buNone/>
             </a:pPr>
             <a:r>
-              <a:rPr lang="en-US" sz="2400" b="1" dirty="0">
+              <a:rPr lang="en-US" sz="1200" b="1" dirty="0">
                 <a:solidFill>
                   <a:schemeClr val="bg1"/>
                 </a:solidFill>
               </a:rPr>
-              <a:t>1</a:t>
-            </a:r>
-            <a:endParaRPr lang="en-US" sz="2400" dirty="0"/>
-          </a:p>
-        </p:txBody>
-      </p:sp>
-      <p:sp>
-        <p:nvSpPr>
-          <p:cNvPr id="6" name="Text 4"/>
+              <a:t>Fiori Elements</a:t>
+            </a:r>
+            <a:endParaRPr lang="en-US" sz="1200" dirty="0"/>
+          </a:p>
+        </p:txBody>
+      </p:sp>
+      <p:sp>
+        <p:nvSpPr>
+          <p:cNvPr id="10" name="Text 7"/>
           <p:cNvSpPr txBox="1"/>
           <p:nvPr/>
         </p:nvSpPr>
         <p:spPr>
           <a:xfrm>
-            <a:off x="822960" y="2468880"/>
-            <a:ext cx="2926080" cy="457200"/>
+            <a:off x="777240" y="3200400"/>
+            <a:ext cx="3017520" cy="411480"/>
           </a:xfrm>
           <a:prstGeom prst="rect">
             <a:avLst/>
@@ -7916,27 +8080,27 @@
               <a:buNone/>
             </a:pPr>
             <a:r>
-              <a:rPr lang="en-US" sz="1900" b="1" dirty="0">
-                <a:solidFill>
-                  <a:schemeClr val="accent1"/>
-                </a:solidFill>
-              </a:rPr>
-              <a:t>Fiori Elements</a:t>
-            </a:r>
-            <a:endParaRPr lang="en-US" sz="1900" dirty="0"/>
-          </a:p>
-        </p:txBody>
-      </p:sp>
-      <p:sp>
-        <p:nvSpPr>
-          <p:cNvPr id="7" name="Text 5"/>
+              <a:rPr lang="en-US" sz="1800" b="1" dirty="0">
+                <a:solidFill>
+                  <a:schemeClr val="tx1"/>
+                </a:solidFill>
+              </a:rPr>
+              <a:t>Wareneingänge im Blick</a:t>
+            </a:r>
+            <a:endParaRPr lang="en-US" sz="1800" dirty="0"/>
+          </a:p>
+        </p:txBody>
+      </p:sp>
+      <p:sp>
+        <p:nvSpPr>
+          <p:cNvPr id="11" name="Text 8"/>
           <p:cNvSpPr txBox="1"/>
           <p:nvPr/>
         </p:nvSpPr>
         <p:spPr>
           <a:xfrm>
-            <a:off x="822960" y="2971800"/>
-            <a:ext cx="2926080" cy="1097280"/>
+            <a:off x="777240" y="3611880"/>
+            <a:ext cx="3017520" cy="1188720"/>
           </a:xfrm>
           <a:prstGeom prst="rect">
             <a:avLst/>
@@ -7952,29 +8116,29 @@
               <a:buNone/>
             </a:pPr>
             <a:r>
-              <a:rPr lang="en-US" sz="1500" dirty="0">
+              <a:rPr lang="en-US" sz="1400" dirty="0">
                 <a:solidFill>
                   <a:schemeClr val="tx1"/>
                 </a:solidFill>
               </a:rPr>
-              <a:t>mit RAP im Backend. Deckt Liste, Detail, Bearbeiten und Analyse ab.</a:t>
-            </a:r>
-            <a:endParaRPr lang="en-US" sz="1500" dirty="0"/>
-          </a:p>
-        </p:txBody>
-      </p:sp>
-      <p:sp>
-        <p:nvSpPr>
-          <p:cNvPr id="8" name="Pfeil 1"/>
+              <a:t>Liste mit Filter nach Lieferant, Status und Datum. Varianten, Export, Personalisierung inklusive.</a:t>
+            </a:r>
+            <a:endParaRPr lang="en-US" sz="1400" dirty="0"/>
+          </a:p>
+        </p:txBody>
+      </p:sp>
+      <p:sp>
+        <p:nvSpPr>
+          <p:cNvPr id="12" name="Pfeil Wareneingänge im Blick"/>
           <p:cNvSpPr/>
           <p:nvPr/>
         </p:nvSpPr>
         <p:spPr>
           <a:xfrm>
-            <a:off x="4050792" y="2606040"/>
-            <a:ext cx="274320" cy="457200"/>
-          </a:xfrm>
-          <a:prstGeom prst="rightArrow">
+            <a:off x="2103120" y="4956048"/>
+            <a:ext cx="365760" cy="320040"/>
+          </a:xfrm>
+          <a:prstGeom prst="downArrow">
             <a:avLst/>
           </a:prstGeom>
           <a:solidFill>
@@ -7985,18 +8149,112 @@
       </p:sp>
       <p:sp>
         <p:nvSpPr>
-          <p:cNvPr id="9" name="Stufe 2"/>
+          <p:cNvPr id="13" name="Klärung / Qualität Kreis"/>
           <p:cNvSpPr/>
           <p:nvPr/>
         </p:nvSpPr>
         <p:spPr>
           <a:xfrm>
-            <a:off x="4343400" y="1463040"/>
-            <a:ext cx="3474720" cy="2743200"/>
+            <a:off x="4343400" y="1783080"/>
+            <a:ext cx="548640" cy="548640"/>
+          </a:xfrm>
+          <a:prstGeom prst="ellipse">
+            <a:avLst/>
+          </a:prstGeom>
+          <a:solidFill>
+            <a:schemeClr val="tx2"/>
+          </a:solidFill>
+          <a:ln/>
+        </p:spPr>
+      </p:sp>
+      <p:pic>
+        <p:nvPicPr>
+          <p:cNvPr id="14" name="Klärung / Qualität Icon" descr="Klärung / Qualität">    </p:cNvPr>
+          <p:cNvPicPr>
+            <a:picLocks noChangeAspect="1"/>
+          </p:cNvPicPr>
+          <p:nvPr/>
+        </p:nvPicPr>
+        <p:blipFill>
+          <a:blip r:embed="rId2"/>
+          <a:stretch>
+            <a:fillRect/>
+          </a:stretch>
+        </p:blipFill>
+        <p:spPr>
+          <a:xfrm>
+            <a:off x="4480560" y="1920240"/>
+            <a:ext cx="274320" cy="274320"/>
+          </a:xfrm>
+          <a:prstGeom prst="rect">
+            <a:avLst/>
+          </a:prstGeom>
+        </p:spPr>
+      </p:pic>
+      <p:sp>
+        <p:nvSpPr>
+          <p:cNvPr id="15" name="Text 11"/>
+          <p:cNvSpPr txBox="1"/>
+          <p:nvPr/>
+        </p:nvSpPr>
+        <p:spPr>
+          <a:xfrm>
+            <a:off x="5029200" y="1737360"/>
+            <a:ext cx="2788920" cy="640080"/>
+          </a:xfrm>
+          <a:prstGeom prst="rect">
+            <a:avLst/>
+          </a:prstGeom>
+          <a:noFill/>
+          <a:ln/>
+        </p:spPr>
+        <p:txBody>
+          <a:bodyPr wrap="square" lIns="0" tIns="0" rIns="0" bIns="0" rtlCol="0" anchor="ctr"/>
+          <a:lstStyle/>
+          <a:p>
+            <a:pPr indent="0" marL="0">
+              <a:buNone/>
+            </a:pPr>
+            <a:r>
+              <a:rPr lang="en-US" sz="1400" b="1" dirty="0">
+                <a:solidFill>
+                  <a:schemeClr val="tx1"/>
+                </a:solidFill>
+              </a:rPr>
+              <a:t>Klärung / Qualität</a:t>
+            </a:r>
+            <a:endParaRPr lang="en-US" sz="1400" dirty="0"/>
+          </a:p>
+          <a:p>
+            <a:pPr indent="0" marL="0">
+              <a:buNone/>
+            </a:pPr>
+            <a:r>
+              <a:rPr lang="en-US" sz="1400" dirty="0">
+                <a:solidFill>
+                  <a:schemeClr val="accent4"/>
+                </a:solidFill>
+              </a:rPr>
+              <a:t>PC oder Tablet</a:t>
+            </a:r>
+            <a:endParaRPr lang="en-US" sz="1400" dirty="0"/>
+          </a:p>
+        </p:txBody>
+      </p:sp>
+      <p:sp>
+        <p:nvSpPr>
+          <p:cNvPr id="16" name="App Abweichung klären"/>
+          <p:cNvSpPr/>
+          <p:nvPr/>
+        </p:nvSpPr>
+        <p:spPr>
+          <a:xfrm>
+            <a:off x="4343400" y="2560320"/>
+            <a:ext cx="3474720" cy="2331720"/>
           </a:xfrm>
           <a:prstGeom prst="roundRect">
             <a:avLst>
-              <a:gd name="adj" fmla="val 4000"/>
+              <a:gd name="adj" fmla="val 4706"/>
             </a:avLst>
           </a:prstGeom>
           <a:solidFill>
@@ -8007,17 +8265,19 @@
       </p:sp>
       <p:sp>
         <p:nvSpPr>
-          <p:cNvPr id="10" name="Stufe 2 Nummer"/>
+          <p:cNvPr id="17" name="Technik Abweichung klären"/>
           <p:cNvSpPr/>
           <p:nvPr/>
         </p:nvSpPr>
         <p:spPr>
           <a:xfrm>
-            <a:off x="4617720" y="1691640"/>
-            <a:ext cx="640080" cy="640080"/>
-          </a:xfrm>
-          <a:prstGeom prst="ellipse">
-            <a:avLst/>
+            <a:off x="4572000" y="2743200"/>
+            <a:ext cx="1645920" cy="347472"/>
+          </a:xfrm>
+          <a:prstGeom prst="roundRect">
+            <a:avLst>
+              <a:gd name="adj" fmla="val 21053"/>
+            </a:avLst>
           </a:prstGeom>
           <a:solidFill>
             <a:schemeClr val="accent1"/>
@@ -8027,14 +8287,14 @@
       </p:sp>
       <p:sp>
         <p:nvSpPr>
-          <p:cNvPr id="11" name="Text 9"/>
+          <p:cNvPr id="18" name="Text 14"/>
           <p:cNvSpPr txBox="1"/>
           <p:nvPr/>
         </p:nvSpPr>
         <p:spPr>
           <a:xfrm>
-            <a:off x="4617720" y="1691640"/>
-            <a:ext cx="640080" cy="640080"/>
+            <a:off x="4572000" y="2743200"/>
+            <a:ext cx="1645920" cy="347472"/>
           </a:xfrm>
           <a:prstGeom prst="rect">
             <a:avLst/>
@@ -8050,27 +8310,27 @@
               <a:buNone/>
             </a:pPr>
             <a:r>
-              <a:rPr lang="en-US" sz="2400" b="1" dirty="0">
+              <a:rPr lang="en-US" sz="1200" b="1" dirty="0">
                 <a:solidFill>
                   <a:schemeClr val="bg1"/>
                 </a:solidFill>
               </a:rPr>
-              <a:t>2</a:t>
-            </a:r>
-            <a:endParaRPr lang="en-US" sz="2400" dirty="0"/>
-          </a:p>
-        </p:txBody>
-      </p:sp>
-      <p:sp>
-        <p:nvSpPr>
-          <p:cNvPr id="12" name="Text 10"/>
+              <a:t>Fiori Elements</a:t>
+            </a:r>
+            <a:endParaRPr lang="en-US" sz="1200" dirty="0"/>
+          </a:p>
+        </p:txBody>
+      </p:sp>
+      <p:sp>
+        <p:nvSpPr>
+          <p:cNvPr id="19" name="Text 15"/>
           <p:cNvSpPr txBox="1"/>
           <p:nvPr/>
         </p:nvSpPr>
         <p:spPr>
           <a:xfrm>
-            <a:off x="4617720" y="2468880"/>
-            <a:ext cx="2926080" cy="457200"/>
+            <a:off x="4572000" y="3200400"/>
+            <a:ext cx="3017520" cy="411480"/>
           </a:xfrm>
           <a:prstGeom prst="rect">
             <a:avLst/>
@@ -8086,27 +8346,27 @@
               <a:buNone/>
             </a:pPr>
             <a:r>
-              <a:rPr lang="en-US" sz="1900" b="1" dirty="0">
-                <a:solidFill>
-                  <a:schemeClr val="accent1"/>
-                </a:solidFill>
-              </a:rPr>
-              <a:t>Fiori Elements + Erweiterung</a:t>
-            </a:r>
-            <a:endParaRPr lang="en-US" sz="1900" dirty="0"/>
-          </a:p>
-        </p:txBody>
-      </p:sp>
-      <p:sp>
-        <p:nvSpPr>
-          <p:cNvPr id="13" name="Text 11"/>
+              <a:rPr lang="en-US" sz="1800" b="1" dirty="0">
+                <a:solidFill>
+                  <a:schemeClr val="tx1"/>
+                </a:solidFill>
+              </a:rPr>
+              <a:t>Abweichung klären</a:t>
+            </a:r>
+            <a:endParaRPr lang="en-US" sz="1800" dirty="0"/>
+          </a:p>
+        </p:txBody>
+      </p:sp>
+      <p:sp>
+        <p:nvSpPr>
+          <p:cNvPr id="20" name="Text 16"/>
           <p:cNvSpPr txBox="1"/>
           <p:nvPr/>
         </p:nvSpPr>
         <p:spPr>
           <a:xfrm>
-            <a:off x="4617720" y="2971800"/>
-            <a:ext cx="2926080" cy="1097280"/>
+            <a:off x="4572000" y="3611880"/>
+            <a:ext cx="3017520" cy="1188720"/>
           </a:xfrm>
           <a:prstGeom prst="rect">
             <a:avLst/>
@@ -8122,29 +8382,29 @@
               <a:buNone/>
             </a:pPr>
             <a:r>
-              <a:rPr lang="en-US" sz="1500" dirty="0">
+              <a:rPr lang="en-US" sz="1400" dirty="0">
                 <a:solidFill>
                   <a:schemeClr val="tx1"/>
                 </a:solidFill>
               </a:rPr>
-              <a:t>Flexible Programming Model: eigene Abschnitte und Bausteine, wo nötig.</a:t>
-            </a:r>
-            <a:endParaRPr lang="en-US" sz="1500" dirty="0"/>
-          </a:p>
-        </p:txBody>
-      </p:sp>
-      <p:sp>
-        <p:nvSpPr>
-          <p:cNvPr id="14" name="Pfeil 2"/>
+              <a:t>Detailseite mit Positionen, Mengendifferenzen und Aktionen wie „Freigeben“ oder „Sperren“.</a:t>
+            </a:r>
+            <a:endParaRPr lang="en-US" sz="1400" dirty="0"/>
+          </a:p>
+        </p:txBody>
+      </p:sp>
+      <p:sp>
+        <p:nvSpPr>
+          <p:cNvPr id="21" name="Pfeil Abweichung klären"/>
           <p:cNvSpPr/>
           <p:nvPr/>
         </p:nvSpPr>
         <p:spPr>
           <a:xfrm>
-            <a:off x="7845552" y="2606040"/>
-            <a:ext cx="274320" cy="457200"/>
-          </a:xfrm>
-          <a:prstGeom prst="rightArrow">
+            <a:off x="5897880" y="4956048"/>
+            <a:ext cx="365760" cy="320040"/>
+          </a:xfrm>
+          <a:prstGeom prst="downArrow">
             <a:avLst/>
           </a:prstGeom>
           <a:solidFill>
@@ -8155,18 +8415,112 @@
       </p:sp>
       <p:sp>
         <p:nvSpPr>
-          <p:cNvPr id="15" name="Stufe 3"/>
+          <p:cNvPr id="22" name="Lagermitarbeiter Kreis"/>
           <p:cNvSpPr/>
           <p:nvPr/>
         </p:nvSpPr>
         <p:spPr>
           <a:xfrm>
-            <a:off x="8138160" y="1463040"/>
-            <a:ext cx="3474720" cy="2743200"/>
+            <a:off x="8138160" y="1783080"/>
+            <a:ext cx="548640" cy="548640"/>
+          </a:xfrm>
+          <a:prstGeom prst="ellipse">
+            <a:avLst/>
+          </a:prstGeom>
+          <a:solidFill>
+            <a:schemeClr val="tx2"/>
+          </a:solidFill>
+          <a:ln/>
+        </p:spPr>
+      </p:sp>
+      <p:pic>
+        <p:nvPicPr>
+          <p:cNvPr id="23" name="Lagermitarbeiter Icon" descr="Lagermitarbeiter">    </p:cNvPr>
+          <p:cNvPicPr>
+            <a:picLocks noChangeAspect="1"/>
+          </p:cNvPicPr>
+          <p:nvPr/>
+        </p:nvPicPr>
+        <p:blipFill>
+          <a:blip r:embed="rId3"/>
+          <a:stretch>
+            <a:fillRect/>
+          </a:stretch>
+        </p:blipFill>
+        <p:spPr>
+          <a:xfrm>
+            <a:off x="8275320" y="1920240"/>
+            <a:ext cx="274320" cy="274320"/>
+          </a:xfrm>
+          <a:prstGeom prst="rect">
+            <a:avLst/>
+          </a:prstGeom>
+        </p:spPr>
+      </p:pic>
+      <p:sp>
+        <p:nvSpPr>
+          <p:cNvPr id="24" name="Text 19"/>
+          <p:cNvSpPr txBox="1"/>
+          <p:nvPr/>
+        </p:nvSpPr>
+        <p:spPr>
+          <a:xfrm>
+            <a:off x="8823960" y="1737360"/>
+            <a:ext cx="2788920" cy="640080"/>
+          </a:xfrm>
+          <a:prstGeom prst="rect">
+            <a:avLst/>
+          </a:prstGeom>
+          <a:noFill/>
+          <a:ln/>
+        </p:spPr>
+        <p:txBody>
+          <a:bodyPr wrap="square" lIns="0" tIns="0" rIns="0" bIns="0" rtlCol="0" anchor="ctr"/>
+          <a:lstStyle/>
+          <a:p>
+            <a:pPr indent="0" marL="0">
+              <a:buNone/>
+            </a:pPr>
+            <a:r>
+              <a:rPr lang="en-US" sz="1400" b="1" dirty="0">
+                <a:solidFill>
+                  <a:schemeClr val="tx1"/>
+                </a:solidFill>
+              </a:rPr>
+              <a:t>Lagermitarbeiter</a:t>
+            </a:r>
+            <a:endParaRPr lang="en-US" sz="1400" dirty="0"/>
+          </a:p>
+          <a:p>
+            <a:pPr indent="0" marL="0">
+              <a:buNone/>
+            </a:pPr>
+            <a:r>
+              <a:rPr lang="en-US" sz="1400" dirty="0">
+                <a:solidFill>
+                  <a:schemeClr val="accent4"/>
+                </a:solidFill>
+              </a:rPr>
+              <a:t>Handheld mit Scanner</a:t>
+            </a:r>
+            <a:endParaRPr lang="en-US" sz="1400" dirty="0"/>
+          </a:p>
+        </p:txBody>
+      </p:sp>
+      <p:sp>
+        <p:nvSpPr>
+          <p:cNvPr id="25" name="App Scannen &amp; Buchen"/>
+          <p:cNvSpPr/>
+          <p:nvPr/>
+        </p:nvSpPr>
+        <p:spPr>
+          <a:xfrm>
+            <a:off x="8138160" y="2560320"/>
+            <a:ext cx="3474720" cy="2331720"/>
           </a:xfrm>
           <a:prstGeom prst="roundRect">
             <a:avLst>
-              <a:gd name="adj" fmla="val 4000"/>
+              <a:gd name="adj" fmla="val 4706"/>
             </a:avLst>
           </a:prstGeom>
           <a:solidFill>
@@ -8177,17 +8531,19 @@
       </p:sp>
       <p:sp>
         <p:nvSpPr>
-          <p:cNvPr id="16" name="Stufe 3 Nummer"/>
+          <p:cNvPr id="26" name="Technik Scannen &amp; Buchen"/>
           <p:cNvSpPr/>
           <p:nvPr/>
         </p:nvSpPr>
         <p:spPr>
           <a:xfrm>
-            <a:off x="8412480" y="1691640"/>
-            <a:ext cx="640080" cy="640080"/>
-          </a:xfrm>
-          <a:prstGeom prst="ellipse">
-            <a:avLst/>
+            <a:off x="8366760" y="2743200"/>
+            <a:ext cx="1828800" cy="347472"/>
+          </a:xfrm>
+          <a:prstGeom prst="roundRect">
+            <a:avLst>
+              <a:gd name="adj" fmla="val 21053"/>
+            </a:avLst>
           </a:prstGeom>
           <a:solidFill>
             <a:schemeClr val="accent2"/>
@@ -8197,14 +8553,14 @@
       </p:sp>
       <p:sp>
         <p:nvSpPr>
-          <p:cNvPr id="17" name="Text 15"/>
+          <p:cNvPr id="27" name="Text 22"/>
           <p:cNvSpPr txBox="1"/>
           <p:nvPr/>
         </p:nvSpPr>
         <p:spPr>
           <a:xfrm>
-            <a:off x="8412480" y="1691640"/>
-            <a:ext cx="640080" cy="640080"/>
+            <a:off x="8366760" y="2743200"/>
+            <a:ext cx="1828800" cy="347472"/>
           </a:xfrm>
           <a:prstGeom prst="rect">
             <a:avLst/>
@@ -8220,27 +8576,27 @@
               <a:buNone/>
             </a:pPr>
             <a:r>
-              <a:rPr lang="en-US" sz="2400" b="1" dirty="0">
+              <a:rPr lang="en-US" sz="1200" b="1" dirty="0">
                 <a:solidFill>
                   <a:schemeClr val="bg1"/>
                 </a:solidFill>
               </a:rPr>
-              <a:t>3</a:t>
-            </a:r>
-            <a:endParaRPr lang="en-US" sz="2400" dirty="0"/>
-          </a:p>
-        </p:txBody>
-      </p:sp>
-      <p:sp>
-        <p:nvSpPr>
-          <p:cNvPr id="18" name="Text 16"/>
+              <a:t>SAPUI5 Freestyle</a:t>
+            </a:r>
+            <a:endParaRPr lang="en-US" sz="1200" dirty="0"/>
+          </a:p>
+        </p:txBody>
+      </p:sp>
+      <p:sp>
+        <p:nvSpPr>
+          <p:cNvPr id="28" name="Text 23"/>
           <p:cNvSpPr txBox="1"/>
           <p:nvPr/>
         </p:nvSpPr>
         <p:spPr>
           <a:xfrm>
-            <a:off x="8412480" y="2468880"/>
-            <a:ext cx="2926080" cy="457200"/>
+            <a:off x="8366760" y="3200400"/>
+            <a:ext cx="3017520" cy="411480"/>
           </a:xfrm>
           <a:prstGeom prst="rect">
             <a:avLst/>
@@ -8256,27 +8612,27 @@
               <a:buNone/>
             </a:pPr>
             <a:r>
-              <a:rPr lang="en-US" sz="1900" b="1" dirty="0">
-                <a:solidFill>
-                  <a:schemeClr val="accent2"/>
-                </a:solidFill>
-              </a:rPr>
-              <a:t>SAPUI5 Freestyle</a:t>
-            </a:r>
-            <a:endParaRPr lang="en-US" sz="1900" dirty="0"/>
-          </a:p>
-        </p:txBody>
-      </p:sp>
-      <p:sp>
-        <p:nvSpPr>
-          <p:cNvPr id="19" name="Text 17"/>
+              <a:rPr lang="en-US" sz="1800" b="1" dirty="0">
+                <a:solidFill>
+                  <a:schemeClr val="tx1"/>
+                </a:solidFill>
+              </a:rPr>
+              <a:t>Scannen &amp; Buchen</a:t>
+            </a:r>
+            <a:endParaRPr lang="en-US" sz="1800" dirty="0"/>
+          </a:p>
+        </p:txBody>
+      </p:sp>
+      <p:sp>
+        <p:nvSpPr>
+          <p:cNvPr id="29" name="Text 24"/>
           <p:cNvSpPr txBox="1"/>
           <p:nvPr/>
         </p:nvSpPr>
         <p:spPr>
           <a:xfrm>
-            <a:off x="8412480" y="2971800"/>
-            <a:ext cx="2926080" cy="1097280"/>
+            <a:off x="8366760" y="3611880"/>
+            <a:ext cx="3017520" cy="1188720"/>
           </a:xfrm>
           <a:prstGeom prst="rect">
             <a:avLst/>
@@ -8292,12 +8648,101 @@
               <a:buNone/>
             </a:pPr>
             <a:r>
+              <a:rPr lang="en-US" sz="1400" dirty="0">
+                <a:solidFill>
+                  <a:schemeClr val="tx1"/>
+                </a:solidFill>
+              </a:rPr>
+              <a:t>Lieferung scannen → Menge bestätigen → buchen. Große Buttons, Fokus springt weiter, klares Feedback.</a:t>
+            </a:r>
+            <a:endParaRPr lang="en-US" sz="1400" dirty="0"/>
+          </a:p>
+        </p:txBody>
+      </p:sp>
+      <p:sp>
+        <p:nvSpPr>
+          <p:cNvPr id="30" name="Pfeil Scannen &amp; Buchen"/>
+          <p:cNvSpPr/>
+          <p:nvPr/>
+        </p:nvSpPr>
+        <p:spPr>
+          <a:xfrm>
+            <a:off x="9692640" y="4956048"/>
+            <a:ext cx="365760" cy="320040"/>
+          </a:xfrm>
+          <a:prstGeom prst="downArrow">
+            <a:avLst/>
+          </a:prstGeom>
+          <a:solidFill>
+            <a:schemeClr val="accent4"/>
+          </a:solidFill>
+          <a:ln/>
+        </p:spPr>
+      </p:sp>
+      <p:sp>
+        <p:nvSpPr>
+          <p:cNvPr id="31" name="Gemeinsames Backend"/>
+          <p:cNvSpPr/>
+          <p:nvPr/>
+        </p:nvSpPr>
+        <p:spPr>
+          <a:xfrm>
+            <a:off x="548640" y="5349240"/>
+            <a:ext cx="11064240" cy="731520"/>
+          </a:xfrm>
+          <a:prstGeom prst="roundRect">
+            <a:avLst>
+              <a:gd name="adj" fmla="val 12500"/>
+            </a:avLst>
+          </a:prstGeom>
+          <a:solidFill>
+            <a:schemeClr val="tx2"/>
+          </a:solidFill>
+          <a:ln/>
+        </p:spPr>
+      </p:sp>
+      <p:sp>
+        <p:nvSpPr>
+          <p:cNvPr id="32" name="Text 27"/>
+          <p:cNvSpPr txBox="1"/>
+          <p:nvPr/>
+        </p:nvSpPr>
+        <p:spPr>
+          <a:xfrm>
+            <a:off x="777240" y="5349240"/>
+            <a:ext cx="10607040" cy="731520"/>
+          </a:xfrm>
+          <a:prstGeom prst="rect">
+            <a:avLst/>
+          </a:prstGeom>
+          <a:noFill/>
+          <a:ln/>
+        </p:spPr>
+        <p:txBody>
+          <a:bodyPr wrap="square" lIns="0" tIns="0" rIns="0" bIns="0" rtlCol="0" anchor="ctr"/>
+          <a:lstStyle/>
+          <a:p>
+            <a:pPr indent="0" marL="0">
+              <a:buNone/>
+            </a:pPr>
+            <a:r>
+              <a:rPr lang="en-US" sz="1500" b="1" dirty="0">
+                <a:solidFill>
+                  <a:schemeClr val="bg1"/>
+                </a:solidFill>
+              </a:rPr>
+              <a:t>Ein gemeinsames Backend (RAP): </a:t>
+            </a:r>
+            <a:pPr indent="0" marL="0">
+              <a:buNone/>
+            </a:pPr>
+            <a:r>
               <a:rPr lang="en-US" sz="1500" dirty="0">
                 <a:solidFill>
-                  <a:schemeClr val="tx1"/>
-                </a:solidFill>
-              </a:rPr>
-              <a:t>nur mit Begründung, verantwortlichem Owner und Wartungsbudget.</a:t>
+                  <a:schemeClr val="bg1"/>
+                </a:solidFill>
+              </a:rPr>
+              <a:t>Prüfungen, Buchungslogik und Berechtigungen – einmal entwickelt, von allen drei Oberflächen genutzt.</a:t>
             </a:r>
             <a:endParaRPr lang="en-US" sz="1500" dirty="0"/>
           </a:p>
@@ -8305,14 +8750,14 @@
       </p:sp>
       <p:sp>
         <p:nvSpPr>
-          <p:cNvPr id="20" name="Text 18"/>
+          <p:cNvPr id="33" name="Text 28"/>
           <p:cNvSpPr txBox="1"/>
           <p:nvPr/>
         </p:nvSpPr>
         <p:spPr>
           <a:xfrm>
-            <a:off x="548640" y="4526280"/>
-            <a:ext cx="11064240" cy="411480"/>
+            <a:off x="6309360" y="6382512"/>
+            <a:ext cx="4754880" cy="292608"/>
           </a:xfrm>
           <a:prstGeom prst="rect">
             <a:avLst/>
@@ -8324,126 +8769,18 @@
           <a:bodyPr wrap="square" lIns="0" tIns="0" rIns="0" bIns="0" rtlCol="0" anchor="ctr"/>
           <a:lstStyle/>
           <a:p>
-            <a:pPr indent="0" marL="0">
-              <a:buNone/>
-            </a:pPr>
-            <a:r>
-              <a:rPr lang="en-US" sz="1800" b="1" dirty="0">
-                <a:solidFill>
-                  <a:schemeClr val="tx1"/>
-                </a:solidFill>
-              </a:rPr>
-              <a:t>Prüffragen vor jeder Freestyle-Entscheidung</a:t>
-            </a:r>
-            <a:endParaRPr lang="en-US" sz="1800" dirty="0"/>
-          </a:p>
-        </p:txBody>
-      </p:sp>
-      <p:sp>
-        <p:nvSpPr>
-          <p:cNvPr id="21" name="Text 19"/>
-          <p:cNvSpPr txBox="1"/>
-          <p:nvPr/>
-        </p:nvSpPr>
-        <p:spPr>
-          <a:xfrm>
-            <a:off x="548640" y="5029200"/>
-            <a:ext cx="3474720" cy="914400"/>
-          </a:xfrm>
-          <a:prstGeom prst="rect">
-            <a:avLst/>
-          </a:prstGeom>
-          <a:noFill/>
-          <a:ln/>
-        </p:spPr>
-        <p:txBody>
-          <a:bodyPr wrap="square" lIns="0" tIns="0" rIns="0" bIns="0" rtlCol="0" anchor="t"/>
-          <a:lstStyle/>
-          <a:p>
-            <a:pPr indent="0" marL="0">
-              <a:buNone/>
-            </a:pPr>
-            <a:r>
-              <a:rPr lang="en-US" sz="1500" dirty="0">
-                <a:solidFill>
-                  <a:schemeClr val="tx1"/>
-                </a:solidFill>
-              </a:rPr>
-              <a:t>Passt die Anforderung wirklich in keinen Floorplan?</a:t>
-            </a:r>
-            <a:endParaRPr lang="en-US" sz="1500" dirty="0"/>
-          </a:p>
-        </p:txBody>
-      </p:sp>
-      <p:sp>
-        <p:nvSpPr>
-          <p:cNvPr id="22" name="Text 20"/>
-          <p:cNvSpPr txBox="1"/>
-          <p:nvPr/>
-        </p:nvSpPr>
-        <p:spPr>
-          <a:xfrm>
-            <a:off x="4343400" y="5029200"/>
-            <a:ext cx="3474720" cy="914400"/>
-          </a:xfrm>
-          <a:prstGeom prst="rect">
-            <a:avLst/>
-          </a:prstGeom>
-          <a:noFill/>
-          <a:ln/>
-        </p:spPr>
-        <p:txBody>
-          <a:bodyPr wrap="square" lIns="0" tIns="0" rIns="0" bIns="0" rtlCol="0" anchor="t"/>
-          <a:lstStyle/>
-          <a:p>
-            <a:pPr indent="0" marL="0">
-              <a:buNone/>
-            </a:pPr>
-            <a:r>
-              <a:rPr lang="en-US" sz="1500" dirty="0">
-                <a:solidFill>
-                  <a:schemeClr val="tx1"/>
-                </a:solidFill>
-              </a:rPr>
-              <a:t>Wer verantwortet Updates, Tests und Upgrades?</a:t>
-            </a:r>
-            <a:endParaRPr lang="en-US" sz="1500" dirty="0"/>
-          </a:p>
-        </p:txBody>
-      </p:sp>
-      <p:sp>
-        <p:nvSpPr>
-          <p:cNvPr id="23" name="Text 21"/>
-          <p:cNvSpPr txBox="1"/>
-          <p:nvPr/>
-        </p:nvSpPr>
-        <p:spPr>
-          <a:xfrm>
-            <a:off x="8138160" y="5029200"/>
-            <a:ext cx="3474720" cy="914400"/>
-          </a:xfrm>
-          <a:prstGeom prst="rect">
-            <a:avLst/>
-          </a:prstGeom>
-          <a:noFill/>
-          <a:ln/>
-        </p:spPr>
-        <p:txBody>
-          <a:bodyPr wrap="square" lIns="0" tIns="0" rIns="0" bIns="0" rtlCol="0" anchor="t"/>
-          <a:lstStyle/>
-          <a:p>
-            <a:pPr indent="0" marL="0">
-              <a:buNone/>
-            </a:pPr>
-            <a:r>
-              <a:rPr lang="en-US" sz="1500" dirty="0">
-                <a:solidFill>
-                  <a:schemeClr val="tx1"/>
-                </a:solidFill>
-              </a:rPr>
-              <a:t>Ist der Wartungsaufwand für die nächsten Jahre eingeplant?</a:t>
-            </a:r>
-            <a:endParaRPr lang="en-US" sz="1500" dirty="0"/>
+            <a:pPr algn="r" indent="0" marL="0">
+              <a:buNone/>
+            </a:pPr>
+            <a:r>
+              <a:rPr lang="en-US" sz="1100" i="1" dirty="0">
+                <a:solidFill>
+                  <a:schemeClr val="accent4"/>
+                </a:solidFill>
+              </a:rPr>
+              <a:t>Schematisches Beispiel</a:t>
+            </a:r>
+            <a:endParaRPr lang="en-US" sz="1100" dirty="0"/>
           </a:p>
         </p:txBody>
       </p:sp>
@@ -8527,6 +8864,2889 @@
         </p:nvSpPr>
         <p:spPr>
           <a:xfrm>
+            <a:off x="548640" y="365760"/>
+            <a:ext cx="11064240" cy="822960"/>
+          </a:xfrm>
+          <a:prstGeom prst="rect">
+            <a:avLst/>
+          </a:prstGeom>
+          <a:noFill/>
+          <a:ln/>
+        </p:spPr>
+        <p:txBody>
+          <a:bodyPr wrap="square" lIns="0" tIns="0" rIns="0" bIns="0" rtlCol="0" anchor="ctr"/>
+          <a:lstStyle/>
+          <a:p>
+            <a:pPr algn="l" indent="0" marL="0">
+              <a:buNone/>
+            </a:pPr>
+            <a:r>
+              <a:rPr lang="en-US" sz="3400" b="1" dirty="0">
+                <a:solidFill>
+                  <a:schemeClr val="tx2"/>
+                </a:solidFill>
+              </a:rPr>
+              <a:t>Produktion: eine Anwendung, zwei Technologien</a:t>
+            </a:r>
+            <a:endParaRPr lang="en-US" sz="3400" dirty="0"/>
+          </a:p>
+        </p:txBody>
+      </p:sp>
+      <p:sp>
+        <p:nvSpPr>
+          <p:cNvPr id="3" name="Text 1"/>
+          <p:cNvSpPr txBox="1"/>
+          <p:nvPr/>
+        </p:nvSpPr>
+        <p:spPr>
+          <a:xfrm>
+            <a:off x="548640" y="1234440"/>
+            <a:ext cx="11064240" cy="365760"/>
+          </a:xfrm>
+          <a:prstGeom prst="rect">
+            <a:avLst/>
+          </a:prstGeom>
+          <a:noFill/>
+          <a:ln/>
+        </p:spPr>
+        <p:txBody>
+          <a:bodyPr wrap="square" lIns="0" tIns="0" rIns="0" bIns="0" rtlCol="0" anchor="ctr"/>
+          <a:lstStyle/>
+          <a:p>
+            <a:pPr indent="0" marL="0">
+              <a:buNone/>
+            </a:pPr>
+            <a:r>
+              <a:rPr lang="en-US" sz="1600" dirty="0">
+                <a:solidFill>
+                  <a:schemeClr val="accent4"/>
+                </a:solidFill>
+              </a:rPr>
+              <a:t>Rückmeldung von Fertigungsaufträgen: Planung am PC, Rückmeldung direkt an der Linie.</a:t>
+            </a:r>
+            <a:endParaRPr lang="en-US" sz="1600" dirty="0"/>
+          </a:p>
+        </p:txBody>
+      </p:sp>
+      <p:sp>
+        <p:nvSpPr>
+          <p:cNvPr id="4" name="Meister / Planung Kreis"/>
+          <p:cNvSpPr/>
+          <p:nvPr/>
+        </p:nvSpPr>
+        <p:spPr>
+          <a:xfrm>
+            <a:off x="548640" y="1783080"/>
+            <a:ext cx="548640" cy="548640"/>
+          </a:xfrm>
+          <a:prstGeom prst="ellipse">
+            <a:avLst/>
+          </a:prstGeom>
+          <a:solidFill>
+            <a:schemeClr val="tx2"/>
+          </a:solidFill>
+          <a:ln/>
+        </p:spPr>
+      </p:sp>
+      <p:pic>
+        <p:nvPicPr>
+          <p:cNvPr id="5" name="Meister / Planung Icon" descr="Meister / Planung">    </p:cNvPr>
+          <p:cNvPicPr>
+            <a:picLocks noChangeAspect="1"/>
+          </p:cNvPicPr>
+          <p:nvPr/>
+        </p:nvPicPr>
+        <p:blipFill>
+          <a:blip r:embed="rId1"/>
+          <a:stretch>
+            <a:fillRect/>
+          </a:stretch>
+        </p:blipFill>
+        <p:spPr>
+          <a:xfrm>
+            <a:off x="685800" y="1920240"/>
+            <a:ext cx="274320" cy="274320"/>
+          </a:xfrm>
+          <a:prstGeom prst="rect">
+            <a:avLst/>
+          </a:prstGeom>
+        </p:spPr>
+      </p:pic>
+      <p:sp>
+        <p:nvSpPr>
+          <p:cNvPr id="6" name="Text 3"/>
+          <p:cNvSpPr txBox="1"/>
+          <p:nvPr/>
+        </p:nvSpPr>
+        <p:spPr>
+          <a:xfrm>
+            <a:off x="1234440" y="1737360"/>
+            <a:ext cx="2788920" cy="640080"/>
+          </a:xfrm>
+          <a:prstGeom prst="rect">
+            <a:avLst/>
+          </a:prstGeom>
+          <a:noFill/>
+          <a:ln/>
+        </p:spPr>
+        <p:txBody>
+          <a:bodyPr wrap="square" lIns="0" tIns="0" rIns="0" bIns="0" rtlCol="0" anchor="ctr"/>
+          <a:lstStyle/>
+          <a:p>
+            <a:pPr indent="0" marL="0">
+              <a:buNone/>
+            </a:pPr>
+            <a:r>
+              <a:rPr lang="en-US" sz="1400" b="1" dirty="0">
+                <a:solidFill>
+                  <a:schemeClr val="tx1"/>
+                </a:solidFill>
+              </a:rPr>
+              <a:t>Meister / Planung</a:t>
+            </a:r>
+            <a:endParaRPr lang="en-US" sz="1400" dirty="0"/>
+          </a:p>
+          <a:p>
+            <a:pPr indent="0" marL="0">
+              <a:buNone/>
+            </a:pPr>
+            <a:r>
+              <a:rPr lang="en-US" sz="1400" dirty="0">
+                <a:solidFill>
+                  <a:schemeClr val="accent4"/>
+                </a:solidFill>
+              </a:rPr>
+              <a:t>PC im Büro</a:t>
+            </a:r>
+            <a:endParaRPr lang="en-US" sz="1400" dirty="0"/>
+          </a:p>
+        </p:txBody>
+      </p:sp>
+      <p:sp>
+        <p:nvSpPr>
+          <p:cNvPr id="7" name="App Auftragsübersicht"/>
+          <p:cNvSpPr/>
+          <p:nvPr/>
+        </p:nvSpPr>
+        <p:spPr>
+          <a:xfrm>
+            <a:off x="548640" y="2560320"/>
+            <a:ext cx="3474720" cy="2331720"/>
+          </a:xfrm>
+          <a:prstGeom prst="roundRect">
+            <a:avLst>
+              <a:gd name="adj" fmla="val 4706"/>
+            </a:avLst>
+          </a:prstGeom>
+          <a:solidFill>
+            <a:schemeClr val="accent6"/>
+          </a:solidFill>
+          <a:ln/>
+        </p:spPr>
+      </p:sp>
+      <p:sp>
+        <p:nvSpPr>
+          <p:cNvPr id="8" name="Technik Auftragsübersicht"/>
+          <p:cNvSpPr/>
+          <p:nvPr/>
+        </p:nvSpPr>
+        <p:spPr>
+          <a:xfrm>
+            <a:off x="777240" y="2743200"/>
+            <a:ext cx="1645920" cy="347472"/>
+          </a:xfrm>
+          <a:prstGeom prst="roundRect">
+            <a:avLst>
+              <a:gd name="adj" fmla="val 21053"/>
+            </a:avLst>
+          </a:prstGeom>
+          <a:solidFill>
+            <a:schemeClr val="accent1"/>
+          </a:solidFill>
+          <a:ln/>
+        </p:spPr>
+      </p:sp>
+      <p:sp>
+        <p:nvSpPr>
+          <p:cNvPr id="9" name="Text 6"/>
+          <p:cNvSpPr txBox="1"/>
+          <p:nvPr/>
+        </p:nvSpPr>
+        <p:spPr>
+          <a:xfrm>
+            <a:off x="777240" y="2743200"/>
+            <a:ext cx="1645920" cy="347472"/>
+          </a:xfrm>
+          <a:prstGeom prst="rect">
+            <a:avLst/>
+          </a:prstGeom>
+          <a:noFill/>
+          <a:ln/>
+        </p:spPr>
+        <p:txBody>
+          <a:bodyPr wrap="square" lIns="0" tIns="0" rIns="0" bIns="0" rtlCol="0" anchor="ctr"/>
+          <a:lstStyle/>
+          <a:p>
+            <a:pPr algn="ctr" indent="0" marL="0">
+              <a:buNone/>
+            </a:pPr>
+            <a:r>
+              <a:rPr lang="en-US" sz="1200" b="1" dirty="0">
+                <a:solidFill>
+                  <a:schemeClr val="bg1"/>
+                </a:solidFill>
+              </a:rPr>
+              <a:t>Fiori Elements</a:t>
+            </a:r>
+            <a:endParaRPr lang="en-US" sz="1200" dirty="0"/>
+          </a:p>
+        </p:txBody>
+      </p:sp>
+      <p:sp>
+        <p:nvSpPr>
+          <p:cNvPr id="10" name="Text 7"/>
+          <p:cNvSpPr txBox="1"/>
+          <p:nvPr/>
+        </p:nvSpPr>
+        <p:spPr>
+          <a:xfrm>
+            <a:off x="777240" y="3200400"/>
+            <a:ext cx="3017520" cy="411480"/>
+          </a:xfrm>
+          <a:prstGeom prst="rect">
+            <a:avLst/>
+          </a:prstGeom>
+          <a:noFill/>
+          <a:ln/>
+        </p:spPr>
+        <p:txBody>
+          <a:bodyPr wrap="square" lIns="0" tIns="0" rIns="0" bIns="0" rtlCol="0" anchor="ctr"/>
+          <a:lstStyle/>
+          <a:p>
+            <a:pPr indent="0" marL="0">
+              <a:buNone/>
+            </a:pPr>
+            <a:r>
+              <a:rPr lang="en-US" sz="1800" b="1" dirty="0">
+                <a:solidFill>
+                  <a:schemeClr val="tx1"/>
+                </a:solidFill>
+              </a:rPr>
+              <a:t>Auftragsübersicht</a:t>
+            </a:r>
+            <a:endParaRPr lang="en-US" sz="1800" dirty="0"/>
+          </a:p>
+        </p:txBody>
+      </p:sp>
+      <p:sp>
+        <p:nvSpPr>
+          <p:cNvPr id="11" name="Text 8"/>
+          <p:cNvSpPr txBox="1"/>
+          <p:nvPr/>
+        </p:nvSpPr>
+        <p:spPr>
+          <a:xfrm>
+            <a:off x="777240" y="3611880"/>
+            <a:ext cx="3017520" cy="1188720"/>
+          </a:xfrm>
+          <a:prstGeom prst="rect">
+            <a:avLst/>
+          </a:prstGeom>
+          <a:noFill/>
+          <a:ln/>
+        </p:spPr>
+        <p:txBody>
+          <a:bodyPr wrap="square" lIns="0" tIns="0" rIns="0" bIns="0" rtlCol="0" anchor="t"/>
+          <a:lstStyle/>
+          <a:p>
+            <a:pPr indent="0" marL="0">
+              <a:buNone/>
+            </a:pPr>
+            <a:r>
+              <a:rPr lang="en-US" sz="1400" dirty="0">
+                <a:solidFill>
+                  <a:schemeClr val="tx1"/>
+                </a:solidFill>
+              </a:rPr>
+              <a:t>Fertigungsaufträge nach Linie, Status und Termin. Rückstände und Engpässe auf einen Blick.</a:t>
+            </a:r>
+            <a:endParaRPr lang="en-US" sz="1400" dirty="0"/>
+          </a:p>
+        </p:txBody>
+      </p:sp>
+      <p:sp>
+        <p:nvSpPr>
+          <p:cNvPr id="12" name="Pfeil Auftragsübersicht"/>
+          <p:cNvSpPr/>
+          <p:nvPr/>
+        </p:nvSpPr>
+        <p:spPr>
+          <a:xfrm>
+            <a:off x="2103120" y="4956048"/>
+            <a:ext cx="365760" cy="320040"/>
+          </a:xfrm>
+          <a:prstGeom prst="downArrow">
+            <a:avLst/>
+          </a:prstGeom>
+          <a:solidFill>
+            <a:schemeClr val="accent4"/>
+          </a:solidFill>
+          <a:ln/>
+        </p:spPr>
+      </p:sp>
+      <p:sp>
+        <p:nvSpPr>
+          <p:cNvPr id="13" name="Qualität / Meister Kreis"/>
+          <p:cNvSpPr/>
+          <p:nvPr/>
+        </p:nvSpPr>
+        <p:spPr>
+          <a:xfrm>
+            <a:off x="4343400" y="1783080"/>
+            <a:ext cx="548640" cy="548640"/>
+          </a:xfrm>
+          <a:prstGeom prst="ellipse">
+            <a:avLst/>
+          </a:prstGeom>
+          <a:solidFill>
+            <a:schemeClr val="tx2"/>
+          </a:solidFill>
+          <a:ln/>
+        </p:spPr>
+      </p:sp>
+      <p:pic>
+        <p:nvPicPr>
+          <p:cNvPr id="14" name="Qualität / Meister Icon" descr="Qualität / Meister">    </p:cNvPr>
+          <p:cNvPicPr>
+            <a:picLocks noChangeAspect="1"/>
+          </p:cNvPicPr>
+          <p:nvPr/>
+        </p:nvPicPr>
+        <p:blipFill>
+          <a:blip r:embed="rId2"/>
+          <a:stretch>
+            <a:fillRect/>
+          </a:stretch>
+        </p:blipFill>
+        <p:spPr>
+          <a:xfrm>
+            <a:off x="4480560" y="1920240"/>
+            <a:ext cx="274320" cy="274320"/>
+          </a:xfrm>
+          <a:prstGeom prst="rect">
+            <a:avLst/>
+          </a:prstGeom>
+        </p:spPr>
+      </p:pic>
+      <p:sp>
+        <p:nvSpPr>
+          <p:cNvPr id="15" name="Text 11"/>
+          <p:cNvSpPr txBox="1"/>
+          <p:nvPr/>
+        </p:nvSpPr>
+        <p:spPr>
+          <a:xfrm>
+            <a:off x="5029200" y="1737360"/>
+            <a:ext cx="2788920" cy="640080"/>
+          </a:xfrm>
+          <a:prstGeom prst="rect">
+            <a:avLst/>
+          </a:prstGeom>
+          <a:noFill/>
+          <a:ln/>
+        </p:spPr>
+        <p:txBody>
+          <a:bodyPr wrap="square" lIns="0" tIns="0" rIns="0" bIns="0" rtlCol="0" anchor="ctr"/>
+          <a:lstStyle/>
+          <a:p>
+            <a:pPr indent="0" marL="0">
+              <a:buNone/>
+            </a:pPr>
+            <a:r>
+              <a:rPr lang="en-US" sz="1400" b="1" dirty="0">
+                <a:solidFill>
+                  <a:schemeClr val="tx1"/>
+                </a:solidFill>
+              </a:rPr>
+              <a:t>Qualität / Meister</a:t>
+            </a:r>
+            <a:endParaRPr lang="en-US" sz="1400" dirty="0"/>
+          </a:p>
+          <a:p>
+            <a:pPr indent="0" marL="0">
+              <a:buNone/>
+            </a:pPr>
+            <a:r>
+              <a:rPr lang="en-US" sz="1400" dirty="0">
+                <a:solidFill>
+                  <a:schemeClr val="accent4"/>
+                </a:solidFill>
+              </a:rPr>
+              <a:t>PC oder Tablet</a:t>
+            </a:r>
+            <a:endParaRPr lang="en-US" sz="1400" dirty="0"/>
+          </a:p>
+        </p:txBody>
+      </p:sp>
+      <p:sp>
+        <p:nvSpPr>
+          <p:cNvPr id="16" name="App Auftrag &amp; Störung"/>
+          <p:cNvSpPr/>
+          <p:nvPr/>
+        </p:nvSpPr>
+        <p:spPr>
+          <a:xfrm>
+            <a:off x="4343400" y="2560320"/>
+            <a:ext cx="3474720" cy="2331720"/>
+          </a:xfrm>
+          <a:prstGeom prst="roundRect">
+            <a:avLst>
+              <a:gd name="adj" fmla="val 4706"/>
+            </a:avLst>
+          </a:prstGeom>
+          <a:solidFill>
+            <a:schemeClr val="accent6"/>
+          </a:solidFill>
+          <a:ln/>
+        </p:spPr>
+      </p:sp>
+      <p:sp>
+        <p:nvSpPr>
+          <p:cNvPr id="17" name="Technik Auftrag &amp; Störung"/>
+          <p:cNvSpPr/>
+          <p:nvPr/>
+        </p:nvSpPr>
+        <p:spPr>
+          <a:xfrm>
+            <a:off x="4572000" y="2743200"/>
+            <a:ext cx="1645920" cy="347472"/>
+          </a:xfrm>
+          <a:prstGeom prst="roundRect">
+            <a:avLst>
+              <a:gd name="adj" fmla="val 21053"/>
+            </a:avLst>
+          </a:prstGeom>
+          <a:solidFill>
+            <a:schemeClr val="accent1"/>
+          </a:solidFill>
+          <a:ln/>
+        </p:spPr>
+      </p:sp>
+      <p:sp>
+        <p:nvSpPr>
+          <p:cNvPr id="18" name="Text 14"/>
+          <p:cNvSpPr txBox="1"/>
+          <p:nvPr/>
+        </p:nvSpPr>
+        <p:spPr>
+          <a:xfrm>
+            <a:off x="4572000" y="2743200"/>
+            <a:ext cx="1645920" cy="347472"/>
+          </a:xfrm>
+          <a:prstGeom prst="rect">
+            <a:avLst/>
+          </a:prstGeom>
+          <a:noFill/>
+          <a:ln/>
+        </p:spPr>
+        <p:txBody>
+          <a:bodyPr wrap="square" lIns="0" tIns="0" rIns="0" bIns="0" rtlCol="0" anchor="ctr"/>
+          <a:lstStyle/>
+          <a:p>
+            <a:pPr algn="ctr" indent="0" marL="0">
+              <a:buNone/>
+            </a:pPr>
+            <a:r>
+              <a:rPr lang="en-US" sz="1200" b="1" dirty="0">
+                <a:solidFill>
+                  <a:schemeClr val="bg1"/>
+                </a:solidFill>
+              </a:rPr>
+              <a:t>Fiori Elements</a:t>
+            </a:r>
+            <a:endParaRPr lang="en-US" sz="1200" dirty="0"/>
+          </a:p>
+        </p:txBody>
+      </p:sp>
+      <p:sp>
+        <p:nvSpPr>
+          <p:cNvPr id="19" name="Text 15"/>
+          <p:cNvSpPr txBox="1"/>
+          <p:nvPr/>
+        </p:nvSpPr>
+        <p:spPr>
+          <a:xfrm>
+            <a:off x="4572000" y="3200400"/>
+            <a:ext cx="3017520" cy="411480"/>
+          </a:xfrm>
+          <a:prstGeom prst="rect">
+            <a:avLst/>
+          </a:prstGeom>
+          <a:noFill/>
+          <a:ln/>
+        </p:spPr>
+        <p:txBody>
+          <a:bodyPr wrap="square" lIns="0" tIns="0" rIns="0" bIns="0" rtlCol="0" anchor="ctr"/>
+          <a:lstStyle/>
+          <a:p>
+            <a:pPr indent="0" marL="0">
+              <a:buNone/>
+            </a:pPr>
+            <a:r>
+              <a:rPr lang="en-US" sz="1800" b="1" dirty="0">
+                <a:solidFill>
+                  <a:schemeClr val="tx1"/>
+                </a:solidFill>
+              </a:rPr>
+              <a:t>Auftrag &amp; Störung</a:t>
+            </a:r>
+            <a:endParaRPr lang="en-US" sz="1800" dirty="0"/>
+          </a:p>
+        </p:txBody>
+      </p:sp>
+      <p:sp>
+        <p:nvSpPr>
+          <p:cNvPr id="20" name="Text 16"/>
+          <p:cNvSpPr txBox="1"/>
+          <p:nvPr/>
+        </p:nvSpPr>
+        <p:spPr>
+          <a:xfrm>
+            <a:off x="4572000" y="3611880"/>
+            <a:ext cx="3017520" cy="1188720"/>
+          </a:xfrm>
+          <a:prstGeom prst="rect">
+            <a:avLst/>
+          </a:prstGeom>
+          <a:noFill/>
+          <a:ln/>
+        </p:spPr>
+        <p:txBody>
+          <a:bodyPr wrap="square" lIns="0" tIns="0" rIns="0" bIns="0" rtlCol="0" anchor="t"/>
+          <a:lstStyle/>
+          <a:p>
+            <a:pPr indent="0" marL="0">
+              <a:buNone/>
+            </a:pPr>
+            <a:r>
+              <a:rPr lang="en-US" sz="1400" dirty="0">
+                <a:solidFill>
+                  <a:schemeClr val="tx1"/>
+                </a:solidFill>
+              </a:rPr>
+              <a:t>Detailseite mit Vorgängen, Ausschussgründen und Störmeldungen. Störung anlegen per Aktion.</a:t>
+            </a:r>
+            <a:endParaRPr lang="en-US" sz="1400" dirty="0"/>
+          </a:p>
+        </p:txBody>
+      </p:sp>
+      <p:sp>
+        <p:nvSpPr>
+          <p:cNvPr id="21" name="Pfeil Auftrag &amp; Störung"/>
+          <p:cNvSpPr/>
+          <p:nvPr/>
+        </p:nvSpPr>
+        <p:spPr>
+          <a:xfrm>
+            <a:off x="5897880" y="4956048"/>
+            <a:ext cx="365760" cy="320040"/>
+          </a:xfrm>
+          <a:prstGeom prst="downArrow">
+            <a:avLst/>
+          </a:prstGeom>
+          <a:solidFill>
+            <a:schemeClr val="accent4"/>
+          </a:solidFill>
+          <a:ln/>
+        </p:spPr>
+      </p:sp>
+      <p:sp>
+        <p:nvSpPr>
+          <p:cNvPr id="22" name="Werker an der Linie Kreis"/>
+          <p:cNvSpPr/>
+          <p:nvPr/>
+        </p:nvSpPr>
+        <p:spPr>
+          <a:xfrm>
+            <a:off x="8138160" y="1783080"/>
+            <a:ext cx="548640" cy="548640"/>
+          </a:xfrm>
+          <a:prstGeom prst="ellipse">
+            <a:avLst/>
+          </a:prstGeom>
+          <a:solidFill>
+            <a:schemeClr val="tx2"/>
+          </a:solidFill>
+          <a:ln/>
+        </p:spPr>
+      </p:sp>
+      <p:pic>
+        <p:nvPicPr>
+          <p:cNvPr id="23" name="Werker an der Linie Icon" descr="Werker an der Linie">    </p:cNvPr>
+          <p:cNvPicPr>
+            <a:picLocks noChangeAspect="1"/>
+          </p:cNvPicPr>
+          <p:nvPr/>
+        </p:nvPicPr>
+        <p:blipFill>
+          <a:blip r:embed="rId3"/>
+          <a:stretch>
+            <a:fillRect/>
+          </a:stretch>
+        </p:blipFill>
+        <p:spPr>
+          <a:xfrm>
+            <a:off x="8275320" y="1920240"/>
+            <a:ext cx="274320" cy="274320"/>
+          </a:xfrm>
+          <a:prstGeom prst="rect">
+            <a:avLst/>
+          </a:prstGeom>
+        </p:spPr>
+      </p:pic>
+      <p:sp>
+        <p:nvSpPr>
+          <p:cNvPr id="24" name="Text 19"/>
+          <p:cNvSpPr txBox="1"/>
+          <p:nvPr/>
+        </p:nvSpPr>
+        <p:spPr>
+          <a:xfrm>
+            <a:off x="8823960" y="1737360"/>
+            <a:ext cx="2788920" cy="640080"/>
+          </a:xfrm>
+          <a:prstGeom prst="rect">
+            <a:avLst/>
+          </a:prstGeom>
+          <a:noFill/>
+          <a:ln/>
+        </p:spPr>
+        <p:txBody>
+          <a:bodyPr wrap="square" lIns="0" tIns="0" rIns="0" bIns="0" rtlCol="0" anchor="ctr"/>
+          <a:lstStyle/>
+          <a:p>
+            <a:pPr indent="0" marL="0">
+              <a:buNone/>
+            </a:pPr>
+            <a:r>
+              <a:rPr lang="en-US" sz="1400" b="1" dirty="0">
+                <a:solidFill>
+                  <a:schemeClr val="tx1"/>
+                </a:solidFill>
+              </a:rPr>
+              <a:t>Werker an der Linie</a:t>
+            </a:r>
+            <a:endParaRPr lang="en-US" sz="1400" dirty="0"/>
+          </a:p>
+          <a:p>
+            <a:pPr indent="0" marL="0">
+              <a:buNone/>
+            </a:pPr>
+            <a:r>
+              <a:rPr lang="en-US" sz="1400" dirty="0">
+                <a:solidFill>
+                  <a:schemeClr val="accent4"/>
+                </a:solidFill>
+              </a:rPr>
+              <a:t>Terminal oder Handheld</a:t>
+            </a:r>
+            <a:endParaRPr lang="en-US" sz="1400" dirty="0"/>
+          </a:p>
+        </p:txBody>
+      </p:sp>
+      <p:sp>
+        <p:nvSpPr>
+          <p:cNvPr id="25" name="App Rückmelde-Terminal"/>
+          <p:cNvSpPr/>
+          <p:nvPr/>
+        </p:nvSpPr>
+        <p:spPr>
+          <a:xfrm>
+            <a:off x="8138160" y="2560320"/>
+            <a:ext cx="3474720" cy="2331720"/>
+          </a:xfrm>
+          <a:prstGeom prst="roundRect">
+            <a:avLst>
+              <a:gd name="adj" fmla="val 4706"/>
+            </a:avLst>
+          </a:prstGeom>
+          <a:solidFill>
+            <a:schemeClr val="accent5"/>
+          </a:solidFill>
+          <a:ln/>
+        </p:spPr>
+      </p:sp>
+      <p:sp>
+        <p:nvSpPr>
+          <p:cNvPr id="26" name="Technik Rückmelde-Terminal"/>
+          <p:cNvSpPr/>
+          <p:nvPr/>
+        </p:nvSpPr>
+        <p:spPr>
+          <a:xfrm>
+            <a:off x="8366760" y="2743200"/>
+            <a:ext cx="1828800" cy="347472"/>
+          </a:xfrm>
+          <a:prstGeom prst="roundRect">
+            <a:avLst>
+              <a:gd name="adj" fmla="val 21053"/>
+            </a:avLst>
+          </a:prstGeom>
+          <a:solidFill>
+            <a:schemeClr val="accent2"/>
+          </a:solidFill>
+          <a:ln/>
+        </p:spPr>
+      </p:sp>
+      <p:sp>
+        <p:nvSpPr>
+          <p:cNvPr id="27" name="Text 22"/>
+          <p:cNvSpPr txBox="1"/>
+          <p:nvPr/>
+        </p:nvSpPr>
+        <p:spPr>
+          <a:xfrm>
+            <a:off x="8366760" y="2743200"/>
+            <a:ext cx="1828800" cy="347472"/>
+          </a:xfrm>
+          <a:prstGeom prst="rect">
+            <a:avLst/>
+          </a:prstGeom>
+          <a:noFill/>
+          <a:ln/>
+        </p:spPr>
+        <p:txBody>
+          <a:bodyPr wrap="square" lIns="0" tIns="0" rIns="0" bIns="0" rtlCol="0" anchor="ctr"/>
+          <a:lstStyle/>
+          <a:p>
+            <a:pPr algn="ctr" indent="0" marL="0">
+              <a:buNone/>
+            </a:pPr>
+            <a:r>
+              <a:rPr lang="en-US" sz="1200" b="1" dirty="0">
+                <a:solidFill>
+                  <a:schemeClr val="bg1"/>
+                </a:solidFill>
+              </a:rPr>
+              <a:t>SAPUI5 Freestyle</a:t>
+            </a:r>
+            <a:endParaRPr lang="en-US" sz="1200" dirty="0"/>
+          </a:p>
+        </p:txBody>
+      </p:sp>
+      <p:sp>
+        <p:nvSpPr>
+          <p:cNvPr id="28" name="Text 23"/>
+          <p:cNvSpPr txBox="1"/>
+          <p:nvPr/>
+        </p:nvSpPr>
+        <p:spPr>
+          <a:xfrm>
+            <a:off x="8366760" y="3200400"/>
+            <a:ext cx="3017520" cy="411480"/>
+          </a:xfrm>
+          <a:prstGeom prst="rect">
+            <a:avLst/>
+          </a:prstGeom>
+          <a:noFill/>
+          <a:ln/>
+        </p:spPr>
+        <p:txBody>
+          <a:bodyPr wrap="square" lIns="0" tIns="0" rIns="0" bIns="0" rtlCol="0" anchor="ctr"/>
+          <a:lstStyle/>
+          <a:p>
+            <a:pPr indent="0" marL="0">
+              <a:buNone/>
+            </a:pPr>
+            <a:r>
+              <a:rPr lang="en-US" sz="1800" b="1" dirty="0">
+                <a:solidFill>
+                  <a:schemeClr val="tx1"/>
+                </a:solidFill>
+              </a:rPr>
+              <a:t>Rückmelde-Terminal</a:t>
+            </a:r>
+            <a:endParaRPr lang="en-US" sz="1800" dirty="0"/>
+          </a:p>
+        </p:txBody>
+      </p:sp>
+      <p:sp>
+        <p:nvSpPr>
+          <p:cNvPr id="29" name="Text 24"/>
+          <p:cNvSpPr txBox="1"/>
+          <p:nvPr/>
+        </p:nvSpPr>
+        <p:spPr>
+          <a:xfrm>
+            <a:off x="8366760" y="3611880"/>
+            <a:ext cx="3017520" cy="1188720"/>
+          </a:xfrm>
+          <a:prstGeom prst="rect">
+            <a:avLst/>
+          </a:prstGeom>
+          <a:noFill/>
+          <a:ln/>
+        </p:spPr>
+        <p:txBody>
+          <a:bodyPr wrap="square" lIns="0" tIns="0" rIns="0" bIns="0" rtlCol="0" anchor="t"/>
+          <a:lstStyle/>
+          <a:p>
+            <a:pPr indent="0" marL="0">
+              <a:buNone/>
+            </a:pPr>
+            <a:r>
+              <a:rPr lang="en-US" sz="1400" dirty="0">
+                <a:solidFill>
+                  <a:schemeClr val="tx1"/>
+                </a:solidFill>
+              </a:rPr>
+              <a:t>Auftrag scannen → Start / Stopp → Gutmenge und Ausschuss mit großen Buttons melden.</a:t>
+            </a:r>
+            <a:endParaRPr lang="en-US" sz="1400" dirty="0"/>
+          </a:p>
+        </p:txBody>
+      </p:sp>
+      <p:sp>
+        <p:nvSpPr>
+          <p:cNvPr id="30" name="Pfeil Rückmelde-Terminal"/>
+          <p:cNvSpPr/>
+          <p:nvPr/>
+        </p:nvSpPr>
+        <p:spPr>
+          <a:xfrm>
+            <a:off x="9692640" y="4956048"/>
+            <a:ext cx="365760" cy="320040"/>
+          </a:xfrm>
+          <a:prstGeom prst="downArrow">
+            <a:avLst/>
+          </a:prstGeom>
+          <a:solidFill>
+            <a:schemeClr val="accent4"/>
+          </a:solidFill>
+          <a:ln/>
+        </p:spPr>
+      </p:sp>
+      <p:sp>
+        <p:nvSpPr>
+          <p:cNvPr id="31" name="Gemeinsames Backend"/>
+          <p:cNvSpPr/>
+          <p:nvPr/>
+        </p:nvSpPr>
+        <p:spPr>
+          <a:xfrm>
+            <a:off x="548640" y="5349240"/>
+            <a:ext cx="11064240" cy="731520"/>
+          </a:xfrm>
+          <a:prstGeom prst="roundRect">
+            <a:avLst>
+              <a:gd name="adj" fmla="val 12500"/>
+            </a:avLst>
+          </a:prstGeom>
+          <a:solidFill>
+            <a:schemeClr val="tx2"/>
+          </a:solidFill>
+          <a:ln/>
+        </p:spPr>
+      </p:sp>
+      <p:sp>
+        <p:nvSpPr>
+          <p:cNvPr id="32" name="Text 27"/>
+          <p:cNvSpPr txBox="1"/>
+          <p:nvPr/>
+        </p:nvSpPr>
+        <p:spPr>
+          <a:xfrm>
+            <a:off x="777240" y="5349240"/>
+            <a:ext cx="10607040" cy="731520"/>
+          </a:xfrm>
+          <a:prstGeom prst="rect">
+            <a:avLst/>
+          </a:prstGeom>
+          <a:noFill/>
+          <a:ln/>
+        </p:spPr>
+        <p:txBody>
+          <a:bodyPr wrap="square" lIns="0" tIns="0" rIns="0" bIns="0" rtlCol="0" anchor="ctr"/>
+          <a:lstStyle/>
+          <a:p>
+            <a:pPr indent="0" marL="0">
+              <a:buNone/>
+            </a:pPr>
+            <a:r>
+              <a:rPr lang="en-US" sz="1500" b="1" dirty="0">
+                <a:solidFill>
+                  <a:schemeClr val="bg1"/>
+                </a:solidFill>
+              </a:rPr>
+              <a:t>Ein gemeinsames Backend (RAP): </a:t>
+            </a:r>
+            <a:pPr indent="0" marL="0">
+              <a:buNone/>
+            </a:pPr>
+            <a:r>
+              <a:rPr lang="en-US" sz="1500" dirty="0">
+                <a:solidFill>
+                  <a:schemeClr val="bg1"/>
+                </a:solidFill>
+              </a:rPr>
+              <a:t>Auftragsstatus, Rückmeldelogik und Prüfungen – einmal entwickelt, von allen drei Oberflächen genutzt.</a:t>
+            </a:r>
+            <a:endParaRPr lang="en-US" sz="1500" dirty="0"/>
+          </a:p>
+        </p:txBody>
+      </p:sp>
+      <p:sp>
+        <p:nvSpPr>
+          <p:cNvPr id="33" name="Text 28"/>
+          <p:cNvSpPr txBox="1"/>
+          <p:nvPr/>
+        </p:nvSpPr>
+        <p:spPr>
+          <a:xfrm>
+            <a:off x="6309360" y="6382512"/>
+            <a:ext cx="4754880" cy="292608"/>
+          </a:xfrm>
+          <a:prstGeom prst="rect">
+            <a:avLst/>
+          </a:prstGeom>
+          <a:noFill/>
+          <a:ln/>
+        </p:spPr>
+        <p:txBody>
+          <a:bodyPr wrap="square" lIns="0" tIns="0" rIns="0" bIns="0" rtlCol="0" anchor="ctr"/>
+          <a:lstStyle/>
+          <a:p>
+            <a:pPr algn="r" indent="0" marL="0">
+              <a:buNone/>
+            </a:pPr>
+            <a:r>
+              <a:rPr lang="en-US" sz="1100" i="1" dirty="0">
+                <a:solidFill>
+                  <a:schemeClr val="accent4"/>
+                </a:solidFill>
+              </a:rPr>
+              <a:t>Schematisches Beispiel</a:t>
+            </a:r>
+            <a:endParaRPr lang="en-US" sz="1100" dirty="0"/>
+          </a:p>
+        </p:txBody>
+      </p:sp>
+      <p:sp>
+        <p:nvSpPr>
+          <p:cNvPr id="25" name="Slide Number Placeholder 0"/>
+          <p:cNvSpPr>
+            <a:spLocks noGrp="1"/>
+          </p:cNvSpPr>
+          <p:nvPr>
+            <p:ph type="sldNum" sz="quarter" idx="4294967295"/>
+          </p:nvPr>
+        </p:nvSpPr>
+        <p:spPr>
+          <a:xfrm>
+            <a:off x="11155680" y="6400800"/>
+            <a:ext cx="457200" cy="274320"/>
+          </a:xfrm>
+          <a:prstGeom prst="rect">
+            <a:avLst/>
+          </a:prstGeom>
+          <a:extLst>
+            <a:ext uri="{C572A759-6A51-4108-AA02-DFA0A04FC94B}">
+              <ma14:wrappingTextBoxFlag xmlns:ma14="http://schemas.microsoft.com/office/mac/drawingml/2011/main" val="0"/>
+            </a:ext>
+          </a:extLst>
+        </p:spPr>
+        <p:txBody>
+          <a:bodyPr/>
+          <a:lstStyle>
+            <a:lvl1pPr>
+              <a:defRPr sz="1000">
+                <a:solidFill>
+                  <a:schemeClr val="accent4"/>
+                </a:solidFill>
+              </a:defRPr>
+            </a:lvl1pPr>
+          </a:lstStyle>
+          <a:p>
+            <a:pPr algn="r"/>
+            <a:fld id="{F7021451-1387-4CA6-816F-3879F97B5CBC}" type="slidenum">
+              <a:rPr b="0" lang="en-US"/>
+              <a:t>16</a:t>
+            </a:fld>
+            <a:endParaRPr lang="en-US"/>
+          </a:p>
+        </p:txBody>
+      </p:sp>
+    </p:spTree>
+  </p:cSld>
+  <p:clrMapOvr>
+    <a:masterClrMapping/>
+  </p:clrMapOvr>
+</p:sld>
+</file>
+
+<file path=ppt/slides/slide17.xml><?xml version="1.0" encoding="utf-8"?>
+<p:sld xmlns:a="http://schemas.openxmlformats.org/drawingml/2006/main" xmlns:r="http://schemas.openxmlformats.org/officeDocument/2006/relationships" xmlns:p="http://schemas.openxmlformats.org/presentationml/2006/main">
+  <p:cSld name="Slide 17">
+    <p:spTree>
+      <p:nvGrpSpPr>
+        <p:cNvPr id="1" name=""/>
+        <p:cNvGrpSpPr/>
+        <p:nvPr/>
+      </p:nvGrpSpPr>
+      <p:grpSpPr>
+        <a:xfrm>
+          <a:off x="0" y="0"/>
+          <a:ext cx="0" cy="0"/>
+          <a:chOff x="0" y="0"/>
+          <a:chExt cx="0" cy="0"/>
+        </a:xfrm>
+      </p:grpSpPr>
+      <p:sp>
+        <p:nvSpPr>
+          <p:cNvPr id="2" name="Text 0"/>
+          <p:cNvSpPr/>
+          <p:nvPr>
+            <p:ph idx="100" type="title" hasCustomPrompt="1"/>
+          </p:nvPr>
+        </p:nvSpPr>
+        <p:spPr>
+          <a:xfrm>
+            <a:off x="548640" y="365760"/>
+            <a:ext cx="11064240" cy="822960"/>
+          </a:xfrm>
+          <a:prstGeom prst="rect">
+            <a:avLst/>
+          </a:prstGeom>
+          <a:noFill/>
+          <a:ln/>
+        </p:spPr>
+        <p:txBody>
+          <a:bodyPr wrap="square" lIns="0" tIns="0" rIns="0" bIns="0" rtlCol="0" anchor="ctr"/>
+          <a:lstStyle/>
+          <a:p>
+            <a:pPr algn="l" indent="0" marL="0">
+              <a:buNone/>
+            </a:pPr>
+            <a:r>
+              <a:rPr lang="en-US" sz="3400" b="1" dirty="0">
+                <a:solidFill>
+                  <a:schemeClr val="tx2"/>
+                </a:solidFill>
+              </a:rPr>
+              <a:t>So setzen wir Kombinationen um</a:t>
+            </a:r>
+            <a:endParaRPr lang="en-US" sz="3400" dirty="0"/>
+          </a:p>
+        </p:txBody>
+      </p:sp>
+      <p:sp>
+        <p:nvSpPr>
+          <p:cNvPr id="3" name="Schritt 1"/>
+          <p:cNvSpPr/>
+          <p:nvPr/>
+        </p:nvSpPr>
+        <p:spPr>
+          <a:xfrm>
+            <a:off x="548640" y="1417320"/>
+            <a:ext cx="2560320" cy="2743200"/>
+          </a:xfrm>
+          <a:prstGeom prst="roundRect">
+            <a:avLst>
+              <a:gd name="adj" fmla="val 4286"/>
+            </a:avLst>
+          </a:prstGeom>
+          <a:solidFill>
+            <a:schemeClr val="bg2"/>
+          </a:solidFill>
+          <a:ln/>
+        </p:spPr>
+      </p:sp>
+      <p:sp>
+        <p:nvSpPr>
+          <p:cNvPr id="4" name="Schritt 1 Nummer"/>
+          <p:cNvSpPr/>
+          <p:nvPr/>
+        </p:nvSpPr>
+        <p:spPr>
+          <a:xfrm>
+            <a:off x="777240" y="1645920"/>
+            <a:ext cx="594360" cy="594360"/>
+          </a:xfrm>
+          <a:prstGeom prst="ellipse">
+            <a:avLst/>
+          </a:prstGeom>
+          <a:solidFill>
+            <a:schemeClr val="accent4"/>
+          </a:solidFill>
+          <a:ln/>
+        </p:spPr>
+      </p:sp>
+      <p:sp>
+        <p:nvSpPr>
+          <p:cNvPr id="5" name="Text 3"/>
+          <p:cNvSpPr txBox="1"/>
+          <p:nvPr/>
+        </p:nvSpPr>
+        <p:spPr>
+          <a:xfrm>
+            <a:off x="777240" y="1645920"/>
+            <a:ext cx="594360" cy="594360"/>
+          </a:xfrm>
+          <a:prstGeom prst="rect">
+            <a:avLst/>
+          </a:prstGeom>
+          <a:noFill/>
+          <a:ln/>
+        </p:spPr>
+        <p:txBody>
+          <a:bodyPr wrap="square" lIns="0" tIns="0" rIns="0" bIns="0" rtlCol="0" anchor="ctr"/>
+          <a:lstStyle/>
+          <a:p>
+            <a:pPr algn="ctr" indent="0" marL="0">
+              <a:buNone/>
+            </a:pPr>
+            <a:r>
+              <a:rPr lang="en-US" sz="2200" b="1" dirty="0">
+                <a:solidFill>
+                  <a:schemeClr val="bg1"/>
+                </a:solidFill>
+              </a:rPr>
+              <a:t>1</a:t>
+            </a:r>
+            <a:endParaRPr lang="en-US" sz="2200" dirty="0"/>
+          </a:p>
+        </p:txBody>
+      </p:sp>
+      <p:sp>
+        <p:nvSpPr>
+          <p:cNvPr id="6" name="Text 4"/>
+          <p:cNvSpPr txBox="1"/>
+          <p:nvPr/>
+        </p:nvSpPr>
+        <p:spPr>
+          <a:xfrm>
+            <a:off x="777240" y="2377440"/>
+            <a:ext cx="2194560" cy="685800"/>
+          </a:xfrm>
+          <a:prstGeom prst="rect">
+            <a:avLst/>
+          </a:prstGeom>
+          <a:noFill/>
+          <a:ln/>
+        </p:spPr>
+        <p:txBody>
+          <a:bodyPr wrap="square" lIns="0" tIns="0" rIns="0" bIns="0" rtlCol="0" anchor="t"/>
+          <a:lstStyle/>
+          <a:p>
+            <a:pPr indent="0" marL="0">
+              <a:buNone/>
+            </a:pPr>
+            <a:r>
+              <a:rPr lang="en-US" sz="1700" b="1" dirty="0">
+                <a:solidFill>
+                  <a:schemeClr val="accent4"/>
+                </a:solidFill>
+              </a:rPr>
+              <a:t>Standard prüfen</a:t>
+            </a:r>
+            <a:endParaRPr lang="en-US" sz="1700" dirty="0"/>
+          </a:p>
+        </p:txBody>
+      </p:sp>
+      <p:sp>
+        <p:nvSpPr>
+          <p:cNvPr id="7" name="Text 5"/>
+          <p:cNvSpPr txBox="1"/>
+          <p:nvPr/>
+        </p:nvSpPr>
+        <p:spPr>
+          <a:xfrm>
+            <a:off x="777240" y="3063240"/>
+            <a:ext cx="2194560" cy="1005840"/>
+          </a:xfrm>
+          <a:prstGeom prst="rect">
+            <a:avLst/>
+          </a:prstGeom>
+          <a:noFill/>
+          <a:ln/>
+        </p:spPr>
+        <p:txBody>
+          <a:bodyPr wrap="square" lIns="0" tIns="0" rIns="0" bIns="0" rtlCol="0" anchor="t"/>
+          <a:lstStyle/>
+          <a:p>
+            <a:pPr indent="0" marL="0">
+              <a:buNone/>
+            </a:pPr>
+            <a:r>
+              <a:rPr lang="en-US" sz="1400" dirty="0">
+                <a:solidFill>
+                  <a:schemeClr val="tx1"/>
+                </a:solidFill>
+              </a:rPr>
+              <a:t>Gibt es für den Ablauf schon eine SAP-Standard-App? Dann diese nutzen.</a:t>
+            </a:r>
+            <a:endParaRPr lang="en-US" sz="1400" dirty="0"/>
+          </a:p>
+        </p:txBody>
+      </p:sp>
+      <p:sp>
+        <p:nvSpPr>
+          <p:cNvPr id="8" name="Pfeil Schritt 1"/>
+          <p:cNvSpPr/>
+          <p:nvPr/>
+        </p:nvSpPr>
+        <p:spPr>
+          <a:xfrm>
+            <a:off x="3127248" y="2606040"/>
+            <a:ext cx="219456" cy="365760"/>
+          </a:xfrm>
+          <a:prstGeom prst="rightArrow">
+            <a:avLst/>
+          </a:prstGeom>
+          <a:solidFill>
+            <a:schemeClr val="accent4"/>
+          </a:solidFill>
+          <a:ln/>
+        </p:spPr>
+      </p:sp>
+      <p:sp>
+        <p:nvSpPr>
+          <p:cNvPr id="9" name="Schritt 2"/>
+          <p:cNvSpPr/>
+          <p:nvPr/>
+        </p:nvSpPr>
+        <p:spPr>
+          <a:xfrm>
+            <a:off x="3364992" y="1417320"/>
+            <a:ext cx="2560320" cy="2743200"/>
+          </a:xfrm>
+          <a:prstGeom prst="roundRect">
+            <a:avLst>
+              <a:gd name="adj" fmla="val 4286"/>
+            </a:avLst>
+          </a:prstGeom>
+          <a:solidFill>
+            <a:schemeClr val="bg2"/>
+          </a:solidFill>
+          <a:ln/>
+        </p:spPr>
+      </p:sp>
+      <p:sp>
+        <p:nvSpPr>
+          <p:cNvPr id="10" name="Schritt 2 Nummer"/>
+          <p:cNvSpPr/>
+          <p:nvPr/>
+        </p:nvSpPr>
+        <p:spPr>
+          <a:xfrm>
+            <a:off x="3593592" y="1645920"/>
+            <a:ext cx="594360" cy="594360"/>
+          </a:xfrm>
+          <a:prstGeom prst="ellipse">
+            <a:avLst/>
+          </a:prstGeom>
+          <a:solidFill>
+            <a:schemeClr val="tx2"/>
+          </a:solidFill>
+          <a:ln/>
+        </p:spPr>
+      </p:sp>
+      <p:sp>
+        <p:nvSpPr>
+          <p:cNvPr id="11" name="Text 9"/>
+          <p:cNvSpPr txBox="1"/>
+          <p:nvPr/>
+        </p:nvSpPr>
+        <p:spPr>
+          <a:xfrm>
+            <a:off x="3593592" y="1645920"/>
+            <a:ext cx="594360" cy="594360"/>
+          </a:xfrm>
+          <a:prstGeom prst="rect">
+            <a:avLst/>
+          </a:prstGeom>
+          <a:noFill/>
+          <a:ln/>
+        </p:spPr>
+        <p:txBody>
+          <a:bodyPr wrap="square" lIns="0" tIns="0" rIns="0" bIns="0" rtlCol="0" anchor="ctr"/>
+          <a:lstStyle/>
+          <a:p>
+            <a:pPr algn="ctr" indent="0" marL="0">
+              <a:buNone/>
+            </a:pPr>
+            <a:r>
+              <a:rPr lang="en-US" sz="2200" b="1" dirty="0">
+                <a:solidFill>
+                  <a:schemeClr val="bg1"/>
+                </a:solidFill>
+              </a:rPr>
+              <a:t>2</a:t>
+            </a:r>
+            <a:endParaRPr lang="en-US" sz="2200" dirty="0"/>
+          </a:p>
+        </p:txBody>
+      </p:sp>
+      <p:sp>
+        <p:nvSpPr>
+          <p:cNvPr id="12" name="Text 10"/>
+          <p:cNvSpPr txBox="1"/>
+          <p:nvPr/>
+        </p:nvSpPr>
+        <p:spPr>
+          <a:xfrm>
+            <a:off x="3593592" y="2377440"/>
+            <a:ext cx="2194560" cy="685800"/>
+          </a:xfrm>
+          <a:prstGeom prst="rect">
+            <a:avLst/>
+          </a:prstGeom>
+          <a:noFill/>
+          <a:ln/>
+        </p:spPr>
+        <p:txBody>
+          <a:bodyPr wrap="square" lIns="0" tIns="0" rIns="0" bIns="0" rtlCol="0" anchor="t"/>
+          <a:lstStyle/>
+          <a:p>
+            <a:pPr indent="0" marL="0">
+              <a:buNone/>
+            </a:pPr>
+            <a:r>
+              <a:rPr lang="en-US" sz="1700" b="1" dirty="0">
+                <a:solidFill>
+                  <a:schemeClr val="tx2"/>
+                </a:solidFill>
+              </a:rPr>
+              <a:t>Backend zuerst</a:t>
+            </a:r>
+            <a:endParaRPr lang="en-US" sz="1700" dirty="0"/>
+          </a:p>
+        </p:txBody>
+      </p:sp>
+      <p:sp>
+        <p:nvSpPr>
+          <p:cNvPr id="13" name="Text 11"/>
+          <p:cNvSpPr txBox="1"/>
+          <p:nvPr/>
+        </p:nvSpPr>
+        <p:spPr>
+          <a:xfrm>
+            <a:off x="3593592" y="3063240"/>
+            <a:ext cx="2194560" cy="1005840"/>
+          </a:xfrm>
+          <a:prstGeom prst="rect">
+            <a:avLst/>
+          </a:prstGeom>
+          <a:noFill/>
+          <a:ln/>
+        </p:spPr>
+        <p:txBody>
+          <a:bodyPr wrap="square" lIns="0" tIns="0" rIns="0" bIns="0" rtlCol="0" anchor="t"/>
+          <a:lstStyle/>
+          <a:p>
+            <a:pPr indent="0" marL="0">
+              <a:buNone/>
+            </a:pPr>
+            <a:r>
+              <a:rPr lang="en-US" sz="1400" dirty="0">
+                <a:solidFill>
+                  <a:schemeClr val="tx1"/>
+                </a:solidFill>
+              </a:rPr>
+              <a:t>RAP-Business-Objekt mit Prüfungen und Aktionen – einmal, für alle Oberflächen.</a:t>
+            </a:r>
+            <a:endParaRPr lang="en-US" sz="1400" dirty="0"/>
+          </a:p>
+        </p:txBody>
+      </p:sp>
+      <p:sp>
+        <p:nvSpPr>
+          <p:cNvPr id="14" name="Pfeil Schritt 2"/>
+          <p:cNvSpPr/>
+          <p:nvPr/>
+        </p:nvSpPr>
+        <p:spPr>
+          <a:xfrm>
+            <a:off x="5943600" y="2606040"/>
+            <a:ext cx="219456" cy="365760"/>
+          </a:xfrm>
+          <a:prstGeom prst="rightArrow">
+            <a:avLst/>
+          </a:prstGeom>
+          <a:solidFill>
+            <a:schemeClr val="accent4"/>
+          </a:solidFill>
+          <a:ln/>
+        </p:spPr>
+      </p:sp>
+      <p:sp>
+        <p:nvSpPr>
+          <p:cNvPr id="15" name="Schritt 3"/>
+          <p:cNvSpPr/>
+          <p:nvPr/>
+        </p:nvSpPr>
+        <p:spPr>
+          <a:xfrm>
+            <a:off x="6181344" y="1417320"/>
+            <a:ext cx="2560320" cy="2743200"/>
+          </a:xfrm>
+          <a:prstGeom prst="roundRect">
+            <a:avLst>
+              <a:gd name="adj" fmla="val 4286"/>
+            </a:avLst>
+          </a:prstGeom>
+          <a:solidFill>
+            <a:schemeClr val="accent6"/>
+          </a:solidFill>
+          <a:ln/>
+        </p:spPr>
+      </p:sp>
+      <p:sp>
+        <p:nvSpPr>
+          <p:cNvPr id="16" name="Schritt 3 Nummer"/>
+          <p:cNvSpPr/>
+          <p:nvPr/>
+        </p:nvSpPr>
+        <p:spPr>
+          <a:xfrm>
+            <a:off x="6409944" y="1645920"/>
+            <a:ext cx="594360" cy="594360"/>
+          </a:xfrm>
+          <a:prstGeom prst="ellipse">
+            <a:avLst/>
+          </a:prstGeom>
+          <a:solidFill>
+            <a:schemeClr val="accent1"/>
+          </a:solidFill>
+          <a:ln/>
+        </p:spPr>
+      </p:sp>
+      <p:sp>
+        <p:nvSpPr>
+          <p:cNvPr id="17" name="Text 15"/>
+          <p:cNvSpPr txBox="1"/>
+          <p:nvPr/>
+        </p:nvSpPr>
+        <p:spPr>
+          <a:xfrm>
+            <a:off x="6409944" y="1645920"/>
+            <a:ext cx="594360" cy="594360"/>
+          </a:xfrm>
+          <a:prstGeom prst="rect">
+            <a:avLst/>
+          </a:prstGeom>
+          <a:noFill/>
+          <a:ln/>
+        </p:spPr>
+        <p:txBody>
+          <a:bodyPr wrap="square" lIns="0" tIns="0" rIns="0" bIns="0" rtlCol="0" anchor="ctr"/>
+          <a:lstStyle/>
+          <a:p>
+            <a:pPr algn="ctr" indent="0" marL="0">
+              <a:buNone/>
+            </a:pPr>
+            <a:r>
+              <a:rPr lang="en-US" sz="2200" b="1" dirty="0">
+                <a:solidFill>
+                  <a:schemeClr val="bg1"/>
+                </a:solidFill>
+              </a:rPr>
+              <a:t>3</a:t>
+            </a:r>
+            <a:endParaRPr lang="en-US" sz="2200" dirty="0"/>
+          </a:p>
+        </p:txBody>
+      </p:sp>
+      <p:sp>
+        <p:nvSpPr>
+          <p:cNvPr id="18" name="Text 16"/>
+          <p:cNvSpPr txBox="1"/>
+          <p:nvPr/>
+        </p:nvSpPr>
+        <p:spPr>
+          <a:xfrm>
+            <a:off x="6409944" y="2377440"/>
+            <a:ext cx="2194560" cy="685800"/>
+          </a:xfrm>
+          <a:prstGeom prst="rect">
+            <a:avLst/>
+          </a:prstGeom>
+          <a:noFill/>
+          <a:ln/>
+        </p:spPr>
+        <p:txBody>
+          <a:bodyPr wrap="square" lIns="0" tIns="0" rIns="0" bIns="0" rtlCol="0" anchor="t"/>
+          <a:lstStyle/>
+          <a:p>
+            <a:pPr indent="0" marL="0">
+              <a:buNone/>
+            </a:pPr>
+            <a:r>
+              <a:rPr lang="en-US" sz="1700" b="1" dirty="0">
+                <a:solidFill>
+                  <a:schemeClr val="accent1"/>
+                </a:solidFill>
+              </a:rPr>
+              <a:t>Fiori Elements für Büro-Abläufe</a:t>
+            </a:r>
+            <a:endParaRPr lang="en-US" sz="1700" dirty="0"/>
+          </a:p>
+        </p:txBody>
+      </p:sp>
+      <p:sp>
+        <p:nvSpPr>
+          <p:cNvPr id="19" name="Text 17"/>
+          <p:cNvSpPr txBox="1"/>
+          <p:nvPr/>
+        </p:nvSpPr>
+        <p:spPr>
+          <a:xfrm>
+            <a:off x="6409944" y="3063240"/>
+            <a:ext cx="2194560" cy="1005840"/>
+          </a:xfrm>
+          <a:prstGeom prst="rect">
+            <a:avLst/>
+          </a:prstGeom>
+          <a:noFill/>
+          <a:ln/>
+        </p:spPr>
+        <p:txBody>
+          <a:bodyPr wrap="square" lIns="0" tIns="0" rIns="0" bIns="0" rtlCol="0" anchor="t"/>
+          <a:lstStyle/>
+          <a:p>
+            <a:pPr indent="0" marL="0">
+              <a:buNone/>
+            </a:pPr>
+            <a:r>
+              <a:rPr lang="en-US" sz="1400" dirty="0">
+                <a:solidFill>
+                  <a:schemeClr val="tx1"/>
+                </a:solidFill>
+              </a:rPr>
+              <a:t>Übersicht, Detail, Klärung – ohne eigenen UI-Code.</a:t>
+            </a:r>
+            <a:endParaRPr lang="en-US" sz="1400" dirty="0"/>
+          </a:p>
+        </p:txBody>
+      </p:sp>
+      <p:sp>
+        <p:nvSpPr>
+          <p:cNvPr id="20" name="Pfeil Schritt 3"/>
+          <p:cNvSpPr/>
+          <p:nvPr/>
+        </p:nvSpPr>
+        <p:spPr>
+          <a:xfrm>
+            <a:off x="8759952" y="2606040"/>
+            <a:ext cx="219456" cy="365760"/>
+          </a:xfrm>
+          <a:prstGeom prst="rightArrow">
+            <a:avLst/>
+          </a:prstGeom>
+          <a:solidFill>
+            <a:schemeClr val="accent4"/>
+          </a:solidFill>
+          <a:ln/>
+        </p:spPr>
+      </p:sp>
+      <p:sp>
+        <p:nvSpPr>
+          <p:cNvPr id="21" name="Schritt 4"/>
+          <p:cNvSpPr/>
+          <p:nvPr/>
+        </p:nvSpPr>
+        <p:spPr>
+          <a:xfrm>
+            <a:off x="8997696" y="1417320"/>
+            <a:ext cx="2560320" cy="2743200"/>
+          </a:xfrm>
+          <a:prstGeom prst="roundRect">
+            <a:avLst>
+              <a:gd name="adj" fmla="val 4286"/>
+            </a:avLst>
+          </a:prstGeom>
+          <a:solidFill>
+            <a:schemeClr val="accent5"/>
+          </a:solidFill>
+          <a:ln/>
+        </p:spPr>
+      </p:sp>
+      <p:sp>
+        <p:nvSpPr>
+          <p:cNvPr id="22" name="Schritt 4 Nummer"/>
+          <p:cNvSpPr/>
+          <p:nvPr/>
+        </p:nvSpPr>
+        <p:spPr>
+          <a:xfrm>
+            <a:off x="9226296" y="1645920"/>
+            <a:ext cx="594360" cy="594360"/>
+          </a:xfrm>
+          <a:prstGeom prst="ellipse">
+            <a:avLst/>
+          </a:prstGeom>
+          <a:solidFill>
+            <a:schemeClr val="accent2"/>
+          </a:solidFill>
+          <a:ln/>
+        </p:spPr>
+      </p:sp>
+      <p:sp>
+        <p:nvSpPr>
+          <p:cNvPr id="23" name="Text 21"/>
+          <p:cNvSpPr txBox="1"/>
+          <p:nvPr/>
+        </p:nvSpPr>
+        <p:spPr>
+          <a:xfrm>
+            <a:off x="9226296" y="1645920"/>
+            <a:ext cx="594360" cy="594360"/>
+          </a:xfrm>
+          <a:prstGeom prst="rect">
+            <a:avLst/>
+          </a:prstGeom>
+          <a:noFill/>
+          <a:ln/>
+        </p:spPr>
+        <p:txBody>
+          <a:bodyPr wrap="square" lIns="0" tIns="0" rIns="0" bIns="0" rtlCol="0" anchor="ctr"/>
+          <a:lstStyle/>
+          <a:p>
+            <a:pPr algn="ctr" indent="0" marL="0">
+              <a:buNone/>
+            </a:pPr>
+            <a:r>
+              <a:rPr lang="en-US" sz="2200" b="1" dirty="0">
+                <a:solidFill>
+                  <a:schemeClr val="bg1"/>
+                </a:solidFill>
+              </a:rPr>
+              <a:t>4</a:t>
+            </a:r>
+            <a:endParaRPr lang="en-US" sz="2200" dirty="0"/>
+          </a:p>
+        </p:txBody>
+      </p:sp>
+      <p:sp>
+        <p:nvSpPr>
+          <p:cNvPr id="24" name="Text 22"/>
+          <p:cNvSpPr txBox="1"/>
+          <p:nvPr/>
+        </p:nvSpPr>
+        <p:spPr>
+          <a:xfrm>
+            <a:off x="9226296" y="2377440"/>
+            <a:ext cx="2194560" cy="685800"/>
+          </a:xfrm>
+          <a:prstGeom prst="rect">
+            <a:avLst/>
+          </a:prstGeom>
+          <a:noFill/>
+          <a:ln/>
+        </p:spPr>
+        <p:txBody>
+          <a:bodyPr wrap="square" lIns="0" tIns="0" rIns="0" bIns="0" rtlCol="0" anchor="t"/>
+          <a:lstStyle/>
+          <a:p>
+            <a:pPr indent="0" marL="0">
+              <a:buNone/>
+            </a:pPr>
+            <a:r>
+              <a:rPr lang="en-US" sz="1700" b="1" dirty="0">
+                <a:solidFill>
+                  <a:schemeClr val="accent2"/>
+                </a:solidFill>
+              </a:rPr>
+              <a:t>Freestyle gezielt</a:t>
+            </a:r>
+            <a:endParaRPr lang="en-US" sz="1700" dirty="0"/>
+          </a:p>
+        </p:txBody>
+      </p:sp>
+      <p:sp>
+        <p:nvSpPr>
+          <p:cNvPr id="25" name="Text 23"/>
+          <p:cNvSpPr txBox="1"/>
+          <p:nvPr/>
+        </p:nvSpPr>
+        <p:spPr>
+          <a:xfrm>
+            <a:off x="9226296" y="3063240"/>
+            <a:ext cx="2194560" cy="1005840"/>
+          </a:xfrm>
+          <a:prstGeom prst="rect">
+            <a:avLst/>
+          </a:prstGeom>
+          <a:noFill/>
+          <a:ln/>
+        </p:spPr>
+        <p:txBody>
+          <a:bodyPr wrap="square" lIns="0" tIns="0" rIns="0" bIns="0" rtlCol="0" anchor="t"/>
+          <a:lstStyle/>
+          <a:p>
+            <a:pPr indent="0" marL="0">
+              <a:buNone/>
+            </a:pPr>
+            <a:r>
+              <a:rPr lang="en-US" sz="1400" dirty="0">
+                <a:solidFill>
+                  <a:schemeClr val="tx1"/>
+                </a:solidFill>
+              </a:rPr>
+              <a:t>Nur der Handheld- oder Werker-Ablauf. Dünn, ohne eigene Geschäftslogik.</a:t>
+            </a:r>
+            <a:endParaRPr lang="en-US" sz="1400" dirty="0"/>
+          </a:p>
+        </p:txBody>
+      </p:sp>
+      <p:sp>
+        <p:nvSpPr>
+          <p:cNvPr id="26" name="Text 24"/>
+          <p:cNvSpPr txBox="1"/>
+          <p:nvPr/>
+        </p:nvSpPr>
+        <p:spPr>
+          <a:xfrm>
+            <a:off x="548640" y="4480560"/>
+            <a:ext cx="11064240" cy="411480"/>
+          </a:xfrm>
+          <a:prstGeom prst="rect">
+            <a:avLst/>
+          </a:prstGeom>
+          <a:noFill/>
+          <a:ln/>
+        </p:spPr>
+        <p:txBody>
+          <a:bodyPr wrap="square" lIns="0" tIns="0" rIns="0" bIns="0" rtlCol="0" anchor="ctr"/>
+          <a:lstStyle/>
+          <a:p>
+            <a:pPr indent="0" marL="0">
+              <a:buNone/>
+            </a:pPr>
+            <a:r>
+              <a:rPr lang="en-US" sz="1800" b="1" dirty="0">
+                <a:solidFill>
+                  <a:schemeClr val="tx1"/>
+                </a:solidFill>
+              </a:rPr>
+              <a:t>Spielregeln für die Freestyle-Teile</a:t>
+            </a:r>
+            <a:endParaRPr lang="en-US" sz="1800" dirty="0"/>
+          </a:p>
+        </p:txBody>
+      </p:sp>
+      <p:sp>
+        <p:nvSpPr>
+          <p:cNvPr id="27" name="Regel 1"/>
+          <p:cNvSpPr/>
+          <p:nvPr/>
+        </p:nvSpPr>
+        <p:spPr>
+          <a:xfrm>
+            <a:off x="548640" y="5029200"/>
+            <a:ext cx="2029968" cy="731520"/>
+          </a:xfrm>
+          <a:prstGeom prst="roundRect">
+            <a:avLst>
+              <a:gd name="adj" fmla="val 12500"/>
+            </a:avLst>
+          </a:prstGeom>
+          <a:solidFill>
+            <a:schemeClr val="accent5"/>
+          </a:solidFill>
+          <a:ln/>
+        </p:spPr>
+      </p:sp>
+      <p:sp>
+        <p:nvSpPr>
+          <p:cNvPr id="28" name="Text 26"/>
+          <p:cNvSpPr txBox="1"/>
+          <p:nvPr/>
+        </p:nvSpPr>
+        <p:spPr>
+          <a:xfrm>
+            <a:off x="640080" y="5029200"/>
+            <a:ext cx="1847088" cy="731520"/>
+          </a:xfrm>
+          <a:prstGeom prst="rect">
+            <a:avLst/>
+          </a:prstGeom>
+          <a:noFill/>
+          <a:ln/>
+        </p:spPr>
+        <p:txBody>
+          <a:bodyPr wrap="square" lIns="0" tIns="0" rIns="0" bIns="0" rtlCol="0" anchor="ctr"/>
+          <a:lstStyle/>
+          <a:p>
+            <a:pPr algn="ctr" indent="0" marL="0">
+              <a:buNone/>
+            </a:pPr>
+            <a:r>
+              <a:rPr lang="en-US" sz="1400" b="1" dirty="0">
+                <a:solidFill>
+                  <a:schemeClr val="tx1"/>
+                </a:solidFill>
+              </a:rPr>
+              <a:t>Owner benannt</a:t>
+            </a:r>
+            <a:endParaRPr lang="en-US" sz="1400" dirty="0"/>
+          </a:p>
+        </p:txBody>
+      </p:sp>
+      <p:sp>
+        <p:nvSpPr>
+          <p:cNvPr id="29" name="Regel 2"/>
+          <p:cNvSpPr/>
+          <p:nvPr/>
+        </p:nvSpPr>
+        <p:spPr>
+          <a:xfrm>
+            <a:off x="2798064" y="5029200"/>
+            <a:ext cx="2029968" cy="731520"/>
+          </a:xfrm>
+          <a:prstGeom prst="roundRect">
+            <a:avLst>
+              <a:gd name="adj" fmla="val 12500"/>
+            </a:avLst>
+          </a:prstGeom>
+          <a:solidFill>
+            <a:schemeClr val="accent5"/>
+          </a:solidFill>
+          <a:ln/>
+        </p:spPr>
+      </p:sp>
+      <p:sp>
+        <p:nvSpPr>
+          <p:cNvPr id="30" name="Text 28"/>
+          <p:cNvSpPr txBox="1"/>
+          <p:nvPr/>
+        </p:nvSpPr>
+        <p:spPr>
+          <a:xfrm>
+            <a:off x="2889504" y="5029200"/>
+            <a:ext cx="1847088" cy="731520"/>
+          </a:xfrm>
+          <a:prstGeom prst="rect">
+            <a:avLst/>
+          </a:prstGeom>
+          <a:noFill/>
+          <a:ln/>
+        </p:spPr>
+        <p:txBody>
+          <a:bodyPr wrap="square" lIns="0" tIns="0" rIns="0" bIns="0" rtlCol="0" anchor="ctr"/>
+          <a:lstStyle/>
+          <a:p>
+            <a:pPr algn="ctr" indent="0" marL="0">
+              <a:buNone/>
+            </a:pPr>
+            <a:r>
+              <a:rPr lang="en-US" sz="1400" b="1" dirty="0">
+                <a:solidFill>
+                  <a:schemeClr val="tx1"/>
+                </a:solidFill>
+              </a:rPr>
+              <a:t>Gemeinsame UI5-Version</a:t>
+            </a:r>
+            <a:endParaRPr lang="en-US" sz="1400" dirty="0"/>
+          </a:p>
+        </p:txBody>
+      </p:sp>
+      <p:sp>
+        <p:nvSpPr>
+          <p:cNvPr id="31" name="Regel 3"/>
+          <p:cNvSpPr/>
+          <p:nvPr/>
+        </p:nvSpPr>
+        <p:spPr>
+          <a:xfrm>
+            <a:off x="5047488" y="5029200"/>
+            <a:ext cx="2029968" cy="731520"/>
+          </a:xfrm>
+          <a:prstGeom prst="roundRect">
+            <a:avLst>
+              <a:gd name="adj" fmla="val 12500"/>
+            </a:avLst>
+          </a:prstGeom>
+          <a:solidFill>
+            <a:schemeClr val="accent5"/>
+          </a:solidFill>
+          <a:ln/>
+        </p:spPr>
+      </p:sp>
+      <p:sp>
+        <p:nvSpPr>
+          <p:cNvPr id="32" name="Text 30"/>
+          <p:cNvSpPr txBox="1"/>
+          <p:nvPr/>
+        </p:nvSpPr>
+        <p:spPr>
+          <a:xfrm>
+            <a:off x="5138928" y="5029200"/>
+            <a:ext cx="1847088" cy="731520"/>
+          </a:xfrm>
+          <a:prstGeom prst="rect">
+            <a:avLst/>
+          </a:prstGeom>
+          <a:noFill/>
+          <a:ln/>
+        </p:spPr>
+        <p:txBody>
+          <a:bodyPr wrap="square" lIns="0" tIns="0" rIns="0" bIns="0" rtlCol="0" anchor="ctr"/>
+          <a:lstStyle/>
+          <a:p>
+            <a:pPr algn="ctr" indent="0" marL="0">
+              <a:buNone/>
+            </a:pPr>
+            <a:r>
+              <a:rPr lang="en-US" sz="1400" b="1" dirty="0">
+                <a:solidFill>
+                  <a:schemeClr val="tx1"/>
+                </a:solidFill>
+              </a:rPr>
+              <a:t>Pakete regelmäßig aktualisieren</a:t>
+            </a:r>
+            <a:endParaRPr lang="en-US" sz="1400" dirty="0"/>
+          </a:p>
+        </p:txBody>
+      </p:sp>
+      <p:sp>
+        <p:nvSpPr>
+          <p:cNvPr id="33" name="Regel 4"/>
+          <p:cNvSpPr/>
+          <p:nvPr/>
+        </p:nvSpPr>
+        <p:spPr>
+          <a:xfrm>
+            <a:off x="7296912" y="5029200"/>
+            <a:ext cx="2029968" cy="731520"/>
+          </a:xfrm>
+          <a:prstGeom prst="roundRect">
+            <a:avLst>
+              <a:gd name="adj" fmla="val 12500"/>
+            </a:avLst>
+          </a:prstGeom>
+          <a:solidFill>
+            <a:schemeClr val="accent5"/>
+          </a:solidFill>
+          <a:ln/>
+        </p:spPr>
+      </p:sp>
+      <p:sp>
+        <p:nvSpPr>
+          <p:cNvPr id="34" name="Text 32"/>
+          <p:cNvSpPr txBox="1"/>
+          <p:nvPr/>
+        </p:nvSpPr>
+        <p:spPr>
+          <a:xfrm>
+            <a:off x="7388352" y="5029200"/>
+            <a:ext cx="1847088" cy="731520"/>
+          </a:xfrm>
+          <a:prstGeom prst="rect">
+            <a:avLst/>
+          </a:prstGeom>
+          <a:noFill/>
+          <a:ln/>
+        </p:spPr>
+        <p:txBody>
+          <a:bodyPr wrap="square" lIns="0" tIns="0" rIns="0" bIns="0" rtlCol="0" anchor="ctr"/>
+          <a:lstStyle/>
+          <a:p>
+            <a:pPr algn="ctr" indent="0" marL="0">
+              <a:buNone/>
+            </a:pPr>
+            <a:r>
+              <a:rPr lang="en-US" sz="1400" b="1" dirty="0">
+                <a:solidFill>
+                  <a:schemeClr val="tx1"/>
+                </a:solidFill>
+              </a:rPr>
+              <a:t>Tests für den Kernablauf</a:t>
+            </a:r>
+            <a:endParaRPr lang="en-US" sz="1400" dirty="0"/>
+          </a:p>
+        </p:txBody>
+      </p:sp>
+      <p:sp>
+        <p:nvSpPr>
+          <p:cNvPr id="35" name="Regel 5"/>
+          <p:cNvSpPr/>
+          <p:nvPr/>
+        </p:nvSpPr>
+        <p:spPr>
+          <a:xfrm>
+            <a:off x="9546336" y="5029200"/>
+            <a:ext cx="2029968" cy="731520"/>
+          </a:xfrm>
+          <a:prstGeom prst="roundRect">
+            <a:avLst>
+              <a:gd name="adj" fmla="val 12500"/>
+            </a:avLst>
+          </a:prstGeom>
+          <a:solidFill>
+            <a:schemeClr val="accent5"/>
+          </a:solidFill>
+          <a:ln/>
+        </p:spPr>
+      </p:sp>
+      <p:sp>
+        <p:nvSpPr>
+          <p:cNvPr id="36" name="Text 34"/>
+          <p:cNvSpPr txBox="1"/>
+          <p:nvPr/>
+        </p:nvSpPr>
+        <p:spPr>
+          <a:xfrm>
+            <a:off x="9637776" y="5029200"/>
+            <a:ext cx="1847088" cy="731520"/>
+          </a:xfrm>
+          <a:prstGeom prst="rect">
+            <a:avLst/>
+          </a:prstGeom>
+          <a:noFill/>
+          <a:ln/>
+        </p:spPr>
+        <p:txBody>
+          <a:bodyPr wrap="square" lIns="0" tIns="0" rIns="0" bIns="0" rtlCol="0" anchor="ctr"/>
+          <a:lstStyle/>
+          <a:p>
+            <a:pPr algn="ctr" indent="0" marL="0">
+              <a:buNone/>
+            </a:pPr>
+            <a:r>
+              <a:rPr lang="en-US" sz="1400" b="1" dirty="0">
+                <a:solidFill>
+                  <a:schemeClr val="tx1"/>
+                </a:solidFill>
+              </a:rPr>
+              <a:t>Logik bleibt im Backend</a:t>
+            </a:r>
+            <a:endParaRPr lang="en-US" sz="1400" dirty="0"/>
+          </a:p>
+        </p:txBody>
+      </p:sp>
+      <p:sp>
+        <p:nvSpPr>
+          <p:cNvPr id="25" name="Slide Number Placeholder 0"/>
+          <p:cNvSpPr>
+            <a:spLocks noGrp="1"/>
+          </p:cNvSpPr>
+          <p:nvPr>
+            <p:ph type="sldNum" sz="quarter" idx="4294967295"/>
+          </p:nvPr>
+        </p:nvSpPr>
+        <p:spPr>
+          <a:xfrm>
+            <a:off x="11155680" y="6400800"/>
+            <a:ext cx="457200" cy="274320"/>
+          </a:xfrm>
+          <a:prstGeom prst="rect">
+            <a:avLst/>
+          </a:prstGeom>
+          <a:extLst>
+            <a:ext uri="{C572A759-6A51-4108-AA02-DFA0A04FC94B}">
+              <ma14:wrappingTextBoxFlag xmlns:ma14="http://schemas.microsoft.com/office/mac/drawingml/2011/main" val="0"/>
+            </a:ext>
+          </a:extLst>
+        </p:spPr>
+        <p:txBody>
+          <a:bodyPr/>
+          <a:lstStyle>
+            <a:lvl1pPr>
+              <a:defRPr sz="1000">
+                <a:solidFill>
+                  <a:schemeClr val="accent4"/>
+                </a:solidFill>
+              </a:defRPr>
+            </a:lvl1pPr>
+          </a:lstStyle>
+          <a:p>
+            <a:pPr algn="r"/>
+            <a:fld id="{F7021451-1387-4CA6-816F-3879F97B5CBC}" type="slidenum">
+              <a:rPr b="0" lang="en-US"/>
+              <a:t>17</a:t>
+            </a:fld>
+            <a:endParaRPr lang="en-US"/>
+          </a:p>
+        </p:txBody>
+      </p:sp>
+    </p:spTree>
+  </p:cSld>
+  <p:clrMapOvr>
+    <a:masterClrMapping/>
+  </p:clrMapOvr>
+</p:sld>
+</file>
+
+<file path=ppt/slides/slide18.xml><?xml version="1.0" encoding="utf-8"?>
+<p:sld xmlns:a="http://schemas.openxmlformats.org/drawingml/2006/main" xmlns:r="http://schemas.openxmlformats.org/officeDocument/2006/relationships" xmlns:p="http://schemas.openxmlformats.org/presentationml/2006/main">
+  <p:cSld name="Slide 18">
+    <p:spTree>
+      <p:nvGrpSpPr>
+        <p:cNvPr id="1" name=""/>
+        <p:cNvGrpSpPr/>
+        <p:nvPr/>
+      </p:nvGrpSpPr>
+      <p:grpSpPr>
+        <a:xfrm>
+          <a:off x="0" y="0"/>
+          <a:ext cx="0" cy="0"/>
+          <a:chOff x="0" y="0"/>
+          <a:chExt cx="0" cy="0"/>
+        </a:xfrm>
+      </p:grpSpPr>
+      <p:sp>
+        <p:nvSpPr>
+          <p:cNvPr id="2" name="Text 0"/>
+          <p:cNvSpPr/>
+          <p:nvPr>
+            <p:ph idx="100" type="title" hasCustomPrompt="1"/>
+          </p:nvPr>
+        </p:nvSpPr>
+        <p:spPr>
+          <a:xfrm>
+            <a:off x="548640" y="365760"/>
+            <a:ext cx="11064240" cy="822960"/>
+          </a:xfrm>
+          <a:prstGeom prst="rect">
+            <a:avLst/>
+          </a:prstGeom>
+          <a:noFill/>
+          <a:ln/>
+        </p:spPr>
+        <p:txBody>
+          <a:bodyPr wrap="square" lIns="0" tIns="0" rIns="0" bIns="0" rtlCol="0" anchor="ctr"/>
+          <a:lstStyle/>
+          <a:p>
+            <a:pPr algn="l" indent="0" marL="0">
+              <a:buNone/>
+            </a:pPr>
+            <a:r>
+              <a:rPr lang="en-US" sz="3400" b="1" dirty="0">
+                <a:solidFill>
+                  <a:schemeClr val="tx2"/>
+                </a:solidFill>
+              </a:rPr>
+              <a:t>Leitplanke: die richtige Technik je Ablauf</a:t>
+            </a:r>
+            <a:endParaRPr lang="en-US" sz="3400" dirty="0"/>
+          </a:p>
+        </p:txBody>
+      </p:sp>
+      <p:sp>
+        <p:nvSpPr>
+          <p:cNvPr id="3" name="Stufe 1"/>
+          <p:cNvSpPr/>
+          <p:nvPr/>
+        </p:nvSpPr>
+        <p:spPr>
+          <a:xfrm>
+            <a:off x="548640" y="1463040"/>
+            <a:ext cx="3474720" cy="2743200"/>
+          </a:xfrm>
+          <a:prstGeom prst="roundRect">
+            <a:avLst>
+              <a:gd name="adj" fmla="val 4000"/>
+            </a:avLst>
+          </a:prstGeom>
+          <a:solidFill>
+            <a:schemeClr val="accent6"/>
+          </a:solidFill>
+          <a:ln/>
+        </p:spPr>
+      </p:sp>
+      <p:sp>
+        <p:nvSpPr>
+          <p:cNvPr id="4" name="Stufe 1 Nummer"/>
+          <p:cNvSpPr/>
+          <p:nvPr/>
+        </p:nvSpPr>
+        <p:spPr>
+          <a:xfrm>
+            <a:off x="822960" y="1691640"/>
+            <a:ext cx="640080" cy="640080"/>
+          </a:xfrm>
+          <a:prstGeom prst="ellipse">
+            <a:avLst/>
+          </a:prstGeom>
+          <a:solidFill>
+            <a:schemeClr val="accent1"/>
+          </a:solidFill>
+          <a:ln/>
+        </p:spPr>
+      </p:sp>
+      <p:sp>
+        <p:nvSpPr>
+          <p:cNvPr id="5" name="Text 3"/>
+          <p:cNvSpPr txBox="1"/>
+          <p:nvPr/>
+        </p:nvSpPr>
+        <p:spPr>
+          <a:xfrm>
+            <a:off x="822960" y="1691640"/>
+            <a:ext cx="640080" cy="640080"/>
+          </a:xfrm>
+          <a:prstGeom prst="rect">
+            <a:avLst/>
+          </a:prstGeom>
+          <a:noFill/>
+          <a:ln/>
+        </p:spPr>
+        <p:txBody>
+          <a:bodyPr wrap="square" lIns="0" tIns="0" rIns="0" bIns="0" rtlCol="0" anchor="ctr"/>
+          <a:lstStyle/>
+          <a:p>
+            <a:pPr algn="ctr" indent="0" marL="0">
+              <a:buNone/>
+            </a:pPr>
+            <a:r>
+              <a:rPr lang="en-US" sz="2400" b="1" dirty="0">
+                <a:solidFill>
+                  <a:schemeClr val="bg1"/>
+                </a:solidFill>
+              </a:rPr>
+              <a:t>1</a:t>
+            </a:r>
+            <a:endParaRPr lang="en-US" sz="2400" dirty="0"/>
+          </a:p>
+        </p:txBody>
+      </p:sp>
+      <p:sp>
+        <p:nvSpPr>
+          <p:cNvPr id="6" name="Text 4"/>
+          <p:cNvSpPr txBox="1"/>
+          <p:nvPr/>
+        </p:nvSpPr>
+        <p:spPr>
+          <a:xfrm>
+            <a:off x="822960" y="2468880"/>
+            <a:ext cx="2926080" cy="457200"/>
+          </a:xfrm>
+          <a:prstGeom prst="rect">
+            <a:avLst/>
+          </a:prstGeom>
+          <a:noFill/>
+          <a:ln/>
+        </p:spPr>
+        <p:txBody>
+          <a:bodyPr wrap="square" lIns="0" tIns="0" rIns="0" bIns="0" rtlCol="0" anchor="ctr"/>
+          <a:lstStyle/>
+          <a:p>
+            <a:pPr indent="0" marL="0">
+              <a:buNone/>
+            </a:pPr>
+            <a:r>
+              <a:rPr lang="en-US" sz="1900" b="1" dirty="0">
+                <a:solidFill>
+                  <a:schemeClr val="accent1"/>
+                </a:solidFill>
+              </a:rPr>
+              <a:t>Fiori Elements</a:t>
+            </a:r>
+            <a:endParaRPr lang="en-US" sz="1900" dirty="0"/>
+          </a:p>
+        </p:txBody>
+      </p:sp>
+      <p:sp>
+        <p:nvSpPr>
+          <p:cNvPr id="7" name="Text 5"/>
+          <p:cNvSpPr txBox="1"/>
+          <p:nvPr/>
+        </p:nvSpPr>
+        <p:spPr>
+          <a:xfrm>
+            <a:off x="822960" y="2971800"/>
+            <a:ext cx="2926080" cy="1097280"/>
+          </a:xfrm>
+          <a:prstGeom prst="rect">
+            <a:avLst/>
+          </a:prstGeom>
+          <a:noFill/>
+          <a:ln/>
+        </p:spPr>
+        <p:txBody>
+          <a:bodyPr wrap="square" lIns="0" tIns="0" rIns="0" bIns="0" rtlCol="0" anchor="t"/>
+          <a:lstStyle/>
+          <a:p>
+            <a:pPr indent="0" marL="0">
+              <a:buNone/>
+            </a:pPr>
+            <a:r>
+              <a:rPr lang="en-US" sz="1500" dirty="0">
+                <a:solidFill>
+                  <a:schemeClr val="tx1"/>
+                </a:solidFill>
+              </a:rPr>
+              <a:t>mit RAP im Backend. Deckt Liste, Detail, Bearbeiten und Analyse ab.</a:t>
+            </a:r>
+            <a:endParaRPr lang="en-US" sz="1500" dirty="0"/>
+          </a:p>
+        </p:txBody>
+      </p:sp>
+      <p:sp>
+        <p:nvSpPr>
+          <p:cNvPr id="8" name="Pfeil 1"/>
+          <p:cNvSpPr/>
+          <p:nvPr/>
+        </p:nvSpPr>
+        <p:spPr>
+          <a:xfrm>
+            <a:off x="4050792" y="2606040"/>
+            <a:ext cx="274320" cy="457200"/>
+          </a:xfrm>
+          <a:prstGeom prst="rightArrow">
+            <a:avLst/>
+          </a:prstGeom>
+          <a:solidFill>
+            <a:schemeClr val="accent4"/>
+          </a:solidFill>
+          <a:ln/>
+        </p:spPr>
+      </p:sp>
+      <p:sp>
+        <p:nvSpPr>
+          <p:cNvPr id="9" name="Stufe 2"/>
+          <p:cNvSpPr/>
+          <p:nvPr/>
+        </p:nvSpPr>
+        <p:spPr>
+          <a:xfrm>
+            <a:off x="4343400" y="1463040"/>
+            <a:ext cx="3474720" cy="2743200"/>
+          </a:xfrm>
+          <a:prstGeom prst="roundRect">
+            <a:avLst>
+              <a:gd name="adj" fmla="val 4000"/>
+            </a:avLst>
+          </a:prstGeom>
+          <a:solidFill>
+            <a:schemeClr val="accent6"/>
+          </a:solidFill>
+          <a:ln/>
+        </p:spPr>
+      </p:sp>
+      <p:sp>
+        <p:nvSpPr>
+          <p:cNvPr id="10" name="Stufe 2 Nummer"/>
+          <p:cNvSpPr/>
+          <p:nvPr/>
+        </p:nvSpPr>
+        <p:spPr>
+          <a:xfrm>
+            <a:off x="4617720" y="1691640"/>
+            <a:ext cx="640080" cy="640080"/>
+          </a:xfrm>
+          <a:prstGeom prst="ellipse">
+            <a:avLst/>
+          </a:prstGeom>
+          <a:solidFill>
+            <a:schemeClr val="accent1"/>
+          </a:solidFill>
+          <a:ln/>
+        </p:spPr>
+      </p:sp>
+      <p:sp>
+        <p:nvSpPr>
+          <p:cNvPr id="11" name="Text 9"/>
+          <p:cNvSpPr txBox="1"/>
+          <p:nvPr/>
+        </p:nvSpPr>
+        <p:spPr>
+          <a:xfrm>
+            <a:off x="4617720" y="1691640"/>
+            <a:ext cx="640080" cy="640080"/>
+          </a:xfrm>
+          <a:prstGeom prst="rect">
+            <a:avLst/>
+          </a:prstGeom>
+          <a:noFill/>
+          <a:ln/>
+        </p:spPr>
+        <p:txBody>
+          <a:bodyPr wrap="square" lIns="0" tIns="0" rIns="0" bIns="0" rtlCol="0" anchor="ctr"/>
+          <a:lstStyle/>
+          <a:p>
+            <a:pPr algn="ctr" indent="0" marL="0">
+              <a:buNone/>
+            </a:pPr>
+            <a:r>
+              <a:rPr lang="en-US" sz="2400" b="1" dirty="0">
+                <a:solidFill>
+                  <a:schemeClr val="bg1"/>
+                </a:solidFill>
+              </a:rPr>
+              <a:t>2</a:t>
+            </a:r>
+            <a:endParaRPr lang="en-US" sz="2400" dirty="0"/>
+          </a:p>
+        </p:txBody>
+      </p:sp>
+      <p:sp>
+        <p:nvSpPr>
+          <p:cNvPr id="12" name="Text 10"/>
+          <p:cNvSpPr txBox="1"/>
+          <p:nvPr/>
+        </p:nvSpPr>
+        <p:spPr>
+          <a:xfrm>
+            <a:off x="4617720" y="2468880"/>
+            <a:ext cx="2926080" cy="457200"/>
+          </a:xfrm>
+          <a:prstGeom prst="rect">
+            <a:avLst/>
+          </a:prstGeom>
+          <a:noFill/>
+          <a:ln/>
+        </p:spPr>
+        <p:txBody>
+          <a:bodyPr wrap="square" lIns="0" tIns="0" rIns="0" bIns="0" rtlCol="0" anchor="ctr"/>
+          <a:lstStyle/>
+          <a:p>
+            <a:pPr indent="0" marL="0">
+              <a:buNone/>
+            </a:pPr>
+            <a:r>
+              <a:rPr lang="en-US" sz="1900" b="1" dirty="0">
+                <a:solidFill>
+                  <a:schemeClr val="accent1"/>
+                </a:solidFill>
+              </a:rPr>
+              <a:t>Fiori Elements + Erweiterung</a:t>
+            </a:r>
+            <a:endParaRPr lang="en-US" sz="1900" dirty="0"/>
+          </a:p>
+        </p:txBody>
+      </p:sp>
+      <p:sp>
+        <p:nvSpPr>
+          <p:cNvPr id="13" name="Text 11"/>
+          <p:cNvSpPr txBox="1"/>
+          <p:nvPr/>
+        </p:nvSpPr>
+        <p:spPr>
+          <a:xfrm>
+            <a:off x="4617720" y="2971800"/>
+            <a:ext cx="2926080" cy="1097280"/>
+          </a:xfrm>
+          <a:prstGeom prst="rect">
+            <a:avLst/>
+          </a:prstGeom>
+          <a:noFill/>
+          <a:ln/>
+        </p:spPr>
+        <p:txBody>
+          <a:bodyPr wrap="square" lIns="0" tIns="0" rIns="0" bIns="0" rtlCol="0" anchor="t"/>
+          <a:lstStyle/>
+          <a:p>
+            <a:pPr indent="0" marL="0">
+              <a:buNone/>
+            </a:pPr>
+            <a:r>
+              <a:rPr lang="en-US" sz="1500" dirty="0">
+                <a:solidFill>
+                  <a:schemeClr val="tx1"/>
+                </a:solidFill>
+              </a:rPr>
+              <a:t>Flexible Programming Model: eigene Abschnitte und Bausteine, wo nötig.</a:t>
+            </a:r>
+            <a:endParaRPr lang="en-US" sz="1500" dirty="0"/>
+          </a:p>
+        </p:txBody>
+      </p:sp>
+      <p:sp>
+        <p:nvSpPr>
+          <p:cNvPr id="14" name="Pfeil 2"/>
+          <p:cNvSpPr/>
+          <p:nvPr/>
+        </p:nvSpPr>
+        <p:spPr>
+          <a:xfrm>
+            <a:off x="7845552" y="2606040"/>
+            <a:ext cx="274320" cy="457200"/>
+          </a:xfrm>
+          <a:prstGeom prst="rightArrow">
+            <a:avLst/>
+          </a:prstGeom>
+          <a:solidFill>
+            <a:schemeClr val="accent4"/>
+          </a:solidFill>
+          <a:ln/>
+        </p:spPr>
+      </p:sp>
+      <p:sp>
+        <p:nvSpPr>
+          <p:cNvPr id="15" name="Stufe 3"/>
+          <p:cNvSpPr/>
+          <p:nvPr/>
+        </p:nvSpPr>
+        <p:spPr>
+          <a:xfrm>
+            <a:off x="8138160" y="1463040"/>
+            <a:ext cx="3474720" cy="2743200"/>
+          </a:xfrm>
+          <a:prstGeom prst="roundRect">
+            <a:avLst>
+              <a:gd name="adj" fmla="val 4000"/>
+            </a:avLst>
+          </a:prstGeom>
+          <a:solidFill>
+            <a:schemeClr val="accent5"/>
+          </a:solidFill>
+          <a:ln/>
+        </p:spPr>
+      </p:sp>
+      <p:sp>
+        <p:nvSpPr>
+          <p:cNvPr id="16" name="Stufe 3 Nummer"/>
+          <p:cNvSpPr/>
+          <p:nvPr/>
+        </p:nvSpPr>
+        <p:spPr>
+          <a:xfrm>
+            <a:off x="8412480" y="1691640"/>
+            <a:ext cx="640080" cy="640080"/>
+          </a:xfrm>
+          <a:prstGeom prst="ellipse">
+            <a:avLst/>
+          </a:prstGeom>
+          <a:solidFill>
+            <a:schemeClr val="accent2"/>
+          </a:solidFill>
+          <a:ln/>
+        </p:spPr>
+      </p:sp>
+      <p:sp>
+        <p:nvSpPr>
+          <p:cNvPr id="17" name="Text 15"/>
+          <p:cNvSpPr txBox="1"/>
+          <p:nvPr/>
+        </p:nvSpPr>
+        <p:spPr>
+          <a:xfrm>
+            <a:off x="8412480" y="1691640"/>
+            <a:ext cx="640080" cy="640080"/>
+          </a:xfrm>
+          <a:prstGeom prst="rect">
+            <a:avLst/>
+          </a:prstGeom>
+          <a:noFill/>
+          <a:ln/>
+        </p:spPr>
+        <p:txBody>
+          <a:bodyPr wrap="square" lIns="0" tIns="0" rIns="0" bIns="0" rtlCol="0" anchor="ctr"/>
+          <a:lstStyle/>
+          <a:p>
+            <a:pPr algn="ctr" indent="0" marL="0">
+              <a:buNone/>
+            </a:pPr>
+            <a:r>
+              <a:rPr lang="en-US" sz="2400" b="1" dirty="0">
+                <a:solidFill>
+                  <a:schemeClr val="bg1"/>
+                </a:solidFill>
+              </a:rPr>
+              <a:t>3</a:t>
+            </a:r>
+            <a:endParaRPr lang="en-US" sz="2400" dirty="0"/>
+          </a:p>
+        </p:txBody>
+      </p:sp>
+      <p:sp>
+        <p:nvSpPr>
+          <p:cNvPr id="18" name="Text 16"/>
+          <p:cNvSpPr txBox="1"/>
+          <p:nvPr/>
+        </p:nvSpPr>
+        <p:spPr>
+          <a:xfrm>
+            <a:off x="8412480" y="2468880"/>
+            <a:ext cx="2926080" cy="457200"/>
+          </a:xfrm>
+          <a:prstGeom prst="rect">
+            <a:avLst/>
+          </a:prstGeom>
+          <a:noFill/>
+          <a:ln/>
+        </p:spPr>
+        <p:txBody>
+          <a:bodyPr wrap="square" lIns="0" tIns="0" rIns="0" bIns="0" rtlCol="0" anchor="ctr"/>
+          <a:lstStyle/>
+          <a:p>
+            <a:pPr indent="0" marL="0">
+              <a:buNone/>
+            </a:pPr>
+            <a:r>
+              <a:rPr lang="en-US" sz="1900" b="1" dirty="0">
+                <a:solidFill>
+                  <a:schemeClr val="accent2"/>
+                </a:solidFill>
+              </a:rPr>
+              <a:t>SAPUI5 Freestyle</a:t>
+            </a:r>
+            <a:endParaRPr lang="en-US" sz="1900" dirty="0"/>
+          </a:p>
+        </p:txBody>
+      </p:sp>
+      <p:sp>
+        <p:nvSpPr>
+          <p:cNvPr id="19" name="Text 17"/>
+          <p:cNvSpPr txBox="1"/>
+          <p:nvPr/>
+        </p:nvSpPr>
+        <p:spPr>
+          <a:xfrm>
+            <a:off x="8412480" y="2971800"/>
+            <a:ext cx="2926080" cy="1097280"/>
+          </a:xfrm>
+          <a:prstGeom prst="rect">
+            <a:avLst/>
+          </a:prstGeom>
+          <a:noFill/>
+          <a:ln/>
+        </p:spPr>
+        <p:txBody>
+          <a:bodyPr wrap="square" lIns="0" tIns="0" rIns="0" bIns="0" rtlCol="0" anchor="t"/>
+          <a:lstStyle/>
+          <a:p>
+            <a:pPr indent="0" marL="0">
+              <a:buNone/>
+            </a:pPr>
+            <a:r>
+              <a:rPr lang="en-US" sz="1500" dirty="0">
+                <a:solidFill>
+                  <a:schemeClr val="tx1"/>
+                </a:solidFill>
+              </a:rPr>
+              <a:t>für klar abgegrenzte Abläufe wie Handheld-Scan – mit Owner und Wartungsbudget.</a:t>
+            </a:r>
+            <a:endParaRPr lang="en-US" sz="1500" dirty="0"/>
+          </a:p>
+        </p:txBody>
+      </p:sp>
+      <p:sp>
+        <p:nvSpPr>
+          <p:cNvPr id="20" name="Text 18"/>
+          <p:cNvSpPr txBox="1"/>
+          <p:nvPr/>
+        </p:nvSpPr>
+        <p:spPr>
+          <a:xfrm>
+            <a:off x="548640" y="4526280"/>
+            <a:ext cx="11064240" cy="411480"/>
+          </a:xfrm>
+          <a:prstGeom prst="rect">
+            <a:avLst/>
+          </a:prstGeom>
+          <a:noFill/>
+          <a:ln/>
+        </p:spPr>
+        <p:txBody>
+          <a:bodyPr wrap="square" lIns="0" tIns="0" rIns="0" bIns="0" rtlCol="0" anchor="ctr"/>
+          <a:lstStyle/>
+          <a:p>
+            <a:pPr indent="0" marL="0">
+              <a:buNone/>
+            </a:pPr>
+            <a:r>
+              <a:rPr lang="en-US" sz="1800" b="1" dirty="0">
+                <a:solidFill>
+                  <a:schemeClr val="tx1"/>
+                </a:solidFill>
+              </a:rPr>
+              <a:t>Prüffragen vor jedem Freestyle-Teil</a:t>
+            </a:r>
+            <a:endParaRPr lang="en-US" sz="1800" dirty="0"/>
+          </a:p>
+        </p:txBody>
+      </p:sp>
+      <p:sp>
+        <p:nvSpPr>
+          <p:cNvPr id="21" name="Text 19"/>
+          <p:cNvSpPr txBox="1"/>
+          <p:nvPr/>
+        </p:nvSpPr>
+        <p:spPr>
+          <a:xfrm>
+            <a:off x="548640" y="5029200"/>
+            <a:ext cx="3474720" cy="914400"/>
+          </a:xfrm>
+          <a:prstGeom prst="rect">
+            <a:avLst/>
+          </a:prstGeom>
+          <a:noFill/>
+          <a:ln/>
+        </p:spPr>
+        <p:txBody>
+          <a:bodyPr wrap="square" lIns="0" tIns="0" rIns="0" bIns="0" rtlCol="0" anchor="t"/>
+          <a:lstStyle/>
+          <a:p>
+            <a:pPr indent="0" marL="0">
+              <a:buNone/>
+            </a:pPr>
+            <a:r>
+              <a:rPr lang="en-US" sz="1500" dirty="0">
+                <a:solidFill>
+                  <a:schemeClr val="tx1"/>
+                </a:solidFill>
+              </a:rPr>
+              <a:t>Passt der Ablauf wirklich in keinen Floorplan – auch nicht mit Erweiterung?</a:t>
+            </a:r>
+            <a:endParaRPr lang="en-US" sz="1500" dirty="0"/>
+          </a:p>
+        </p:txBody>
+      </p:sp>
+      <p:sp>
+        <p:nvSpPr>
+          <p:cNvPr id="22" name="Text 20"/>
+          <p:cNvSpPr txBox="1"/>
+          <p:nvPr/>
+        </p:nvSpPr>
+        <p:spPr>
+          <a:xfrm>
+            <a:off x="4343400" y="5029200"/>
+            <a:ext cx="3474720" cy="914400"/>
+          </a:xfrm>
+          <a:prstGeom prst="rect">
+            <a:avLst/>
+          </a:prstGeom>
+          <a:noFill/>
+          <a:ln/>
+        </p:spPr>
+        <p:txBody>
+          <a:bodyPr wrap="square" lIns="0" tIns="0" rIns="0" bIns="0" rtlCol="0" anchor="t"/>
+          <a:lstStyle/>
+          <a:p>
+            <a:pPr indent="0" marL="0">
+              <a:buNone/>
+            </a:pPr>
+            <a:r>
+              <a:rPr lang="en-US" sz="1500" dirty="0">
+                <a:solidFill>
+                  <a:schemeClr val="tx1"/>
+                </a:solidFill>
+              </a:rPr>
+              <a:t>Wer verantwortet Updates, Tests und Upgrades?</a:t>
+            </a:r>
+            <a:endParaRPr lang="en-US" sz="1500" dirty="0"/>
+          </a:p>
+        </p:txBody>
+      </p:sp>
+      <p:sp>
+        <p:nvSpPr>
+          <p:cNvPr id="23" name="Text 21"/>
+          <p:cNvSpPr txBox="1"/>
+          <p:nvPr/>
+        </p:nvSpPr>
+        <p:spPr>
+          <a:xfrm>
+            <a:off x="8138160" y="5029200"/>
+            <a:ext cx="3474720" cy="914400"/>
+          </a:xfrm>
+          <a:prstGeom prst="rect">
+            <a:avLst/>
+          </a:prstGeom>
+          <a:noFill/>
+          <a:ln/>
+        </p:spPr>
+        <p:txBody>
+          <a:bodyPr wrap="square" lIns="0" tIns="0" rIns="0" bIns="0" rtlCol="0" anchor="t"/>
+          <a:lstStyle/>
+          <a:p>
+            <a:pPr indent="0" marL="0">
+              <a:buNone/>
+            </a:pPr>
+            <a:r>
+              <a:rPr lang="en-US" sz="1500" dirty="0">
+                <a:solidFill>
+                  <a:schemeClr val="tx1"/>
+                </a:solidFill>
+              </a:rPr>
+              <a:t>Ist der Wartungsaufwand für die nächsten Jahre eingeplant?</a:t>
+            </a:r>
+            <a:endParaRPr lang="en-US" sz="1500" dirty="0"/>
+          </a:p>
+        </p:txBody>
+      </p:sp>
+      <p:sp>
+        <p:nvSpPr>
+          <p:cNvPr id="25" name="Slide Number Placeholder 0"/>
+          <p:cNvSpPr>
+            <a:spLocks noGrp="1"/>
+          </p:cNvSpPr>
+          <p:nvPr>
+            <p:ph type="sldNum" sz="quarter" idx="4294967295"/>
+          </p:nvPr>
+        </p:nvSpPr>
+        <p:spPr>
+          <a:xfrm>
+            <a:off x="11155680" y="6400800"/>
+            <a:ext cx="457200" cy="274320"/>
+          </a:xfrm>
+          <a:prstGeom prst="rect">
+            <a:avLst/>
+          </a:prstGeom>
+          <a:extLst>
+            <a:ext uri="{C572A759-6A51-4108-AA02-DFA0A04FC94B}">
+              <ma14:wrappingTextBoxFlag xmlns:ma14="http://schemas.microsoft.com/office/mac/drawingml/2011/main" val="0"/>
+            </a:ext>
+          </a:extLst>
+        </p:spPr>
+        <p:txBody>
+          <a:bodyPr/>
+          <a:lstStyle>
+            <a:lvl1pPr>
+              <a:defRPr sz="1000">
+                <a:solidFill>
+                  <a:schemeClr val="accent4"/>
+                </a:solidFill>
+              </a:defRPr>
+            </a:lvl1pPr>
+          </a:lstStyle>
+          <a:p>
+            <a:pPr algn="r"/>
+            <a:fld id="{F7021451-1387-4CA6-816F-3879F97B5CBC}" type="slidenum">
+              <a:rPr b="0" lang="en-US"/>
+              <a:t>18</a:t>
+            </a:fld>
+            <a:endParaRPr lang="en-US"/>
+          </a:p>
+        </p:txBody>
+      </p:sp>
+    </p:spTree>
+  </p:cSld>
+  <p:clrMapOvr>
+    <a:masterClrMapping/>
+  </p:clrMapOvr>
+</p:sld>
+</file>
+
+<file path=ppt/slides/slide19.xml><?xml version="1.0" encoding="utf-8"?>
+<p:sld xmlns:a="http://schemas.openxmlformats.org/drawingml/2006/main" xmlns:r="http://schemas.openxmlformats.org/officeDocument/2006/relationships" xmlns:p="http://schemas.openxmlformats.org/presentationml/2006/main">
+  <p:cSld name="Slide 19">
+    <p:spTree>
+      <p:nvGrpSpPr>
+        <p:cNvPr id="1" name=""/>
+        <p:cNvGrpSpPr/>
+        <p:nvPr/>
+      </p:nvGrpSpPr>
+      <p:grpSpPr>
+        <a:xfrm>
+          <a:off x="0" y="0"/>
+          <a:ext cx="0" cy="0"/>
+          <a:chOff x="0" y="0"/>
+          <a:chExt cx="0" cy="0"/>
+        </a:xfrm>
+      </p:grpSpPr>
+      <p:sp>
+        <p:nvSpPr>
+          <p:cNvPr id="2" name="Text 0"/>
+          <p:cNvSpPr/>
+          <p:nvPr>
+            <p:ph idx="100" type="title" hasCustomPrompt="1"/>
+          </p:nvPr>
+        </p:nvSpPr>
+        <p:spPr>
+          <a:xfrm>
             <a:off x="731520" y="1828800"/>
             <a:ext cx="6766560" cy="2011680"/>
           </a:xfrm>
@@ -8549,7 +11769,7 @@
                   <a:schemeClr val="bg1"/>
                 </a:solidFill>
               </a:rPr>
-              <a:t>Nicht jede Anforderung bedeutet SAPUI5</a:t>
+              <a:t>Nicht alles ist SAPUI5 – nicht alles ist Fiori Elements</a:t>
             </a:r>
             <a:endParaRPr lang="en-US" sz="4800" dirty="0"/>
           </a:p>
@@ -8587,7 +11807,7 @@
                   <a:schemeClr val="accent6"/>
                 </a:solidFill>
               </a:rPr>
-              <a:t>Fiori Elements ist der Standard, Freestyle die bewusste Ausnahme.</a:t>
+              <a:t>Die Lösung ist die richtige Kombination, auf einem gemeinsamen Backend.</a:t>
             </a:r>
             <a:endParaRPr lang="en-US" sz="2200" dirty="0"/>
           </a:p>
@@ -8715,7 +11935,7 @@
                   <a:schemeClr val="bg1"/>
                 </a:solidFill>
               </a:rPr>
-              <a:t>Fiori Elements + RAP als Standard festlegen</a:t>
+              <a:t>Fiori Elements + RAP für Büro- und Standardabläufe</a:t>
             </a:r>
             <a:endParaRPr lang="en-US" sz="1500" dirty="0"/>
           </a:p>
@@ -8807,7 +12027,7 @@
                   <a:schemeClr val="bg1"/>
                 </a:solidFill>
               </a:rPr>
-              <a:t>Freestyle nur nach kurzem Architektur-Check</a:t>
+              <a:t>Freestyle gezielt für Handheld- und Werker-Abläufe</a:t>
             </a:r>
             <a:endParaRPr lang="en-US" sz="1500" dirty="0"/>
           </a:p>
@@ -8822,6 +12042,98 @@
         <p:spPr>
           <a:xfrm>
             <a:off x="8138160" y="4023360"/>
+            <a:ext cx="502920" cy="502920"/>
+          </a:xfrm>
+          <a:prstGeom prst="ellipse">
+            <a:avLst/>
+          </a:prstGeom>
+          <a:solidFill>
+            <a:schemeClr val="accent1"/>
+          </a:solidFill>
+          <a:ln/>
+        </p:spPr>
+      </p:sp>
+      <p:sp>
+        <p:nvSpPr>
+          <p:cNvPr id="12" name="Text 10"/>
+          <p:cNvSpPr txBox="1"/>
+          <p:nvPr/>
+        </p:nvSpPr>
+        <p:spPr>
+          <a:xfrm>
+            <a:off x="8138160" y="4023360"/>
+            <a:ext cx="502920" cy="502920"/>
+          </a:xfrm>
+          <a:prstGeom prst="rect">
+            <a:avLst/>
+          </a:prstGeom>
+          <a:noFill/>
+          <a:ln/>
+        </p:spPr>
+        <p:txBody>
+          <a:bodyPr wrap="square" lIns="0" tIns="0" rIns="0" bIns="0" rtlCol="0" anchor="ctr"/>
+          <a:lstStyle/>
+          <a:p>
+            <a:pPr algn="ctr" indent="0" marL="0">
+              <a:buNone/>
+            </a:pPr>
+            <a:r>
+              <a:rPr lang="en-US" sz="1600" b="1" dirty="0">
+                <a:solidFill>
+                  <a:schemeClr val="bg1"/>
+                </a:solidFill>
+              </a:rPr>
+              <a:t>3</a:t>
+            </a:r>
+            <a:endParaRPr lang="en-US" sz="1600" dirty="0"/>
+          </a:p>
+        </p:txBody>
+      </p:sp>
+      <p:sp>
+        <p:nvSpPr>
+          <p:cNvPr id="13" name="Text 11"/>
+          <p:cNvSpPr txBox="1"/>
+          <p:nvPr/>
+        </p:nvSpPr>
+        <p:spPr>
+          <a:xfrm>
+            <a:off x="8823960" y="3977640"/>
+            <a:ext cx="2834640" cy="685800"/>
+          </a:xfrm>
+          <a:prstGeom prst="rect">
+            <a:avLst/>
+          </a:prstGeom>
+          <a:noFill/>
+          <a:ln/>
+        </p:spPr>
+        <p:txBody>
+          <a:bodyPr wrap="square" lIns="0" tIns="0" rIns="0" bIns="0" rtlCol="0" anchor="ctr"/>
+          <a:lstStyle/>
+          <a:p>
+            <a:pPr indent="0" marL="0">
+              <a:buNone/>
+            </a:pPr>
+            <a:r>
+              <a:rPr lang="en-US" sz="1500" dirty="0">
+                <a:solidFill>
+                  <a:schemeClr val="bg1"/>
+                </a:solidFill>
+              </a:rPr>
+              <a:t>Geschäftslogik ins Backend – Oberflächen bleiben schlank</a:t>
+            </a:r>
+            <a:endParaRPr lang="en-US" sz="1500" dirty="0"/>
+          </a:p>
+        </p:txBody>
+      </p:sp>
+      <p:sp>
+        <p:nvSpPr>
+          <p:cNvPr id="14" name="Schritt 4"/>
+          <p:cNvSpPr/>
+          <p:nvPr/>
+        </p:nvSpPr>
+        <p:spPr>
+          <a:xfrm>
+            <a:off x="8138160" y="4937760"/>
             <a:ext cx="502920" cy="502920"/>
           </a:xfrm>
           <a:prstGeom prst="ellipse">
@@ -8835,80 +12147,8 @@
       </p:sp>
       <p:sp>
         <p:nvSpPr>
-          <p:cNvPr id="12" name="Text 10"/>
+          <p:cNvPr id="15" name="Text 13"/>
           <p:cNvSpPr txBox="1"/>
-          <p:nvPr/>
-        </p:nvSpPr>
-        <p:spPr>
-          <a:xfrm>
-            <a:off x="8138160" y="4023360"/>
-            <a:ext cx="502920" cy="502920"/>
-          </a:xfrm>
-          <a:prstGeom prst="rect">
-            <a:avLst/>
-          </a:prstGeom>
-          <a:noFill/>
-          <a:ln/>
-        </p:spPr>
-        <p:txBody>
-          <a:bodyPr wrap="square" lIns="0" tIns="0" rIns="0" bIns="0" rtlCol="0" anchor="ctr"/>
-          <a:lstStyle/>
-          <a:p>
-            <a:pPr algn="ctr" indent="0" marL="0">
-              <a:buNone/>
-            </a:pPr>
-            <a:r>
-              <a:rPr lang="en-US" sz="1600" b="1" dirty="0">
-                <a:solidFill>
-                  <a:schemeClr val="bg1"/>
-                </a:solidFill>
-              </a:rPr>
-              <a:t>3</a:t>
-            </a:r>
-            <a:endParaRPr lang="en-US" sz="1600" dirty="0"/>
-          </a:p>
-        </p:txBody>
-      </p:sp>
-      <p:sp>
-        <p:nvSpPr>
-          <p:cNvPr id="13" name="Text 11"/>
-          <p:cNvSpPr txBox="1"/>
-          <p:nvPr/>
-        </p:nvSpPr>
-        <p:spPr>
-          <a:xfrm>
-            <a:off x="8823960" y="3977640"/>
-            <a:ext cx="2834640" cy="685800"/>
-          </a:xfrm>
-          <a:prstGeom prst="rect">
-            <a:avLst/>
-          </a:prstGeom>
-          <a:noFill/>
-          <a:ln/>
-        </p:spPr>
-        <p:txBody>
-          <a:bodyPr wrap="square" lIns="0" tIns="0" rIns="0" bIns="0" rtlCol="0" anchor="ctr"/>
-          <a:lstStyle/>
-          <a:p>
-            <a:pPr indent="0" marL="0">
-              <a:buNone/>
-            </a:pPr>
-            <a:r>
-              <a:rPr lang="en-US" sz="1500" dirty="0">
-                <a:solidFill>
-                  <a:schemeClr val="bg1"/>
-                </a:solidFill>
-              </a:rPr>
-              <a:t>Wartungsbudget je Freestyle-App einplanen</a:t>
-            </a:r>
-            <a:endParaRPr lang="en-US" sz="1500" dirty="0"/>
-          </a:p>
-        </p:txBody>
-      </p:sp>
-      <p:sp>
-        <p:nvSpPr>
-          <p:cNvPr id="14" name="Schritt 4"/>
-          <p:cNvSpPr/>
           <p:nvPr/>
         </p:nvSpPr>
         <p:spPr>
@@ -8916,26 +12156,6 @@
             <a:off x="8138160" y="4937760"/>
             <a:ext cx="502920" cy="502920"/>
           </a:xfrm>
-          <a:prstGeom prst="ellipse">
-            <a:avLst/>
-          </a:prstGeom>
-          <a:solidFill>
-            <a:schemeClr val="accent1"/>
-          </a:solidFill>
-          <a:ln/>
-        </p:spPr>
-      </p:sp>
-      <p:sp>
-        <p:nvSpPr>
-          <p:cNvPr id="15" name="Text 13"/>
-          <p:cNvSpPr txBox="1"/>
-          <p:nvPr/>
-        </p:nvSpPr>
-        <p:spPr>
-          <a:xfrm>
-            <a:off x="8138160" y="4937760"/>
-            <a:ext cx="502920" cy="502920"/>
-          </a:xfrm>
           <a:prstGeom prst="rect">
             <a:avLst/>
           </a:prstGeom>
@@ -8991,7 +12211,7 @@
                   <a:schemeClr val="bg1"/>
                 </a:solidFill>
               </a:rPr>
-              <a:t>Know-how in RAP &amp; Annotationen aufbauen</a:t>
+              <a:t>Owner und Wartungsbudget je Freestyle-App</a:t>
             </a:r>
             <a:endParaRPr lang="en-US" sz="1500" dirty="0"/>
           </a:p>
@@ -9441,7 +12661,7 @@
                 <a:ea typeface="Cambria" pitchFamily="34" charset="-122"/>
                 <a:cs typeface="Cambria" pitchFamily="34" charset="-120"/>
               </a:rPr>
-              <a:t>Fiori Elements als Standard</a:t>
+              <a:t>Die richtige Kombination</a:t>
             </a:r>
             <a:endParaRPr lang="en-US" sz="2100" dirty="0"/>
           </a:p>
@@ -9477,7 +12697,7 @@
                   <a:schemeClr val="tx1"/>
                 </a:solidFill>
               </a:rPr>
-              <a:t>Freestyle nur als begründete Ausnahme, mit Owner und eingeplantem Wartungsbudget.</a:t>
+              <a:t>Fiori Elements für Standardabläufe, Freestyle gezielt für Spezialabläufe – auf einem gemeinsamen Backend.</a:t>
             </a:r>
             <a:endParaRPr lang="en-US" sz="1600" dirty="0"/>
           </a:p>

--- a/praesentation/Fiori_vs_Freestyle.pptx
+++ b/praesentation/Fiori_vs_Freestyle.pptx
@@ -127,19 +127,19 @@
   <p:extLst>
     <p:ext uri="{521415D9-36F7-43E2-AB2F-B90AF26B5E84}">
       <p14:sectionLst xmlns:p14="http://schemas.microsoft.com/office/powerpoint/2010/main">
-        <p14:section name="Einstieg" id="{6df5ab9d-f7e4-d7f1-99bb-25e1a6ed0d30}">
+        <p14:section name="Einstieg" id="{6035d874-c025-2222-1639-0eb330a541c8}">
           <p14:sldIdLst>
             <p14:sldId id="256"/>
             <p14:sldId id="257"/>
             <p14:sldId id="258"/>
           </p14:sldIdLst>
         </p14:section>
-        <p14:section name="Einordnung" id="{840fcced-d8ce-f292-abfc-04618d602e34}">
+        <p14:section name="Einordnung" id="{834af46a-5fae-e54b-945c-7a57d8d6de3c}">
           <p14:sldIdLst>
             <p14:sldId id="259"/>
           </p14:sldIdLst>
         </p14:section>
-        <p14:section name="Demo" id="{6bc710ed-7c03-e66a-ab04-6b481c5bb3b3}">
+        <p14:section name="Demo" id="{db3df99d-91df-0e3a-4c8d-532f4f1028f5}">
           <p14:sldIdLst>
             <p14:sldId id="260"/>
             <p14:sldId id="261"/>
@@ -147,14 +147,14 @@
             <p14:sldId id="263"/>
           </p14:sldIdLst>
         </p14:section>
-        <p14:section name="Bewertung" id="{60d0d377-94d5-9882-01ab-18b568bd1191}">
+        <p14:section name="Bewertung" id="{c6890580-fee5-8822-9802-05ea8a08b159}">
           <p14:sldIdLst>
             <p14:sldId id="264"/>
             <p14:sldId id="265"/>
             <p14:sldId id="266"/>
           </p14:sldIdLst>
         </p14:section>
-        <p14:section name="Shopfloor" id="{cf54d55d-9f68-f938-724c-edc09730dce6}">
+        <p14:section name="Shopfloor" id="{bcd83242-82a0-ea1a-633e-da3d1512476a}">
           <p14:sldIdLst>
             <p14:sldId id="267"/>
             <p14:sldId id="268"/>
@@ -162,7 +162,7 @@
             <p14:sldId id="270"/>
           </p14:sldIdLst>
         </p14:section>
-        <p14:section name="Kombination" id="{bb0be2ab-c136-3ab5-fbea-e2550b0d606f}">
+        <p14:section name="Kombination" id="{f79b7383-a626-08bb-8bb3-d396ccf7d7c7}">
           <p14:sldIdLst>
             <p14:sldId id="271"/>
             <p14:sldId id="272"/>
@@ -170,7 +170,7 @@
             <p14:sldId id="274"/>
           </p14:sldIdLst>
         </p14:section>
-        <p14:section name="Vorschlag" id="{bd69d547-32c8-8536-8e68-d0a889c69c47}">
+        <p14:section name="Fazit" id="{c5103ea9-867a-97e3-1d0b-4990eba44b52}">
           <p14:sldIdLst>
             <p14:sldId id="275"/>
             <p14:sldId id="276"/>
@@ -1845,7 +1845,7 @@
           <a:p>
             <a:r>
               <a:rPr lang="en-US" dirty="0"/>
-              <a:t>So würde ich vorgehen: Erstens prüfen, ob SAP den Ablauf schon im Standard abdeckt. Zweitens das Backend zuerst bauen, als RAP-Business-Objekt mit allen Prüfungen und Aktionen – das ist die Basis für jede Oberfläche. Drittens die Büro-Abläufe mit Fiori Elements, das geht schnell und ohne eigenen UI-Code. Viertens Freestyle gezielt für den einen Ablauf, der es braucht – dünn, ohne eigene Geschäftslogik und gern als eigene Seite in derselben App. Für die Freestyle-Teile gelten feste Spielregeln, damit sie wartbar bleiben.</a:t>
+              <a:t>Ein mögliches Vorgehen, keine Vorschrift: Erstens prüfen, ob SAP den Ablauf schon im Standard abdeckt. Zweitens das Backend zuerst bauen, als RAP-Business-Objekt mit allen Prüfungen und Aktionen – das ist die Basis für jede Oberfläche. Drittens die Büro-Abläufe mit Fiori Elements, das geht schnell und ohne eigenen UI-Code. Viertens Freestyle gezielt für den einen Ablauf, der es braucht – dünn, ohne eigene Geschäftslogik und gern als eigene Seite in derselben App. Unten steht, was die Freestyle-Teile langfristig wartbar hält.</a:t>
             </a:r>
             <a:endParaRPr lang="en-US" dirty="0"/>
           </a:p>
@@ -2021,7 +2021,7 @@
           <a:p>
             <a:r>
               <a:rPr lang="en-US" dirty="0"/>
-              <a:t>Als Leitplanke pro Ablauf, nicht pro Anwendung: Zuerst Fiori Elements mit RAP. Reicht das nicht, erweitern wir Fiori Elements gezielt. Und für klar abgegrenzte Abläufe wie den Scan am Handheld nehmen wir bewusst Freestyle – mit Owner und eingeplantem Wartungsbudget. Die drei Prüffragen können wir in jede Anforderungsklärung aufnehmen.</a:t>
+              <a:t>Das ist als Orientierung gemeint, nicht als Regelwerk – und zwar pro Ablauf, nicht pro Anwendung: Trägt Fiori Elements mit RAP? Reicht eine Erweiterung? Und wo ein Ablauf es wirklich braucht, etwa der Scan am Handheld, ist Freestyle die richtige Wahl – dann aber bewusst, mit eingeplanter Wartung. Die drei Fragen unten helfen, das in jeder Anforderungsklärung kurz zu reflektieren.</a:t>
             </a:r>
             <a:endParaRPr lang="en-US" dirty="0"/>
           </a:p>
@@ -2109,7 +2109,7 @@
           <a:p>
             <a:r>
               <a:rPr lang="en-US" dirty="0"/>
-              <a:t>Zusammenfassung: Gleiches Aussehen heißt nicht gleicher Aufwand. Nicht alles ist SAPUI5, nicht alles ist Fiori Elements – unsere Anwendungen werden Kombinationen sein. Fiori Elements, wo der Standard trägt, Freestyle gezielt dort, wo ein Ablauf es wirklich braucht, zum Beispiel am Handheld. Die Logik gehört ins Backend, damit die Freestyle-Teile klein und wartbar bleiben. Fragen?</a:t>
+              <a:t>Zum Schluss: Ich möchte heute nichts entscheiden lassen. Mir geht es darum, dass wir dasselbe Bild haben. Gleiches Aussehen heißt nicht gleicher Aufwand. Nicht alles ist SAPUI5, nicht alles ist Fiori Elements – unsere Anwendungen werden Kombinationen sein. Und wenn uns jemand – intern oder extern – eine Lösung anbietet, sollten wir einfach nachfragen können: Warum diese Technik, und was bedeutet das für die Wartung? Ich freue mich auf eure Fragen und Erfahrungen.</a:t>
             </a:r>
             <a:endParaRPr lang="en-US" dirty="0"/>
           </a:p>
@@ -2197,7 +2197,7 @@
           <a:p>
             <a:r>
               <a:rPr lang="en-US" dirty="0"/>
-              <a:t>Mir ist wichtig, das klarzustellen: Ich bin weder Gegner noch Verfechter einer Technologie, ich mag SAPUI5 sogar sehr. Es geht darum, dass wir als Unternehmen wissen, was geht und was nicht – und dass wir Angebote von Externen selbst einordnen können. Ein Beispiel: Wenn etwas als Freestyle 5 Personentage kostet und mit Fiori Elements in einem Tag erledigt wäre, ist das schon bei der Erstellung ein Unterschied. Der größere Teil kommt aber danach: Jeder Change Request, jedes Upgrade und die Paketpflege kosten bei Freestyle jedes Jahr wieder. Die Zahlen hier sind eine beispielhafte Größenordnung, keine Messung.</a:t>
+              <a:t>Mir ist wichtig, das gleich am Anfang klarzustellen: Ich will hier nichts verkaufen und auch keine Technologie durchsetzen. Ich bin weder Gegner noch Verfechter, ich mag SAPUI5 sogar sehr. Mir geht es um Bewusstsein: dass wir als Unternehmen wissen, was geht und was nicht, und Angebote – auch von Externen – selbst einordnen können. Ein Beispiel zur Größenordnung: Wenn etwas als Freestyle 5 Personentage kostet und mit Fiori Elements in einem Tag erledigt wäre, ist das schon bei der Erstellung ein Unterschied. Der größere Teil kommt aber danach: Jeder Change Request, jedes Upgrade und die Paketpflege kosten bei Freestyle jedes Jahr wieder. Die Zahlen sind ein Beispiel, keine Messung.</a:t>
             </a:r>
             <a:endParaRPr lang="en-US" dirty="0"/>
           </a:p>
@@ -12700,7 +12700,7 @@
                   <a:schemeClr val="tx2"/>
                 </a:solidFill>
               </a:rPr>
-              <a:t>So setzen wir Kombinationen um</a:t>
+              <a:t>Wie eine Kombination entstehen kann</a:t>
             </a:r>
             <a:endParaRPr lang="en-US" sz="3400" dirty="0"/>
           </a:p>
@@ -13396,7 +13396,7 @@
                   <a:schemeClr val="tx1"/>
                 </a:solidFill>
               </a:rPr>
-              <a:t>Spielregeln für die Freestyle-Teile</a:t>
+              <a:t>Was die Freestyle-Teile wartbar hält</a:t>
             </a:r>
             <a:endParaRPr lang="en-US" sz="1800" dirty="0"/>
           </a:p>
@@ -14325,7 +14325,7 @@
                   <a:schemeClr val="tx2"/>
                 </a:solidFill>
               </a:rPr>
-              <a:t>Leitplanke: die richtige Technik je Ablauf</a:t>
+              <a:t>Orientierung: die passende Technik je Ablauf</a:t>
             </a:r>
             <a:endParaRPr lang="en-US" sz="3400" dirty="0"/>
           </a:p>
@@ -14815,7 +14815,7 @@
                   <a:schemeClr val="tx1"/>
                 </a:solidFill>
               </a:rPr>
-              <a:t>für klar abgegrenzte Abläufe wie Handheld-Scan – mit Owner und Wartungsbudget.</a:t>
+              <a:t>für klar abgegrenzte Abläufe wie Handheld-Scan – mit bewusst eingeplanter Wartung.</a:t>
             </a:r>
             <a:endParaRPr lang="en-US" sz="1500" dirty="0"/>
           </a:p>
@@ -14851,7 +14851,7 @@
                   <a:schemeClr val="tx1"/>
                 </a:solidFill>
               </a:rPr>
-              <a:t>Prüffragen vor jedem Freestyle-Teil</a:t>
+              <a:t>Fragen, die sich vor jedem Freestyle-Teil lohnen</a:t>
             </a:r>
             <a:endParaRPr lang="en-US" sz="1800" dirty="0"/>
           </a:p>
@@ -15105,7 +15105,7 @@
                   <a:schemeClr val="accent6"/>
                 </a:solidFill>
               </a:rPr>
-              <a:t>Die Lösung ist die richtige Kombination, auf einem gemeinsamen Backend.</a:t>
+              <a:t>Es geht nicht um Entweder-oder, sondern um die bewusste Wahl je Ablauf.</a:t>
             </a:r>
             <a:endParaRPr lang="en-US" sz="2200" dirty="0"/>
           </a:p>
@@ -15141,7 +15141,7 @@
                   <a:schemeClr val="bg1"/>
                 </a:solidFill>
               </a:rPr>
-              <a:t>Nächste Schritte</a:t>
+              <a:t>Was ich mitgeben möchte</a:t>
             </a:r>
             <a:endParaRPr lang="en-US" sz="2000" dirty="0"/>
           </a:p>
@@ -15233,7 +15233,7 @@
                   <a:schemeClr val="bg1"/>
                 </a:solidFill>
               </a:rPr>
-              <a:t>Fiori Elements + RAP für Büro- und Standardabläufe</a:t>
+              <a:t>Gleicher Look heißt nicht gleicher Aufwand</a:t>
             </a:r>
             <a:endParaRPr lang="en-US" sz="1500" dirty="0"/>
           </a:p>
@@ -15248,6 +15248,98 @@
         <p:spPr>
           <a:xfrm>
             <a:off x="8138160" y="3108960"/>
+            <a:ext cx="502920" cy="502920"/>
+          </a:xfrm>
+          <a:prstGeom prst="ellipse">
+            <a:avLst/>
+          </a:prstGeom>
+          <a:solidFill>
+            <a:schemeClr val="accent1"/>
+          </a:solidFill>
+          <a:ln/>
+        </p:spPr>
+      </p:sp>
+      <p:sp>
+        <p:nvSpPr>
+          <p:cNvPr id="9" name="Text 7"/>
+          <p:cNvSpPr txBox="1"/>
+          <p:nvPr/>
+        </p:nvSpPr>
+        <p:spPr>
+          <a:xfrm>
+            <a:off x="8138160" y="3108960"/>
+            <a:ext cx="502920" cy="502920"/>
+          </a:xfrm>
+          <a:prstGeom prst="rect">
+            <a:avLst/>
+          </a:prstGeom>
+          <a:noFill/>
+          <a:ln/>
+        </p:spPr>
+        <p:txBody>
+          <a:bodyPr wrap="square" lIns="0" tIns="0" rIns="0" bIns="0" rtlCol="0" anchor="ctr"/>
+          <a:lstStyle/>
+          <a:p>
+            <a:pPr algn="ctr" indent="0" marL="0">
+              <a:buNone/>
+            </a:pPr>
+            <a:r>
+              <a:rPr lang="en-US" sz="1600" b="1" dirty="0">
+                <a:solidFill>
+                  <a:schemeClr val="bg1"/>
+                </a:solidFill>
+              </a:rPr>
+              <a:t>2</a:t>
+            </a:r>
+            <a:endParaRPr lang="en-US" sz="1600" dirty="0"/>
+          </a:p>
+        </p:txBody>
+      </p:sp>
+      <p:sp>
+        <p:nvSpPr>
+          <p:cNvPr id="10" name="Text 8"/>
+          <p:cNvSpPr txBox="1"/>
+          <p:nvPr/>
+        </p:nvSpPr>
+        <p:spPr>
+          <a:xfrm>
+            <a:off x="8823960" y="3063240"/>
+            <a:ext cx="2834640" cy="685800"/>
+          </a:xfrm>
+          <a:prstGeom prst="rect">
+            <a:avLst/>
+          </a:prstGeom>
+          <a:noFill/>
+          <a:ln/>
+        </p:spPr>
+        <p:txBody>
+          <a:bodyPr wrap="square" lIns="0" tIns="0" rIns="0" bIns="0" rtlCol="0" anchor="ctr"/>
+          <a:lstStyle/>
+          <a:p>
+            <a:pPr indent="0" marL="0">
+              <a:buNone/>
+            </a:pPr>
+            <a:r>
+              <a:rPr lang="en-US" sz="1500" dirty="0">
+                <a:solidFill>
+                  <a:schemeClr val="bg1"/>
+                </a:solidFill>
+              </a:rPr>
+              <a:t>Fiori Elements trägt die meisten Standardabläufe</a:t>
+            </a:r>
+            <a:endParaRPr lang="en-US" sz="1500" dirty="0"/>
+          </a:p>
+        </p:txBody>
+      </p:sp>
+      <p:sp>
+        <p:nvSpPr>
+          <p:cNvPr id="11" name="Schritt 3"/>
+          <p:cNvSpPr/>
+          <p:nvPr/>
+        </p:nvSpPr>
+        <p:spPr>
+          <a:xfrm>
+            <a:off x="8138160" y="4023360"/>
             <a:ext cx="502920" cy="502920"/>
           </a:xfrm>
           <a:prstGeom prst="ellipse">
@@ -15261,13 +15353,13 @@
       </p:sp>
       <p:sp>
         <p:nvSpPr>
-          <p:cNvPr id="9" name="Text 7"/>
+          <p:cNvPr id="12" name="Text 10"/>
           <p:cNvSpPr txBox="1"/>
           <p:nvPr/>
         </p:nvSpPr>
         <p:spPr>
           <a:xfrm>
-            <a:off x="8138160" y="3108960"/>
+            <a:off x="8138160" y="4023360"/>
             <a:ext cx="502920" cy="502920"/>
           </a:xfrm>
           <a:prstGeom prst="rect">
@@ -15289,7 +15381,7 @@
                   <a:schemeClr val="bg1"/>
                 </a:solidFill>
               </a:rPr>
-              <a:t>2</a:t>
+              <a:t>3</a:t>
             </a:r>
             <a:endParaRPr lang="en-US" sz="1600" dirty="0"/>
           </a:p>
@@ -15297,13 +15389,13 @@
       </p:sp>
       <p:sp>
         <p:nvSpPr>
-          <p:cNvPr id="10" name="Text 8"/>
+          <p:cNvPr id="13" name="Text 11"/>
           <p:cNvSpPr txBox="1"/>
           <p:nvPr/>
         </p:nvSpPr>
         <p:spPr>
           <a:xfrm>
-            <a:off x="8823960" y="3063240"/>
+            <a:off x="8823960" y="3977640"/>
             <a:ext cx="2834640" cy="685800"/>
           </a:xfrm>
           <a:prstGeom prst="rect">
@@ -15325,7 +15417,7 @@
                   <a:schemeClr val="bg1"/>
                 </a:solidFill>
               </a:rPr>
-              <a:t>Freestyle gezielt für Handheld- und Werker-Abläufe</a:t>
+              <a:t>Freestyle ist richtig, wo ein Ablauf es braucht</a:t>
             </a:r>
             <a:endParaRPr lang="en-US" sz="1500" dirty="0"/>
           </a:p>
@@ -15333,13 +15425,13 @@
       </p:sp>
       <p:sp>
         <p:nvSpPr>
-          <p:cNvPr id="11" name="Schritt 3"/>
+          <p:cNvPr id="14" name="Schritt 4"/>
           <p:cNvSpPr/>
           <p:nvPr/>
         </p:nvSpPr>
         <p:spPr>
           <a:xfrm>
-            <a:off x="8138160" y="4023360"/>
+            <a:off x="8138160" y="4937760"/>
             <a:ext cx="502920" cy="502920"/>
           </a:xfrm>
           <a:prstGeom prst="ellipse">
@@ -15353,80 +15445,8 @@
       </p:sp>
       <p:sp>
         <p:nvSpPr>
-          <p:cNvPr id="12" name="Text 10"/>
+          <p:cNvPr id="15" name="Text 13"/>
           <p:cNvSpPr txBox="1"/>
-          <p:nvPr/>
-        </p:nvSpPr>
-        <p:spPr>
-          <a:xfrm>
-            <a:off x="8138160" y="4023360"/>
-            <a:ext cx="502920" cy="502920"/>
-          </a:xfrm>
-          <a:prstGeom prst="rect">
-            <a:avLst/>
-          </a:prstGeom>
-          <a:noFill/>
-          <a:ln/>
-        </p:spPr>
-        <p:txBody>
-          <a:bodyPr wrap="square" lIns="0" tIns="0" rIns="0" bIns="0" rtlCol="0" anchor="ctr"/>
-          <a:lstStyle/>
-          <a:p>
-            <a:pPr algn="ctr" indent="0" marL="0">
-              <a:buNone/>
-            </a:pPr>
-            <a:r>
-              <a:rPr lang="en-US" sz="1600" b="1" dirty="0">
-                <a:solidFill>
-                  <a:schemeClr val="bg1"/>
-                </a:solidFill>
-              </a:rPr>
-              <a:t>3</a:t>
-            </a:r>
-            <a:endParaRPr lang="en-US" sz="1600" dirty="0"/>
-          </a:p>
-        </p:txBody>
-      </p:sp>
-      <p:sp>
-        <p:nvSpPr>
-          <p:cNvPr id="13" name="Text 11"/>
-          <p:cNvSpPr txBox="1"/>
-          <p:nvPr/>
-        </p:nvSpPr>
-        <p:spPr>
-          <a:xfrm>
-            <a:off x="8823960" y="3977640"/>
-            <a:ext cx="2834640" cy="685800"/>
-          </a:xfrm>
-          <a:prstGeom prst="rect">
-            <a:avLst/>
-          </a:prstGeom>
-          <a:noFill/>
-          <a:ln/>
-        </p:spPr>
-        <p:txBody>
-          <a:bodyPr wrap="square" lIns="0" tIns="0" rIns="0" bIns="0" rtlCol="0" anchor="ctr"/>
-          <a:lstStyle/>
-          <a:p>
-            <a:pPr indent="0" marL="0">
-              <a:buNone/>
-            </a:pPr>
-            <a:r>
-              <a:rPr lang="en-US" sz="1500" dirty="0">
-                <a:solidFill>
-                  <a:schemeClr val="bg1"/>
-                </a:solidFill>
-              </a:rPr>
-              <a:t>Geschäftslogik ins Backend – Oberflächen bleiben schlank</a:t>
-            </a:r>
-            <a:endParaRPr lang="en-US" sz="1500" dirty="0"/>
-          </a:p>
-        </p:txBody>
-      </p:sp>
-      <p:sp>
-        <p:nvSpPr>
-          <p:cNvPr id="14" name="Schritt 4"/>
-          <p:cNvSpPr/>
           <p:nvPr/>
         </p:nvSpPr>
         <p:spPr>
@@ -15434,26 +15454,6 @@
             <a:off x="8138160" y="4937760"/>
             <a:ext cx="502920" cy="502920"/>
           </a:xfrm>
-          <a:prstGeom prst="ellipse">
-            <a:avLst/>
-          </a:prstGeom>
-          <a:solidFill>
-            <a:schemeClr val="accent2"/>
-          </a:solidFill>
-          <a:ln/>
-        </p:spPr>
-      </p:sp>
-      <p:sp>
-        <p:nvSpPr>
-          <p:cNvPr id="15" name="Text 13"/>
-          <p:cNvSpPr txBox="1"/>
-          <p:nvPr/>
-        </p:nvSpPr>
-        <p:spPr>
-          <a:xfrm>
-            <a:off x="8138160" y="4937760"/>
-            <a:ext cx="502920" cy="502920"/>
-          </a:xfrm>
           <a:prstGeom prst="rect">
             <a:avLst/>
           </a:prstGeom>
@@ -15509,7 +15509,7 @@
                   <a:schemeClr val="bg1"/>
                 </a:solidFill>
               </a:rPr>
-              <a:t>Owner und Wartungsbudget je Freestyle-App</a:t>
+              <a:t>Bei Angeboten nachfragen: Warum diese Technik?</a:t>
             </a:r>
             <a:endParaRPr lang="en-US" sz="1500" dirty="0"/>
           </a:p>
@@ -15572,7 +15572,7 @@
                   <a:schemeClr val="tx2"/>
                 </a:solidFill>
               </a:rPr>
-              <a:t>Meine Haltung: bewusst entscheiden</a:t>
+              <a:t>Worum es mir geht: Bewusstsein schaffen</a:t>
             </a:r>
             <a:endParaRPr lang="en-US" sz="3400" dirty="0"/>
           </a:p>
@@ -15713,7 +15713,7 @@
                   <a:schemeClr val="accent6"/>
                 </a:solidFill>
               </a:rPr>
-              <a:t>Aber wir müssen als Unternehmen wissen, was geht und was nicht – und Angebote von Externen selbst beurteilen können, statt sie teuer zu bezahlen.</a:t>
+              <a:t>Ich will nichts verkaufen. Ich will, dass wir als Unternehmen wissen, was geht und was nicht – und Angebote, auch von Externen, selbst einordnen können.</a:t>
             </a:r>
             <a:endParaRPr lang="en-US" sz="1600" dirty="0"/>
           </a:p>
